--- a/dist/bitcoincierge_pitch_deck.pptx
+++ b/dist/bitcoincierge_pitch_deck.pptx
@@ -10084,7 +10084,7 @@
                 <a:ea typeface="Georgia" pitchFamily="34" charset="-122"/>
                 <a:cs typeface="Georgia" pitchFamily="34" charset="-120"/>
               </a:rPr>
-              <a:t>The other 1.4 billion Indians? They've never thought about Bitcoin. Not once.</a:t>
+              <a:t>And for rest of 1.4 billion Indians - Bitcoin is still not a real thing!</a:t>
             </a:r>
             <a:endParaRPr lang="en-US" sz="1600" dirty="0"/>
           </a:p>
@@ -10175,7 +10175,7 @@
                 <a:ea typeface="Calibri" pitchFamily="34" charset="-122"/>
                 <a:cs typeface="Calibri" pitchFamily="34" charset="-120"/>
               </a:rPr>
-              <a:t>M A R K E T I N G   C H A N N E L   1   /   3</a:t>
+              <a:t>O R G A N I C   M A R K E T I N G   P R O B L E M</a:t>
             </a:r>
             <a:endParaRPr lang="en-US" sz="850" dirty="0"/>
           </a:p>
@@ -10189,8 +10189,8 @@
         </p:nvSpPr>
         <p:spPr>
           <a:xfrm>
-            <a:off x="457200" y="502920"/>
-            <a:ext cx="8229600" cy="594360"/>
+            <a:off x="457200" y="411480"/>
+            <a:ext cx="8229600" cy="685800"/>
           </a:xfrm>
           <a:prstGeom prst="rect">
             <a:avLst/>
@@ -10206,7 +10206,7 @@
               <a:buNone/>
             </a:pPr>
             <a:r>
-              <a:rPr lang="en-US" sz="3200" i="1" dirty="0">
+              <a:rPr lang="en-US" sz="3600" i="1" dirty="0">
                 <a:solidFill>
                   <a:srgbClr val="1A1A1A"/>
                 </a:solidFill>
@@ -10214,47 +10214,46 @@
                 <a:ea typeface="Georgia" pitchFamily="34" charset="-122"/>
                 <a:cs typeface="Georgia" pitchFamily="34" charset="-120"/>
               </a:rPr>
-              <a:t>Want to run Bitcoin ads?</a:t>
-            </a:r>
-            <a:endParaRPr lang="en-US" sz="3200" dirty="0"/>
-          </a:p>
-        </p:txBody>
-      </p:sp>
-      <p:sp>
-        <p:nvSpPr>
-          <p:cNvPr id="5" name="Shape 3"/>
-          <p:cNvSpPr/>
-          <p:nvPr/>
-        </p:nvSpPr>
-        <p:spPr>
-          <a:xfrm>
-            <a:off x="1645920" y="1234440"/>
-            <a:ext cx="5852160" cy="1417320"/>
-          </a:xfrm>
-          <a:prstGeom prst="rect">
-            <a:avLst/>
-          </a:prstGeom>
-          <a:solidFill>
-            <a:srgbClr val="FCE8D5"/>
-          </a:solidFill>
-          <a:ln w="63500">
-            <a:solidFill>
-              <a:srgbClr val="DC2626"/>
-            </a:solidFill>
-            <a:prstDash val="solid"/>
-          </a:ln>
-        </p:spPr>
-      </p:sp>
-      <p:sp>
-        <p:nvSpPr>
-          <p:cNvPr id="6" name="Text 4"/>
-          <p:cNvSpPr/>
-          <p:nvPr/>
-        </p:nvSpPr>
-        <p:spPr>
-          <a:xfrm>
-            <a:off x="1645920" y="1234440"/>
-            <a:ext cx="5852160" cy="1417320"/>
+              <a:t>AI is the new cool kid</a:t>
+            </a:r>
+            <a:endParaRPr lang="en-US" sz="3600" dirty="0"/>
+          </a:p>
+        </p:txBody>
+      </p:sp>
+      <p:pic>
+        <p:nvPicPr>
+          <p:cNvPr id="5" name="Image 0" descr="/Users/sov/bitcoincierge-pitch-deck 3/assets/processed/ai_robot.png">    </p:cNvPr>
+          <p:cNvPicPr>
+            <a:picLocks noChangeAspect="1"/>
+          </p:cNvPicPr>
+          <p:nvPr/>
+        </p:nvPicPr>
+        <p:blipFill>
+          <a:blip r:embed="rId1"/>
+          <a:stretch>
+            <a:fillRect/>
+          </a:stretch>
+        </p:blipFill>
+        <p:spPr>
+          <a:xfrm>
+            <a:off x="1097280" y="1371600"/>
+            <a:ext cx="2560320" cy="2560320"/>
+          </a:xfrm>
+          <a:prstGeom prst="rect">
+            <a:avLst/>
+          </a:prstGeom>
+        </p:spPr>
+      </p:pic>
+      <p:sp>
+        <p:nvSpPr>
+          <p:cNvPr id="6" name="Text 3"/>
+          <p:cNvSpPr/>
+          <p:nvPr/>
+        </p:nvSpPr>
+        <p:spPr>
+          <a:xfrm>
+            <a:off x="3657600" y="1463040"/>
+            <a:ext cx="1828800" cy="2286000"/>
           </a:xfrm>
           <a:prstGeom prst="rect">
             <a:avLst/>
@@ -10270,506 +10269,44 @@
               <a:buNone/>
             </a:pPr>
             <a:r>
-              <a:rPr lang="en-US" sz="7200" b="1" dirty="0">
-                <a:solidFill>
-                  <a:srgbClr val="DC2626"/>
+              <a:rPr lang="en-US" sz="8000" b="1" dirty="0">
+                <a:solidFill>
+                  <a:srgbClr val="8C5A3A"/>
                 </a:solidFill>
                 <a:latin typeface="Georgia" pitchFamily="34" charset="0"/>
                 <a:ea typeface="Georgia" pitchFamily="34" charset="-122"/>
                 <a:cs typeface="Georgia" pitchFamily="34" charset="-120"/>
               </a:rPr>
-              <a:t>REJECTED.</a:t>
-            </a:r>
-            <a:endParaRPr lang="en-US" sz="7200" dirty="0"/>
-          </a:p>
-        </p:txBody>
-      </p:sp>
-      <p:sp>
-        <p:nvSpPr>
-          <p:cNvPr id="7" name="Shape 5"/>
-          <p:cNvSpPr/>
-          <p:nvPr/>
-        </p:nvSpPr>
-        <p:spPr>
-          <a:xfrm>
-            <a:off x="365760" y="2743200"/>
-            <a:ext cx="2697480" cy="2103120"/>
-          </a:xfrm>
-          <a:prstGeom prst="rect">
-            <a:avLst/>
-          </a:prstGeom>
-          <a:solidFill>
-            <a:srgbClr val="FCE8D5"/>
-          </a:solidFill>
-          <a:ln w="12700">
-            <a:solidFill>
-              <a:srgbClr val="F5C49A"/>
-            </a:solidFill>
-            <a:prstDash val="solid"/>
-          </a:ln>
-        </p:spPr>
-      </p:sp>
-      <p:sp>
-        <p:nvSpPr>
-          <p:cNvPr id="8" name="Shape 6"/>
-          <p:cNvSpPr/>
-          <p:nvPr/>
-        </p:nvSpPr>
-        <p:spPr>
-          <a:xfrm>
-            <a:off x="365760" y="2743200"/>
-            <a:ext cx="2697480" cy="50292"/>
-          </a:xfrm>
-          <a:prstGeom prst="rect">
-            <a:avLst/>
-          </a:prstGeom>
-          <a:solidFill>
-            <a:srgbClr val="DC2626"/>
-          </a:solidFill>
-          <a:ln/>
-        </p:spPr>
-      </p:sp>
-      <p:sp>
-        <p:nvSpPr>
-          <p:cNvPr id="9" name="Text 7"/>
-          <p:cNvSpPr/>
-          <p:nvPr/>
-        </p:nvSpPr>
-        <p:spPr>
-          <a:xfrm>
-            <a:off x="502920" y="2834640"/>
-            <a:ext cx="2423160" cy="822960"/>
-          </a:xfrm>
-          <a:prstGeom prst="rect">
-            <a:avLst/>
-          </a:prstGeom>
-          <a:noFill/>
-          <a:ln/>
-        </p:spPr>
-        <p:txBody>
-          <a:bodyPr wrap="square" lIns="0" tIns="0" rIns="0" bIns="0" rtlCol="0" anchor="ctr"/>
-          <a:lstStyle/>
-          <a:p>
-            <a:pPr algn="ctr" indent="0" marL="0">
-              <a:buNone/>
-            </a:pPr>
-            <a:r>
-              <a:rPr lang="en-US" sz="4200" b="1" dirty="0">
-                <a:solidFill>
-                  <a:srgbClr val="4285F4"/>
-                </a:solidFill>
-                <a:latin typeface="Georgia" pitchFamily="34" charset="0"/>
-                <a:ea typeface="Georgia" pitchFamily="34" charset="-122"/>
-                <a:cs typeface="Georgia" pitchFamily="34" charset="-120"/>
-              </a:rPr>
-              <a:t>G</a:t>
-            </a:r>
-            <a:endParaRPr lang="en-US" sz="4200" dirty="0"/>
-          </a:p>
-        </p:txBody>
-      </p:sp>
-      <p:sp>
-        <p:nvSpPr>
-          <p:cNvPr id="10" name="Text 8"/>
-          <p:cNvSpPr/>
-          <p:nvPr/>
-        </p:nvSpPr>
-        <p:spPr>
-          <a:xfrm>
-            <a:off x="502920" y="3703320"/>
-            <a:ext cx="2423160" cy="320040"/>
-          </a:xfrm>
-          <a:prstGeom prst="rect">
-            <a:avLst/>
-          </a:prstGeom>
-          <a:noFill/>
-          <a:ln/>
-        </p:spPr>
-        <p:txBody>
-          <a:bodyPr wrap="square" lIns="0" tIns="0" rIns="0" bIns="0" rtlCol="0" anchor="ctr"/>
-          <a:lstStyle/>
-          <a:p>
-            <a:pPr algn="ctr" indent="0" marL="0">
-              <a:buNone/>
-            </a:pPr>
-            <a:r>
-              <a:rPr lang="en-US" sz="1100" b="1" dirty="0">
-                <a:solidFill>
-                  <a:srgbClr val="1A1A1A"/>
-                </a:solidFill>
-                <a:latin typeface="Calibri" pitchFamily="34" charset="0"/>
-                <a:ea typeface="Calibri" pitchFamily="34" charset="-122"/>
-                <a:cs typeface="Calibri" pitchFamily="34" charset="-120"/>
-              </a:rPr>
-              <a:t>Google Ads</a:t>
-            </a:r>
-            <a:endParaRPr lang="en-US" sz="1100" dirty="0"/>
-          </a:p>
-        </p:txBody>
-      </p:sp>
-      <p:sp>
-        <p:nvSpPr>
-          <p:cNvPr id="11" name="Text 9"/>
-          <p:cNvSpPr/>
-          <p:nvPr/>
-        </p:nvSpPr>
-        <p:spPr>
-          <a:xfrm>
-            <a:off x="502920" y="4069080"/>
-            <a:ext cx="2423160" cy="640080"/>
-          </a:xfrm>
-          <a:prstGeom prst="rect">
-            <a:avLst/>
-          </a:prstGeom>
-          <a:noFill/>
-          <a:ln/>
-        </p:spPr>
-        <p:txBody>
-          <a:bodyPr wrap="square" lIns="0" tIns="0" rIns="0" bIns="0" rtlCol="0" anchor="ctr"/>
-          <a:lstStyle/>
-          <a:p>
-            <a:pPr algn="ctr" indent="0" marL="0">
-              <a:buNone/>
-            </a:pPr>
-            <a:r>
-              <a:rPr lang="en-US" sz="850" dirty="0">
-                <a:solidFill>
-                  <a:srgbClr val="8C5A3A"/>
-                </a:solidFill>
-                <a:latin typeface="Calibri" pitchFamily="34" charset="0"/>
-                <a:ea typeface="Calibri" pitchFamily="34" charset="-122"/>
-                <a:cs typeface="Calibri" pitchFamily="34" charset="-120"/>
-              </a:rPr>
-              <a:t>Crypto advertising requires certification &amp; ongoing compliance</a:t>
-            </a:r>
-            <a:endParaRPr lang="en-US" sz="850" dirty="0"/>
-          </a:p>
-        </p:txBody>
-      </p:sp>
-      <p:sp>
-        <p:nvSpPr>
-          <p:cNvPr id="12" name="Shape 10"/>
-          <p:cNvSpPr/>
-          <p:nvPr/>
-        </p:nvSpPr>
-        <p:spPr>
-          <a:xfrm>
-            <a:off x="3200400" y="2743200"/>
-            <a:ext cx="2697480" cy="2103120"/>
-          </a:xfrm>
-          <a:prstGeom prst="rect">
-            <a:avLst/>
-          </a:prstGeom>
-          <a:solidFill>
-            <a:srgbClr val="FCE8D5"/>
-          </a:solidFill>
-          <a:ln w="12700">
-            <a:solidFill>
-              <a:srgbClr val="F5C49A"/>
-            </a:solidFill>
-            <a:prstDash val="solid"/>
-          </a:ln>
-        </p:spPr>
-      </p:sp>
-      <p:sp>
-        <p:nvSpPr>
-          <p:cNvPr id="13" name="Shape 11"/>
-          <p:cNvSpPr/>
-          <p:nvPr/>
-        </p:nvSpPr>
-        <p:spPr>
-          <a:xfrm>
-            <a:off x="3200400" y="2743200"/>
-            <a:ext cx="2697480" cy="50292"/>
-          </a:xfrm>
-          <a:prstGeom prst="rect">
-            <a:avLst/>
-          </a:prstGeom>
-          <a:solidFill>
-            <a:srgbClr val="DC2626"/>
-          </a:solidFill>
-          <a:ln/>
-        </p:spPr>
-      </p:sp>
-      <p:sp>
-        <p:nvSpPr>
-          <p:cNvPr id="14" name="Text 12"/>
-          <p:cNvSpPr/>
-          <p:nvPr/>
-        </p:nvSpPr>
-        <p:spPr>
-          <a:xfrm>
-            <a:off x="3337560" y="2834640"/>
-            <a:ext cx="2423160" cy="822960"/>
-          </a:xfrm>
-          <a:prstGeom prst="rect">
-            <a:avLst/>
-          </a:prstGeom>
-          <a:noFill/>
-          <a:ln/>
-        </p:spPr>
-        <p:txBody>
-          <a:bodyPr wrap="square" lIns="0" tIns="0" rIns="0" bIns="0" rtlCol="0" anchor="ctr"/>
-          <a:lstStyle/>
-          <a:p>
-            <a:pPr algn="ctr" indent="0" marL="0">
-              <a:buNone/>
-            </a:pPr>
-            <a:r>
-              <a:rPr lang="en-US" sz="4200" b="1" dirty="0">
-                <a:solidFill>
-                  <a:srgbClr val="0082FB"/>
-                </a:solidFill>
-                <a:latin typeface="Georgia" pitchFamily="34" charset="0"/>
-                <a:ea typeface="Georgia" pitchFamily="34" charset="-122"/>
-                <a:cs typeface="Georgia" pitchFamily="34" charset="-120"/>
-              </a:rPr>
-              <a:t>M</a:t>
-            </a:r>
-            <a:endParaRPr lang="en-US" sz="4200" dirty="0"/>
-          </a:p>
-        </p:txBody>
-      </p:sp>
-      <p:sp>
-        <p:nvSpPr>
-          <p:cNvPr id="15" name="Text 13"/>
-          <p:cNvSpPr/>
-          <p:nvPr/>
-        </p:nvSpPr>
-        <p:spPr>
-          <a:xfrm>
-            <a:off x="3337560" y="3703320"/>
-            <a:ext cx="2423160" cy="320040"/>
-          </a:xfrm>
-          <a:prstGeom prst="rect">
-            <a:avLst/>
-          </a:prstGeom>
-          <a:noFill/>
-          <a:ln/>
-        </p:spPr>
-        <p:txBody>
-          <a:bodyPr wrap="square" lIns="0" tIns="0" rIns="0" bIns="0" rtlCol="0" anchor="ctr"/>
-          <a:lstStyle/>
-          <a:p>
-            <a:pPr algn="ctr" indent="0" marL="0">
-              <a:buNone/>
-            </a:pPr>
-            <a:r>
-              <a:rPr lang="en-US" sz="1100" b="1" dirty="0">
-                <a:solidFill>
-                  <a:srgbClr val="1A1A1A"/>
-                </a:solidFill>
-                <a:latin typeface="Calibri" pitchFamily="34" charset="0"/>
-                <a:ea typeface="Calibri" pitchFamily="34" charset="-122"/>
-                <a:cs typeface="Calibri" pitchFamily="34" charset="-120"/>
-              </a:rPr>
-              <a:t>Meta / Instagram</a:t>
-            </a:r>
-            <a:endParaRPr lang="en-US" sz="1100" dirty="0"/>
-          </a:p>
-        </p:txBody>
-      </p:sp>
-      <p:sp>
-        <p:nvSpPr>
-          <p:cNvPr id="16" name="Text 14"/>
-          <p:cNvSpPr/>
-          <p:nvPr/>
-        </p:nvSpPr>
-        <p:spPr>
-          <a:xfrm>
-            <a:off x="3337560" y="4069080"/>
-            <a:ext cx="2423160" cy="640080"/>
-          </a:xfrm>
-          <a:prstGeom prst="rect">
-            <a:avLst/>
-          </a:prstGeom>
-          <a:noFill/>
-          <a:ln/>
-        </p:spPr>
-        <p:txBody>
-          <a:bodyPr wrap="square" lIns="0" tIns="0" rIns="0" bIns="0" rtlCol="0" anchor="ctr"/>
-          <a:lstStyle/>
-          <a:p>
-            <a:pPr algn="ctr" indent="0" marL="0">
-              <a:buNone/>
-            </a:pPr>
-            <a:r>
-              <a:rPr lang="en-US" sz="850" dirty="0">
-                <a:solidFill>
-                  <a:srgbClr val="8C5A3A"/>
-                </a:solidFill>
-                <a:latin typeface="Calibri" pitchFamily="34" charset="0"/>
-                <a:ea typeface="Calibri" pitchFamily="34" charset="-122"/>
-                <a:cs typeface="Calibri" pitchFamily="34" charset="-120"/>
-              </a:rPr>
-              <a:t>Crypto ads require prior written permission. Often denied.</a:t>
-            </a:r>
-            <a:endParaRPr lang="en-US" sz="850" dirty="0"/>
-          </a:p>
-        </p:txBody>
-      </p:sp>
-      <p:sp>
-        <p:nvSpPr>
-          <p:cNvPr id="17" name="Shape 15"/>
-          <p:cNvSpPr/>
-          <p:nvPr/>
-        </p:nvSpPr>
-        <p:spPr>
-          <a:xfrm>
-            <a:off x="6035040" y="2743200"/>
-            <a:ext cx="2697480" cy="2103120"/>
-          </a:xfrm>
-          <a:prstGeom prst="rect">
-            <a:avLst/>
-          </a:prstGeom>
-          <a:solidFill>
-            <a:srgbClr val="FCE8D5"/>
-          </a:solidFill>
-          <a:ln w="12700">
-            <a:solidFill>
-              <a:srgbClr val="F5C49A"/>
-            </a:solidFill>
-            <a:prstDash val="solid"/>
-          </a:ln>
-        </p:spPr>
-      </p:sp>
-      <p:sp>
-        <p:nvSpPr>
-          <p:cNvPr id="18" name="Shape 16"/>
-          <p:cNvSpPr/>
-          <p:nvPr/>
-        </p:nvSpPr>
-        <p:spPr>
-          <a:xfrm>
-            <a:off x="6035040" y="2743200"/>
-            <a:ext cx="2697480" cy="50292"/>
-          </a:xfrm>
-          <a:prstGeom prst="rect">
-            <a:avLst/>
-          </a:prstGeom>
-          <a:solidFill>
-            <a:srgbClr val="DC2626"/>
-          </a:solidFill>
-          <a:ln/>
-        </p:spPr>
-      </p:sp>
-      <p:sp>
-        <p:nvSpPr>
-          <p:cNvPr id="19" name="Text 17"/>
-          <p:cNvSpPr/>
-          <p:nvPr/>
-        </p:nvSpPr>
-        <p:spPr>
-          <a:xfrm>
-            <a:off x="6172200" y="2834640"/>
-            <a:ext cx="2423160" cy="822960"/>
-          </a:xfrm>
-          <a:prstGeom prst="rect">
-            <a:avLst/>
-          </a:prstGeom>
-          <a:noFill/>
-          <a:ln/>
-        </p:spPr>
-        <p:txBody>
-          <a:bodyPr wrap="square" lIns="0" tIns="0" rIns="0" bIns="0" rtlCol="0" anchor="ctr"/>
-          <a:lstStyle/>
-          <a:p>
-            <a:pPr algn="ctr" indent="0" marL="0">
-              <a:buNone/>
-            </a:pPr>
-            <a:r>
-              <a:rPr lang="en-US" sz="4200" b="1" dirty="0">
-                <a:solidFill>
-                  <a:srgbClr val="FFFFFF"/>
-                </a:solidFill>
-                <a:latin typeface="Georgia" pitchFamily="34" charset="0"/>
-                <a:ea typeface="Georgia" pitchFamily="34" charset="-122"/>
-                <a:cs typeface="Georgia" pitchFamily="34" charset="-120"/>
-              </a:rPr>
-              <a:t>𝕏</a:t>
-            </a:r>
-            <a:endParaRPr lang="en-US" sz="4200" dirty="0"/>
-          </a:p>
-        </p:txBody>
-      </p:sp>
-      <p:sp>
-        <p:nvSpPr>
-          <p:cNvPr id="20" name="Text 18"/>
-          <p:cNvSpPr/>
-          <p:nvPr/>
-        </p:nvSpPr>
-        <p:spPr>
-          <a:xfrm>
-            <a:off x="6172200" y="3703320"/>
-            <a:ext cx="2423160" cy="320040"/>
-          </a:xfrm>
-          <a:prstGeom prst="rect">
-            <a:avLst/>
-          </a:prstGeom>
-          <a:noFill/>
-          <a:ln/>
-        </p:spPr>
-        <p:txBody>
-          <a:bodyPr wrap="square" lIns="0" tIns="0" rIns="0" bIns="0" rtlCol="0" anchor="ctr"/>
-          <a:lstStyle/>
-          <a:p>
-            <a:pPr algn="ctr" indent="0" marL="0">
-              <a:buNone/>
-            </a:pPr>
-            <a:r>
-              <a:rPr lang="en-US" sz="1100" b="1" dirty="0">
-                <a:solidFill>
-                  <a:srgbClr val="1A1A1A"/>
-                </a:solidFill>
-                <a:latin typeface="Calibri" pitchFamily="34" charset="0"/>
-                <a:ea typeface="Calibri" pitchFamily="34" charset="-122"/>
-                <a:cs typeface="Calibri" pitchFamily="34" charset="-120"/>
-              </a:rPr>
-              <a:t>Twitter / X</a:t>
-            </a:r>
-            <a:endParaRPr lang="en-US" sz="1100" dirty="0"/>
-          </a:p>
-        </p:txBody>
-      </p:sp>
-      <p:sp>
-        <p:nvSpPr>
-          <p:cNvPr id="21" name="Text 19"/>
-          <p:cNvSpPr/>
-          <p:nvPr/>
-        </p:nvSpPr>
-        <p:spPr>
-          <a:xfrm>
-            <a:off x="6172200" y="4069080"/>
-            <a:ext cx="2423160" cy="640080"/>
-          </a:xfrm>
-          <a:prstGeom prst="rect">
-            <a:avLst/>
-          </a:prstGeom>
-          <a:noFill/>
-          <a:ln/>
-        </p:spPr>
-        <p:txBody>
-          <a:bodyPr wrap="square" lIns="0" tIns="0" rIns="0" bIns="0" rtlCol="0" anchor="ctr"/>
-          <a:lstStyle/>
-          <a:p>
-            <a:pPr algn="ctr" indent="0" marL="0">
-              <a:buNone/>
-            </a:pPr>
-            <a:r>
-              <a:rPr lang="en-US" sz="850" dirty="0">
-                <a:solidFill>
-                  <a:srgbClr val="8C5A3A"/>
-                </a:solidFill>
-                <a:latin typeface="Calibri" pitchFamily="34" charset="0"/>
-                <a:ea typeface="Calibri" pitchFamily="34" charset="-122"/>
-                <a:cs typeface="Calibri" pitchFamily="34" charset="-120"/>
-              </a:rPr>
-              <a:t>Allowed but requires financial services certification per market</a:t>
-            </a:r>
-            <a:endParaRPr lang="en-US" sz="850" dirty="0"/>
-          </a:p>
-        </p:txBody>
-      </p:sp>
+              <a:t>&gt;</a:t>
+            </a:r>
+            <a:endParaRPr lang="en-US" sz="8000" dirty="0"/>
+          </a:p>
+        </p:txBody>
+      </p:sp>
+      <p:pic>
+        <p:nvPicPr>
+          <p:cNvPr id="7" name="Image 1" descr="/Users/sov/bitcoincierge-pitch-deck 3/assets/processed/bitcoin_smiley.png">    </p:cNvPr>
+          <p:cNvPicPr>
+            <a:picLocks noChangeAspect="1"/>
+          </p:cNvPicPr>
+          <p:nvPr/>
+        </p:nvPicPr>
+        <p:blipFill>
+          <a:blip r:embed="rId2"/>
+          <a:stretch>
+            <a:fillRect/>
+          </a:stretch>
+        </p:blipFill>
+        <p:spPr>
+          <a:xfrm>
+            <a:off x="5486400" y="1371600"/>
+            <a:ext cx="2560320" cy="2560320"/>
+          </a:xfrm>
+          <a:prstGeom prst="rect">
+            <a:avLst/>
+          </a:prstGeom>
+        </p:spPr>
+      </p:pic>
     </p:spTree>
   </p:cSld>
   <p:clrMapOvr>
@@ -10855,7 +10392,7 @@
                 <a:ea typeface="Calibri" pitchFamily="34" charset="-122"/>
                 <a:cs typeface="Calibri" pitchFamily="34" charset="-120"/>
               </a:rPr>
-              <a:t>M A R K E T I N G   C H A N N E L   2   /   3</a:t>
+              <a:t>P A I D   M A R K E T I N G   P R O B L E M</a:t>
             </a:r>
             <a:endParaRPr lang="en-US" sz="850" dirty="0"/>
           </a:p>
@@ -10869,8 +10406,8 @@
         </p:nvSpPr>
         <p:spPr>
           <a:xfrm>
-            <a:off x="457200" y="475488"/>
-            <a:ext cx="8229600" cy="640080"/>
+            <a:off x="457200" y="411480"/>
+            <a:ext cx="8229600" cy="685800"/>
           </a:xfrm>
           <a:prstGeom prst="rect">
             <a:avLst/>
@@ -10886,7 +10423,7 @@
               <a:buNone/>
             </a:pPr>
             <a:r>
-              <a:rPr lang="en-US" sz="3600" i="1" dirty="0">
+              <a:rPr lang="en-US" sz="3200" i="1" dirty="0">
                 <a:solidFill>
                   <a:srgbClr val="1A1A1A"/>
                 </a:solidFill>
@@ -10894,67 +10431,46 @@
                 <a:ea typeface="Georgia" pitchFamily="34" charset="-122"/>
                 <a:cs typeface="Georgia" pitchFamily="34" charset="-120"/>
               </a:rPr>
-              <a:t>Go organic? 📱</a:t>
-            </a:r>
-            <a:endParaRPr lang="en-US" sz="3600" dirty="0"/>
-          </a:p>
-        </p:txBody>
-      </p:sp>
-      <p:sp>
-        <p:nvSpPr>
-          <p:cNvPr id="5" name="Shape 3"/>
-          <p:cNvSpPr/>
-          <p:nvPr/>
-        </p:nvSpPr>
-        <p:spPr>
-          <a:xfrm>
-            <a:off x="365760" y="1325880"/>
-            <a:ext cx="2697480" cy="3200400"/>
-          </a:xfrm>
-          <a:prstGeom prst="rect">
-            <a:avLst/>
-          </a:prstGeom>
-          <a:solidFill>
-            <a:srgbClr val="FCE8D5"/>
-          </a:solidFill>
-          <a:ln w="12700">
-            <a:solidFill>
-              <a:srgbClr val="F5C49A"/>
-            </a:solidFill>
-            <a:prstDash val="solid"/>
-          </a:ln>
-        </p:spPr>
-      </p:sp>
-      <p:sp>
-        <p:nvSpPr>
-          <p:cNvPr id="6" name="Shape 4"/>
-          <p:cNvSpPr/>
-          <p:nvPr/>
-        </p:nvSpPr>
-        <p:spPr>
-          <a:xfrm>
-            <a:off x="365760" y="1325880"/>
-            <a:ext cx="2697480" cy="50292"/>
-          </a:xfrm>
-          <a:prstGeom prst="rect">
-            <a:avLst/>
-          </a:prstGeom>
-          <a:solidFill>
-            <a:srgbClr val="DC2626"/>
-          </a:solidFill>
-          <a:ln/>
-        </p:spPr>
-      </p:sp>
-      <p:sp>
-        <p:nvSpPr>
-          <p:cNvPr id="7" name="Text 5"/>
-          <p:cNvSpPr/>
-          <p:nvPr/>
-        </p:nvSpPr>
-        <p:spPr>
-          <a:xfrm>
-            <a:off x="502920" y="1463040"/>
-            <a:ext cx="2423160" cy="1280160"/>
+              <a:t>Performance Media is pain</a:t>
+            </a:r>
+            <a:endParaRPr lang="en-US" sz="3200" dirty="0"/>
+          </a:p>
+        </p:txBody>
+      </p:sp>
+      <p:pic>
+        <p:nvPicPr>
+          <p:cNvPr id="5" name="Image 0" descr="/Users/sov/bitcoincierge-pitch-deck 3/assets/processed/google.png">    </p:cNvPr>
+          <p:cNvPicPr>
+            <a:picLocks noChangeAspect="1"/>
+          </p:cNvPicPr>
+          <p:nvPr/>
+        </p:nvPicPr>
+        <p:blipFill>
+          <a:blip r:embed="rId1"/>
+          <a:stretch>
+            <a:fillRect/>
+          </a:stretch>
+        </p:blipFill>
+        <p:spPr>
+          <a:xfrm>
+            <a:off x="1005840" y="1417320"/>
+            <a:ext cx="1463040" cy="1463040"/>
+          </a:xfrm>
+          <a:prstGeom prst="rect">
+            <a:avLst/>
+          </a:prstGeom>
+        </p:spPr>
+      </p:pic>
+      <p:sp>
+        <p:nvSpPr>
+          <p:cNvPr id="6" name="Text 3"/>
+          <p:cNvSpPr/>
+          <p:nvPr/>
+        </p:nvSpPr>
+        <p:spPr>
+          <a:xfrm>
+            <a:off x="502920" y="3017520"/>
+            <a:ext cx="2468880" cy="347472"/>
           </a:xfrm>
           <a:prstGeom prst="rect">
             <a:avLst/>
@@ -10970,30 +10486,30 @@
               <a:buNone/>
             </a:pPr>
             <a:r>
-              <a:rPr lang="en-US" sz="6000" dirty="0">
-                <a:solidFill>
-                  <a:srgbClr val="000000"/>
-                </a:solidFill>
-                <a:latin typeface="Calibri" pitchFamily="34" charset="0"/>
-                <a:ea typeface="Calibri" pitchFamily="34" charset="-122"/>
-                <a:cs typeface="Calibri" pitchFamily="34" charset="-120"/>
-              </a:rPr>
-              <a:t>🫥</a:t>
-            </a:r>
-            <a:endParaRPr lang="en-US" sz="6000" dirty="0"/>
-          </a:p>
-        </p:txBody>
-      </p:sp>
-      <p:sp>
-        <p:nvSpPr>
-          <p:cNvPr id="8" name="Text 6"/>
-          <p:cNvSpPr/>
-          <p:nvPr/>
-        </p:nvSpPr>
-        <p:spPr>
-          <a:xfrm>
-            <a:off x="457200" y="2880360"/>
-            <a:ext cx="2514600" cy="822960"/>
+              <a:rPr lang="en-US" sz="1300" b="1" dirty="0">
+                <a:solidFill>
+                  <a:srgbClr val="1A1A1A"/>
+                </a:solidFill>
+                <a:latin typeface="Calibri" pitchFamily="34" charset="0"/>
+                <a:ea typeface="Calibri" pitchFamily="34" charset="-122"/>
+                <a:cs typeface="Calibri" pitchFamily="34" charset="-120"/>
+              </a:rPr>
+              <a:t>Google</a:t>
+            </a:r>
+            <a:endParaRPr lang="en-US" sz="1300" dirty="0"/>
+          </a:p>
+        </p:txBody>
+      </p:sp>
+      <p:sp>
+        <p:nvSpPr>
+          <p:cNvPr id="7" name="Text 4"/>
+          <p:cNvSpPr/>
+          <p:nvPr/>
+        </p:nvSpPr>
+        <p:spPr>
+          <a:xfrm>
+            <a:off x="502920" y="3401568"/>
+            <a:ext cx="2468880" cy="594360"/>
           </a:xfrm>
           <a:prstGeom prst="rect">
             <a:avLst/>
@@ -11009,7 +10525,70 @@
               <a:buNone/>
             </a:pPr>
             <a:r>
-              <a:rPr lang="en-US" sz="2200" b="1" dirty="0">
+              <a:rPr lang="en-US" sz="1000" dirty="0">
+                <a:solidFill>
+                  <a:srgbClr val="8C5A3A"/>
+                </a:solidFill>
+                <a:latin typeface="Calibri" pitchFamily="34" charset="0"/>
+                <a:ea typeface="Calibri" pitchFamily="34" charset="-122"/>
+                <a:cs typeface="Calibri" pitchFamily="34" charset="-120"/>
+              </a:rPr>
+              <a:t>Requires certification and compliance</a:t>
+            </a:r>
+            <a:endParaRPr lang="en-US" sz="1000" dirty="0"/>
+          </a:p>
+        </p:txBody>
+      </p:sp>
+      <p:pic>
+        <p:nvPicPr>
+          <p:cNvPr id="8" name="Image 1" descr="/Users/sov/bitcoincierge-pitch-deck 3/assets/processed/meta.png">    </p:cNvPr>
+          <p:cNvPicPr>
+            <a:picLocks noChangeAspect="1"/>
+          </p:cNvPicPr>
+          <p:nvPr/>
+        </p:nvPicPr>
+        <p:blipFill>
+          <a:blip r:embed="rId2"/>
+          <a:stretch>
+            <a:fillRect/>
+          </a:stretch>
+        </p:blipFill>
+        <p:spPr>
+          <a:xfrm>
+            <a:off x="3840480" y="1417320"/>
+            <a:ext cx="1463040" cy="1463040"/>
+          </a:xfrm>
+          <a:prstGeom prst="rect">
+            <a:avLst/>
+          </a:prstGeom>
+        </p:spPr>
+      </p:pic>
+      <p:sp>
+        <p:nvSpPr>
+          <p:cNvPr id="9" name="Text 5"/>
+          <p:cNvSpPr/>
+          <p:nvPr/>
+        </p:nvSpPr>
+        <p:spPr>
+          <a:xfrm>
+            <a:off x="3337560" y="3017520"/>
+            <a:ext cx="2468880" cy="347472"/>
+          </a:xfrm>
+          <a:prstGeom prst="rect">
+            <a:avLst/>
+          </a:prstGeom>
+          <a:noFill/>
+          <a:ln/>
+        </p:spPr>
+        <p:txBody>
+          <a:bodyPr wrap="square" lIns="0" tIns="0" rIns="0" bIns="0" rtlCol="0" anchor="ctr"/>
+          <a:lstStyle/>
+          <a:p>
+            <a:pPr algn="ctr" indent="0" marL="0">
+              <a:buNone/>
+            </a:pPr>
+            <a:r>
+              <a:rPr lang="en-US" sz="1300" b="1" dirty="0">
                 <a:solidFill>
                   <a:srgbClr val="1A1A1A"/>
                 </a:solidFill>
@@ -11017,67 +10596,22 @@
                 <a:ea typeface="Calibri" pitchFamily="34" charset="-122"/>
                 <a:cs typeface="Calibri" pitchFamily="34" charset="-120"/>
               </a:rPr>
-              <a:t>Shadow Banning</a:t>
-            </a:r>
-            <a:endParaRPr lang="en-US" sz="2200" dirty="0"/>
-          </a:p>
-        </p:txBody>
-      </p:sp>
-      <p:sp>
-        <p:nvSpPr>
-          <p:cNvPr id="9" name="Shape 7"/>
-          <p:cNvSpPr/>
-          <p:nvPr/>
-        </p:nvSpPr>
-        <p:spPr>
-          <a:xfrm>
-            <a:off x="3200400" y="1325880"/>
-            <a:ext cx="2697480" cy="3200400"/>
-          </a:xfrm>
-          <a:prstGeom prst="rect">
-            <a:avLst/>
-          </a:prstGeom>
-          <a:solidFill>
-            <a:srgbClr val="FCE8D5"/>
-          </a:solidFill>
-          <a:ln w="12700">
-            <a:solidFill>
-              <a:srgbClr val="F5C49A"/>
-            </a:solidFill>
-            <a:prstDash val="solid"/>
-          </a:ln>
-        </p:spPr>
-      </p:sp>
-      <p:sp>
-        <p:nvSpPr>
-          <p:cNvPr id="10" name="Shape 8"/>
-          <p:cNvSpPr/>
-          <p:nvPr/>
-        </p:nvSpPr>
-        <p:spPr>
-          <a:xfrm>
-            <a:off x="3200400" y="1325880"/>
-            <a:ext cx="2697480" cy="50292"/>
-          </a:xfrm>
-          <a:prstGeom prst="rect">
-            <a:avLst/>
-          </a:prstGeom>
-          <a:solidFill>
-            <a:srgbClr val="DC2626"/>
-          </a:solidFill>
-          <a:ln/>
-        </p:spPr>
-      </p:sp>
-      <p:sp>
-        <p:nvSpPr>
-          <p:cNvPr id="11" name="Text 9"/>
-          <p:cNvSpPr/>
-          <p:nvPr/>
-        </p:nvSpPr>
-        <p:spPr>
-          <a:xfrm>
-            <a:off x="3337560" y="1463040"/>
-            <a:ext cx="2423160" cy="1280160"/>
+              <a:t>Meta / Facebook</a:t>
+            </a:r>
+            <a:endParaRPr lang="en-US" sz="1300" dirty="0"/>
+          </a:p>
+        </p:txBody>
+      </p:sp>
+      <p:sp>
+        <p:nvSpPr>
+          <p:cNvPr id="10" name="Text 6"/>
+          <p:cNvSpPr/>
+          <p:nvPr/>
+        </p:nvSpPr>
+        <p:spPr>
+          <a:xfrm>
+            <a:off x="3337560" y="3401568"/>
+            <a:ext cx="2468880" cy="594360"/>
           </a:xfrm>
           <a:prstGeom prst="rect">
             <a:avLst/>
@@ -11093,30 +10627,54 @@
               <a:buNone/>
             </a:pPr>
             <a:r>
-              <a:rPr lang="en-US" sz="6000" dirty="0">
-                <a:solidFill>
-                  <a:srgbClr val="000000"/>
-                </a:solidFill>
-                <a:latin typeface="Calibri" pitchFamily="34" charset="0"/>
-                <a:ea typeface="Calibri" pitchFamily="34" charset="-122"/>
-                <a:cs typeface="Calibri" pitchFamily="34" charset="-120"/>
-              </a:rPr>
-              <a:t>🤖</a:t>
-            </a:r>
-            <a:endParaRPr lang="en-US" sz="6000" dirty="0"/>
-          </a:p>
-        </p:txBody>
-      </p:sp>
-      <p:sp>
-        <p:nvSpPr>
-          <p:cNvPr id="12" name="Text 10"/>
-          <p:cNvSpPr/>
-          <p:nvPr/>
-        </p:nvSpPr>
-        <p:spPr>
-          <a:xfrm>
-            <a:off x="3291840" y="2880360"/>
-            <a:ext cx="2514600" cy="822960"/>
+              <a:rPr lang="en-US" sz="1000" dirty="0">
+                <a:solidFill>
+                  <a:srgbClr val="8C5A3A"/>
+                </a:solidFill>
+                <a:latin typeface="Calibri" pitchFamily="34" charset="0"/>
+                <a:ea typeface="Calibri" pitchFamily="34" charset="-122"/>
+                <a:cs typeface="Calibri" pitchFamily="34" charset="-120"/>
+              </a:rPr>
+              <a:t>Requires prior permission. Often denied.</a:t>
+            </a:r>
+            <a:endParaRPr lang="en-US" sz="1000" dirty="0"/>
+          </a:p>
+        </p:txBody>
+      </p:sp>
+      <p:pic>
+        <p:nvPicPr>
+          <p:cNvPr id="11" name="Image 2" descr="/Users/sov/bitcoincierge-pitch-deck 3/assets/processed/x_logo.png">    </p:cNvPr>
+          <p:cNvPicPr>
+            <a:picLocks noChangeAspect="1"/>
+          </p:cNvPicPr>
+          <p:nvPr/>
+        </p:nvPicPr>
+        <p:blipFill>
+          <a:blip r:embed="rId3"/>
+          <a:stretch>
+            <a:fillRect/>
+          </a:stretch>
+        </p:blipFill>
+        <p:spPr>
+          <a:xfrm>
+            <a:off x="6675120" y="1417320"/>
+            <a:ext cx="1463040" cy="1463040"/>
+          </a:xfrm>
+          <a:prstGeom prst="rect">
+            <a:avLst/>
+          </a:prstGeom>
+        </p:spPr>
+      </p:pic>
+      <p:sp>
+        <p:nvSpPr>
+          <p:cNvPr id="12" name="Text 7"/>
+          <p:cNvSpPr/>
+          <p:nvPr/>
+        </p:nvSpPr>
+        <p:spPr>
+          <a:xfrm>
+            <a:off x="6172200" y="3017520"/>
+            <a:ext cx="2468880" cy="347472"/>
           </a:xfrm>
           <a:prstGeom prst="rect">
             <a:avLst/>
@@ -11132,7 +10690,7 @@
               <a:buNone/>
             </a:pPr>
             <a:r>
-              <a:rPr lang="en-US" sz="2200" b="1" dirty="0">
+              <a:rPr lang="en-US" sz="1300" b="1" dirty="0">
                 <a:solidFill>
                   <a:srgbClr val="1A1A1A"/>
                 </a:solidFill>
@@ -11140,67 +10698,22 @@
                 <a:ea typeface="Calibri" pitchFamily="34" charset="-122"/>
                 <a:cs typeface="Calibri" pitchFamily="34" charset="-120"/>
               </a:rPr>
-              <a:t>AI Slop</a:t>
-            </a:r>
-            <a:endParaRPr lang="en-US" sz="2200" dirty="0"/>
-          </a:p>
-        </p:txBody>
-      </p:sp>
-      <p:sp>
-        <p:nvSpPr>
-          <p:cNvPr id="13" name="Shape 11"/>
-          <p:cNvSpPr/>
-          <p:nvPr/>
-        </p:nvSpPr>
-        <p:spPr>
-          <a:xfrm>
-            <a:off x="6035040" y="1325880"/>
-            <a:ext cx="2697480" cy="3200400"/>
-          </a:xfrm>
-          <a:prstGeom prst="rect">
-            <a:avLst/>
-          </a:prstGeom>
-          <a:solidFill>
-            <a:srgbClr val="FCE8D5"/>
-          </a:solidFill>
-          <a:ln w="12700">
-            <a:solidFill>
-              <a:srgbClr val="F5C49A"/>
-            </a:solidFill>
-            <a:prstDash val="solid"/>
-          </a:ln>
-        </p:spPr>
-      </p:sp>
-      <p:sp>
-        <p:nvSpPr>
-          <p:cNvPr id="14" name="Shape 12"/>
-          <p:cNvSpPr/>
-          <p:nvPr/>
-        </p:nvSpPr>
-        <p:spPr>
-          <a:xfrm>
-            <a:off x="6035040" y="1325880"/>
-            <a:ext cx="2697480" cy="50292"/>
-          </a:xfrm>
-          <a:prstGeom prst="rect">
-            <a:avLst/>
-          </a:prstGeom>
-          <a:solidFill>
-            <a:srgbClr val="DC2626"/>
-          </a:solidFill>
-          <a:ln/>
-        </p:spPr>
-      </p:sp>
-      <p:sp>
-        <p:nvSpPr>
-          <p:cNvPr id="15" name="Text 13"/>
-          <p:cNvSpPr/>
-          <p:nvPr/>
-        </p:nvSpPr>
-        <p:spPr>
-          <a:xfrm>
-            <a:off x="6172200" y="1463040"/>
-            <a:ext cx="2423160" cy="1280160"/>
+              <a:t>Twitter / X</a:t>
+            </a:r>
+            <a:endParaRPr lang="en-US" sz="1300" dirty="0"/>
+          </a:p>
+        </p:txBody>
+      </p:sp>
+      <p:sp>
+        <p:nvSpPr>
+          <p:cNvPr id="13" name="Text 8"/>
+          <p:cNvSpPr/>
+          <p:nvPr/>
+        </p:nvSpPr>
+        <p:spPr>
+          <a:xfrm>
+            <a:off x="6172200" y="3401568"/>
+            <a:ext cx="2468880" cy="594360"/>
           </a:xfrm>
           <a:prstGeom prst="rect">
             <a:avLst/>
@@ -11216,56 +10729,17 @@
               <a:buNone/>
             </a:pPr>
             <a:r>
-              <a:rPr lang="en-US" sz="6000" dirty="0">
-                <a:solidFill>
-                  <a:srgbClr val="000000"/>
-                </a:solidFill>
-                <a:latin typeface="Calibri" pitchFamily="34" charset="0"/>
-                <a:ea typeface="Calibri" pitchFamily="34" charset="-122"/>
-                <a:cs typeface="Calibri" pitchFamily="34" charset="-120"/>
-              </a:rPr>
-              <a:t>😮‍💨</a:t>
-            </a:r>
-            <a:endParaRPr lang="en-US" sz="6000" dirty="0"/>
-          </a:p>
-        </p:txBody>
-      </p:sp>
-      <p:sp>
-        <p:nvSpPr>
-          <p:cNvPr id="16" name="Text 14"/>
-          <p:cNvSpPr/>
-          <p:nvPr/>
-        </p:nvSpPr>
-        <p:spPr>
-          <a:xfrm>
-            <a:off x="6126480" y="2880360"/>
-            <a:ext cx="2514600" cy="822960"/>
-          </a:xfrm>
-          <a:prstGeom prst="rect">
-            <a:avLst/>
-          </a:prstGeom>
-          <a:noFill/>
-          <a:ln/>
-        </p:spPr>
-        <p:txBody>
-          <a:bodyPr wrap="square" lIns="0" tIns="0" rIns="0" bIns="0" rtlCol="0" anchor="ctr"/>
-          <a:lstStyle/>
-          <a:p>
-            <a:pPr algn="ctr" indent="0" marL="0">
-              <a:buNone/>
-            </a:pPr>
-            <a:r>
-              <a:rPr lang="en-US" sz="2200" b="1" dirty="0">
-                <a:solidFill>
-                  <a:srgbClr val="1A1A1A"/>
-                </a:solidFill>
-                <a:latin typeface="Calibri" pitchFamily="34" charset="0"/>
-                <a:ea typeface="Calibri" pitchFamily="34" charset="-122"/>
-                <a:cs typeface="Calibri" pitchFamily="34" charset="-120"/>
-              </a:rPr>
-              <a:t>Social Media Fatigue</a:t>
-            </a:r>
-            <a:endParaRPr lang="en-US" sz="2200" dirty="0"/>
+              <a:rPr lang="en-US" sz="1000" dirty="0">
+                <a:solidFill>
+                  <a:srgbClr val="8C5A3A"/>
+                </a:solidFill>
+                <a:latin typeface="Calibri" pitchFamily="34" charset="0"/>
+                <a:ea typeface="Calibri" pitchFamily="34" charset="-122"/>
+                <a:cs typeface="Calibri" pitchFamily="34" charset="-120"/>
+              </a:rPr>
+              <a:t>Requires certification.</a:t>
+            </a:r>
+            <a:endParaRPr lang="en-US" sz="1000" dirty="0"/>
           </a:p>
         </p:txBody>
       </p:sp>
@@ -11354,7 +10828,7 @@
                 <a:ea typeface="Calibri" pitchFamily="34" charset="-122"/>
                 <a:cs typeface="Calibri" pitchFamily="34" charset="-120"/>
               </a:rPr>
-              <a:t>M A R K E T I N G   C H A N N E L   3   /   3</a:t>
+              <a:t>C U R R E N T   W O R K A R O U N D S</a:t>
             </a:r>
             <a:endParaRPr lang="en-US" sz="850" dirty="0"/>
           </a:p>
@@ -11393,7 +10867,7 @@
                 <a:ea typeface="Georgia" pitchFamily="34" charset="-122"/>
                 <a:cs typeface="Georgia" pitchFamily="34" charset="-120"/>
               </a:rPr>
-              <a:t>Pay to play? 💸</a:t>
+              <a:t>Big brands have figured 💸</a:t>
             </a:r>
             <a:endParaRPr lang="en-US" sz="3600" dirty="0"/>
           </a:p>
@@ -11692,7 +11166,7 @@
                 <a:ea typeface="Calibri" pitchFamily="34" charset="-122"/>
                 <a:cs typeface="Calibri" pitchFamily="34" charset="-120"/>
               </a:rPr>
-              <a:t>For Coinbase. Not for your seed-stage startup.</a:t>
+              <a:t>May not be for many of us!</a:t>
             </a:r>
             <a:endParaRPr lang="en-US" sz="900" dirty="0"/>
           </a:p>
@@ -11932,7 +11406,7 @@
                 <a:ea typeface="Calibri" pitchFamily="34" charset="-122"/>
                 <a:cs typeface="Calibri" pitchFamily="34" charset="-120"/>
               </a:rPr>
-              <a:t>Top 10 Indian Bitcoin creators</a:t>
+              <a:t>Top 10 Indian creators</a:t>
             </a:r>
             <a:endParaRPr lang="en-US" sz="900" dirty="0"/>
           </a:p>
@@ -11991,7 +11465,7 @@
                 <a:ea typeface="Calibri" pitchFamily="34" charset="-122"/>
                 <a:cs typeface="Calibri" pitchFamily="34" charset="-120"/>
               </a:rPr>
-              <a:t>No guaranteed conversion. No attribution. No retargeting.</a:t>
+              <a:t>No assured conversion, or attribution.</a:t>
             </a:r>
             <a:endParaRPr lang="en-US" sz="900" dirty="0"/>
           </a:p>
@@ -12121,24 +11595,7 @@
                 <a:ea typeface="Georgia" pitchFamily="34" charset="-122"/>
                 <a:cs typeface="Georgia" pitchFamily="34" charset="-120"/>
               </a:rPr>
-              <a:t>Smart founders already</a:t>
-            </a:r>
-            <a:endParaRPr lang="en-US" sz="3000" dirty="0"/>
-          </a:p>
-          <a:p>
-            <a:pPr algn="l" indent="0" marL="0">
-              <a:buNone/>
-            </a:pPr>
-            <a:r>
-              <a:rPr lang="en-US" sz="3000" i="1" dirty="0">
-                <a:solidFill>
-                  <a:srgbClr val="1A1A1A"/>
-                </a:solidFill>
-                <a:latin typeface="Georgia" pitchFamily="34" charset="0"/>
-                <a:ea typeface="Georgia" pitchFamily="34" charset="-122"/>
-                <a:cs typeface="Georgia" pitchFamily="34" charset="-120"/>
-              </a:rPr>
-              <a:t>figured it out.</a:t>
+              <a:t>Smart founders are figuring</a:t>
             </a:r>
             <a:endParaRPr lang="en-US" sz="3000" dirty="0"/>
           </a:p>
@@ -12844,7 +12301,7 @@
                 <a:ea typeface="Calibri" pitchFamily="34" charset="-122"/>
                 <a:cs typeface="Calibri" pitchFamily="34" charset="-120"/>
               </a:rPr>
-              <a:t>B U T   T H I S   M O D E L   H A S   P R O B L E M S</a:t>
+              <a:t>T H E   B I G   P R O B L E M</a:t>
             </a:r>
             <a:endParaRPr lang="en-US" sz="850" dirty="0"/>
           </a:p>
@@ -12903,24 +12360,7 @@
                 <a:ea typeface="Georgia" pitchFamily="34" charset="-122"/>
                 <a:cs typeface="Georgia" pitchFamily="34" charset="-120"/>
               </a:rPr>
-              <a:t>Building your own community</a:t>
-            </a:r>
-            <a:endParaRPr lang="en-US" sz="3000" dirty="0"/>
-          </a:p>
-          <a:p>
-            <a:pPr algn="l" indent="0" marL="0">
-              <a:buNone/>
-            </a:pPr>
-            <a:r>
-              <a:rPr lang="en-US" sz="3000" i="1" dirty="0">
-                <a:solidFill>
-                  <a:srgbClr val="1A1A1A"/>
-                </a:solidFill>
-                <a:latin typeface="Georgia" pitchFamily="34" charset="0"/>
-                <a:ea typeface="Georgia" pitchFamily="34" charset="-122"/>
-                <a:cs typeface="Georgia" pitchFamily="34" charset="-120"/>
-              </a:rPr>
-              <a:t>breaks at scale.</a:t>
+              <a:t>Before you jump this route!</a:t>
             </a:r>
             <a:endParaRPr lang="en-US" sz="3000" dirty="0"/>
           </a:p>

--- a/dist/bitcoincierge_pitch_deck.pptx
+++ b/dist/bitcoincierge_pitch_deck.pptx
@@ -24,10 +24,9 @@
     <p:sldId id="272" r:id="rId18"/>
     <p:sldId id="273" r:id="rId19"/>
     <p:sldId id="274" r:id="rId20"/>
-    <p:sldId id="275" r:id="rId21"/>
   </p:sldIdLst>
   <p:notesMasterIdLst>
-    <p:notesMasterId r:id="rId22"/>
+    <p:notesMasterId r:id="rId21"/>
   </p:notesMasterIdLst>
   <p:sldSz cx="9144000" cy="5143500"/>
   <p:notesSz cx="5143500" cy="9144000"/>
@@ -1513,94 +1512,6 @@
             <a:fld id="{F7021451-1387-4CA6-816F-3879F97B5CBC}" type="slidenum">
               <a:rPr lang="en-US"/>
               <a:t>2</a:t>
-            </a:fld>
-            <a:endParaRPr lang="en-US"/>
-          </a:p>
-        </p:txBody>
-      </p:sp>
-    </p:spTree>
-    <p:extLst>
-      <p:ext uri="{BB962C8B-B14F-4D97-AF65-F5344CB8AC3E}">
-        <p14:creationId xmlns:p14="http://schemas.microsoft.com/office/powerpoint/2010/main" val="1024086991"/>
-      </p:ext>
-    </p:extLst>
-  </p:cSld>
-  <p:clrMapOvr>
-    <a:masterClrMapping/>
-  </p:clrMapOvr>
-</p:notes>
-</file>
-
-<file path=ppt/notesSlides/notesSlide20.xml><?xml version="1.0" encoding="utf-8"?>
-<p:notes xmlns:a="http://schemas.openxmlformats.org/drawingml/2006/main" xmlns:r="http://schemas.openxmlformats.org/officeDocument/2006/relationships" xmlns:p="http://schemas.openxmlformats.org/presentationml/2006/main">
-  <p:cSld>
-    <p:spTree>
-      <p:nvGrpSpPr>
-        <p:cNvPr id="1" name=""/>
-        <p:cNvGrpSpPr/>
-        <p:nvPr/>
-      </p:nvGrpSpPr>
-      <p:grpSpPr>
-        <a:xfrm>
-          <a:off x="0" y="0"/>
-          <a:ext cx="0" cy="0"/>
-          <a:chOff x="0" y="0"/>
-          <a:chExt cx="0" cy="0"/>
-        </a:xfrm>
-      </p:grpSpPr>
-      <p:sp>
-        <p:nvSpPr>
-          <p:cNvPr id="2" name="Slide Image Placeholder 1"/>
-          <p:cNvSpPr>
-            <a:spLocks noGrp="1" noRot="1" noChangeAspect="1"/>
-          </p:cNvSpPr>
-          <p:nvPr>
-            <p:ph type="sldImg"/>
-          </p:nvPr>
-        </p:nvSpPr>
-        <p:spPr/>
-      </p:sp>
-      <p:sp>
-        <p:nvSpPr>
-          <p:cNvPr id="3" name="Notes Placeholder 2"/>
-          <p:cNvSpPr>
-            <a:spLocks noGrp="1"/>
-          </p:cNvSpPr>
-          <p:nvPr>
-            <p:ph type="body" idx="1"/>
-          </p:nvPr>
-        </p:nvSpPr>
-        <p:spPr/>
-        <p:txBody>
-          <a:bodyPr/>
-          <a:lstStyle/>
-          <a:p>
-            <a:r>
-              <a:rPr lang="en-US" dirty="0"/>
-              <a:t/>
-            </a:r>
-            <a:endParaRPr lang="en-US" dirty="0"/>
-          </a:p>
-        </p:txBody>
-      </p:sp>
-      <p:sp>
-        <p:nvSpPr>
-          <p:cNvPr id="4" name="Slide Number Placeholder 3"/>
-          <p:cNvSpPr>
-            <a:spLocks noGrp="1"/>
-          </p:cNvSpPr>
-          <p:nvPr>
-            <p:ph type="sldNum" sz="quarter" idx="10"/>
-          </p:nvPr>
-        </p:nvSpPr>
-        <p:spPr/>
-        <p:txBody>
-          <a:bodyPr/>
-          <a:lstStyle/>
-          <a:p>
-            <a:fld id="{F7021451-1387-4CA6-816F-3879F97B5CBC}" type="slidenum">
-              <a:rPr lang="en-US"/>
-              <a:t>20</a:t>
             </a:fld>
             <a:endParaRPr lang="en-US"/>
           </a:p>
@@ -2713,79 +2624,36 @@
           <a:chExt cx="0" cy="0"/>
         </a:xfrm>
       </p:grpSpPr>
-      <p:pic>
-        <p:nvPicPr>
-          <p:cNvPr id="2" name="Image 0" descr="preencoded.png">    </p:cNvPr>
-          <p:cNvPicPr>
-            <a:picLocks noChangeAspect="1"/>
-          </p:cNvPicPr>
-          <p:nvPr/>
-        </p:nvPicPr>
-        <p:blipFill>
-          <a:blip r:embed="rId1"/>
-          <a:stretch>
-            <a:fillRect/>
-          </a:stretch>
-        </p:blipFill>
-        <p:spPr>
-          <a:xfrm>
-            <a:off x="1691640" y="42977"/>
-            <a:ext cx="6350508" cy="5825642"/>
-          </a:xfrm>
-          <a:prstGeom prst="rect">
-            <a:avLst/>
-          </a:prstGeom>
-        </p:spPr>
-      </p:pic>
-      <p:sp>
-        <p:nvSpPr>
-          <p:cNvPr id="3" name="Text 0"/>
-          <p:cNvSpPr/>
-          <p:nvPr/>
-        </p:nvSpPr>
-        <p:spPr>
-          <a:xfrm>
-            <a:off x="4030675" y="1536192"/>
-            <a:ext cx="164592" cy="201168"/>
-          </a:xfrm>
-          <a:prstGeom prst="rect">
-            <a:avLst/>
-          </a:prstGeom>
-          <a:noFill/>
-          <a:ln/>
-        </p:spPr>
-        <p:txBody>
-          <a:bodyPr wrap="square" lIns="0" tIns="0" rIns="0" bIns="0" rtlCol="0" anchor="ctr"/>
-          <a:lstStyle/>
-          <a:p>
-            <a:pPr algn="ctr" indent="0" marL="0">
-              <a:buNone/>
-            </a:pPr>
-            <a:r>
-              <a:rPr lang="en-US" sz="1800" dirty="0">
-                <a:solidFill>
-                  <a:srgbClr val="F26522"/>
-                </a:solidFill>
-                <a:latin typeface="Calibri" pitchFamily="34" charset="0"/>
-                <a:ea typeface="Calibri" pitchFamily="34" charset="-122"/>
-                <a:cs typeface="Calibri" pitchFamily="34" charset="-120"/>
-              </a:rPr>
-              <a:t>●</a:t>
-            </a:r>
-            <a:endParaRPr lang="en-US" sz="1800" dirty="0"/>
-          </a:p>
-        </p:txBody>
-      </p:sp>
-      <p:sp>
-        <p:nvSpPr>
-          <p:cNvPr id="4" name="Text 1"/>
-          <p:cNvSpPr/>
-          <p:nvPr/>
-        </p:nvSpPr>
-        <p:spPr>
-          <a:xfrm>
-            <a:off x="4240987" y="1563624"/>
-            <a:ext cx="960120" cy="182880"/>
+      <p:sp>
+        <p:nvSpPr>
+          <p:cNvPr id="2" name="Shape 0"/>
+          <p:cNvSpPr/>
+          <p:nvPr/>
+        </p:nvSpPr>
+        <p:spPr>
+          <a:xfrm>
+            <a:off x="411480" y="502920"/>
+            <a:ext cx="50292" cy="1078992"/>
+          </a:xfrm>
+          <a:prstGeom prst="rect">
+            <a:avLst/>
+          </a:prstGeom>
+          <a:solidFill>
+            <a:srgbClr val="F26522"/>
+          </a:solidFill>
+          <a:ln/>
+        </p:spPr>
+      </p:sp>
+      <p:sp>
+        <p:nvSpPr>
+          <p:cNvPr id="3" name="Text 1"/>
+          <p:cNvSpPr/>
+          <p:nvPr/>
+        </p:nvSpPr>
+        <p:spPr>
+          <a:xfrm>
+            <a:off x="594360" y="502920"/>
+            <a:ext cx="8046720" cy="1078992"/>
           </a:xfrm>
           <a:prstGeom prst="rect">
             <a:avLst/>
@@ -2801,554 +2669,79 @@
               <a:buNone/>
             </a:pPr>
             <a:r>
-              <a:rPr lang="en-US" sz="800" b="1" dirty="0">
+              <a:rPr lang="en-US" sz="3000" i="1" dirty="0">
                 <a:solidFill>
                   <a:srgbClr val="1A1A1A"/>
-                </a:solidFill>
-                <a:latin typeface="Calibri" pitchFamily="34" charset="0"/>
-                <a:ea typeface="Calibri" pitchFamily="34" charset="-122"/>
-                <a:cs typeface="Calibri" pitchFamily="34" charset="-120"/>
-              </a:rPr>
-              <a:t>Delhi</a:t>
-            </a:r>
-            <a:endParaRPr lang="en-US" sz="800" dirty="0"/>
-          </a:p>
-        </p:txBody>
-      </p:sp>
-      <p:sp>
-        <p:nvSpPr>
-          <p:cNvPr id="5" name="Text 2"/>
-          <p:cNvSpPr/>
-          <p:nvPr/>
-        </p:nvSpPr>
-        <p:spPr>
-          <a:xfrm>
-            <a:off x="3102559" y="2672791"/>
-            <a:ext cx="164592" cy="201168"/>
-          </a:xfrm>
-          <a:prstGeom prst="rect">
-            <a:avLst/>
-          </a:prstGeom>
-          <a:noFill/>
-          <a:ln/>
-        </p:spPr>
-        <p:txBody>
-          <a:bodyPr wrap="square" lIns="0" tIns="0" rIns="0" bIns="0" rtlCol="0" anchor="ctr"/>
-          <a:lstStyle/>
-          <a:p>
-            <a:pPr algn="ctr" indent="0" marL="0">
-              <a:buNone/>
-            </a:pPr>
-            <a:r>
-              <a:rPr lang="en-US" sz="1800" dirty="0">
-                <a:solidFill>
-                  <a:srgbClr val="F26522"/>
-                </a:solidFill>
-                <a:latin typeface="Calibri" pitchFamily="34" charset="0"/>
-                <a:ea typeface="Calibri" pitchFamily="34" charset="-122"/>
-                <a:cs typeface="Calibri" pitchFamily="34" charset="-120"/>
-              </a:rPr>
-              <a:t>●</a:t>
-            </a:r>
-            <a:endParaRPr lang="en-US" sz="1800" dirty="0"/>
-          </a:p>
-        </p:txBody>
-      </p:sp>
-      <p:sp>
-        <p:nvSpPr>
-          <p:cNvPr id="6" name="Text 3"/>
-          <p:cNvSpPr/>
-          <p:nvPr/>
-        </p:nvSpPr>
-        <p:spPr>
-          <a:xfrm>
-            <a:off x="2096719" y="2700223"/>
-            <a:ext cx="960120" cy="182880"/>
-          </a:xfrm>
-          <a:prstGeom prst="rect">
-            <a:avLst/>
-          </a:prstGeom>
-          <a:noFill/>
-          <a:ln/>
-        </p:spPr>
-        <p:txBody>
-          <a:bodyPr wrap="square" lIns="0" tIns="0" rIns="0" bIns="0" rtlCol="0" anchor="ctr"/>
-          <a:lstStyle/>
-          <a:p>
-            <a:pPr algn="r" indent="0" marL="0">
-              <a:buNone/>
-            </a:pPr>
-            <a:r>
-              <a:rPr lang="en-US" sz="800" b="1" dirty="0">
-                <a:solidFill>
-                  <a:srgbClr val="1A1A1A"/>
-                </a:solidFill>
-                <a:latin typeface="Calibri" pitchFamily="34" charset="0"/>
-                <a:ea typeface="Calibri" pitchFamily="34" charset="-122"/>
-                <a:cs typeface="Calibri" pitchFamily="34" charset="-120"/>
-              </a:rPr>
-              <a:t>Ahmedabad</a:t>
-            </a:r>
-            <a:endParaRPr lang="en-US" sz="800" dirty="0"/>
-          </a:p>
-        </p:txBody>
-      </p:sp>
-      <p:sp>
-        <p:nvSpPr>
-          <p:cNvPr id="7" name="Text 4"/>
-          <p:cNvSpPr/>
-          <p:nvPr/>
-        </p:nvSpPr>
-        <p:spPr>
-          <a:xfrm>
-            <a:off x="3298241" y="3098902"/>
-            <a:ext cx="164592" cy="201168"/>
-          </a:xfrm>
-          <a:prstGeom prst="rect">
-            <a:avLst/>
-          </a:prstGeom>
-          <a:noFill/>
-          <a:ln/>
-        </p:spPr>
-        <p:txBody>
-          <a:bodyPr wrap="square" lIns="0" tIns="0" rIns="0" bIns="0" rtlCol="0" anchor="ctr"/>
-          <a:lstStyle/>
-          <a:p>
-            <a:pPr algn="ctr" indent="0" marL="0">
-              <a:buNone/>
-            </a:pPr>
-            <a:r>
-              <a:rPr lang="en-US" sz="1800" dirty="0">
-                <a:solidFill>
-                  <a:srgbClr val="F26522"/>
-                </a:solidFill>
-                <a:latin typeface="Calibri" pitchFamily="34" charset="0"/>
-                <a:ea typeface="Calibri" pitchFamily="34" charset="-122"/>
-                <a:cs typeface="Calibri" pitchFamily="34" charset="-120"/>
-              </a:rPr>
-              <a:t>●</a:t>
-            </a:r>
-            <a:endParaRPr lang="en-US" sz="1800" dirty="0"/>
-          </a:p>
-        </p:txBody>
-      </p:sp>
-      <p:sp>
-        <p:nvSpPr>
-          <p:cNvPr id="8" name="Text 5"/>
-          <p:cNvSpPr/>
-          <p:nvPr/>
-        </p:nvSpPr>
-        <p:spPr>
-          <a:xfrm>
-            <a:off x="2292401" y="3126334"/>
-            <a:ext cx="960120" cy="182880"/>
-          </a:xfrm>
-          <a:prstGeom prst="rect">
-            <a:avLst/>
-          </a:prstGeom>
-          <a:noFill/>
-          <a:ln/>
-        </p:spPr>
-        <p:txBody>
-          <a:bodyPr wrap="square" lIns="0" tIns="0" rIns="0" bIns="0" rtlCol="0" anchor="ctr"/>
-          <a:lstStyle/>
-          <a:p>
-            <a:pPr algn="r" indent="0" marL="0">
-              <a:buNone/>
-            </a:pPr>
-            <a:r>
-              <a:rPr lang="en-US" sz="800" b="1" dirty="0">
-                <a:solidFill>
-                  <a:srgbClr val="1A1A1A"/>
-                </a:solidFill>
-                <a:latin typeface="Calibri" pitchFamily="34" charset="0"/>
-                <a:ea typeface="Calibri" pitchFamily="34" charset="-122"/>
-                <a:cs typeface="Calibri" pitchFamily="34" charset="-120"/>
-              </a:rPr>
-              <a:t>Mumbai</a:t>
-            </a:r>
-            <a:endParaRPr lang="en-US" sz="800" dirty="0"/>
-          </a:p>
-        </p:txBody>
-      </p:sp>
-      <p:sp>
-        <p:nvSpPr>
-          <p:cNvPr id="9" name="Text 6"/>
-          <p:cNvSpPr/>
-          <p:nvPr/>
-        </p:nvSpPr>
-        <p:spPr>
-          <a:xfrm>
-            <a:off x="3407054" y="3595421"/>
-            <a:ext cx="164592" cy="201168"/>
-          </a:xfrm>
-          <a:prstGeom prst="rect">
-            <a:avLst/>
-          </a:prstGeom>
-          <a:noFill/>
-          <a:ln/>
-        </p:spPr>
-        <p:txBody>
-          <a:bodyPr wrap="square" lIns="0" tIns="0" rIns="0" bIns="0" rtlCol="0" anchor="ctr"/>
-          <a:lstStyle/>
-          <a:p>
-            <a:pPr algn="ctr" indent="0" marL="0">
-              <a:buNone/>
-            </a:pPr>
-            <a:r>
-              <a:rPr lang="en-US" sz="1800" dirty="0">
-                <a:solidFill>
-                  <a:srgbClr val="F26522"/>
-                </a:solidFill>
-                <a:latin typeface="Calibri" pitchFamily="34" charset="0"/>
-                <a:ea typeface="Calibri" pitchFamily="34" charset="-122"/>
-                <a:cs typeface="Calibri" pitchFamily="34" charset="-120"/>
-              </a:rPr>
-              <a:t>●</a:t>
-            </a:r>
-            <a:endParaRPr lang="en-US" sz="1800" dirty="0"/>
-          </a:p>
-        </p:txBody>
-      </p:sp>
-      <p:sp>
-        <p:nvSpPr>
-          <p:cNvPr id="10" name="Text 7"/>
-          <p:cNvSpPr/>
-          <p:nvPr/>
-        </p:nvSpPr>
-        <p:spPr>
-          <a:xfrm>
-            <a:off x="2401214" y="3622853"/>
-            <a:ext cx="960120" cy="182880"/>
-          </a:xfrm>
-          <a:prstGeom prst="rect">
-            <a:avLst/>
-          </a:prstGeom>
-          <a:noFill/>
-          <a:ln/>
-        </p:spPr>
-        <p:txBody>
-          <a:bodyPr wrap="square" lIns="0" tIns="0" rIns="0" bIns="0" rtlCol="0" anchor="ctr"/>
-          <a:lstStyle/>
-          <a:p>
-            <a:pPr algn="r" indent="0" marL="0">
-              <a:buNone/>
-            </a:pPr>
-            <a:r>
-              <a:rPr lang="en-US" sz="800" b="1" dirty="0">
-                <a:solidFill>
-                  <a:srgbClr val="1A1A1A"/>
-                </a:solidFill>
-                <a:latin typeface="Calibri" pitchFamily="34" charset="0"/>
-                <a:ea typeface="Calibri" pitchFamily="34" charset="-122"/>
-                <a:cs typeface="Calibri" pitchFamily="34" charset="-120"/>
-              </a:rPr>
-              <a:t>Goa</a:t>
-            </a:r>
-            <a:endParaRPr lang="en-US" sz="800" dirty="0"/>
-          </a:p>
-        </p:txBody>
-      </p:sp>
-      <p:sp>
-        <p:nvSpPr>
-          <p:cNvPr id="11" name="Text 8"/>
-          <p:cNvSpPr/>
-          <p:nvPr/>
-        </p:nvSpPr>
-        <p:spPr>
-          <a:xfrm>
-            <a:off x="4664354" y="3374136"/>
-            <a:ext cx="164592" cy="201168"/>
-          </a:xfrm>
-          <a:prstGeom prst="rect">
-            <a:avLst/>
-          </a:prstGeom>
-          <a:noFill/>
-          <a:ln/>
-        </p:spPr>
-        <p:txBody>
-          <a:bodyPr wrap="square" lIns="0" tIns="0" rIns="0" bIns="0" rtlCol="0" anchor="ctr"/>
-          <a:lstStyle/>
-          <a:p>
-            <a:pPr algn="ctr" indent="0" marL="0">
-              <a:buNone/>
-            </a:pPr>
-            <a:r>
-              <a:rPr lang="en-US" sz="1800" dirty="0">
-                <a:solidFill>
-                  <a:srgbClr val="F26522"/>
-                </a:solidFill>
-                <a:latin typeface="Calibri" pitchFamily="34" charset="0"/>
-                <a:ea typeface="Calibri" pitchFamily="34" charset="-122"/>
-                <a:cs typeface="Calibri" pitchFamily="34" charset="-120"/>
-              </a:rPr>
-              <a:t>●</a:t>
-            </a:r>
-            <a:endParaRPr lang="en-US" sz="1800" dirty="0"/>
-          </a:p>
-        </p:txBody>
-      </p:sp>
-      <p:sp>
-        <p:nvSpPr>
-          <p:cNvPr id="12" name="Text 9"/>
-          <p:cNvSpPr/>
-          <p:nvPr/>
-        </p:nvSpPr>
-        <p:spPr>
-          <a:xfrm>
-            <a:off x="4874666" y="3401568"/>
-            <a:ext cx="960120" cy="182880"/>
-          </a:xfrm>
-          <a:prstGeom prst="rect">
-            <a:avLst/>
-          </a:prstGeom>
-          <a:noFill/>
-          <a:ln/>
-        </p:spPr>
-        <p:txBody>
-          <a:bodyPr wrap="square" lIns="0" tIns="0" rIns="0" bIns="0" rtlCol="0" anchor="ctr"/>
-          <a:lstStyle/>
-          <a:p>
-            <a:pPr algn="l" indent="0" marL="0">
-              <a:buNone/>
-            </a:pPr>
-            <a:r>
-              <a:rPr lang="en-US" sz="800" b="1" dirty="0">
-                <a:solidFill>
-                  <a:srgbClr val="1A1A1A"/>
-                </a:solidFill>
-                <a:latin typeface="Calibri" pitchFamily="34" charset="0"/>
-                <a:ea typeface="Calibri" pitchFamily="34" charset="-122"/>
-                <a:cs typeface="Calibri" pitchFamily="34" charset="-120"/>
-              </a:rPr>
-              <a:t>Hyderabad</a:t>
-            </a:r>
-            <a:endParaRPr lang="en-US" sz="800" dirty="0"/>
-          </a:p>
-        </p:txBody>
-      </p:sp>
-      <p:sp>
-        <p:nvSpPr>
-          <p:cNvPr id="13" name="Text 10"/>
-          <p:cNvSpPr/>
-          <p:nvPr/>
-        </p:nvSpPr>
-        <p:spPr>
-          <a:xfrm>
-            <a:off x="4114800" y="3814877"/>
-            <a:ext cx="164592" cy="201168"/>
-          </a:xfrm>
-          <a:prstGeom prst="rect">
-            <a:avLst/>
-          </a:prstGeom>
-          <a:noFill/>
-          <a:ln/>
-        </p:spPr>
-        <p:txBody>
-          <a:bodyPr wrap="square" lIns="0" tIns="0" rIns="0" bIns="0" rtlCol="0" anchor="ctr"/>
-          <a:lstStyle/>
-          <a:p>
-            <a:pPr algn="ctr" indent="0" marL="0">
-              <a:buNone/>
-            </a:pPr>
-            <a:r>
-              <a:rPr lang="en-US" sz="1800" dirty="0">
-                <a:solidFill>
-                  <a:srgbClr val="F26522"/>
-                </a:solidFill>
-                <a:latin typeface="Calibri" pitchFamily="34" charset="0"/>
-                <a:ea typeface="Calibri" pitchFamily="34" charset="-122"/>
-                <a:cs typeface="Calibri" pitchFamily="34" charset="-120"/>
-              </a:rPr>
-              <a:t>●</a:t>
-            </a:r>
-            <a:endParaRPr lang="en-US" sz="1800" dirty="0"/>
-          </a:p>
-        </p:txBody>
-      </p:sp>
-      <p:sp>
-        <p:nvSpPr>
-          <p:cNvPr id="14" name="Text 11"/>
-          <p:cNvSpPr/>
-          <p:nvPr/>
-        </p:nvSpPr>
-        <p:spPr>
-          <a:xfrm>
-            <a:off x="4325112" y="3842309"/>
-            <a:ext cx="960120" cy="182880"/>
-          </a:xfrm>
-          <a:prstGeom prst="rect">
-            <a:avLst/>
-          </a:prstGeom>
-          <a:noFill/>
-          <a:ln/>
-        </p:spPr>
-        <p:txBody>
-          <a:bodyPr wrap="square" lIns="0" tIns="0" rIns="0" bIns="0" rtlCol="0" anchor="ctr"/>
-          <a:lstStyle/>
-          <a:p>
-            <a:pPr algn="l" indent="0" marL="0">
-              <a:buNone/>
-            </a:pPr>
-            <a:r>
-              <a:rPr lang="en-US" sz="800" b="1" dirty="0">
-                <a:solidFill>
-                  <a:srgbClr val="1A1A1A"/>
-                </a:solidFill>
-                <a:latin typeface="Calibri" pitchFamily="34" charset="0"/>
-                <a:ea typeface="Calibri" pitchFamily="34" charset="-122"/>
-                <a:cs typeface="Calibri" pitchFamily="34" charset="-120"/>
-              </a:rPr>
-              <a:t>Bangalore</a:t>
-            </a:r>
-            <a:endParaRPr lang="en-US" sz="800" dirty="0"/>
-          </a:p>
-        </p:txBody>
-      </p:sp>
-      <p:sp>
-        <p:nvSpPr>
-          <p:cNvPr id="15" name="Text 12"/>
-          <p:cNvSpPr/>
-          <p:nvPr/>
-        </p:nvSpPr>
-        <p:spPr>
-          <a:xfrm>
-            <a:off x="4454957" y="4298594"/>
-            <a:ext cx="164592" cy="201168"/>
-          </a:xfrm>
-          <a:prstGeom prst="rect">
-            <a:avLst/>
-          </a:prstGeom>
-          <a:noFill/>
-          <a:ln/>
-        </p:spPr>
-        <p:txBody>
-          <a:bodyPr wrap="square" lIns="0" tIns="0" rIns="0" bIns="0" rtlCol="0" anchor="ctr"/>
-          <a:lstStyle/>
-          <a:p>
-            <a:pPr algn="ctr" indent="0" marL="0">
-              <a:buNone/>
-            </a:pPr>
-            <a:r>
-              <a:rPr lang="en-US" sz="1800" dirty="0">
-                <a:solidFill>
-                  <a:srgbClr val="F26522"/>
-                </a:solidFill>
-                <a:latin typeface="Calibri" pitchFamily="34" charset="0"/>
-                <a:ea typeface="Calibri" pitchFamily="34" charset="-122"/>
-                <a:cs typeface="Calibri" pitchFamily="34" charset="-120"/>
-              </a:rPr>
-              <a:t>●</a:t>
-            </a:r>
-            <a:endParaRPr lang="en-US" sz="1800" dirty="0"/>
-          </a:p>
-        </p:txBody>
-      </p:sp>
-      <p:sp>
-        <p:nvSpPr>
-          <p:cNvPr id="16" name="Text 13"/>
-          <p:cNvSpPr/>
-          <p:nvPr/>
-        </p:nvSpPr>
-        <p:spPr>
-          <a:xfrm>
-            <a:off x="4665269" y="4326026"/>
-            <a:ext cx="960120" cy="182880"/>
-          </a:xfrm>
-          <a:prstGeom prst="rect">
-            <a:avLst/>
-          </a:prstGeom>
-          <a:noFill/>
-          <a:ln/>
-        </p:spPr>
-        <p:txBody>
-          <a:bodyPr wrap="square" lIns="0" tIns="0" rIns="0" bIns="0" rtlCol="0" anchor="ctr"/>
-          <a:lstStyle/>
-          <a:p>
-            <a:pPr algn="l" indent="0" marL="0">
-              <a:buNone/>
-            </a:pPr>
-            <a:r>
-              <a:rPr lang="en-US" sz="800" b="1" dirty="0">
-                <a:solidFill>
-                  <a:srgbClr val="1A1A1A"/>
-                </a:solidFill>
-                <a:latin typeface="Calibri" pitchFamily="34" charset="0"/>
-                <a:ea typeface="Calibri" pitchFamily="34" charset="-122"/>
-                <a:cs typeface="Calibri" pitchFamily="34" charset="-120"/>
-              </a:rPr>
-              <a:t>Chennai</a:t>
-            </a:r>
-            <a:endParaRPr lang="en-US" sz="800" dirty="0"/>
-          </a:p>
-        </p:txBody>
-      </p:sp>
-      <p:sp>
-        <p:nvSpPr>
-          <p:cNvPr id="17" name="Text 14"/>
-          <p:cNvSpPr/>
-          <p:nvPr/>
-        </p:nvSpPr>
-        <p:spPr>
-          <a:xfrm>
-            <a:off x="228600" y="2194560"/>
-            <a:ext cx="1371600" cy="822960"/>
-          </a:xfrm>
-          <a:prstGeom prst="rect">
-            <a:avLst/>
-          </a:prstGeom>
-          <a:noFill/>
-          <a:ln/>
-        </p:spPr>
-        <p:txBody>
-          <a:bodyPr wrap="square" lIns="0" tIns="0" rIns="0" bIns="0" rtlCol="0" anchor="ctr"/>
-          <a:lstStyle/>
-          <a:p>
-            <a:pPr algn="ctr" indent="0" marL="0">
-              <a:buNone/>
-            </a:pPr>
-            <a:r>
-              <a:rPr lang="en-US" sz="2800" i="1" dirty="0">
-                <a:solidFill>
-                  <a:srgbClr val="F26522"/>
                 </a:solidFill>
                 <a:latin typeface="Georgia" pitchFamily="34" charset="0"/>
                 <a:ea typeface="Georgia" pitchFamily="34" charset="-122"/>
                 <a:cs typeface="Georgia" pitchFamily="34" charset="-120"/>
               </a:rPr>
-              <a:t>7 Cities</a:t>
-            </a:r>
-            <a:endParaRPr lang="en-US" sz="2800" dirty="0"/>
-          </a:p>
-          <a:p>
-            <a:pPr algn="ctr" indent="0" marL="0">
-              <a:buNone/>
-            </a:pPr>
-            <a:r>
-              <a:rPr lang="en-US" sz="2800" i="1" dirty="0">
-                <a:solidFill>
-                  <a:srgbClr val="F26522"/>
+              <a:t>IRL event &amp; community management</a:t>
+            </a:r>
+            <a:endParaRPr lang="en-US" sz="3000" dirty="0"/>
+          </a:p>
+          <a:p>
+            <a:pPr algn="l" indent="0" marL="0">
+              <a:buNone/>
+            </a:pPr>
+            <a:r>
+              <a:rPr lang="en-US" sz="3000" i="1" dirty="0">
+                <a:solidFill>
+                  <a:srgbClr val="1A1A1A"/>
                 </a:solidFill>
                 <a:latin typeface="Georgia" pitchFamily="34" charset="0"/>
                 <a:ea typeface="Georgia" pitchFamily="34" charset="-122"/>
                 <a:cs typeface="Georgia" pitchFamily="34" charset="-120"/>
               </a:rPr>
-              <a:t>Active</a:t>
-            </a:r>
-            <a:endParaRPr lang="en-US" sz="2800" dirty="0"/>
-          </a:p>
-        </p:txBody>
-      </p:sp>
-      <p:sp>
-        <p:nvSpPr>
-          <p:cNvPr id="18" name="Text 15"/>
-          <p:cNvSpPr/>
-          <p:nvPr/>
-        </p:nvSpPr>
-        <p:spPr>
-          <a:xfrm>
-            <a:off x="91440" y="3108960"/>
-            <a:ext cx="1554480" cy="731520"/>
+              <a:t>as a service — for Bitcoin brands.</a:t>
+            </a:r>
+            <a:endParaRPr lang="en-US" sz="3000" dirty="0"/>
+          </a:p>
+        </p:txBody>
+      </p:sp>
+      <p:sp>
+        <p:nvSpPr>
+          <p:cNvPr id="4" name="Shape 2"/>
+          <p:cNvSpPr/>
+          <p:nvPr/>
+        </p:nvSpPr>
+        <p:spPr>
+          <a:xfrm>
+            <a:off x="457200" y="1691640"/>
+            <a:ext cx="1965960" cy="2743200"/>
+          </a:xfrm>
+          <a:prstGeom prst="rect">
+            <a:avLst/>
+          </a:prstGeom>
+          <a:solidFill>
+            <a:srgbClr val="FFFFFF"/>
+          </a:solidFill>
+          <a:ln w="9525">
+            <a:solidFill>
+              <a:srgbClr val="E5E7EB"/>
+            </a:solidFill>
+            <a:prstDash val="solid"/>
+          </a:ln>
+          <a:effectLst>
+            <a:outerShdw sx="100000" sy="100000" kx="0" ky="0" algn="bl" rotWithShape="0" blurRad="76200" dist="25400" dir="8100000">
+              <a:srgbClr val="000000">
+                <a:alpha val="8000"/>
+              </a:srgbClr>
+            </a:outerShdw>
+          </a:effectLst>
+        </p:spPr>
+      </p:sp>
+      <p:sp>
+        <p:nvSpPr>
+          <p:cNvPr id="5" name="Text 3"/>
+          <p:cNvSpPr/>
+          <p:nvPr/>
+        </p:nvSpPr>
+        <p:spPr>
+          <a:xfrm>
+            <a:off x="548640" y="1920240"/>
+            <a:ext cx="1783080" cy="1097280"/>
           </a:xfrm>
           <a:prstGeom prst="rect">
             <a:avLst/>
@@ -3364,47 +2757,101 @@
               <a:buNone/>
             </a:pPr>
             <a:r>
-              <a:rPr lang="en-US" sz="800" dirty="0">
-                <a:solidFill>
-                  <a:srgbClr val="8C5A3A"/>
-                </a:solidFill>
-                <a:latin typeface="Calibri" pitchFamily="34" charset="0"/>
-                <a:ea typeface="Calibri" pitchFamily="34" charset="-122"/>
-                <a:cs typeface="Calibri" pitchFamily="34" charset="-120"/>
-              </a:rPr>
-              <a:t>Mentors present, community active,</a:t>
-            </a:r>
-            <a:endParaRPr lang="en-US" sz="800" dirty="0"/>
-          </a:p>
+              <a:rPr lang="en-US" sz="5200" dirty="0">
+                <a:solidFill>
+                  <a:srgbClr val="000000"/>
+                </a:solidFill>
+                <a:latin typeface="Calibri" pitchFamily="34" charset="0"/>
+                <a:ea typeface="Calibri" pitchFamily="34" charset="-122"/>
+                <a:cs typeface="Calibri" pitchFamily="34" charset="-120"/>
+              </a:rPr>
+              <a:t>📍</a:t>
+            </a:r>
+            <a:endParaRPr lang="en-US" sz="5200" dirty="0"/>
+          </a:p>
+        </p:txBody>
+      </p:sp>
+      <p:sp>
+        <p:nvSpPr>
+          <p:cNvPr id="6" name="Text 4"/>
+          <p:cNvSpPr/>
+          <p:nvPr/>
+        </p:nvSpPr>
+        <p:spPr>
+          <a:xfrm>
+            <a:off x="548640" y="3154680"/>
+            <a:ext cx="1783080" cy="731520"/>
+          </a:xfrm>
+          <a:prstGeom prst="rect">
+            <a:avLst/>
+          </a:prstGeom>
+          <a:noFill/>
+          <a:ln/>
+        </p:spPr>
+        <p:txBody>
+          <a:bodyPr wrap="square" lIns="0" tIns="0" rIns="0" bIns="0" rtlCol="0" anchor="ctr"/>
+          <a:lstStyle/>
           <a:p>
             <a:pPr algn="ctr" indent="0" marL="0">
               <a:buNone/>
             </a:pPr>
             <a:r>
-              <a:rPr lang="en-US" sz="800" dirty="0">
-                <a:solidFill>
-                  <a:srgbClr val="8C5A3A"/>
-                </a:solidFill>
-                <a:latin typeface="Calibri" pitchFamily="34" charset="0"/>
-                <a:ea typeface="Calibri" pitchFamily="34" charset="-122"/>
-                <a:cs typeface="Calibri" pitchFamily="34" charset="-120"/>
-              </a:rPr>
-              <a:t>ready to run activations</a:t>
-            </a:r>
-            <a:endParaRPr lang="en-US" sz="800" dirty="0"/>
-          </a:p>
-        </p:txBody>
-      </p:sp>
-      <p:sp>
-        <p:nvSpPr>
-          <p:cNvPr id="19" name="Text 16"/>
-          <p:cNvSpPr/>
-          <p:nvPr/>
-        </p:nvSpPr>
-        <p:spPr>
-          <a:xfrm>
-            <a:off x="91440" y="3977640"/>
-            <a:ext cx="1554480" cy="457200"/>
+              <a:rPr lang="en-US" sz="1200" b="1" dirty="0">
+                <a:solidFill>
+                  <a:srgbClr val="1A1A1A"/>
+                </a:solidFill>
+                <a:latin typeface="Calibri" pitchFamily="34" charset="0"/>
+                <a:ea typeface="Calibri" pitchFamily="34" charset="-122"/>
+                <a:cs typeface="Calibri" pitchFamily="34" charset="-120"/>
+              </a:rPr>
+              <a:t>Venue &amp; Logistics</a:t>
+            </a:r>
+            <a:endParaRPr lang="en-US" sz="1200" dirty="0"/>
+          </a:p>
+        </p:txBody>
+      </p:sp>
+      <p:sp>
+        <p:nvSpPr>
+          <p:cNvPr id="7" name="Shape 5"/>
+          <p:cNvSpPr/>
+          <p:nvPr/>
+        </p:nvSpPr>
+        <p:spPr>
+          <a:xfrm>
+            <a:off x="2542032" y="1691640"/>
+            <a:ext cx="1965960" cy="2743200"/>
+          </a:xfrm>
+          <a:prstGeom prst="rect">
+            <a:avLst/>
+          </a:prstGeom>
+          <a:solidFill>
+            <a:srgbClr val="FFFFFF"/>
+          </a:solidFill>
+          <a:ln w="9525">
+            <a:solidFill>
+              <a:srgbClr val="E5E7EB"/>
+            </a:solidFill>
+            <a:prstDash val="solid"/>
+          </a:ln>
+          <a:effectLst>
+            <a:outerShdw sx="100000" sy="100000" kx="0" ky="0" algn="bl" rotWithShape="0" blurRad="76200" dist="25400" dir="8100000">
+              <a:srgbClr val="000000">
+                <a:alpha val="8000"/>
+              </a:srgbClr>
+            </a:outerShdw>
+          </a:effectLst>
+        </p:spPr>
+      </p:sp>
+      <p:sp>
+        <p:nvSpPr>
+          <p:cNvPr id="8" name="Text 6"/>
+          <p:cNvSpPr/>
+          <p:nvPr/>
+        </p:nvSpPr>
+        <p:spPr>
+          <a:xfrm>
+            <a:off x="2633472" y="1920240"/>
+            <a:ext cx="1783080" cy="1097280"/>
           </a:xfrm>
           <a:prstGeom prst="rect">
             <a:avLst/>
@@ -3420,40 +2867,282 @@
               <a:buNone/>
             </a:pPr>
             <a:r>
-              <a:rPr lang="en-US" sz="800" i="1" dirty="0">
-                <a:solidFill>
-                  <a:srgbClr val="F26522"/>
-                </a:solidFill>
-                <a:latin typeface="Calibri" pitchFamily="34" charset="0"/>
-                <a:ea typeface="Calibri" pitchFamily="34" charset="-122"/>
-                <a:cs typeface="Calibri" pitchFamily="34" charset="-120"/>
-              </a:rPr>
-              <a:t>Expanding to</a:t>
-            </a:r>
-            <a:endParaRPr lang="en-US" sz="800" dirty="0"/>
-          </a:p>
+              <a:rPr lang="en-US" sz="5200" dirty="0">
+                <a:solidFill>
+                  <a:srgbClr val="000000"/>
+                </a:solidFill>
+                <a:latin typeface="Calibri" pitchFamily="34" charset="0"/>
+                <a:ea typeface="Calibri" pitchFamily="34" charset="-122"/>
+                <a:cs typeface="Calibri" pitchFamily="34" charset="-120"/>
+              </a:rPr>
+              <a:t>👥</a:t>
+            </a:r>
+            <a:endParaRPr lang="en-US" sz="5200" dirty="0"/>
+          </a:p>
+        </p:txBody>
+      </p:sp>
+      <p:sp>
+        <p:nvSpPr>
+          <p:cNvPr id="9" name="Text 7"/>
+          <p:cNvSpPr/>
+          <p:nvPr/>
+        </p:nvSpPr>
+        <p:spPr>
+          <a:xfrm>
+            <a:off x="2633472" y="3154680"/>
+            <a:ext cx="1783080" cy="731520"/>
+          </a:xfrm>
+          <a:prstGeom prst="rect">
+            <a:avLst/>
+          </a:prstGeom>
+          <a:noFill/>
+          <a:ln/>
+        </p:spPr>
+        <p:txBody>
+          <a:bodyPr wrap="square" lIns="0" tIns="0" rIns="0" bIns="0" rtlCol="0" anchor="ctr"/>
+          <a:lstStyle/>
           <a:p>
             <a:pPr algn="ctr" indent="0" marL="0">
               <a:buNone/>
             </a:pPr>
             <a:r>
-              <a:rPr lang="en-US" sz="800" i="1" dirty="0">
-                <a:solidFill>
-                  <a:srgbClr val="F26522"/>
-                </a:solidFill>
-                <a:latin typeface="Calibri" pitchFamily="34" charset="0"/>
-                <a:ea typeface="Calibri" pitchFamily="34" charset="-122"/>
-                <a:cs typeface="Calibri" pitchFamily="34" charset="-120"/>
-              </a:rPr>
-              <a:t>more cities</a:t>
-            </a:r>
-            <a:endParaRPr lang="en-US" sz="800" dirty="0"/>
-          </a:p>
-        </p:txBody>
-      </p:sp>
-      <p:sp>
-        <p:nvSpPr>
-          <p:cNvPr id="20" name="Shape 17"/>
+              <a:rPr lang="en-US" sz="1200" b="1" dirty="0">
+                <a:solidFill>
+                  <a:srgbClr val="1A1A1A"/>
+                </a:solidFill>
+                <a:latin typeface="Calibri" pitchFamily="34" charset="0"/>
+                <a:ea typeface="Calibri" pitchFamily="34" charset="-122"/>
+                <a:cs typeface="Calibri" pitchFamily="34" charset="-120"/>
+              </a:rPr>
+              <a:t>Curated Audience</a:t>
+            </a:r>
+            <a:endParaRPr lang="en-US" sz="1200" dirty="0"/>
+          </a:p>
+        </p:txBody>
+      </p:sp>
+      <p:sp>
+        <p:nvSpPr>
+          <p:cNvPr id="10" name="Shape 8"/>
+          <p:cNvSpPr/>
+          <p:nvPr/>
+        </p:nvSpPr>
+        <p:spPr>
+          <a:xfrm>
+            <a:off x="4626864" y="1691640"/>
+            <a:ext cx="1965960" cy="2743200"/>
+          </a:xfrm>
+          <a:prstGeom prst="rect">
+            <a:avLst/>
+          </a:prstGeom>
+          <a:solidFill>
+            <a:srgbClr val="FFFFFF"/>
+          </a:solidFill>
+          <a:ln w="9525">
+            <a:solidFill>
+              <a:srgbClr val="E5E7EB"/>
+            </a:solidFill>
+            <a:prstDash val="solid"/>
+          </a:ln>
+          <a:effectLst>
+            <a:outerShdw sx="100000" sy="100000" kx="0" ky="0" algn="bl" rotWithShape="0" blurRad="76200" dist="25400" dir="8100000">
+              <a:srgbClr val="000000">
+                <a:alpha val="8000"/>
+              </a:srgbClr>
+            </a:outerShdw>
+          </a:effectLst>
+        </p:spPr>
+      </p:sp>
+      <p:sp>
+        <p:nvSpPr>
+          <p:cNvPr id="11" name="Text 9"/>
+          <p:cNvSpPr/>
+          <p:nvPr/>
+        </p:nvSpPr>
+        <p:spPr>
+          <a:xfrm>
+            <a:off x="4718304" y="1920240"/>
+            <a:ext cx="1783080" cy="1097280"/>
+          </a:xfrm>
+          <a:prstGeom prst="rect">
+            <a:avLst/>
+          </a:prstGeom>
+          <a:noFill/>
+          <a:ln/>
+        </p:spPr>
+        <p:txBody>
+          <a:bodyPr wrap="square" lIns="0" tIns="0" rIns="0" bIns="0" rtlCol="0" anchor="ctr"/>
+          <a:lstStyle/>
+          <a:p>
+            <a:pPr algn="ctr" indent="0" marL="0">
+              <a:buNone/>
+            </a:pPr>
+            <a:r>
+              <a:rPr lang="en-US" sz="5200" dirty="0">
+                <a:solidFill>
+                  <a:srgbClr val="000000"/>
+                </a:solidFill>
+                <a:latin typeface="Calibri" pitchFamily="34" charset="0"/>
+                <a:ea typeface="Calibri" pitchFamily="34" charset="-122"/>
+                <a:cs typeface="Calibri" pitchFamily="34" charset="-120"/>
+              </a:rPr>
+              <a:t>🎤</a:t>
+            </a:r>
+            <a:endParaRPr lang="en-US" sz="5200" dirty="0"/>
+          </a:p>
+        </p:txBody>
+      </p:sp>
+      <p:sp>
+        <p:nvSpPr>
+          <p:cNvPr id="12" name="Text 10"/>
+          <p:cNvSpPr/>
+          <p:nvPr/>
+        </p:nvSpPr>
+        <p:spPr>
+          <a:xfrm>
+            <a:off x="4718304" y="3154680"/>
+            <a:ext cx="1783080" cy="731520"/>
+          </a:xfrm>
+          <a:prstGeom prst="rect">
+            <a:avLst/>
+          </a:prstGeom>
+          <a:noFill/>
+          <a:ln/>
+        </p:spPr>
+        <p:txBody>
+          <a:bodyPr wrap="square" lIns="0" tIns="0" rIns="0" bIns="0" rtlCol="0" anchor="ctr"/>
+          <a:lstStyle/>
+          <a:p>
+            <a:pPr algn="ctr" indent="0" marL="0">
+              <a:buNone/>
+            </a:pPr>
+            <a:r>
+              <a:rPr lang="en-US" sz="1200" b="1" dirty="0">
+                <a:solidFill>
+                  <a:srgbClr val="1A1A1A"/>
+                </a:solidFill>
+                <a:latin typeface="Calibri" pitchFamily="34" charset="0"/>
+                <a:ea typeface="Calibri" pitchFamily="34" charset="-122"/>
+                <a:cs typeface="Calibri" pitchFamily="34" charset="-120"/>
+              </a:rPr>
+              <a:t>Expert Mentors</a:t>
+            </a:r>
+            <a:endParaRPr lang="en-US" sz="1200" dirty="0"/>
+          </a:p>
+        </p:txBody>
+      </p:sp>
+      <p:sp>
+        <p:nvSpPr>
+          <p:cNvPr id="13" name="Shape 11"/>
+          <p:cNvSpPr/>
+          <p:nvPr/>
+        </p:nvSpPr>
+        <p:spPr>
+          <a:xfrm>
+            <a:off x="6711696" y="1691640"/>
+            <a:ext cx="1965960" cy="2743200"/>
+          </a:xfrm>
+          <a:prstGeom prst="rect">
+            <a:avLst/>
+          </a:prstGeom>
+          <a:solidFill>
+            <a:srgbClr val="FFFFFF"/>
+          </a:solidFill>
+          <a:ln w="9525">
+            <a:solidFill>
+              <a:srgbClr val="E5E7EB"/>
+            </a:solidFill>
+            <a:prstDash val="solid"/>
+          </a:ln>
+          <a:effectLst>
+            <a:outerShdw sx="100000" sy="100000" kx="0" ky="0" algn="bl" rotWithShape="0" blurRad="76200" dist="25400" dir="8100000">
+              <a:srgbClr val="000000">
+                <a:alpha val="8000"/>
+              </a:srgbClr>
+            </a:outerShdw>
+          </a:effectLst>
+        </p:spPr>
+      </p:sp>
+      <p:sp>
+        <p:nvSpPr>
+          <p:cNvPr id="14" name="Text 12"/>
+          <p:cNvSpPr/>
+          <p:nvPr/>
+        </p:nvSpPr>
+        <p:spPr>
+          <a:xfrm>
+            <a:off x="6803136" y="1920240"/>
+            <a:ext cx="1783080" cy="1097280"/>
+          </a:xfrm>
+          <a:prstGeom prst="rect">
+            <a:avLst/>
+          </a:prstGeom>
+          <a:noFill/>
+          <a:ln/>
+        </p:spPr>
+        <p:txBody>
+          <a:bodyPr wrap="square" lIns="0" tIns="0" rIns="0" bIns="0" rtlCol="0" anchor="ctr"/>
+          <a:lstStyle/>
+          <a:p>
+            <a:pPr algn="ctr" indent="0" marL="0">
+              <a:buNone/>
+            </a:pPr>
+            <a:r>
+              <a:rPr lang="en-US" sz="5200" dirty="0">
+                <a:solidFill>
+                  <a:srgbClr val="000000"/>
+                </a:solidFill>
+                <a:latin typeface="Calibri" pitchFamily="34" charset="0"/>
+                <a:ea typeface="Calibri" pitchFamily="34" charset="-122"/>
+                <a:cs typeface="Calibri" pitchFamily="34" charset="-120"/>
+              </a:rPr>
+              <a:t>📊</a:t>
+            </a:r>
+            <a:endParaRPr lang="en-US" sz="5200" dirty="0"/>
+          </a:p>
+        </p:txBody>
+      </p:sp>
+      <p:sp>
+        <p:nvSpPr>
+          <p:cNvPr id="15" name="Text 13"/>
+          <p:cNvSpPr/>
+          <p:nvPr/>
+        </p:nvSpPr>
+        <p:spPr>
+          <a:xfrm>
+            <a:off x="6803136" y="3154680"/>
+            <a:ext cx="1783080" cy="731520"/>
+          </a:xfrm>
+          <a:prstGeom prst="rect">
+            <a:avLst/>
+          </a:prstGeom>
+          <a:noFill/>
+          <a:ln/>
+        </p:spPr>
+        <p:txBody>
+          <a:bodyPr wrap="square" lIns="0" tIns="0" rIns="0" bIns="0" rtlCol="0" anchor="ctr"/>
+          <a:lstStyle/>
+          <a:p>
+            <a:pPr algn="ctr" indent="0" marL="0">
+              <a:buNone/>
+            </a:pPr>
+            <a:r>
+              <a:rPr lang="en-US" sz="1200" b="1" dirty="0">
+                <a:solidFill>
+                  <a:srgbClr val="1A1A1A"/>
+                </a:solidFill>
+                <a:latin typeface="Calibri" pitchFamily="34" charset="0"/>
+                <a:ea typeface="Calibri" pitchFamily="34" charset="-122"/>
+                <a:cs typeface="Calibri" pitchFamily="34" charset="-120"/>
+              </a:rPr>
+              <a:t>Attribution Reports</a:t>
+            </a:r>
+            <a:endParaRPr lang="en-US" sz="1200" dirty="0"/>
+          </a:p>
+        </p:txBody>
+      </p:sp>
+      <p:sp>
+        <p:nvSpPr>
+          <p:cNvPr id="16" name="Shape 14"/>
           <p:cNvSpPr/>
           <p:nvPr/>
         </p:nvSpPr>
@@ -3473,7 +3162,7 @@
       </p:sp>
       <p:sp>
         <p:nvSpPr>
-          <p:cNvPr id="21" name="Text 18"/>
+          <p:cNvPr id="17" name="Text 15"/>
           <p:cNvSpPr/>
           <p:nvPr/>
         </p:nvSpPr>
@@ -3524,7 +3213,7 @@
     <p:bg>
       <p:bgPr>
         <a:solidFill>
-          <a:srgbClr val="FFFFFF"/>
+          <a:srgbClr val="FAF9F6"/>
         </a:solidFill>
       </p:bgPr>
     </p:bg>
@@ -3542,56 +3231,79 @@
           <a:chExt cx="0" cy="0"/>
         </a:xfrm>
       </p:grpSpPr>
-      <p:sp>
-        <p:nvSpPr>
-          <p:cNvPr id="2" name="Shape 0"/>
-          <p:cNvSpPr/>
-          <p:nvPr/>
-        </p:nvSpPr>
-        <p:spPr>
-          <a:xfrm>
-            <a:off x="0" y="0"/>
-            <a:ext cx="4389120" cy="5143500"/>
-          </a:xfrm>
-          <a:prstGeom prst="rect">
-            <a:avLst/>
-          </a:prstGeom>
-          <a:solidFill>
-            <a:srgbClr val="FEF0E6"/>
-          </a:solidFill>
-          <a:ln/>
-        </p:spPr>
-      </p:sp>
-      <p:sp>
-        <p:nvSpPr>
-          <p:cNvPr id="3" name="Shape 1"/>
-          <p:cNvSpPr/>
-          <p:nvPr/>
-        </p:nvSpPr>
-        <p:spPr>
-          <a:xfrm>
-            <a:off x="0" y="0"/>
-            <a:ext cx="4389120" cy="64008"/>
-          </a:xfrm>
-          <a:prstGeom prst="rect">
-            <a:avLst/>
-          </a:prstGeom>
-          <a:solidFill>
-            <a:srgbClr val="1D4ED8"/>
-          </a:solidFill>
-          <a:ln/>
-        </p:spPr>
-      </p:sp>
-      <p:sp>
-        <p:nvSpPr>
-          <p:cNvPr id="4" name="Text 2"/>
-          <p:cNvSpPr/>
-          <p:nvPr/>
-        </p:nvSpPr>
-        <p:spPr>
-          <a:xfrm>
-            <a:off x="274320" y="274320"/>
-            <a:ext cx="3840480" cy="411480"/>
+      <p:pic>
+        <p:nvPicPr>
+          <p:cNvPr id="2" name="Image 0" descr="preencoded.png">    </p:cNvPr>
+          <p:cNvPicPr>
+            <a:picLocks noChangeAspect="1"/>
+          </p:cNvPicPr>
+          <p:nvPr/>
+        </p:nvPicPr>
+        <p:blipFill>
+          <a:blip r:embed="rId1"/>
+          <a:stretch>
+            <a:fillRect/>
+          </a:stretch>
+        </p:blipFill>
+        <p:spPr>
+          <a:xfrm>
+            <a:off x="1691640" y="42977"/>
+            <a:ext cx="6350508" cy="5825642"/>
+          </a:xfrm>
+          <a:prstGeom prst="rect">
+            <a:avLst/>
+          </a:prstGeom>
+        </p:spPr>
+      </p:pic>
+      <p:sp>
+        <p:nvSpPr>
+          <p:cNvPr id="3" name="Text 0"/>
+          <p:cNvSpPr/>
+          <p:nvPr/>
+        </p:nvSpPr>
+        <p:spPr>
+          <a:xfrm>
+            <a:off x="4030675" y="1536192"/>
+            <a:ext cx="164592" cy="201168"/>
+          </a:xfrm>
+          <a:prstGeom prst="rect">
+            <a:avLst/>
+          </a:prstGeom>
+          <a:noFill/>
+          <a:ln/>
+        </p:spPr>
+        <p:txBody>
+          <a:bodyPr wrap="square" lIns="0" tIns="0" rIns="0" bIns="0" rtlCol="0" anchor="ctr"/>
+          <a:lstStyle/>
+          <a:p>
+            <a:pPr algn="ctr" indent="0" marL="0">
+              <a:buNone/>
+            </a:pPr>
+            <a:r>
+              <a:rPr lang="en-US" sz="1800" dirty="0">
+                <a:solidFill>
+                  <a:srgbClr val="F26522"/>
+                </a:solidFill>
+                <a:latin typeface="Calibri" pitchFamily="34" charset="0"/>
+                <a:ea typeface="Calibri" pitchFamily="34" charset="-122"/>
+                <a:cs typeface="Calibri" pitchFamily="34" charset="-120"/>
+              </a:rPr>
+              <a:t>●</a:t>
+            </a:r>
+            <a:endParaRPr lang="en-US" sz="1800" dirty="0"/>
+          </a:p>
+        </p:txBody>
+      </p:sp>
+      <p:sp>
+        <p:nvSpPr>
+          <p:cNvPr id="4" name="Text 1"/>
+          <p:cNvSpPr/>
+          <p:nvPr/>
+        </p:nvSpPr>
+        <p:spPr>
+          <a:xfrm>
+            <a:off x="4240987" y="1563624"/>
+            <a:ext cx="960120" cy="182880"/>
           </a:xfrm>
           <a:prstGeom prst="rect">
             <a:avLst/>
@@ -3607,30 +3319,30 @@
               <a:buNone/>
             </a:pPr>
             <a:r>
-              <a:rPr lang="en-US" sz="1100" b="1" spc="400" kern="0" dirty="0">
-                <a:solidFill>
-                  <a:srgbClr val="1D4ED8"/>
-                </a:solidFill>
-                <a:latin typeface="Calibri" pitchFamily="34" charset="0"/>
-                <a:ea typeface="Calibri" pitchFamily="34" charset="-122"/>
-                <a:cs typeface="Calibri" pitchFamily="34" charset="-120"/>
-              </a:rPr>
-              <a:t>ONLINE</a:t>
-            </a:r>
-            <a:endParaRPr lang="en-US" sz="1100" dirty="0"/>
-          </a:p>
-        </p:txBody>
-      </p:sp>
-      <p:sp>
-        <p:nvSpPr>
-          <p:cNvPr id="5" name="Text 3"/>
-          <p:cNvSpPr/>
-          <p:nvPr/>
-        </p:nvSpPr>
-        <p:spPr>
-          <a:xfrm>
-            <a:off x="365760" y="777240"/>
-            <a:ext cx="3657600" cy="1828800"/>
+              <a:rPr lang="en-US" sz="800" b="1" dirty="0">
+                <a:solidFill>
+                  <a:srgbClr val="1A1A1A"/>
+                </a:solidFill>
+                <a:latin typeface="Calibri" pitchFamily="34" charset="0"/>
+                <a:ea typeface="Calibri" pitchFamily="34" charset="-122"/>
+                <a:cs typeface="Calibri" pitchFamily="34" charset="-120"/>
+              </a:rPr>
+              <a:t>Delhi</a:t>
+            </a:r>
+            <a:endParaRPr lang="en-US" sz="800" dirty="0"/>
+          </a:p>
+        </p:txBody>
+      </p:sp>
+      <p:sp>
+        <p:nvSpPr>
+          <p:cNvPr id="5" name="Text 2"/>
+          <p:cNvSpPr/>
+          <p:nvPr/>
+        </p:nvSpPr>
+        <p:spPr>
+          <a:xfrm>
+            <a:off x="3102559" y="2672791"/>
+            <a:ext cx="164592" cy="201168"/>
           </a:xfrm>
           <a:prstGeom prst="rect">
             <a:avLst/>
@@ -3646,240 +3358,225 @@
               <a:buNone/>
             </a:pPr>
             <a:r>
-              <a:rPr lang="en-US" sz="3000" dirty="0">
-                <a:solidFill>
-                  <a:srgbClr val="000000"/>
-                </a:solidFill>
-                <a:latin typeface="Calibri" pitchFamily="34" charset="0"/>
-                <a:ea typeface="Calibri" pitchFamily="34" charset="-122"/>
-                <a:cs typeface="Calibri" pitchFamily="34" charset="-120"/>
-              </a:rPr>
-              <a:t>📱 📱 📱</a:t>
-            </a:r>
-            <a:endParaRPr lang="en-US" sz="3000" dirty="0"/>
-          </a:p>
+              <a:rPr lang="en-US" sz="1800" dirty="0">
+                <a:solidFill>
+                  <a:srgbClr val="F26522"/>
+                </a:solidFill>
+                <a:latin typeface="Calibri" pitchFamily="34" charset="0"/>
+                <a:ea typeface="Calibri" pitchFamily="34" charset="-122"/>
+                <a:cs typeface="Calibri" pitchFamily="34" charset="-120"/>
+              </a:rPr>
+              <a:t>●</a:t>
+            </a:r>
+            <a:endParaRPr lang="en-US" sz="1800" dirty="0"/>
+          </a:p>
+        </p:txBody>
+      </p:sp>
+      <p:sp>
+        <p:nvSpPr>
+          <p:cNvPr id="6" name="Text 3"/>
+          <p:cNvSpPr/>
+          <p:nvPr/>
+        </p:nvSpPr>
+        <p:spPr>
+          <a:xfrm>
+            <a:off x="2096719" y="2700223"/>
+            <a:ext cx="960120" cy="182880"/>
+          </a:xfrm>
+          <a:prstGeom prst="rect">
+            <a:avLst/>
+          </a:prstGeom>
+          <a:noFill/>
+          <a:ln/>
+        </p:spPr>
+        <p:txBody>
+          <a:bodyPr wrap="square" lIns="0" tIns="0" rIns="0" bIns="0" rtlCol="0" anchor="ctr"/>
+          <a:lstStyle/>
+          <a:p>
+            <a:pPr algn="r" indent="0" marL="0">
+              <a:buNone/>
+            </a:pPr>
+            <a:r>
+              <a:rPr lang="en-US" sz="800" b="1" dirty="0">
+                <a:solidFill>
+                  <a:srgbClr val="1A1A1A"/>
+                </a:solidFill>
+                <a:latin typeface="Calibri" pitchFamily="34" charset="0"/>
+                <a:ea typeface="Calibri" pitchFamily="34" charset="-122"/>
+                <a:cs typeface="Calibri" pitchFamily="34" charset="-120"/>
+              </a:rPr>
+              <a:t>Ahmedabad</a:t>
+            </a:r>
+            <a:endParaRPr lang="en-US" sz="800" dirty="0"/>
+          </a:p>
+        </p:txBody>
+      </p:sp>
+      <p:sp>
+        <p:nvSpPr>
+          <p:cNvPr id="7" name="Text 4"/>
+          <p:cNvSpPr/>
+          <p:nvPr/>
+        </p:nvSpPr>
+        <p:spPr>
+          <a:xfrm>
+            <a:off x="3298241" y="3098902"/>
+            <a:ext cx="164592" cy="201168"/>
+          </a:xfrm>
+          <a:prstGeom prst="rect">
+            <a:avLst/>
+          </a:prstGeom>
+          <a:noFill/>
+          <a:ln/>
+        </p:spPr>
+        <p:txBody>
+          <a:bodyPr wrap="square" lIns="0" tIns="0" rIns="0" bIns="0" rtlCol="0" anchor="ctr"/>
+          <a:lstStyle/>
           <a:p>
             <a:pPr algn="ctr" indent="0" marL="0">
               <a:buNone/>
             </a:pPr>
             <a:r>
-              <a:rPr lang="en-US" sz="3000" dirty="0">
-                <a:solidFill>
-                  <a:srgbClr val="000000"/>
-                </a:solidFill>
-                <a:latin typeface="Calibri" pitchFamily="34" charset="0"/>
-                <a:ea typeface="Calibri" pitchFamily="34" charset="-122"/>
-                <a:cs typeface="Calibri" pitchFamily="34" charset="-120"/>
-              </a:rPr>
-              <a:t>🤖 🤖 🤖</a:t>
-            </a:r>
-            <a:endParaRPr lang="en-US" sz="3000" dirty="0"/>
-          </a:p>
+              <a:rPr lang="en-US" sz="1800" dirty="0">
+                <a:solidFill>
+                  <a:srgbClr val="F26522"/>
+                </a:solidFill>
+                <a:latin typeface="Calibri" pitchFamily="34" charset="0"/>
+                <a:ea typeface="Calibri" pitchFamily="34" charset="-122"/>
+                <a:cs typeface="Calibri" pitchFamily="34" charset="-120"/>
+              </a:rPr>
+              <a:t>●</a:t>
+            </a:r>
+            <a:endParaRPr lang="en-US" sz="1800" dirty="0"/>
+          </a:p>
+        </p:txBody>
+      </p:sp>
+      <p:sp>
+        <p:nvSpPr>
+          <p:cNvPr id="8" name="Text 5"/>
+          <p:cNvSpPr/>
+          <p:nvPr/>
+        </p:nvSpPr>
+        <p:spPr>
+          <a:xfrm>
+            <a:off x="2292401" y="3126334"/>
+            <a:ext cx="960120" cy="182880"/>
+          </a:xfrm>
+          <a:prstGeom prst="rect">
+            <a:avLst/>
+          </a:prstGeom>
+          <a:noFill/>
+          <a:ln/>
+        </p:spPr>
+        <p:txBody>
+          <a:bodyPr wrap="square" lIns="0" tIns="0" rIns="0" bIns="0" rtlCol="0" anchor="ctr"/>
+          <a:lstStyle/>
+          <a:p>
+            <a:pPr algn="r" indent="0" marL="0">
+              <a:buNone/>
+            </a:pPr>
+            <a:r>
+              <a:rPr lang="en-US" sz="800" b="1" dirty="0">
+                <a:solidFill>
+                  <a:srgbClr val="1A1A1A"/>
+                </a:solidFill>
+                <a:latin typeface="Calibri" pitchFamily="34" charset="0"/>
+                <a:ea typeface="Calibri" pitchFamily="34" charset="-122"/>
+                <a:cs typeface="Calibri" pitchFamily="34" charset="-120"/>
+              </a:rPr>
+              <a:t>Mumbai</a:t>
+            </a:r>
+            <a:endParaRPr lang="en-US" sz="800" dirty="0"/>
+          </a:p>
+        </p:txBody>
+      </p:sp>
+      <p:sp>
+        <p:nvSpPr>
+          <p:cNvPr id="9" name="Text 6"/>
+          <p:cNvSpPr/>
+          <p:nvPr/>
+        </p:nvSpPr>
+        <p:spPr>
+          <a:xfrm>
+            <a:off x="3407054" y="3595421"/>
+            <a:ext cx="164592" cy="201168"/>
+          </a:xfrm>
+          <a:prstGeom prst="rect">
+            <a:avLst/>
+          </a:prstGeom>
+          <a:noFill/>
+          <a:ln/>
+        </p:spPr>
+        <p:txBody>
+          <a:bodyPr wrap="square" lIns="0" tIns="0" rIns="0" bIns="0" rtlCol="0" anchor="ctr"/>
+          <a:lstStyle/>
           <a:p>
             <a:pPr algn="ctr" indent="0" marL="0">
               <a:buNone/>
             </a:pPr>
             <a:r>
-              <a:rPr lang="en-US" sz="3000" dirty="0">
-                <a:solidFill>
-                  <a:srgbClr val="000000"/>
-                </a:solidFill>
-                <a:latin typeface="Calibri" pitchFamily="34" charset="0"/>
-                <a:ea typeface="Calibri" pitchFamily="34" charset="-122"/>
-                <a:cs typeface="Calibri" pitchFamily="34" charset="-120"/>
-              </a:rPr>
-              <a:t>📲 📲 📲</a:t>
-            </a:r>
-            <a:endParaRPr lang="en-US" sz="3000" dirty="0"/>
-          </a:p>
-        </p:txBody>
-      </p:sp>
-      <p:sp>
-        <p:nvSpPr>
-          <p:cNvPr id="6" name="Text 4"/>
-          <p:cNvSpPr/>
-          <p:nvPr/>
-        </p:nvSpPr>
-        <p:spPr>
-          <a:xfrm>
-            <a:off x="365760" y="2834640"/>
-            <a:ext cx="3657600" cy="320040"/>
-          </a:xfrm>
-          <a:prstGeom prst="rect">
-            <a:avLst/>
-          </a:prstGeom>
-          <a:noFill/>
-          <a:ln/>
-        </p:spPr>
-        <p:txBody>
-          <a:bodyPr wrap="square" lIns="0" tIns="0" rIns="0" bIns="0" rtlCol="0" anchor="ctr"/>
-          <a:lstStyle/>
-          <a:p>
-            <a:pPr indent="0" marL="0">
-              <a:buNone/>
-            </a:pPr>
-            <a:r>
-              <a:rPr lang="en-US" sz="1000" i="1" dirty="0">
-                <a:solidFill>
-                  <a:srgbClr val="4B5563"/>
-                </a:solidFill>
-                <a:latin typeface="Calibri" pitchFamily="34" charset="0"/>
-                <a:ea typeface="Calibri" pitchFamily="34" charset="-122"/>
-                <a:cs typeface="Calibri" pitchFamily="34" charset="-120"/>
-              </a:rPr>
-              <a:t>— AI-generated content flood</a:t>
-            </a:r>
-            <a:endParaRPr lang="en-US" sz="1000" dirty="0"/>
-          </a:p>
-        </p:txBody>
-      </p:sp>
-      <p:sp>
-        <p:nvSpPr>
-          <p:cNvPr id="7" name="Text 5"/>
-          <p:cNvSpPr/>
-          <p:nvPr/>
-        </p:nvSpPr>
-        <p:spPr>
-          <a:xfrm>
-            <a:off x="365760" y="3218688"/>
-            <a:ext cx="3657600" cy="320040"/>
-          </a:xfrm>
-          <a:prstGeom prst="rect">
-            <a:avLst/>
-          </a:prstGeom>
-          <a:noFill/>
-          <a:ln/>
-        </p:spPr>
-        <p:txBody>
-          <a:bodyPr wrap="square" lIns="0" tIns="0" rIns="0" bIns="0" rtlCol="0" anchor="ctr"/>
-          <a:lstStyle/>
-          <a:p>
-            <a:pPr indent="0" marL="0">
-              <a:buNone/>
-            </a:pPr>
-            <a:r>
-              <a:rPr lang="en-US" sz="1000" i="1" dirty="0">
-                <a:solidFill>
-                  <a:srgbClr val="4B5563"/>
-                </a:solidFill>
-                <a:latin typeface="Calibri" pitchFamily="34" charset="0"/>
-                <a:ea typeface="Calibri" pitchFamily="34" charset="-122"/>
-                <a:cs typeface="Calibri" pitchFamily="34" charset="-120"/>
-              </a:rPr>
-              <a:t>— Crypto ad restrictions</a:t>
-            </a:r>
-            <a:endParaRPr lang="en-US" sz="1000" dirty="0"/>
-          </a:p>
-        </p:txBody>
-      </p:sp>
-      <p:sp>
-        <p:nvSpPr>
-          <p:cNvPr id="8" name="Text 6"/>
-          <p:cNvSpPr/>
-          <p:nvPr/>
-        </p:nvSpPr>
-        <p:spPr>
-          <a:xfrm>
-            <a:off x="365760" y="3602736"/>
-            <a:ext cx="3657600" cy="320040"/>
-          </a:xfrm>
-          <a:prstGeom prst="rect">
-            <a:avLst/>
-          </a:prstGeom>
-          <a:noFill/>
-          <a:ln/>
-        </p:spPr>
-        <p:txBody>
-          <a:bodyPr wrap="square" lIns="0" tIns="0" rIns="0" bIns="0" rtlCol="0" anchor="ctr"/>
-          <a:lstStyle/>
-          <a:p>
-            <a:pPr indent="0" marL="0">
-              <a:buNone/>
-            </a:pPr>
-            <a:r>
-              <a:rPr lang="en-US" sz="1000" i="1" dirty="0">
-                <a:solidFill>
-                  <a:srgbClr val="4B5563"/>
-                </a:solidFill>
-                <a:latin typeface="Calibri" pitchFamily="34" charset="0"/>
-                <a:ea typeface="Calibri" pitchFamily="34" charset="-122"/>
-                <a:cs typeface="Calibri" pitchFamily="34" charset="-120"/>
-              </a:rPr>
-              <a:t>— Doomscrolling &amp; fatigue</a:t>
-            </a:r>
-            <a:endParaRPr lang="en-US" sz="1000" dirty="0"/>
-          </a:p>
-        </p:txBody>
-      </p:sp>
-      <p:sp>
-        <p:nvSpPr>
-          <p:cNvPr id="9" name="Text 7"/>
-          <p:cNvSpPr/>
-          <p:nvPr/>
-        </p:nvSpPr>
-        <p:spPr>
-          <a:xfrm>
-            <a:off x="365760" y="3986784"/>
-            <a:ext cx="3657600" cy="320040"/>
-          </a:xfrm>
-          <a:prstGeom prst="rect">
-            <a:avLst/>
-          </a:prstGeom>
-          <a:noFill/>
-          <a:ln/>
-        </p:spPr>
-        <p:txBody>
-          <a:bodyPr wrap="square" lIns="0" tIns="0" rIns="0" bIns="0" rtlCol="0" anchor="ctr"/>
-          <a:lstStyle/>
-          <a:p>
-            <a:pPr indent="0" marL="0">
-              <a:buNone/>
-            </a:pPr>
-            <a:r>
-              <a:rPr lang="en-US" sz="1000" i="1" dirty="0">
-                <a:solidFill>
-                  <a:srgbClr val="4B5563"/>
-                </a:solidFill>
-                <a:latin typeface="Calibri" pitchFamily="34" charset="0"/>
-                <a:ea typeface="Calibri" pitchFamily="34" charset="-122"/>
-                <a:cs typeface="Calibri" pitchFamily="34" charset="-120"/>
-              </a:rPr>
-              <a:t>— Low ROAS, high burnout</a:t>
-            </a:r>
-            <a:endParaRPr lang="en-US" sz="1000" dirty="0"/>
-          </a:p>
-        </p:txBody>
-      </p:sp>
-      <p:sp>
-        <p:nvSpPr>
-          <p:cNvPr id="10" name="Shape 8"/>
-          <p:cNvSpPr/>
-          <p:nvPr/>
-        </p:nvSpPr>
-        <p:spPr>
-          <a:xfrm>
-            <a:off x="4315968" y="0"/>
-            <a:ext cx="64008" cy="5143500"/>
-          </a:xfrm>
-          <a:prstGeom prst="rect">
-            <a:avLst/>
-          </a:prstGeom>
-          <a:solidFill>
-            <a:srgbClr val="F26522"/>
-          </a:solidFill>
-          <a:ln/>
-        </p:spPr>
-      </p:sp>
-      <p:sp>
-        <p:nvSpPr>
-          <p:cNvPr id="11" name="Text 9"/>
-          <p:cNvSpPr/>
-          <p:nvPr/>
-        </p:nvSpPr>
-        <p:spPr>
-          <a:xfrm>
-            <a:off x="4023360" y="2331720"/>
-            <a:ext cx="1097280" cy="502920"/>
+              <a:rPr lang="en-US" sz="1800" dirty="0">
+                <a:solidFill>
+                  <a:srgbClr val="F26522"/>
+                </a:solidFill>
+                <a:latin typeface="Calibri" pitchFamily="34" charset="0"/>
+                <a:ea typeface="Calibri" pitchFamily="34" charset="-122"/>
+                <a:cs typeface="Calibri" pitchFamily="34" charset="-120"/>
+              </a:rPr>
+              <a:t>●</a:t>
+            </a:r>
+            <a:endParaRPr lang="en-US" sz="1800" dirty="0"/>
+          </a:p>
+        </p:txBody>
+      </p:sp>
+      <p:sp>
+        <p:nvSpPr>
+          <p:cNvPr id="10" name="Text 7"/>
+          <p:cNvSpPr/>
+          <p:nvPr/>
+        </p:nvSpPr>
+        <p:spPr>
+          <a:xfrm>
+            <a:off x="2401214" y="3622853"/>
+            <a:ext cx="960120" cy="182880"/>
+          </a:xfrm>
+          <a:prstGeom prst="rect">
+            <a:avLst/>
+          </a:prstGeom>
+          <a:noFill/>
+          <a:ln/>
+        </p:spPr>
+        <p:txBody>
+          <a:bodyPr wrap="square" lIns="0" tIns="0" rIns="0" bIns="0" rtlCol="0" anchor="ctr"/>
+          <a:lstStyle/>
+          <a:p>
+            <a:pPr algn="r" indent="0" marL="0">
+              <a:buNone/>
+            </a:pPr>
+            <a:r>
+              <a:rPr lang="en-US" sz="800" b="1" dirty="0">
+                <a:solidFill>
+                  <a:srgbClr val="1A1A1A"/>
+                </a:solidFill>
+                <a:latin typeface="Calibri" pitchFamily="34" charset="0"/>
+                <a:ea typeface="Calibri" pitchFamily="34" charset="-122"/>
+                <a:cs typeface="Calibri" pitchFamily="34" charset="-120"/>
+              </a:rPr>
+              <a:t>Goa</a:t>
+            </a:r>
+            <a:endParaRPr lang="en-US" sz="800" dirty="0"/>
+          </a:p>
+        </p:txBody>
+      </p:sp>
+      <p:sp>
+        <p:nvSpPr>
+          <p:cNvPr id="11" name="Text 8"/>
+          <p:cNvSpPr/>
+          <p:nvPr/>
+        </p:nvSpPr>
+        <p:spPr>
+          <a:xfrm>
+            <a:off x="4664354" y="3374136"/>
+            <a:ext cx="164592" cy="201168"/>
           </a:xfrm>
           <a:prstGeom prst="rect">
             <a:avLst/>
@@ -3895,7 +3592,241 @@
               <a:buNone/>
             </a:pPr>
             <a:r>
-              <a:rPr lang="en-US" sz="3000" dirty="0">
+              <a:rPr lang="en-US" sz="1800" dirty="0">
+                <a:solidFill>
+                  <a:srgbClr val="F26522"/>
+                </a:solidFill>
+                <a:latin typeface="Calibri" pitchFamily="34" charset="0"/>
+                <a:ea typeface="Calibri" pitchFamily="34" charset="-122"/>
+                <a:cs typeface="Calibri" pitchFamily="34" charset="-120"/>
+              </a:rPr>
+              <a:t>●</a:t>
+            </a:r>
+            <a:endParaRPr lang="en-US" sz="1800" dirty="0"/>
+          </a:p>
+        </p:txBody>
+      </p:sp>
+      <p:sp>
+        <p:nvSpPr>
+          <p:cNvPr id="12" name="Text 9"/>
+          <p:cNvSpPr/>
+          <p:nvPr/>
+        </p:nvSpPr>
+        <p:spPr>
+          <a:xfrm>
+            <a:off x="4874666" y="3401568"/>
+            <a:ext cx="960120" cy="182880"/>
+          </a:xfrm>
+          <a:prstGeom prst="rect">
+            <a:avLst/>
+          </a:prstGeom>
+          <a:noFill/>
+          <a:ln/>
+        </p:spPr>
+        <p:txBody>
+          <a:bodyPr wrap="square" lIns="0" tIns="0" rIns="0" bIns="0" rtlCol="0" anchor="ctr"/>
+          <a:lstStyle/>
+          <a:p>
+            <a:pPr algn="l" indent="0" marL="0">
+              <a:buNone/>
+            </a:pPr>
+            <a:r>
+              <a:rPr lang="en-US" sz="800" b="1" dirty="0">
+                <a:solidFill>
+                  <a:srgbClr val="1A1A1A"/>
+                </a:solidFill>
+                <a:latin typeface="Calibri" pitchFamily="34" charset="0"/>
+                <a:ea typeface="Calibri" pitchFamily="34" charset="-122"/>
+                <a:cs typeface="Calibri" pitchFamily="34" charset="-120"/>
+              </a:rPr>
+              <a:t>Hyderabad</a:t>
+            </a:r>
+            <a:endParaRPr lang="en-US" sz="800" dirty="0"/>
+          </a:p>
+        </p:txBody>
+      </p:sp>
+      <p:sp>
+        <p:nvSpPr>
+          <p:cNvPr id="13" name="Text 10"/>
+          <p:cNvSpPr/>
+          <p:nvPr/>
+        </p:nvSpPr>
+        <p:spPr>
+          <a:xfrm>
+            <a:off x="4114800" y="3814877"/>
+            <a:ext cx="164592" cy="201168"/>
+          </a:xfrm>
+          <a:prstGeom prst="rect">
+            <a:avLst/>
+          </a:prstGeom>
+          <a:noFill/>
+          <a:ln/>
+        </p:spPr>
+        <p:txBody>
+          <a:bodyPr wrap="square" lIns="0" tIns="0" rIns="0" bIns="0" rtlCol="0" anchor="ctr"/>
+          <a:lstStyle/>
+          <a:p>
+            <a:pPr algn="ctr" indent="0" marL="0">
+              <a:buNone/>
+            </a:pPr>
+            <a:r>
+              <a:rPr lang="en-US" sz="1800" dirty="0">
+                <a:solidFill>
+                  <a:srgbClr val="F26522"/>
+                </a:solidFill>
+                <a:latin typeface="Calibri" pitchFamily="34" charset="0"/>
+                <a:ea typeface="Calibri" pitchFamily="34" charset="-122"/>
+                <a:cs typeface="Calibri" pitchFamily="34" charset="-120"/>
+              </a:rPr>
+              <a:t>●</a:t>
+            </a:r>
+            <a:endParaRPr lang="en-US" sz="1800" dirty="0"/>
+          </a:p>
+        </p:txBody>
+      </p:sp>
+      <p:sp>
+        <p:nvSpPr>
+          <p:cNvPr id="14" name="Text 11"/>
+          <p:cNvSpPr/>
+          <p:nvPr/>
+        </p:nvSpPr>
+        <p:spPr>
+          <a:xfrm>
+            <a:off x="4325112" y="3842309"/>
+            <a:ext cx="960120" cy="182880"/>
+          </a:xfrm>
+          <a:prstGeom prst="rect">
+            <a:avLst/>
+          </a:prstGeom>
+          <a:noFill/>
+          <a:ln/>
+        </p:spPr>
+        <p:txBody>
+          <a:bodyPr wrap="square" lIns="0" tIns="0" rIns="0" bIns="0" rtlCol="0" anchor="ctr"/>
+          <a:lstStyle/>
+          <a:p>
+            <a:pPr algn="l" indent="0" marL="0">
+              <a:buNone/>
+            </a:pPr>
+            <a:r>
+              <a:rPr lang="en-US" sz="800" b="1" dirty="0">
+                <a:solidFill>
+                  <a:srgbClr val="1A1A1A"/>
+                </a:solidFill>
+                <a:latin typeface="Calibri" pitchFamily="34" charset="0"/>
+                <a:ea typeface="Calibri" pitchFamily="34" charset="-122"/>
+                <a:cs typeface="Calibri" pitchFamily="34" charset="-120"/>
+              </a:rPr>
+              <a:t>Bangalore</a:t>
+            </a:r>
+            <a:endParaRPr lang="en-US" sz="800" dirty="0"/>
+          </a:p>
+        </p:txBody>
+      </p:sp>
+      <p:sp>
+        <p:nvSpPr>
+          <p:cNvPr id="15" name="Text 12"/>
+          <p:cNvSpPr/>
+          <p:nvPr/>
+        </p:nvSpPr>
+        <p:spPr>
+          <a:xfrm>
+            <a:off x="4454957" y="4298594"/>
+            <a:ext cx="164592" cy="201168"/>
+          </a:xfrm>
+          <a:prstGeom prst="rect">
+            <a:avLst/>
+          </a:prstGeom>
+          <a:noFill/>
+          <a:ln/>
+        </p:spPr>
+        <p:txBody>
+          <a:bodyPr wrap="square" lIns="0" tIns="0" rIns="0" bIns="0" rtlCol="0" anchor="ctr"/>
+          <a:lstStyle/>
+          <a:p>
+            <a:pPr algn="ctr" indent="0" marL="0">
+              <a:buNone/>
+            </a:pPr>
+            <a:r>
+              <a:rPr lang="en-US" sz="1800" dirty="0">
+                <a:solidFill>
+                  <a:srgbClr val="F26522"/>
+                </a:solidFill>
+                <a:latin typeface="Calibri" pitchFamily="34" charset="0"/>
+                <a:ea typeface="Calibri" pitchFamily="34" charset="-122"/>
+                <a:cs typeface="Calibri" pitchFamily="34" charset="-120"/>
+              </a:rPr>
+              <a:t>●</a:t>
+            </a:r>
+            <a:endParaRPr lang="en-US" sz="1800" dirty="0"/>
+          </a:p>
+        </p:txBody>
+      </p:sp>
+      <p:sp>
+        <p:nvSpPr>
+          <p:cNvPr id="16" name="Text 13"/>
+          <p:cNvSpPr/>
+          <p:nvPr/>
+        </p:nvSpPr>
+        <p:spPr>
+          <a:xfrm>
+            <a:off x="4665269" y="4326026"/>
+            <a:ext cx="960120" cy="182880"/>
+          </a:xfrm>
+          <a:prstGeom prst="rect">
+            <a:avLst/>
+          </a:prstGeom>
+          <a:noFill/>
+          <a:ln/>
+        </p:spPr>
+        <p:txBody>
+          <a:bodyPr wrap="square" lIns="0" tIns="0" rIns="0" bIns="0" rtlCol="0" anchor="ctr"/>
+          <a:lstStyle/>
+          <a:p>
+            <a:pPr algn="l" indent="0" marL="0">
+              <a:buNone/>
+            </a:pPr>
+            <a:r>
+              <a:rPr lang="en-US" sz="800" b="1" dirty="0">
+                <a:solidFill>
+                  <a:srgbClr val="1A1A1A"/>
+                </a:solidFill>
+                <a:latin typeface="Calibri" pitchFamily="34" charset="0"/>
+                <a:ea typeface="Calibri" pitchFamily="34" charset="-122"/>
+                <a:cs typeface="Calibri" pitchFamily="34" charset="-120"/>
+              </a:rPr>
+              <a:t>Chennai</a:t>
+            </a:r>
+            <a:endParaRPr lang="en-US" sz="800" dirty="0"/>
+          </a:p>
+        </p:txBody>
+      </p:sp>
+      <p:sp>
+        <p:nvSpPr>
+          <p:cNvPr id="17" name="Text 14"/>
+          <p:cNvSpPr/>
+          <p:nvPr/>
+        </p:nvSpPr>
+        <p:spPr>
+          <a:xfrm>
+            <a:off x="228600" y="2194560"/>
+            <a:ext cx="1371600" cy="822960"/>
+          </a:xfrm>
+          <a:prstGeom prst="rect">
+            <a:avLst/>
+          </a:prstGeom>
+          <a:noFill/>
+          <a:ln/>
+        </p:spPr>
+        <p:txBody>
+          <a:bodyPr wrap="square" lIns="0" tIns="0" rIns="0" bIns="0" rtlCol="0" anchor="ctr"/>
+          <a:lstStyle/>
+          <a:p>
+            <a:pPr algn="ctr" indent="0" marL="0">
+              <a:buNone/>
+            </a:pPr>
+            <a:r>
+              <a:rPr lang="en-US" sz="2800" i="1" dirty="0">
                 <a:solidFill>
                   <a:srgbClr val="F26522"/>
                 </a:solidFill>
@@ -3903,206 +3834,55 @@
                 <a:ea typeface="Georgia" pitchFamily="34" charset="-122"/>
                 <a:cs typeface="Georgia" pitchFamily="34" charset="-120"/>
               </a:rPr>
-              <a:t>→</a:t>
-            </a:r>
-            <a:endParaRPr lang="en-US" sz="3000" dirty="0"/>
-          </a:p>
-        </p:txBody>
-      </p:sp>
-      <p:sp>
-        <p:nvSpPr>
-          <p:cNvPr id="12" name="Text 10"/>
-          <p:cNvSpPr/>
-          <p:nvPr/>
-        </p:nvSpPr>
-        <p:spPr>
-          <a:xfrm>
-            <a:off x="4663440" y="274320"/>
-            <a:ext cx="4114800" cy="411480"/>
-          </a:xfrm>
-          <a:prstGeom prst="rect">
-            <a:avLst/>
-          </a:prstGeom>
-          <a:noFill/>
-          <a:ln/>
-        </p:spPr>
-        <p:txBody>
-          <a:bodyPr wrap="square" lIns="0" tIns="0" rIns="0" bIns="0" rtlCol="0" anchor="ctr"/>
-          <a:lstStyle/>
-          <a:p>
-            <a:pPr algn="l" indent="0" marL="0">
-              <a:buNone/>
-            </a:pPr>
-            <a:r>
-              <a:rPr lang="en-US" sz="1100" b="1" spc="400" kern="0" dirty="0">
+              <a:t>7 Cities</a:t>
+            </a:r>
+            <a:endParaRPr lang="en-US" sz="2800" dirty="0"/>
+          </a:p>
+          <a:p>
+            <a:pPr algn="ctr" indent="0" marL="0">
+              <a:buNone/>
+            </a:pPr>
+            <a:r>
+              <a:rPr lang="en-US" sz="2800" i="1" dirty="0">
                 <a:solidFill>
                   <a:srgbClr val="F26522"/>
-                </a:solidFill>
-                <a:latin typeface="Calibri" pitchFamily="34" charset="0"/>
-                <a:ea typeface="Calibri" pitchFamily="34" charset="-122"/>
-                <a:cs typeface="Calibri" pitchFamily="34" charset="-120"/>
-              </a:rPr>
-              <a:t>OFFLINE</a:t>
-            </a:r>
-            <a:endParaRPr lang="en-US" sz="1100" dirty="0"/>
-          </a:p>
-        </p:txBody>
-      </p:sp>
-      <p:sp>
-        <p:nvSpPr>
-          <p:cNvPr id="13" name="Text 11"/>
-          <p:cNvSpPr/>
-          <p:nvPr/>
-        </p:nvSpPr>
-        <p:spPr>
-          <a:xfrm>
-            <a:off x="4663440" y="777240"/>
-            <a:ext cx="4114800" cy="1828800"/>
-          </a:xfrm>
-          <a:prstGeom prst="rect">
-            <a:avLst/>
-          </a:prstGeom>
-          <a:noFill/>
-          <a:ln/>
-        </p:spPr>
-        <p:txBody>
-          <a:bodyPr wrap="square" lIns="0" tIns="0" rIns="0" bIns="0" rtlCol="0" anchor="ctr"/>
-          <a:lstStyle/>
-          <a:p>
-            <a:pPr algn="ctr" indent="0" marL="0">
-              <a:buNone/>
-            </a:pPr>
-            <a:r>
-              <a:rPr lang="en-US" sz="3000" dirty="0">
-                <a:solidFill>
-                  <a:srgbClr val="000000"/>
-                </a:solidFill>
-                <a:latin typeface="Calibri" pitchFamily="34" charset="0"/>
-                <a:ea typeface="Calibri" pitchFamily="34" charset="-122"/>
-                <a:cs typeface="Calibri" pitchFamily="34" charset="-120"/>
-              </a:rPr>
-              <a:t>🙌 🙌 🙌</a:t>
-            </a:r>
-            <a:endParaRPr lang="en-US" sz="3000" dirty="0"/>
-          </a:p>
-          <a:p>
-            <a:pPr algn="ctr" indent="0" marL="0">
-              <a:buNone/>
-            </a:pPr>
-            <a:r>
-              <a:rPr lang="en-US" sz="3000" dirty="0">
-                <a:solidFill>
-                  <a:srgbClr val="000000"/>
-                </a:solidFill>
-                <a:latin typeface="Calibri" pitchFamily="34" charset="0"/>
-                <a:ea typeface="Calibri" pitchFamily="34" charset="-122"/>
-                <a:cs typeface="Calibri" pitchFamily="34" charset="-120"/>
-              </a:rPr>
-              <a:t>🤝 🤝 🤝</a:t>
-            </a:r>
-            <a:endParaRPr lang="en-US" sz="3000" dirty="0"/>
-          </a:p>
-          <a:p>
-            <a:pPr algn="ctr" indent="0" marL="0">
-              <a:buNone/>
-            </a:pPr>
-            <a:r>
-              <a:rPr lang="en-US" sz="3000" dirty="0">
-                <a:solidFill>
-                  <a:srgbClr val="000000"/>
-                </a:solidFill>
-                <a:latin typeface="Calibri" pitchFamily="34" charset="0"/>
-                <a:ea typeface="Calibri" pitchFamily="34" charset="-122"/>
-                <a:cs typeface="Calibri" pitchFamily="34" charset="-120"/>
-              </a:rPr>
-              <a:t>⚡ ⚡ ⚡</a:t>
-            </a:r>
-            <a:endParaRPr lang="en-US" sz="3000" dirty="0"/>
-          </a:p>
-        </p:txBody>
-      </p:sp>
-      <p:sp>
-        <p:nvSpPr>
-          <p:cNvPr id="14" name="Text 12"/>
-          <p:cNvSpPr/>
-          <p:nvPr/>
-        </p:nvSpPr>
-        <p:spPr>
-          <a:xfrm>
-            <a:off x="4663440" y="2788920"/>
-            <a:ext cx="4114800" cy="777240"/>
-          </a:xfrm>
-          <a:prstGeom prst="rect">
-            <a:avLst/>
-          </a:prstGeom>
-          <a:noFill/>
-          <a:ln/>
-        </p:spPr>
-        <p:txBody>
-          <a:bodyPr wrap="square" lIns="0" tIns="0" rIns="0" bIns="0" rtlCol="0" anchor="ctr"/>
-          <a:lstStyle/>
-          <a:p>
-            <a:pPr indent="0" marL="0">
-              <a:buNone/>
-            </a:pPr>
-            <a:r>
-              <a:rPr lang="en-US" sz="1800" i="1" dirty="0">
-                <a:solidFill>
-                  <a:srgbClr val="1A1A1A"/>
                 </a:solidFill>
                 <a:latin typeface="Georgia" pitchFamily="34" charset="0"/>
                 <a:ea typeface="Georgia" pitchFamily="34" charset="-122"/>
                 <a:cs typeface="Georgia" pitchFamily="34" charset="-120"/>
               </a:rPr>
-              <a:t>The pendulum is swinging</a:t>
-            </a:r>
-            <a:endParaRPr lang="en-US" sz="1800" dirty="0"/>
-          </a:p>
-          <a:p>
-            <a:pPr indent="0" marL="0">
-              <a:buNone/>
-            </a:pPr>
-            <a:r>
-              <a:rPr lang="en-US" sz="1800" i="1" dirty="0">
-                <a:solidFill>
-                  <a:srgbClr val="1A1A1A"/>
-                </a:solidFill>
-                <a:latin typeface="Georgia" pitchFamily="34" charset="0"/>
-                <a:ea typeface="Georgia" pitchFamily="34" charset="-122"/>
-                <a:cs typeface="Georgia" pitchFamily="34" charset="-120"/>
-              </a:rPr>
-              <a:t>back offline.</a:t>
-            </a:r>
-            <a:endParaRPr lang="en-US" sz="1800" dirty="0"/>
-          </a:p>
-        </p:txBody>
-      </p:sp>
-      <p:sp>
-        <p:nvSpPr>
-          <p:cNvPr id="15" name="Text 13"/>
-          <p:cNvSpPr/>
-          <p:nvPr/>
-        </p:nvSpPr>
-        <p:spPr>
-          <a:xfrm>
-            <a:off x="4663440" y="3657600"/>
-            <a:ext cx="4114800" cy="987552"/>
-          </a:xfrm>
-          <a:prstGeom prst="rect">
-            <a:avLst/>
-          </a:prstGeom>
-          <a:noFill/>
-          <a:ln/>
-        </p:spPr>
-        <p:txBody>
-          <a:bodyPr wrap="square" lIns="0" tIns="0" rIns="0" bIns="0" rtlCol="0" anchor="ctr"/>
-          <a:lstStyle/>
-          <a:p>
-            <a:pPr indent="0" marL="0">
-              <a:buNone/>
-            </a:pPr>
-            <a:r>
-              <a:rPr lang="en-US" sz="950" dirty="0">
+              <a:t>Active</a:t>
+            </a:r>
+            <a:endParaRPr lang="en-US" sz="2800" dirty="0"/>
+          </a:p>
+        </p:txBody>
+      </p:sp>
+      <p:sp>
+        <p:nvSpPr>
+          <p:cNvPr id="18" name="Text 15"/>
+          <p:cNvSpPr/>
+          <p:nvPr/>
+        </p:nvSpPr>
+        <p:spPr>
+          <a:xfrm>
+            <a:off x="91440" y="3108960"/>
+            <a:ext cx="1554480" cy="731520"/>
+          </a:xfrm>
+          <a:prstGeom prst="rect">
+            <a:avLst/>
+          </a:prstGeom>
+          <a:noFill/>
+          <a:ln/>
+        </p:spPr>
+        <p:txBody>
+          <a:bodyPr wrap="square" lIns="0" tIns="0" rIns="0" bIns="0" rtlCol="0" anchor="ctr"/>
+          <a:lstStyle/>
+          <a:p>
+            <a:pPr algn="ctr" indent="0" marL="0">
+              <a:buNone/>
+            </a:pPr>
+            <a:r>
+              <a:rPr lang="en-US" sz="800" dirty="0">
                 <a:solidFill>
                   <a:srgbClr val="8C5A3A"/>
                 </a:solidFill>
@@ -4110,9 +3890,141 @@
                 <a:ea typeface="Calibri" pitchFamily="34" charset="-122"/>
                 <a:cs typeface="Calibri" pitchFamily="34" charset="-120"/>
               </a:rPr>
-              <a:t>People want to meet in person. They want to hold the hardware. They want to feel the experience — not scroll past another post about it.</a:t>
-            </a:r>
-            <a:endParaRPr lang="en-US" sz="950" dirty="0"/>
+              <a:t>Mentors present, community active,</a:t>
+            </a:r>
+            <a:endParaRPr lang="en-US" sz="800" dirty="0"/>
+          </a:p>
+          <a:p>
+            <a:pPr algn="ctr" indent="0" marL="0">
+              <a:buNone/>
+            </a:pPr>
+            <a:r>
+              <a:rPr lang="en-US" sz="800" dirty="0">
+                <a:solidFill>
+                  <a:srgbClr val="8C5A3A"/>
+                </a:solidFill>
+                <a:latin typeface="Calibri" pitchFamily="34" charset="0"/>
+                <a:ea typeface="Calibri" pitchFamily="34" charset="-122"/>
+                <a:cs typeface="Calibri" pitchFamily="34" charset="-120"/>
+              </a:rPr>
+              <a:t>ready to run activations</a:t>
+            </a:r>
+            <a:endParaRPr lang="en-US" sz="800" dirty="0"/>
+          </a:p>
+        </p:txBody>
+      </p:sp>
+      <p:sp>
+        <p:nvSpPr>
+          <p:cNvPr id="19" name="Text 16"/>
+          <p:cNvSpPr/>
+          <p:nvPr/>
+        </p:nvSpPr>
+        <p:spPr>
+          <a:xfrm>
+            <a:off x="91440" y="3977640"/>
+            <a:ext cx="1554480" cy="457200"/>
+          </a:xfrm>
+          <a:prstGeom prst="rect">
+            <a:avLst/>
+          </a:prstGeom>
+          <a:noFill/>
+          <a:ln/>
+        </p:spPr>
+        <p:txBody>
+          <a:bodyPr wrap="square" lIns="0" tIns="0" rIns="0" bIns="0" rtlCol="0" anchor="ctr"/>
+          <a:lstStyle/>
+          <a:p>
+            <a:pPr algn="ctr" indent="0" marL="0">
+              <a:buNone/>
+            </a:pPr>
+            <a:r>
+              <a:rPr lang="en-US" sz="800" i="1" dirty="0">
+                <a:solidFill>
+                  <a:srgbClr val="F26522"/>
+                </a:solidFill>
+                <a:latin typeface="Calibri" pitchFamily="34" charset="0"/>
+                <a:ea typeface="Calibri" pitchFamily="34" charset="-122"/>
+                <a:cs typeface="Calibri" pitchFamily="34" charset="-120"/>
+              </a:rPr>
+              <a:t>Expanding to</a:t>
+            </a:r>
+            <a:endParaRPr lang="en-US" sz="800" dirty="0"/>
+          </a:p>
+          <a:p>
+            <a:pPr algn="ctr" indent="0" marL="0">
+              <a:buNone/>
+            </a:pPr>
+            <a:r>
+              <a:rPr lang="en-US" sz="800" i="1" dirty="0">
+                <a:solidFill>
+                  <a:srgbClr val="F26522"/>
+                </a:solidFill>
+                <a:latin typeface="Calibri" pitchFamily="34" charset="0"/>
+                <a:ea typeface="Calibri" pitchFamily="34" charset="-122"/>
+                <a:cs typeface="Calibri" pitchFamily="34" charset="-120"/>
+              </a:rPr>
+              <a:t>more cities</a:t>
+            </a:r>
+            <a:endParaRPr lang="en-US" sz="800" dirty="0"/>
+          </a:p>
+        </p:txBody>
+      </p:sp>
+      <p:sp>
+        <p:nvSpPr>
+          <p:cNvPr id="20" name="Shape 17"/>
+          <p:cNvSpPr/>
+          <p:nvPr/>
+        </p:nvSpPr>
+        <p:spPr>
+          <a:xfrm>
+            <a:off x="0" y="4983480"/>
+            <a:ext cx="9144000" cy="164592"/>
+          </a:xfrm>
+          <a:prstGeom prst="rect">
+            <a:avLst/>
+          </a:prstGeom>
+          <a:solidFill>
+            <a:srgbClr val="FFF7F0"/>
+          </a:solidFill>
+          <a:ln/>
+        </p:spPr>
+      </p:sp>
+      <p:sp>
+        <p:nvSpPr>
+          <p:cNvPr id="21" name="Text 18"/>
+          <p:cNvSpPr/>
+          <p:nvPr/>
+        </p:nvSpPr>
+        <p:spPr>
+          <a:xfrm>
+            <a:off x="457200" y="4992624"/>
+            <a:ext cx="8229600" cy="146304"/>
+          </a:xfrm>
+          <a:prstGeom prst="rect">
+            <a:avLst/>
+          </a:prstGeom>
+          <a:noFill/>
+          <a:ln/>
+        </p:spPr>
+        <p:txBody>
+          <a:bodyPr wrap="square" lIns="0" tIns="0" rIns="0" bIns="0" rtlCol="0" anchor="ctr"/>
+          <a:lstStyle/>
+          <a:p>
+            <a:pPr algn="l" indent="0" marL="0">
+              <a:buNone/>
+            </a:pPr>
+            <a:r>
+              <a:rPr lang="en-US" sz="750" dirty="0">
+                <a:solidFill>
+                  <a:srgbClr val="8C5A3A"/>
+                </a:solidFill>
+                <a:latin typeface="Calibri" pitchFamily="34" charset="0"/>
+                <a:ea typeface="Calibri" pitchFamily="34" charset="-122"/>
+                <a:cs typeface="Calibri" pitchFamily="34" charset="-120"/>
+              </a:rPr>
+              <a:t>bitcoincierge.in</a:t>
+            </a:r>
+            <a:endParaRPr lang="en-US" sz="750" dirty="0"/>
           </a:p>
         </p:txBody>
       </p:sp>
@@ -4157,7 +4069,7 @@
         <p:spPr>
           <a:xfrm>
             <a:off x="411480" y="475488"/>
-            <a:ext cx="50292" cy="1005840"/>
+            <a:ext cx="50292" cy="749808"/>
           </a:xfrm>
           <a:prstGeom prst="rect">
             <a:avLst/>
@@ -4177,7 +4089,7 @@
         <p:spPr>
           <a:xfrm>
             <a:off x="594360" y="475488"/>
-            <a:ext cx="8046720" cy="1005840"/>
+            <a:ext cx="8046720" cy="749808"/>
           </a:xfrm>
           <a:prstGeom prst="rect">
             <a:avLst/>
@@ -4193,7 +4105,7 @@
               <a:buNone/>
             </a:pPr>
             <a:r>
-              <a:rPr lang="en-US" sz="2800" i="1" dirty="0">
+              <a:rPr lang="en-US" sz="3000" i="1" dirty="0">
                 <a:solidFill>
                   <a:srgbClr val="1A1A1A"/>
                 </a:solidFill>
@@ -4201,26 +4113,9 @@
                 <a:ea typeface="Georgia" pitchFamily="34" charset="-122"/>
                 <a:cs typeface="Georgia" pitchFamily="34" charset="-120"/>
               </a:rPr>
-              <a:t>India is open to Bitcoin products.</a:t>
-            </a:r>
-            <a:endParaRPr lang="en-US" sz="2800" dirty="0"/>
-          </a:p>
-          <a:p>
-            <a:pPr algn="l" indent="0" marL="0">
-              <a:buNone/>
-            </a:pPr>
-            <a:r>
-              <a:rPr lang="en-US" sz="2800" i="1" dirty="0">
-                <a:solidFill>
-                  <a:srgbClr val="1A1A1A"/>
-                </a:solidFill>
-                <a:latin typeface="Georgia" pitchFamily="34" charset="0"/>
-                <a:ea typeface="Georgia" pitchFamily="34" charset="-122"/>
-                <a:cs typeface="Georgia" pitchFamily="34" charset="-120"/>
-              </a:rPr>
-              <a:t>We are just getting started.</a:t>
-            </a:r>
-            <a:endParaRPr lang="en-US" sz="2800" dirty="0"/>
+              <a:t>We charge brands. Not participants.</a:t>
+            </a:r>
+            <a:endParaRPr lang="en-US" sz="3000" dirty="0"/>
           </a:p>
         </p:txBody>
       </p:sp>
@@ -4232,8 +4127,8 @@
         </p:nvSpPr>
         <p:spPr>
           <a:xfrm>
-            <a:off x="457200" y="1664208"/>
-            <a:ext cx="2633472" cy="1261872"/>
+            <a:off x="457200" y="1371600"/>
+            <a:ext cx="4114800" cy="3429000"/>
           </a:xfrm>
           <a:prstGeom prst="rect">
             <a:avLst/>
@@ -4258,14 +4153,73 @@
       </p:sp>
       <p:sp>
         <p:nvSpPr>
-          <p:cNvPr id="5" name="Text 3"/>
-          <p:cNvSpPr/>
-          <p:nvPr/>
-        </p:nvSpPr>
-        <p:spPr>
-          <a:xfrm>
-            <a:off x="621792" y="1737360"/>
-            <a:ext cx="2286000" cy="621792"/>
+          <p:cNvPr id="5" name="Shape 3"/>
+          <p:cNvSpPr/>
+          <p:nvPr/>
+        </p:nvSpPr>
+        <p:spPr>
+          <a:xfrm>
+            <a:off x="658368" y="1572768"/>
+            <a:ext cx="868680" cy="292608"/>
+          </a:xfrm>
+          <a:prstGeom prst="rect">
+            <a:avLst/>
+          </a:prstGeom>
+          <a:solidFill>
+            <a:srgbClr val="D6E4EF"/>
+          </a:solidFill>
+          <a:ln/>
+        </p:spPr>
+      </p:sp>
+      <p:sp>
+        <p:nvSpPr>
+          <p:cNvPr id="6" name="Text 4"/>
+          <p:cNvSpPr/>
+          <p:nvPr/>
+        </p:nvSpPr>
+        <p:spPr>
+          <a:xfrm>
+            <a:off x="658368" y="1572768"/>
+            <a:ext cx="868680" cy="292608"/>
+          </a:xfrm>
+          <a:prstGeom prst="rect">
+            <a:avLst/>
+          </a:prstGeom>
+          <a:noFill/>
+          <a:ln/>
+        </p:spPr>
+        <p:txBody>
+          <a:bodyPr wrap="square" lIns="0" tIns="0" rIns="0" bIns="0" rtlCol="0" anchor="ctr"/>
+          <a:lstStyle/>
+          <a:p>
+            <a:pPr algn="ctr" indent="0" marL="0">
+              <a:buNone/>
+            </a:pPr>
+            <a:r>
+              <a:rPr lang="en-US" sz="750" b="1" spc="150" kern="0" dirty="0">
+                <a:solidFill>
+                  <a:srgbClr val="3A6080"/>
+                </a:solidFill>
+                <a:latin typeface="Calibri" pitchFamily="34" charset="0"/>
+                <a:ea typeface="Calibri" pitchFamily="34" charset="-122"/>
+                <a:cs typeface="Calibri" pitchFamily="34" charset="-120"/>
+              </a:rPr>
+              <a:t>FIXED</a:t>
+            </a:r>
+            <a:endParaRPr lang="en-US" sz="750" dirty="0"/>
+          </a:p>
+        </p:txBody>
+      </p:sp>
+      <p:sp>
+        <p:nvSpPr>
+          <p:cNvPr id="7" name="Text 5"/>
+          <p:cNvSpPr/>
+          <p:nvPr/>
+        </p:nvSpPr>
+        <p:spPr>
+          <a:xfrm>
+            <a:off x="658368" y="1965960"/>
+            <a:ext cx="3749040" cy="365760"/>
           </a:xfrm>
           <a:prstGeom prst="rect">
             <a:avLst/>
@@ -4281,7 +4235,46 @@
               <a:buNone/>
             </a:pPr>
             <a:r>
-              <a:rPr lang="en-US" sz="3400" i="1" dirty="0">
+              <a:rPr lang="en-US" sz="1100" b="1" dirty="0">
+                <a:solidFill>
+                  <a:srgbClr val="1A1A1A"/>
+                </a:solidFill>
+                <a:latin typeface="Calibri" pitchFamily="34" charset="0"/>
+                <a:ea typeface="Calibri" pitchFamily="34" charset="-122"/>
+                <a:cs typeface="Calibri" pitchFamily="34" charset="-120"/>
+              </a:rPr>
+              <a:t>Event Execution Fee</a:t>
+            </a:r>
+            <a:endParaRPr lang="en-US" sz="1100" dirty="0"/>
+          </a:p>
+        </p:txBody>
+      </p:sp>
+      <p:sp>
+        <p:nvSpPr>
+          <p:cNvPr id="8" name="Text 6"/>
+          <p:cNvSpPr/>
+          <p:nvPr/>
+        </p:nvSpPr>
+        <p:spPr>
+          <a:xfrm>
+            <a:off x="658368" y="2377440"/>
+            <a:ext cx="3749040" cy="566928"/>
+          </a:xfrm>
+          <a:prstGeom prst="rect">
+            <a:avLst/>
+          </a:prstGeom>
+          <a:noFill/>
+          <a:ln/>
+        </p:spPr>
+        <p:txBody>
+          <a:bodyPr wrap="square" lIns="0" tIns="0" rIns="0" bIns="0" rtlCol="0" anchor="ctr"/>
+          <a:lstStyle/>
+          <a:p>
+            <a:pPr indent="0" marL="0">
+              <a:buNone/>
+            </a:pPr>
+            <a:r>
+              <a:rPr lang="en-US" sz="2800" i="1" dirty="0">
                 <a:solidFill>
                   <a:srgbClr val="F26522"/>
                 </a:solidFill>
@@ -4289,22 +4282,22 @@
                 <a:ea typeface="Georgia" pitchFamily="34" charset="-122"/>
                 <a:cs typeface="Georgia" pitchFamily="34" charset="-120"/>
               </a:rPr>
-              <a:t>1B+</a:t>
-            </a:r>
-            <a:endParaRPr lang="en-US" sz="3400" dirty="0"/>
-          </a:p>
-        </p:txBody>
-      </p:sp>
-      <p:sp>
-        <p:nvSpPr>
-          <p:cNvPr id="6" name="Text 4"/>
-          <p:cNvSpPr/>
-          <p:nvPr/>
-        </p:nvSpPr>
-        <p:spPr>
-          <a:xfrm>
-            <a:off x="621792" y="2395728"/>
-            <a:ext cx="2286000" cy="411480"/>
+              <a:t>₹15,000 – ₹20,000</a:t>
+            </a:r>
+            <a:endParaRPr lang="en-US" sz="2800" dirty="0"/>
+          </a:p>
+        </p:txBody>
+      </p:sp>
+      <p:sp>
+        <p:nvSpPr>
+          <p:cNvPr id="9" name="Text 7"/>
+          <p:cNvSpPr/>
+          <p:nvPr/>
+        </p:nvSpPr>
+        <p:spPr>
+          <a:xfrm>
+            <a:off x="658368" y="2953512"/>
+            <a:ext cx="3749040" cy="274320"/>
           </a:xfrm>
           <a:prstGeom prst="rect">
             <a:avLst/>
@@ -4328,39 +4321,334 @@
                 <a:ea typeface="Calibri" pitchFamily="34" charset="-122"/>
                 <a:cs typeface="Calibri" pitchFamily="34" charset="-120"/>
               </a:rPr>
-              <a:t>Indians reachable</a:t>
+              <a:t>per event</a:t>
             </a:r>
             <a:endParaRPr lang="en-US" sz="900" dirty="0"/>
           </a:p>
+        </p:txBody>
+      </p:sp>
+      <p:sp>
+        <p:nvSpPr>
+          <p:cNvPr id="10" name="Text 8"/>
+          <p:cNvSpPr/>
+          <p:nvPr/>
+        </p:nvSpPr>
+        <p:spPr>
+          <a:xfrm>
+            <a:off x="658368" y="3337560"/>
+            <a:ext cx="256032" cy="256032"/>
+          </a:xfrm>
+          <a:prstGeom prst="rect">
+            <a:avLst/>
+          </a:prstGeom>
+          <a:noFill/>
+          <a:ln/>
+        </p:spPr>
+        <p:txBody>
+          <a:bodyPr wrap="square" lIns="0" tIns="0" rIns="0" bIns="0" rtlCol="0" anchor="ctr"/>
+          <a:lstStyle/>
           <a:p>
             <a:pPr indent="0" marL="0">
               <a:buNone/>
             </a:pPr>
             <a:r>
-              <a:rPr lang="en-US" sz="900" dirty="0">
-                <a:solidFill>
-                  <a:srgbClr val="8C5A3A"/>
-                </a:solidFill>
-                <a:latin typeface="Calibri" pitchFamily="34" charset="0"/>
-                <a:ea typeface="Calibri" pitchFamily="34" charset="-122"/>
-                <a:cs typeface="Calibri" pitchFamily="34" charset="-120"/>
-              </a:rPr>
-              <a:t>through IRL activations</a:t>
-            </a:r>
-            <a:endParaRPr lang="en-US" sz="900" dirty="0"/>
-          </a:p>
-        </p:txBody>
-      </p:sp>
-      <p:sp>
-        <p:nvSpPr>
-          <p:cNvPr id="7" name="Shape 5"/>
-          <p:cNvSpPr/>
-          <p:nvPr/>
-        </p:nvSpPr>
-        <p:spPr>
-          <a:xfrm>
-            <a:off x="3273552" y="1664208"/>
-            <a:ext cx="2633472" cy="1261872"/>
+              <a:rPr lang="en-US" sz="1000" dirty="0">
+                <a:solidFill>
+                  <a:srgbClr val="F26522"/>
+                </a:solidFill>
+                <a:latin typeface="Calibri" pitchFamily="34" charset="0"/>
+                <a:ea typeface="Calibri" pitchFamily="34" charset="-122"/>
+                <a:cs typeface="Calibri" pitchFamily="34" charset="-120"/>
+              </a:rPr>
+              <a:t>—</a:t>
+            </a:r>
+            <a:endParaRPr lang="en-US" sz="1000" dirty="0"/>
+          </a:p>
+        </p:txBody>
+      </p:sp>
+      <p:sp>
+        <p:nvSpPr>
+          <p:cNvPr id="11" name="Text 9"/>
+          <p:cNvSpPr/>
+          <p:nvPr/>
+        </p:nvSpPr>
+        <p:spPr>
+          <a:xfrm>
+            <a:off x="960120" y="3337560"/>
+            <a:ext cx="3474720" cy="256032"/>
+          </a:xfrm>
+          <a:prstGeom prst="rect">
+            <a:avLst/>
+          </a:prstGeom>
+          <a:noFill/>
+          <a:ln/>
+        </p:spPr>
+        <p:txBody>
+          <a:bodyPr wrap="square" lIns="0" tIns="0" rIns="0" bIns="0" rtlCol="0" anchor="ctr"/>
+          <a:lstStyle/>
+          <a:p>
+            <a:pPr indent="0" marL="0">
+              <a:buNone/>
+            </a:pPr>
+            <a:r>
+              <a:rPr lang="en-US" sz="950" dirty="0">
+                <a:solidFill>
+                  <a:srgbClr val="5C3A20"/>
+                </a:solidFill>
+                <a:latin typeface="Calibri" pitchFamily="34" charset="0"/>
+                <a:ea typeface="Calibri" pitchFamily="34" charset="-122"/>
+                <a:cs typeface="Calibri" pitchFamily="34" charset="-120"/>
+              </a:rPr>
+              <a:t>Venue booking &amp; management</a:t>
+            </a:r>
+            <a:endParaRPr lang="en-US" sz="950" dirty="0"/>
+          </a:p>
+        </p:txBody>
+      </p:sp>
+      <p:sp>
+        <p:nvSpPr>
+          <p:cNvPr id="12" name="Text 10"/>
+          <p:cNvSpPr/>
+          <p:nvPr/>
+        </p:nvSpPr>
+        <p:spPr>
+          <a:xfrm>
+            <a:off x="658368" y="3611880"/>
+            <a:ext cx="256032" cy="256032"/>
+          </a:xfrm>
+          <a:prstGeom prst="rect">
+            <a:avLst/>
+          </a:prstGeom>
+          <a:noFill/>
+          <a:ln/>
+        </p:spPr>
+        <p:txBody>
+          <a:bodyPr wrap="square" lIns="0" tIns="0" rIns="0" bIns="0" rtlCol="0" anchor="ctr"/>
+          <a:lstStyle/>
+          <a:p>
+            <a:pPr indent="0" marL="0">
+              <a:buNone/>
+            </a:pPr>
+            <a:r>
+              <a:rPr lang="en-US" sz="1000" dirty="0">
+                <a:solidFill>
+                  <a:srgbClr val="F26522"/>
+                </a:solidFill>
+                <a:latin typeface="Calibri" pitchFamily="34" charset="0"/>
+                <a:ea typeface="Calibri" pitchFamily="34" charset="-122"/>
+                <a:cs typeface="Calibri" pitchFamily="34" charset="-120"/>
+              </a:rPr>
+              <a:t>—</a:t>
+            </a:r>
+            <a:endParaRPr lang="en-US" sz="1000" dirty="0"/>
+          </a:p>
+        </p:txBody>
+      </p:sp>
+      <p:sp>
+        <p:nvSpPr>
+          <p:cNvPr id="13" name="Text 11"/>
+          <p:cNvSpPr/>
+          <p:nvPr/>
+        </p:nvSpPr>
+        <p:spPr>
+          <a:xfrm>
+            <a:off x="960120" y="3611880"/>
+            <a:ext cx="3474720" cy="256032"/>
+          </a:xfrm>
+          <a:prstGeom prst="rect">
+            <a:avLst/>
+          </a:prstGeom>
+          <a:noFill/>
+          <a:ln/>
+        </p:spPr>
+        <p:txBody>
+          <a:bodyPr wrap="square" lIns="0" tIns="0" rIns="0" bIns="0" rtlCol="0" anchor="ctr"/>
+          <a:lstStyle/>
+          <a:p>
+            <a:pPr indent="0" marL="0">
+              <a:buNone/>
+            </a:pPr>
+            <a:r>
+              <a:rPr lang="en-US" sz="950" dirty="0">
+                <a:solidFill>
+                  <a:srgbClr val="5C3A20"/>
+                </a:solidFill>
+                <a:latin typeface="Calibri" pitchFamily="34" charset="0"/>
+                <a:ea typeface="Calibri" pitchFamily="34" charset="-122"/>
+                <a:cs typeface="Calibri" pitchFamily="34" charset="-120"/>
+              </a:rPr>
+              <a:t>Mentor / speaker time</a:t>
+            </a:r>
+            <a:endParaRPr lang="en-US" sz="950" dirty="0"/>
+          </a:p>
+        </p:txBody>
+      </p:sp>
+      <p:sp>
+        <p:nvSpPr>
+          <p:cNvPr id="14" name="Text 12"/>
+          <p:cNvSpPr/>
+          <p:nvPr/>
+        </p:nvSpPr>
+        <p:spPr>
+          <a:xfrm>
+            <a:off x="658368" y="3886200"/>
+            <a:ext cx="256032" cy="256032"/>
+          </a:xfrm>
+          <a:prstGeom prst="rect">
+            <a:avLst/>
+          </a:prstGeom>
+          <a:noFill/>
+          <a:ln/>
+        </p:spPr>
+        <p:txBody>
+          <a:bodyPr wrap="square" lIns="0" tIns="0" rIns="0" bIns="0" rtlCol="0" anchor="ctr"/>
+          <a:lstStyle/>
+          <a:p>
+            <a:pPr indent="0" marL="0">
+              <a:buNone/>
+            </a:pPr>
+            <a:r>
+              <a:rPr lang="en-US" sz="1000" dirty="0">
+                <a:solidFill>
+                  <a:srgbClr val="F26522"/>
+                </a:solidFill>
+                <a:latin typeface="Calibri" pitchFamily="34" charset="0"/>
+                <a:ea typeface="Calibri" pitchFamily="34" charset="-122"/>
+                <a:cs typeface="Calibri" pitchFamily="34" charset="-120"/>
+              </a:rPr>
+              <a:t>—</a:t>
+            </a:r>
+            <a:endParaRPr lang="en-US" sz="1000" dirty="0"/>
+          </a:p>
+        </p:txBody>
+      </p:sp>
+      <p:sp>
+        <p:nvSpPr>
+          <p:cNvPr id="15" name="Text 13"/>
+          <p:cNvSpPr/>
+          <p:nvPr/>
+        </p:nvSpPr>
+        <p:spPr>
+          <a:xfrm>
+            <a:off x="960120" y="3886200"/>
+            <a:ext cx="3474720" cy="256032"/>
+          </a:xfrm>
+          <a:prstGeom prst="rect">
+            <a:avLst/>
+          </a:prstGeom>
+          <a:noFill/>
+          <a:ln/>
+        </p:spPr>
+        <p:txBody>
+          <a:bodyPr wrap="square" lIns="0" tIns="0" rIns="0" bIns="0" rtlCol="0" anchor="ctr"/>
+          <a:lstStyle/>
+          <a:p>
+            <a:pPr indent="0" marL="0">
+              <a:buNone/>
+            </a:pPr>
+            <a:r>
+              <a:rPr lang="en-US" sz="950" dirty="0">
+                <a:solidFill>
+                  <a:srgbClr val="5C3A20"/>
+                </a:solidFill>
+                <a:latin typeface="Calibri" pitchFamily="34" charset="0"/>
+                <a:ea typeface="Calibri" pitchFamily="34" charset="-122"/>
+                <a:cs typeface="Calibri" pitchFamily="34" charset="-120"/>
+              </a:rPr>
+              <a:t>Snacks, logistics, ops</a:t>
+            </a:r>
+            <a:endParaRPr lang="en-US" sz="950" dirty="0"/>
+          </a:p>
+        </p:txBody>
+      </p:sp>
+      <p:sp>
+        <p:nvSpPr>
+          <p:cNvPr id="16" name="Text 14"/>
+          <p:cNvSpPr/>
+          <p:nvPr/>
+        </p:nvSpPr>
+        <p:spPr>
+          <a:xfrm>
+            <a:off x="658368" y="4160520"/>
+            <a:ext cx="256032" cy="256032"/>
+          </a:xfrm>
+          <a:prstGeom prst="rect">
+            <a:avLst/>
+          </a:prstGeom>
+          <a:noFill/>
+          <a:ln/>
+        </p:spPr>
+        <p:txBody>
+          <a:bodyPr wrap="square" lIns="0" tIns="0" rIns="0" bIns="0" rtlCol="0" anchor="ctr"/>
+          <a:lstStyle/>
+          <a:p>
+            <a:pPr indent="0" marL="0">
+              <a:buNone/>
+            </a:pPr>
+            <a:r>
+              <a:rPr lang="en-US" sz="1000" dirty="0">
+                <a:solidFill>
+                  <a:srgbClr val="F26522"/>
+                </a:solidFill>
+                <a:latin typeface="Calibri" pitchFamily="34" charset="0"/>
+                <a:ea typeface="Calibri" pitchFamily="34" charset="-122"/>
+                <a:cs typeface="Calibri" pitchFamily="34" charset="-120"/>
+              </a:rPr>
+              <a:t>—</a:t>
+            </a:r>
+            <a:endParaRPr lang="en-US" sz="1000" dirty="0"/>
+          </a:p>
+        </p:txBody>
+      </p:sp>
+      <p:sp>
+        <p:nvSpPr>
+          <p:cNvPr id="17" name="Text 15"/>
+          <p:cNvSpPr/>
+          <p:nvPr/>
+        </p:nvSpPr>
+        <p:spPr>
+          <a:xfrm>
+            <a:off x="960120" y="4160520"/>
+            <a:ext cx="3474720" cy="256032"/>
+          </a:xfrm>
+          <a:prstGeom prst="rect">
+            <a:avLst/>
+          </a:prstGeom>
+          <a:noFill/>
+          <a:ln/>
+        </p:spPr>
+        <p:txBody>
+          <a:bodyPr wrap="square" lIns="0" tIns="0" rIns="0" bIns="0" rtlCol="0" anchor="ctr"/>
+          <a:lstStyle/>
+          <a:p>
+            <a:pPr indent="0" marL="0">
+              <a:buNone/>
+            </a:pPr>
+            <a:r>
+              <a:rPr lang="en-US" sz="950" dirty="0">
+                <a:solidFill>
+                  <a:srgbClr val="5C3A20"/>
+                </a:solidFill>
+                <a:latin typeface="Calibri" pitchFamily="34" charset="0"/>
+                <a:ea typeface="Calibri" pitchFamily="34" charset="-122"/>
+                <a:cs typeface="Calibri" pitchFamily="34" charset="-120"/>
+              </a:rPr>
+              <a:t>Post-event summary report</a:t>
+            </a:r>
+            <a:endParaRPr lang="en-US" sz="950" dirty="0"/>
+          </a:p>
+        </p:txBody>
+      </p:sp>
+      <p:sp>
+        <p:nvSpPr>
+          <p:cNvPr id="18" name="Shape 16"/>
+          <p:cNvSpPr/>
+          <p:nvPr/>
+        </p:nvSpPr>
+        <p:spPr>
+          <a:xfrm>
+            <a:off x="4800600" y="1371600"/>
+            <a:ext cx="4114800" cy="3429000"/>
           </a:xfrm>
           <a:prstGeom prst="rect">
             <a:avLst/>
@@ -4385,14 +4673,73 @@
       </p:sp>
       <p:sp>
         <p:nvSpPr>
-          <p:cNvPr id="8" name="Text 6"/>
-          <p:cNvSpPr/>
-          <p:nvPr/>
-        </p:nvSpPr>
-        <p:spPr>
-          <a:xfrm>
-            <a:off x="3438144" y="1737360"/>
-            <a:ext cx="2286000" cy="621792"/>
+          <p:cNvPr id="19" name="Shape 17"/>
+          <p:cNvSpPr/>
+          <p:nvPr/>
+        </p:nvSpPr>
+        <p:spPr>
+          <a:xfrm>
+            <a:off x="5001768" y="1572768"/>
+            <a:ext cx="868680" cy="292608"/>
+          </a:xfrm>
+          <a:prstGeom prst="rect">
+            <a:avLst/>
+          </a:prstGeom>
+          <a:solidFill>
+            <a:srgbClr val="FAD9C8"/>
+          </a:solidFill>
+          <a:ln/>
+        </p:spPr>
+      </p:sp>
+      <p:sp>
+        <p:nvSpPr>
+          <p:cNvPr id="20" name="Text 18"/>
+          <p:cNvSpPr/>
+          <p:nvPr/>
+        </p:nvSpPr>
+        <p:spPr>
+          <a:xfrm>
+            <a:off x="5001768" y="1572768"/>
+            <a:ext cx="868680" cy="292608"/>
+          </a:xfrm>
+          <a:prstGeom prst="rect">
+            <a:avLst/>
+          </a:prstGeom>
+          <a:noFill/>
+          <a:ln/>
+        </p:spPr>
+        <p:txBody>
+          <a:bodyPr wrap="square" lIns="0" tIns="0" rIns="0" bIns="0" rtlCol="0" anchor="ctr"/>
+          <a:lstStyle/>
+          <a:p>
+            <a:pPr algn="ctr" indent="0" marL="0">
+              <a:buNone/>
+            </a:pPr>
+            <a:r>
+              <a:rPr lang="en-US" sz="750" b="1" spc="150" kern="0" dirty="0">
+                <a:solidFill>
+                  <a:srgbClr val="8A3010"/>
+                </a:solidFill>
+                <a:latin typeface="Calibri" pitchFamily="34" charset="0"/>
+                <a:ea typeface="Calibri" pitchFamily="34" charset="-122"/>
+                <a:cs typeface="Calibri" pitchFamily="34" charset="-120"/>
+              </a:rPr>
+              <a:t>VARIABLE</a:t>
+            </a:r>
+            <a:endParaRPr lang="en-US" sz="750" dirty="0"/>
+          </a:p>
+        </p:txBody>
+      </p:sp>
+      <p:sp>
+        <p:nvSpPr>
+          <p:cNvPr id="21" name="Text 19"/>
+          <p:cNvSpPr/>
+          <p:nvPr/>
+        </p:nvSpPr>
+        <p:spPr>
+          <a:xfrm>
+            <a:off x="5001768" y="1965960"/>
+            <a:ext cx="3749040" cy="365760"/>
           </a:xfrm>
           <a:prstGeom prst="rect">
             <a:avLst/>
@@ -4408,7 +4755,46 @@
               <a:buNone/>
             </a:pPr>
             <a:r>
-              <a:rPr lang="en-US" sz="3400" i="1" dirty="0">
+              <a:rPr lang="en-US" sz="1100" b="1" dirty="0">
+                <a:solidFill>
+                  <a:srgbClr val="1A1A1A"/>
+                </a:solidFill>
+                <a:latin typeface="Calibri" pitchFamily="34" charset="0"/>
+                <a:ea typeface="Calibri" pitchFamily="34" charset="-122"/>
+                <a:cs typeface="Calibri" pitchFamily="34" charset="-120"/>
+              </a:rPr>
+              <a:t>Performance / Revenue Share</a:t>
+            </a:r>
+            <a:endParaRPr lang="en-US" sz="1100" dirty="0"/>
+          </a:p>
+        </p:txBody>
+      </p:sp>
+      <p:sp>
+        <p:nvSpPr>
+          <p:cNvPr id="22" name="Text 20"/>
+          <p:cNvSpPr/>
+          <p:nvPr/>
+        </p:nvSpPr>
+        <p:spPr>
+          <a:xfrm>
+            <a:off x="5001768" y="2377440"/>
+            <a:ext cx="3749040" cy="566928"/>
+          </a:xfrm>
+          <a:prstGeom prst="rect">
+            <a:avLst/>
+          </a:prstGeom>
+          <a:noFill/>
+          <a:ln/>
+        </p:spPr>
+        <p:txBody>
+          <a:bodyPr wrap="square" lIns="0" tIns="0" rIns="0" bIns="0" rtlCol="0" anchor="ctr"/>
+          <a:lstStyle/>
+          <a:p>
+            <a:pPr indent="0" marL="0">
+              <a:buNone/>
+            </a:pPr>
+            <a:r>
+              <a:rPr lang="en-US" sz="2800" i="1" dirty="0">
                 <a:solidFill>
                   <a:srgbClr val="F26522"/>
                 </a:solidFill>
@@ -4416,22 +4802,22 @@
                 <a:ea typeface="Georgia" pitchFamily="34" charset="-122"/>
                 <a:cs typeface="Georgia" pitchFamily="34" charset="-120"/>
               </a:rPr>
-              <a:t>8 / 97</a:t>
-            </a:r>
-            <a:endParaRPr lang="en-US" sz="3400" dirty="0"/>
-          </a:p>
-        </p:txBody>
-      </p:sp>
-      <p:sp>
-        <p:nvSpPr>
-          <p:cNvPr id="9" name="Text 7"/>
-          <p:cNvSpPr/>
-          <p:nvPr/>
-        </p:nvSpPr>
-        <p:spPr>
-          <a:xfrm>
-            <a:off x="3438144" y="2395728"/>
-            <a:ext cx="2286000" cy="411480"/>
+              <a:t>0.5% – 2%</a:t>
+            </a:r>
+            <a:endParaRPr lang="en-US" sz="2800" dirty="0"/>
+          </a:p>
+        </p:txBody>
+      </p:sp>
+      <p:sp>
+        <p:nvSpPr>
+          <p:cNvPr id="23" name="Text 21"/>
+          <p:cNvSpPr/>
+          <p:nvPr/>
+        </p:nvSpPr>
+        <p:spPr>
+          <a:xfrm>
+            <a:off x="5001768" y="2953512"/>
+            <a:ext cx="3749040" cy="274320"/>
           </a:xfrm>
           <a:prstGeom prst="rect">
             <a:avLst/>
@@ -4455,71 +4841,61 @@
                 <a:ea typeface="Calibri" pitchFamily="34" charset="-122"/>
                 <a:cs typeface="Calibri" pitchFamily="34" charset="-120"/>
               </a:rPr>
-              <a:t>Tier-1 cities and</a:t>
+              <a:t>on attributed sales or activations</a:t>
             </a:r>
             <a:endParaRPr lang="en-US" sz="900" dirty="0"/>
           </a:p>
+        </p:txBody>
+      </p:sp>
+      <p:sp>
+        <p:nvSpPr>
+          <p:cNvPr id="24" name="Text 22"/>
+          <p:cNvSpPr/>
+          <p:nvPr/>
+        </p:nvSpPr>
+        <p:spPr>
+          <a:xfrm>
+            <a:off x="5001768" y="3337560"/>
+            <a:ext cx="256032" cy="256032"/>
+          </a:xfrm>
+          <a:prstGeom prst="rect">
+            <a:avLst/>
+          </a:prstGeom>
+          <a:noFill/>
+          <a:ln/>
+        </p:spPr>
+        <p:txBody>
+          <a:bodyPr wrap="square" lIns="0" tIns="0" rIns="0" bIns="0" rtlCol="0" anchor="ctr"/>
+          <a:lstStyle/>
           <a:p>
             <a:pPr indent="0" marL="0">
               <a:buNone/>
             </a:pPr>
             <a:r>
-              <a:rPr lang="en-US" sz="900" dirty="0">
-                <a:solidFill>
-                  <a:srgbClr val="8C5A3A"/>
-                </a:solidFill>
-                <a:latin typeface="Calibri" pitchFamily="34" charset="0"/>
-                <a:ea typeface="Calibri" pitchFamily="34" charset="-122"/>
-                <a:cs typeface="Calibri" pitchFamily="34" charset="-120"/>
-              </a:rPr>
-              <a:t>Tier-2 cities in India</a:t>
-            </a:r>
-            <a:endParaRPr lang="en-US" sz="900" dirty="0"/>
-          </a:p>
-        </p:txBody>
-      </p:sp>
-      <p:sp>
-        <p:nvSpPr>
-          <p:cNvPr id="10" name="Shape 8"/>
-          <p:cNvSpPr/>
-          <p:nvPr/>
-        </p:nvSpPr>
-        <p:spPr>
-          <a:xfrm>
-            <a:off x="6089904" y="1664208"/>
-            <a:ext cx="2633472" cy="1261872"/>
-          </a:xfrm>
-          <a:prstGeom prst="rect">
-            <a:avLst/>
-          </a:prstGeom>
-          <a:solidFill>
-            <a:srgbClr val="FFFFFF"/>
-          </a:solidFill>
-          <a:ln w="9525">
-            <a:solidFill>
-              <a:srgbClr val="E5E7EB"/>
-            </a:solidFill>
-            <a:prstDash val="solid"/>
-          </a:ln>
-          <a:effectLst>
-            <a:outerShdw sx="100000" sy="100000" kx="0" ky="0" algn="bl" rotWithShape="0" blurRad="76200" dist="25400" dir="8100000">
-              <a:srgbClr val="000000">
-                <a:alpha val="8000"/>
-              </a:srgbClr>
-            </a:outerShdw>
-          </a:effectLst>
-        </p:spPr>
-      </p:sp>
-      <p:sp>
-        <p:nvSpPr>
-          <p:cNvPr id="11" name="Text 9"/>
-          <p:cNvSpPr/>
-          <p:nvPr/>
-        </p:nvSpPr>
-        <p:spPr>
-          <a:xfrm>
-            <a:off x="6254496" y="1737360"/>
-            <a:ext cx="2286000" cy="621792"/>
+              <a:rPr lang="en-US" sz="1000" dirty="0">
+                <a:solidFill>
+                  <a:srgbClr val="F26522"/>
+                </a:solidFill>
+                <a:latin typeface="Calibri" pitchFamily="34" charset="0"/>
+                <a:ea typeface="Calibri" pitchFamily="34" charset="-122"/>
+                <a:cs typeface="Calibri" pitchFamily="34" charset="-120"/>
+              </a:rPr>
+              <a:t>—</a:t>
+            </a:r>
+            <a:endParaRPr lang="en-US" sz="1000" dirty="0"/>
+          </a:p>
+        </p:txBody>
+      </p:sp>
+      <p:sp>
+        <p:nvSpPr>
+          <p:cNvPr id="25" name="Text 23"/>
+          <p:cNvSpPr/>
+          <p:nvPr/>
+        </p:nvSpPr>
+        <p:spPr>
+          <a:xfrm>
+            <a:off x="5303520" y="3337560"/>
+            <a:ext cx="3474720" cy="256032"/>
           </a:xfrm>
           <a:prstGeom prst="rect">
             <a:avLst/>
@@ -4535,30 +4911,69 @@
               <a:buNone/>
             </a:pPr>
             <a:r>
-              <a:rPr lang="en-US" sz="3400" i="1" dirty="0">
+              <a:rPr lang="en-US" sz="950" dirty="0">
+                <a:solidFill>
+                  <a:srgbClr val="5C3A20"/>
+                </a:solidFill>
+                <a:latin typeface="Calibri" pitchFamily="34" charset="0"/>
+                <a:ea typeface="Calibri" pitchFamily="34" charset="-122"/>
+                <a:cs typeface="Calibri" pitchFamily="34" charset="-120"/>
+              </a:rPr>
+              <a:t>KYC completions / deposits</a:t>
+            </a:r>
+            <a:endParaRPr lang="en-US" sz="950" dirty="0"/>
+          </a:p>
+        </p:txBody>
+      </p:sp>
+      <p:sp>
+        <p:nvSpPr>
+          <p:cNvPr id="26" name="Text 24"/>
+          <p:cNvSpPr/>
+          <p:nvPr/>
+        </p:nvSpPr>
+        <p:spPr>
+          <a:xfrm>
+            <a:off x="5001768" y="3611880"/>
+            <a:ext cx="256032" cy="256032"/>
+          </a:xfrm>
+          <a:prstGeom prst="rect">
+            <a:avLst/>
+          </a:prstGeom>
+          <a:noFill/>
+          <a:ln/>
+        </p:spPr>
+        <p:txBody>
+          <a:bodyPr wrap="square" lIns="0" tIns="0" rIns="0" bIns="0" rtlCol="0" anchor="ctr"/>
+          <a:lstStyle/>
+          <a:p>
+            <a:pPr indent="0" marL="0">
+              <a:buNone/>
+            </a:pPr>
+            <a:r>
+              <a:rPr lang="en-US" sz="1000" dirty="0">
                 <a:solidFill>
                   <a:srgbClr val="F26522"/>
                 </a:solidFill>
-                <a:latin typeface="Georgia" pitchFamily="34" charset="0"/>
-                <a:ea typeface="Georgia" pitchFamily="34" charset="-122"/>
-                <a:cs typeface="Georgia" pitchFamily="34" charset="-120"/>
-              </a:rPr>
-              <a:t>200+</a:t>
-            </a:r>
-            <a:endParaRPr lang="en-US" sz="3400" dirty="0"/>
-          </a:p>
-        </p:txBody>
-      </p:sp>
-      <p:sp>
-        <p:nvSpPr>
-          <p:cNvPr id="12" name="Text 10"/>
-          <p:cNvSpPr/>
-          <p:nvPr/>
-        </p:nvSpPr>
-        <p:spPr>
-          <a:xfrm>
-            <a:off x="6254496" y="2395728"/>
-            <a:ext cx="2286000" cy="411480"/>
+                <a:latin typeface="Calibri" pitchFamily="34" charset="0"/>
+                <a:ea typeface="Calibri" pitchFamily="34" charset="-122"/>
+                <a:cs typeface="Calibri" pitchFamily="34" charset="-120"/>
+              </a:rPr>
+              <a:t>—</a:t>
+            </a:r>
+            <a:endParaRPr lang="en-US" sz="1000" dirty="0"/>
+          </a:p>
+        </p:txBody>
+      </p:sp>
+      <p:sp>
+        <p:nvSpPr>
+          <p:cNvPr id="27" name="Text 25"/>
+          <p:cNvSpPr/>
+          <p:nvPr/>
+        </p:nvSpPr>
+        <p:spPr>
+          <a:xfrm>
+            <a:off x="5303520" y="3611880"/>
+            <a:ext cx="3474720" cy="256032"/>
           </a:xfrm>
           <a:prstGeom prst="rect">
             <a:avLst/>
@@ -4574,79 +4989,69 @@
               <a:buNone/>
             </a:pPr>
             <a:r>
-              <a:rPr lang="en-US" sz="900" dirty="0">
-                <a:solidFill>
-                  <a:srgbClr val="8C5A3A"/>
-                </a:solidFill>
-                <a:latin typeface="Calibri" pitchFamily="34" charset="0"/>
-                <a:ea typeface="Calibri" pitchFamily="34" charset="-122"/>
-                <a:cs typeface="Calibri" pitchFamily="34" charset="-120"/>
-              </a:rPr>
-              <a:t>Bitcoin products &amp;</a:t>
-            </a:r>
-            <a:endParaRPr lang="en-US" sz="900" dirty="0"/>
-          </a:p>
+              <a:rPr lang="en-US" sz="950" dirty="0">
+                <a:solidFill>
+                  <a:srgbClr val="5C3A20"/>
+                </a:solidFill>
+                <a:latin typeface="Calibri" pitchFamily="34" charset="0"/>
+                <a:ea typeface="Calibri" pitchFamily="34" charset="-122"/>
+                <a:cs typeface="Calibri" pitchFamily="34" charset="-120"/>
+              </a:rPr>
+              <a:t>Hardware wallet sales</a:t>
+            </a:r>
+            <a:endParaRPr lang="en-US" sz="950" dirty="0"/>
+          </a:p>
+        </p:txBody>
+      </p:sp>
+      <p:sp>
+        <p:nvSpPr>
+          <p:cNvPr id="28" name="Text 26"/>
+          <p:cNvSpPr/>
+          <p:nvPr/>
+        </p:nvSpPr>
+        <p:spPr>
+          <a:xfrm>
+            <a:off x="5001768" y="3886200"/>
+            <a:ext cx="256032" cy="256032"/>
+          </a:xfrm>
+          <a:prstGeom prst="rect">
+            <a:avLst/>
+          </a:prstGeom>
+          <a:noFill/>
+          <a:ln/>
+        </p:spPr>
+        <p:txBody>
+          <a:bodyPr wrap="square" lIns="0" tIns="0" rIns="0" bIns="0" rtlCol="0" anchor="ctr"/>
+          <a:lstStyle/>
           <a:p>
             <a:pPr indent="0" marL="0">
               <a:buNone/>
             </a:pPr>
             <a:r>
-              <a:rPr lang="en-US" sz="900" dirty="0">
-                <a:solidFill>
-                  <a:srgbClr val="8C5A3A"/>
-                </a:solidFill>
-                <a:latin typeface="Calibri" pitchFamily="34" charset="0"/>
-                <a:ea typeface="Calibri" pitchFamily="34" charset="-122"/>
-                <a:cs typeface="Calibri" pitchFamily="34" charset="-120"/>
-              </a:rPr>
-              <a:t>services usable in India</a:t>
-            </a:r>
-            <a:endParaRPr lang="en-US" sz="900" dirty="0"/>
-          </a:p>
-        </p:txBody>
-      </p:sp>
-      <p:sp>
-        <p:nvSpPr>
-          <p:cNvPr id="13" name="Shape 11"/>
-          <p:cNvSpPr/>
-          <p:nvPr/>
-        </p:nvSpPr>
-        <p:spPr>
-          <a:xfrm>
-            <a:off x="457200" y="3108960"/>
-            <a:ext cx="2633472" cy="1261872"/>
-          </a:xfrm>
-          <a:prstGeom prst="rect">
-            <a:avLst/>
-          </a:prstGeom>
-          <a:solidFill>
-            <a:srgbClr val="FFFFFF"/>
-          </a:solidFill>
-          <a:ln w="9525">
-            <a:solidFill>
-              <a:srgbClr val="E5E7EB"/>
-            </a:solidFill>
-            <a:prstDash val="solid"/>
-          </a:ln>
-          <a:effectLst>
-            <a:outerShdw sx="100000" sy="100000" kx="0" ky="0" algn="bl" rotWithShape="0" blurRad="76200" dist="25400" dir="8100000">
-              <a:srgbClr val="000000">
-                <a:alpha val="8000"/>
-              </a:srgbClr>
-            </a:outerShdw>
-          </a:effectLst>
-        </p:spPr>
-      </p:sp>
-      <p:sp>
-        <p:nvSpPr>
-          <p:cNvPr id="14" name="Text 12"/>
-          <p:cNvSpPr/>
-          <p:nvPr/>
-        </p:nvSpPr>
-        <p:spPr>
-          <a:xfrm>
-            <a:off x="621792" y="3182112"/>
-            <a:ext cx="2286000" cy="621792"/>
+              <a:rPr lang="en-US" sz="1000" dirty="0">
+                <a:solidFill>
+                  <a:srgbClr val="F26522"/>
+                </a:solidFill>
+                <a:latin typeface="Calibri" pitchFamily="34" charset="0"/>
+                <a:ea typeface="Calibri" pitchFamily="34" charset="-122"/>
+                <a:cs typeface="Calibri" pitchFamily="34" charset="-120"/>
+              </a:rPr>
+              <a:t>—</a:t>
+            </a:r>
+            <a:endParaRPr lang="en-US" sz="1000" dirty="0"/>
+          </a:p>
+        </p:txBody>
+      </p:sp>
+      <p:sp>
+        <p:nvSpPr>
+          <p:cNvPr id="29" name="Text 27"/>
+          <p:cNvSpPr/>
+          <p:nvPr/>
+        </p:nvSpPr>
+        <p:spPr>
+          <a:xfrm>
+            <a:off x="5303520" y="3886200"/>
+            <a:ext cx="3474720" cy="256032"/>
           </a:xfrm>
           <a:prstGeom prst="rect">
             <a:avLst/>
@@ -4662,30 +5067,69 @@
               <a:buNone/>
             </a:pPr>
             <a:r>
-              <a:rPr lang="en-US" sz="3400" i="1" dirty="0">
+              <a:rPr lang="en-US" sz="950" dirty="0">
+                <a:solidFill>
+                  <a:srgbClr val="5C3A20"/>
+                </a:solidFill>
+                <a:latin typeface="Calibri" pitchFamily="34" charset="0"/>
+                <a:ea typeface="Calibri" pitchFamily="34" charset="-122"/>
+                <a:cs typeface="Calibri" pitchFamily="34" charset="-120"/>
+              </a:rPr>
+              <a:t>Loan / custody product sign-ups</a:t>
+            </a:r>
+            <a:endParaRPr lang="en-US" sz="950" dirty="0"/>
+          </a:p>
+        </p:txBody>
+      </p:sp>
+      <p:sp>
+        <p:nvSpPr>
+          <p:cNvPr id="30" name="Text 28"/>
+          <p:cNvSpPr/>
+          <p:nvPr/>
+        </p:nvSpPr>
+        <p:spPr>
+          <a:xfrm>
+            <a:off x="5001768" y="4160520"/>
+            <a:ext cx="256032" cy="256032"/>
+          </a:xfrm>
+          <a:prstGeom prst="rect">
+            <a:avLst/>
+          </a:prstGeom>
+          <a:noFill/>
+          <a:ln/>
+        </p:spPr>
+        <p:txBody>
+          <a:bodyPr wrap="square" lIns="0" tIns="0" rIns="0" bIns="0" rtlCol="0" anchor="ctr"/>
+          <a:lstStyle/>
+          <a:p>
+            <a:pPr indent="0" marL="0">
+              <a:buNone/>
+            </a:pPr>
+            <a:r>
+              <a:rPr lang="en-US" sz="1000" dirty="0">
                 <a:solidFill>
                   <a:srgbClr val="F26522"/>
                 </a:solidFill>
-                <a:latin typeface="Georgia" pitchFamily="34" charset="0"/>
-                <a:ea typeface="Georgia" pitchFamily="34" charset="-122"/>
-                <a:cs typeface="Georgia" pitchFamily="34" charset="-120"/>
-              </a:rPr>
-              <a:t>2,000+</a:t>
-            </a:r>
-            <a:endParaRPr lang="en-US" sz="3400" dirty="0"/>
-          </a:p>
-        </p:txBody>
-      </p:sp>
-      <p:sp>
-        <p:nvSpPr>
-          <p:cNvPr id="15" name="Text 13"/>
-          <p:cNvSpPr/>
-          <p:nvPr/>
-        </p:nvSpPr>
-        <p:spPr>
-          <a:xfrm>
-            <a:off x="621792" y="3840480"/>
-            <a:ext cx="2286000" cy="411480"/>
+                <a:latin typeface="Calibri" pitchFamily="34" charset="0"/>
+                <a:ea typeface="Calibri" pitchFamily="34" charset="-122"/>
+                <a:cs typeface="Calibri" pitchFamily="34" charset="-120"/>
+              </a:rPr>
+              <a:t>—</a:t>
+            </a:r>
+            <a:endParaRPr lang="en-US" sz="1000" dirty="0"/>
+          </a:p>
+        </p:txBody>
+      </p:sp>
+      <p:sp>
+        <p:nvSpPr>
+          <p:cNvPr id="31" name="Text 29"/>
+          <p:cNvSpPr/>
+          <p:nvPr/>
+        </p:nvSpPr>
+        <p:spPr>
+          <a:xfrm>
+            <a:off x="5303520" y="4160520"/>
+            <a:ext cx="3474720" cy="256032"/>
           </a:xfrm>
           <a:prstGeom prst="rect">
             <a:avLst/>
@@ -4701,294 +5145,23 @@
               <a:buNone/>
             </a:pPr>
             <a:r>
-              <a:rPr lang="en-US" sz="900" dirty="0">
-                <a:solidFill>
-                  <a:srgbClr val="8C5A3A"/>
-                </a:solidFill>
-                <a:latin typeface="Calibri" pitchFamily="34" charset="0"/>
-                <a:ea typeface="Calibri" pitchFamily="34" charset="-122"/>
-                <a:cs typeface="Calibri" pitchFamily="34" charset="-120"/>
-              </a:rPr>
-              <a:t>Existing community</a:t>
-            </a:r>
-            <a:endParaRPr lang="en-US" sz="900" dirty="0"/>
-          </a:p>
-          <a:p>
-            <a:pPr indent="0" marL="0">
-              <a:buNone/>
-            </a:pPr>
-            <a:r>
-              <a:rPr lang="en-US" sz="900" dirty="0">
-                <a:solidFill>
-                  <a:srgbClr val="8C5A3A"/>
-                </a:solidFill>
-                <a:latin typeface="Calibri" pitchFamily="34" charset="0"/>
-                <a:ea typeface="Calibri" pitchFamily="34" charset="-122"/>
-                <a:cs typeface="Calibri" pitchFamily="34" charset="-120"/>
-              </a:rPr>
-              <a:t>members</a:t>
-            </a:r>
-            <a:endParaRPr lang="en-US" sz="900" dirty="0"/>
-          </a:p>
-        </p:txBody>
-      </p:sp>
-      <p:sp>
-        <p:nvSpPr>
-          <p:cNvPr id="16" name="Shape 14"/>
-          <p:cNvSpPr/>
-          <p:nvPr/>
-        </p:nvSpPr>
-        <p:spPr>
-          <a:xfrm>
-            <a:off x="3273552" y="3108960"/>
-            <a:ext cx="2633472" cy="1261872"/>
-          </a:xfrm>
-          <a:prstGeom prst="rect">
-            <a:avLst/>
-          </a:prstGeom>
-          <a:solidFill>
-            <a:srgbClr val="FFFFFF"/>
-          </a:solidFill>
-          <a:ln w="9525">
-            <a:solidFill>
-              <a:srgbClr val="E5E7EB"/>
-            </a:solidFill>
-            <a:prstDash val="solid"/>
-          </a:ln>
-          <a:effectLst>
-            <a:outerShdw sx="100000" sy="100000" kx="0" ky="0" algn="bl" rotWithShape="0" blurRad="76200" dist="25400" dir="8100000">
-              <a:srgbClr val="000000">
-                <a:alpha val="8000"/>
-              </a:srgbClr>
-            </a:outerShdw>
-          </a:effectLst>
-        </p:spPr>
-      </p:sp>
-      <p:sp>
-        <p:nvSpPr>
-          <p:cNvPr id="17" name="Text 15"/>
-          <p:cNvSpPr/>
-          <p:nvPr/>
-        </p:nvSpPr>
-        <p:spPr>
-          <a:xfrm>
-            <a:off x="3438144" y="3182112"/>
-            <a:ext cx="2286000" cy="621792"/>
-          </a:xfrm>
-          <a:prstGeom prst="rect">
-            <a:avLst/>
-          </a:prstGeom>
-          <a:noFill/>
-          <a:ln/>
-        </p:spPr>
-        <p:txBody>
-          <a:bodyPr wrap="square" lIns="0" tIns="0" rIns="0" bIns="0" rtlCol="0" anchor="ctr"/>
-          <a:lstStyle/>
-          <a:p>
-            <a:pPr indent="0" marL="0">
-              <a:buNone/>
-            </a:pPr>
-            <a:r>
-              <a:rPr lang="en-US" sz="3400" i="1" dirty="0">
-                <a:solidFill>
-                  <a:srgbClr val="F26522"/>
-                </a:solidFill>
-                <a:latin typeface="Georgia" pitchFamily="34" charset="0"/>
-                <a:ea typeface="Georgia" pitchFamily="34" charset="-122"/>
-                <a:cs typeface="Georgia" pitchFamily="34" charset="-120"/>
-              </a:rPr>
-              <a:t>6 / 1</a:t>
-            </a:r>
-            <a:endParaRPr lang="en-US" sz="3400" dirty="0"/>
-          </a:p>
-        </p:txBody>
-      </p:sp>
-      <p:sp>
-        <p:nvSpPr>
-          <p:cNvPr id="18" name="Text 16"/>
-          <p:cNvSpPr/>
-          <p:nvPr/>
-        </p:nvSpPr>
-        <p:spPr>
-          <a:xfrm>
-            <a:off x="3438144" y="3840480"/>
-            <a:ext cx="2286000" cy="411480"/>
-          </a:xfrm>
-          <a:prstGeom prst="rect">
-            <a:avLst/>
-          </a:prstGeom>
-          <a:noFill/>
-          <a:ln/>
-        </p:spPr>
-        <p:txBody>
-          <a:bodyPr wrap="square" lIns="0" tIns="0" rIns="0" bIns="0" rtlCol="0" anchor="ctr"/>
-          <a:lstStyle/>
-          <a:p>
-            <a:pPr indent="0" marL="0">
-              <a:buNone/>
-            </a:pPr>
-            <a:r>
-              <a:rPr lang="en-US" sz="900" dirty="0">
-                <a:solidFill>
-                  <a:srgbClr val="8C5A3A"/>
-                </a:solidFill>
-                <a:latin typeface="Calibri" pitchFamily="34" charset="0"/>
-                <a:ea typeface="Calibri" pitchFamily="34" charset="-122"/>
-                <a:cs typeface="Calibri" pitchFamily="34" charset="-120"/>
-              </a:rPr>
-              <a:t>Tier-1 and Tier-2</a:t>
-            </a:r>
-            <a:endParaRPr lang="en-US" sz="900" dirty="0"/>
-          </a:p>
-          <a:p>
-            <a:pPr indent="0" marL="0">
-              <a:buNone/>
-            </a:pPr>
-            <a:r>
-              <a:rPr lang="en-US" sz="900" dirty="0">
-                <a:solidFill>
-                  <a:srgbClr val="8C5A3A"/>
-                </a:solidFill>
-                <a:latin typeface="Calibri" pitchFamily="34" charset="0"/>
-                <a:ea typeface="Calibri" pitchFamily="34" charset="-122"/>
-                <a:cs typeface="Calibri" pitchFamily="34" charset="-120"/>
-              </a:rPr>
-              <a:t>cities we cover</a:t>
-            </a:r>
-            <a:endParaRPr lang="en-US" sz="900" dirty="0"/>
-          </a:p>
-        </p:txBody>
-      </p:sp>
-      <p:sp>
-        <p:nvSpPr>
-          <p:cNvPr id="19" name="Shape 17"/>
-          <p:cNvSpPr/>
-          <p:nvPr/>
-        </p:nvSpPr>
-        <p:spPr>
-          <a:xfrm>
-            <a:off x="6089904" y="3108960"/>
-            <a:ext cx="2633472" cy="1261872"/>
-          </a:xfrm>
-          <a:prstGeom prst="rect">
-            <a:avLst/>
-          </a:prstGeom>
-          <a:solidFill>
-            <a:srgbClr val="FFFFFF"/>
-          </a:solidFill>
-          <a:ln w="9525">
-            <a:solidFill>
-              <a:srgbClr val="E5E7EB"/>
-            </a:solidFill>
-            <a:prstDash val="solid"/>
-          </a:ln>
-          <a:effectLst>
-            <a:outerShdw sx="100000" sy="100000" kx="0" ky="0" algn="bl" rotWithShape="0" blurRad="76200" dist="25400" dir="8100000">
-              <a:srgbClr val="000000">
-                <a:alpha val="8000"/>
-              </a:srgbClr>
-            </a:outerShdw>
-          </a:effectLst>
-        </p:spPr>
-      </p:sp>
-      <p:sp>
-        <p:nvSpPr>
-          <p:cNvPr id="20" name="Text 18"/>
-          <p:cNvSpPr/>
-          <p:nvPr/>
-        </p:nvSpPr>
-        <p:spPr>
-          <a:xfrm>
-            <a:off x="6254496" y="3182112"/>
-            <a:ext cx="2286000" cy="621792"/>
-          </a:xfrm>
-          <a:prstGeom prst="rect">
-            <a:avLst/>
-          </a:prstGeom>
-          <a:noFill/>
-          <a:ln/>
-        </p:spPr>
-        <p:txBody>
-          <a:bodyPr wrap="square" lIns="0" tIns="0" rIns="0" bIns="0" rtlCol="0" anchor="ctr"/>
-          <a:lstStyle/>
-          <a:p>
-            <a:pPr indent="0" marL="0">
-              <a:buNone/>
-            </a:pPr>
-            <a:r>
-              <a:rPr lang="en-US" sz="3400" i="1" dirty="0">
-                <a:solidFill>
-                  <a:srgbClr val="F26522"/>
-                </a:solidFill>
-                <a:latin typeface="Georgia" pitchFamily="34" charset="0"/>
-                <a:ea typeface="Georgia" pitchFamily="34" charset="-122"/>
-                <a:cs typeface="Georgia" pitchFamily="34" charset="-120"/>
-              </a:rPr>
-              <a:t>6</a:t>
-            </a:r>
-            <a:endParaRPr lang="en-US" sz="3400" dirty="0"/>
-          </a:p>
-        </p:txBody>
-      </p:sp>
-      <p:sp>
-        <p:nvSpPr>
-          <p:cNvPr id="21" name="Text 19"/>
-          <p:cNvSpPr/>
-          <p:nvPr/>
-        </p:nvSpPr>
-        <p:spPr>
-          <a:xfrm>
-            <a:off x="6254496" y="3840480"/>
-            <a:ext cx="2286000" cy="411480"/>
-          </a:xfrm>
-          <a:prstGeom prst="rect">
-            <a:avLst/>
-          </a:prstGeom>
-          <a:noFill/>
-          <a:ln/>
-        </p:spPr>
-        <p:txBody>
-          <a:bodyPr wrap="square" lIns="0" tIns="0" rIns="0" bIns="0" rtlCol="0" anchor="ctr"/>
-          <a:lstStyle/>
-          <a:p>
-            <a:pPr indent="0" marL="0">
-              <a:buNone/>
-            </a:pPr>
-            <a:r>
-              <a:rPr lang="en-US" sz="900" dirty="0">
-                <a:solidFill>
-                  <a:srgbClr val="8C5A3A"/>
-                </a:solidFill>
-                <a:latin typeface="Calibri" pitchFamily="34" charset="0"/>
-                <a:ea typeface="Calibri" pitchFamily="34" charset="-122"/>
-                <a:cs typeface="Calibri" pitchFamily="34" charset="-120"/>
-              </a:rPr>
-              <a:t>Existing brand</a:t>
-            </a:r>
-            <a:endParaRPr lang="en-US" sz="900" dirty="0"/>
-          </a:p>
-          <a:p>
-            <a:pPr indent="0" marL="0">
-              <a:buNone/>
-            </a:pPr>
-            <a:r>
-              <a:rPr lang="en-US" sz="900" dirty="0">
-                <a:solidFill>
-                  <a:srgbClr val="8C5A3A"/>
-                </a:solidFill>
-                <a:latin typeface="Calibri" pitchFamily="34" charset="0"/>
-                <a:ea typeface="Calibri" pitchFamily="34" charset="-122"/>
-                <a:cs typeface="Calibri" pitchFamily="34" charset="-120"/>
-              </a:rPr>
-              <a:t>partnerships</a:t>
-            </a:r>
-            <a:endParaRPr lang="en-US" sz="900" dirty="0"/>
-          </a:p>
-        </p:txBody>
-      </p:sp>
-      <p:sp>
-        <p:nvSpPr>
-          <p:cNvPr id="22" name="Shape 20"/>
+              <a:rPr lang="en-US" sz="950" dirty="0">
+                <a:solidFill>
+                  <a:srgbClr val="5C3A20"/>
+                </a:solidFill>
+                <a:latin typeface="Calibri" pitchFamily="34" charset="0"/>
+                <a:ea typeface="Calibri" pitchFamily="34" charset="-122"/>
+                <a:cs typeface="Calibri" pitchFamily="34" charset="-120"/>
+              </a:rPr>
+              <a:t>Referrals through mentor network</a:t>
+            </a:r>
+            <a:endParaRPr lang="en-US" sz="950" dirty="0"/>
+          </a:p>
+        </p:txBody>
+      </p:sp>
+      <p:sp>
+        <p:nvSpPr>
+          <p:cNvPr id="32" name="Shape 30"/>
           <p:cNvSpPr/>
           <p:nvPr/>
         </p:nvSpPr>
@@ -5008,7 +5181,7 @@
       </p:sp>
       <p:sp>
         <p:nvSpPr>
-          <p:cNvPr id="23" name="Text 21"/>
+          <p:cNvPr id="33" name="Text 31"/>
           <p:cNvSpPr/>
           <p:nvPr/>
         </p:nvSpPr>
@@ -5059,7 +5232,7 @@
     <p:bg>
       <p:bgPr>
         <a:solidFill>
-          <a:srgbClr val="FAF9F6"/>
+          <a:srgbClr val="FFFFFF"/>
         </a:solidFill>
       </p:bgPr>
     </p:bg>
@@ -5085,8 +5258,8 @@
         </p:nvSpPr>
         <p:spPr>
           <a:xfrm>
-            <a:off x="411480" y="475488"/>
-            <a:ext cx="50292" cy="749808"/>
+            <a:off x="0" y="0"/>
+            <a:ext cx="9144000" cy="64008"/>
           </a:xfrm>
           <a:prstGeom prst="rect">
             <a:avLst/>
@@ -5105,8 +5278,8 @@
         </p:nvSpPr>
         <p:spPr>
           <a:xfrm>
-            <a:off x="594360" y="475488"/>
-            <a:ext cx="8046720" cy="749808"/>
+            <a:off x="457200" y="1828800"/>
+            <a:ext cx="4572000" cy="914400"/>
           </a:xfrm>
           <a:prstGeom prst="rect">
             <a:avLst/>
@@ -5122,7 +5295,7 @@
               <a:buNone/>
             </a:pPr>
             <a:r>
-              <a:rPr lang="en-US" sz="3000" i="1" dirty="0">
+              <a:rPr lang="en-US" sz="5600" i="1" dirty="0">
                 <a:solidFill>
                   <a:srgbClr val="1A1A1A"/>
                 </a:solidFill>
@@ -5130,1108 +5303,87 @@
                 <a:ea typeface="Georgia" pitchFamily="34" charset="-122"/>
                 <a:cs typeface="Georgia" pitchFamily="34" charset="-120"/>
               </a:rPr>
-              <a:t>We charge brands. Not participants.</a:t>
-            </a:r>
-            <a:endParaRPr lang="en-US" sz="3000" dirty="0"/>
-          </a:p>
-        </p:txBody>
-      </p:sp>
-      <p:sp>
-        <p:nvSpPr>
-          <p:cNvPr id="4" name="Shape 2"/>
-          <p:cNvSpPr/>
-          <p:nvPr/>
-        </p:nvSpPr>
-        <p:spPr>
-          <a:xfrm>
-            <a:off x="457200" y="1371600"/>
-            <a:ext cx="4114800" cy="3429000"/>
-          </a:xfrm>
-          <a:prstGeom prst="rect">
-            <a:avLst/>
-          </a:prstGeom>
-          <a:solidFill>
-            <a:srgbClr val="FFFFFF"/>
-          </a:solidFill>
-          <a:ln w="9525">
-            <a:solidFill>
-              <a:srgbClr val="E5E7EB"/>
-            </a:solidFill>
-            <a:prstDash val="solid"/>
-          </a:ln>
-          <a:effectLst>
-            <a:outerShdw sx="100000" sy="100000" kx="0" ky="0" algn="bl" rotWithShape="0" blurRad="76200" dist="25400" dir="8100000">
-              <a:srgbClr val="000000">
-                <a:alpha val="8000"/>
-              </a:srgbClr>
-            </a:outerShdw>
-          </a:effectLst>
-        </p:spPr>
-      </p:sp>
-      <p:sp>
-        <p:nvSpPr>
-          <p:cNvPr id="5" name="Shape 3"/>
-          <p:cNvSpPr/>
-          <p:nvPr/>
-        </p:nvSpPr>
-        <p:spPr>
-          <a:xfrm>
-            <a:off x="658368" y="1572768"/>
-            <a:ext cx="868680" cy="292608"/>
-          </a:xfrm>
-          <a:prstGeom prst="rect">
-            <a:avLst/>
-          </a:prstGeom>
-          <a:solidFill>
-            <a:srgbClr val="D6E4EF"/>
-          </a:solidFill>
-          <a:ln/>
-        </p:spPr>
-      </p:sp>
-      <p:sp>
-        <p:nvSpPr>
-          <p:cNvPr id="6" name="Text 4"/>
-          <p:cNvSpPr/>
-          <p:nvPr/>
-        </p:nvSpPr>
-        <p:spPr>
-          <a:xfrm>
-            <a:off x="658368" y="1572768"/>
-            <a:ext cx="868680" cy="292608"/>
-          </a:xfrm>
-          <a:prstGeom prst="rect">
-            <a:avLst/>
-          </a:prstGeom>
-          <a:noFill/>
-          <a:ln/>
-        </p:spPr>
-        <p:txBody>
-          <a:bodyPr wrap="square" lIns="0" tIns="0" rIns="0" bIns="0" rtlCol="0" anchor="ctr"/>
-          <a:lstStyle/>
-          <a:p>
-            <a:pPr algn="ctr" indent="0" marL="0">
-              <a:buNone/>
-            </a:pPr>
-            <a:r>
-              <a:rPr lang="en-US" sz="750" b="1" spc="150" kern="0" dirty="0">
-                <a:solidFill>
-                  <a:srgbClr val="3A6080"/>
-                </a:solidFill>
-                <a:latin typeface="Calibri" pitchFamily="34" charset="0"/>
-                <a:ea typeface="Calibri" pitchFamily="34" charset="-122"/>
-                <a:cs typeface="Calibri" pitchFamily="34" charset="-120"/>
-              </a:rPr>
-              <a:t>FIXED</a:t>
-            </a:r>
-            <a:endParaRPr lang="en-US" sz="750" dirty="0"/>
-          </a:p>
-        </p:txBody>
-      </p:sp>
-      <p:sp>
-        <p:nvSpPr>
-          <p:cNvPr id="7" name="Text 5"/>
-          <p:cNvSpPr/>
-          <p:nvPr/>
-        </p:nvSpPr>
-        <p:spPr>
-          <a:xfrm>
-            <a:off x="658368" y="1965960"/>
-            <a:ext cx="3749040" cy="365760"/>
-          </a:xfrm>
-          <a:prstGeom prst="rect">
-            <a:avLst/>
-          </a:prstGeom>
-          <a:noFill/>
-          <a:ln/>
-        </p:spPr>
-        <p:txBody>
-          <a:bodyPr wrap="square" lIns="0" tIns="0" rIns="0" bIns="0" rtlCol="0" anchor="ctr"/>
-          <a:lstStyle/>
-          <a:p>
-            <a:pPr indent="0" marL="0">
-              <a:buNone/>
-            </a:pPr>
-            <a:r>
-              <a:rPr lang="en-US" sz="1100" b="1" dirty="0">
-                <a:solidFill>
-                  <a:srgbClr val="1A1A1A"/>
-                </a:solidFill>
-                <a:latin typeface="Calibri" pitchFamily="34" charset="0"/>
-                <a:ea typeface="Calibri" pitchFamily="34" charset="-122"/>
-                <a:cs typeface="Calibri" pitchFamily="34" charset="-120"/>
-              </a:rPr>
-              <a:t>Event Execution Fee</a:t>
-            </a:r>
-            <a:endParaRPr lang="en-US" sz="1100" dirty="0"/>
-          </a:p>
-        </p:txBody>
-      </p:sp>
-      <p:sp>
-        <p:nvSpPr>
-          <p:cNvPr id="8" name="Text 6"/>
-          <p:cNvSpPr/>
-          <p:nvPr/>
-        </p:nvSpPr>
-        <p:spPr>
-          <a:xfrm>
-            <a:off x="658368" y="2377440"/>
-            <a:ext cx="3749040" cy="566928"/>
-          </a:xfrm>
-          <a:prstGeom prst="rect">
-            <a:avLst/>
-          </a:prstGeom>
-          <a:noFill/>
-          <a:ln/>
-        </p:spPr>
-        <p:txBody>
-          <a:bodyPr wrap="square" lIns="0" tIns="0" rIns="0" bIns="0" rtlCol="0" anchor="ctr"/>
-          <a:lstStyle/>
-          <a:p>
-            <a:pPr indent="0" marL="0">
-              <a:buNone/>
-            </a:pPr>
-            <a:r>
-              <a:rPr lang="en-US" sz="2800" i="1" dirty="0">
+              <a:t>Getbit</a:t>
+            </a:r>
+            <a:endParaRPr lang="en-US" sz="5600" dirty="0"/>
+          </a:p>
+        </p:txBody>
+      </p:sp>
+      <p:sp>
+        <p:nvSpPr>
+          <p:cNvPr id="4" name="Text 2"/>
+          <p:cNvSpPr/>
+          <p:nvPr/>
+        </p:nvSpPr>
+        <p:spPr>
+          <a:xfrm>
+            <a:off x="457200" y="2926080"/>
+            <a:ext cx="4389120" cy="1828800"/>
+          </a:xfrm>
+          <a:prstGeom prst="rect">
+            <a:avLst/>
+          </a:prstGeom>
+          <a:noFill/>
+          <a:ln/>
+        </p:spPr>
+        <p:txBody>
+          <a:bodyPr wrap="square" lIns="0" tIns="0" rIns="0" bIns="0" rtlCol="0" anchor="ctr"/>
+          <a:lstStyle/>
+          <a:p>
+            <a:pPr algn="l" indent="0" marL="0">
+              <a:buNone/>
+            </a:pPr>
+            <a:r>
+              <a:rPr lang="en-US" sz="1800" dirty="0">
+                <a:solidFill>
+                  <a:srgbClr val="8C5A3A"/>
+                </a:solidFill>
+                <a:latin typeface="Calibri" pitchFamily="34" charset="0"/>
+                <a:ea typeface="Calibri" pitchFamily="34" charset="-122"/>
+                <a:cs typeface="Calibri" pitchFamily="34" charset="-120"/>
+              </a:rPr>
+              <a:t>Bitcoin-only exchange from India. 200+ attendees across meetups powered by Bitcoincierge.</a:t>
+            </a:r>
+            <a:endParaRPr lang="en-US" sz="1800" dirty="0"/>
+          </a:p>
+        </p:txBody>
+      </p:sp>
+      <p:sp>
+        <p:nvSpPr>
+          <p:cNvPr id="5" name="Text 3"/>
+          <p:cNvSpPr/>
+          <p:nvPr/>
+        </p:nvSpPr>
+        <p:spPr>
+          <a:xfrm>
+            <a:off x="457200" y="4892040"/>
+            <a:ext cx="8229600" cy="201168"/>
+          </a:xfrm>
+          <a:prstGeom prst="rect">
+            <a:avLst/>
+          </a:prstGeom>
+          <a:noFill/>
+          <a:ln/>
+        </p:spPr>
+        <p:txBody>
+          <a:bodyPr wrap="square" lIns="0" tIns="0" rIns="0" bIns="0" rtlCol="0" anchor="ctr"/>
+          <a:lstStyle/>
+          <a:p>
+            <a:pPr algn="l" indent="0" marL="0">
+              <a:buNone/>
+            </a:pPr>
+            <a:r>
+              <a:rPr lang="en-US" sz="900" i="1" dirty="0">
                 <a:solidFill>
                   <a:srgbClr val="F26522"/>
                 </a:solidFill>
-                <a:latin typeface="Georgia" pitchFamily="34" charset="0"/>
-                <a:ea typeface="Georgia" pitchFamily="34" charset="-122"/>
-                <a:cs typeface="Georgia" pitchFamily="34" charset="-120"/>
-              </a:rPr>
-              <a:t>₹15,000 – ₹20,000</a:t>
-            </a:r>
-            <a:endParaRPr lang="en-US" sz="2800" dirty="0"/>
-          </a:p>
-        </p:txBody>
-      </p:sp>
-      <p:sp>
-        <p:nvSpPr>
-          <p:cNvPr id="9" name="Text 7"/>
-          <p:cNvSpPr/>
-          <p:nvPr/>
-        </p:nvSpPr>
-        <p:spPr>
-          <a:xfrm>
-            <a:off x="658368" y="2953512"/>
-            <a:ext cx="3749040" cy="274320"/>
-          </a:xfrm>
-          <a:prstGeom prst="rect">
-            <a:avLst/>
-          </a:prstGeom>
-          <a:noFill/>
-          <a:ln/>
-        </p:spPr>
-        <p:txBody>
-          <a:bodyPr wrap="square" lIns="0" tIns="0" rIns="0" bIns="0" rtlCol="0" anchor="ctr"/>
-          <a:lstStyle/>
-          <a:p>
-            <a:pPr indent="0" marL="0">
-              <a:buNone/>
-            </a:pPr>
-            <a:r>
-              <a:rPr lang="en-US" sz="900" dirty="0">
-                <a:solidFill>
-                  <a:srgbClr val="8C5A3A"/>
-                </a:solidFill>
-                <a:latin typeface="Calibri" pitchFamily="34" charset="0"/>
-                <a:ea typeface="Calibri" pitchFamily="34" charset="-122"/>
-                <a:cs typeface="Calibri" pitchFamily="34" charset="-120"/>
-              </a:rPr>
-              <a:t>per event</a:t>
+                <a:latin typeface="Calibri" pitchFamily="34" charset="0"/>
+                <a:ea typeface="Calibri" pitchFamily="34" charset="-122"/>
+                <a:cs typeface="Calibri" pitchFamily="34" charset="-120"/>
+              </a:rPr>
+              <a:t>bitcoincierge.in</a:t>
             </a:r>
             <a:endParaRPr lang="en-US" sz="900" dirty="0"/>
-          </a:p>
-        </p:txBody>
-      </p:sp>
-      <p:sp>
-        <p:nvSpPr>
-          <p:cNvPr id="10" name="Text 8"/>
-          <p:cNvSpPr/>
-          <p:nvPr/>
-        </p:nvSpPr>
-        <p:spPr>
-          <a:xfrm>
-            <a:off x="658368" y="3337560"/>
-            <a:ext cx="256032" cy="256032"/>
-          </a:xfrm>
-          <a:prstGeom prst="rect">
-            <a:avLst/>
-          </a:prstGeom>
-          <a:noFill/>
-          <a:ln/>
-        </p:spPr>
-        <p:txBody>
-          <a:bodyPr wrap="square" lIns="0" tIns="0" rIns="0" bIns="0" rtlCol="0" anchor="ctr"/>
-          <a:lstStyle/>
-          <a:p>
-            <a:pPr indent="0" marL="0">
-              <a:buNone/>
-            </a:pPr>
-            <a:r>
-              <a:rPr lang="en-US" sz="1000" dirty="0">
-                <a:solidFill>
-                  <a:srgbClr val="F26522"/>
-                </a:solidFill>
-                <a:latin typeface="Calibri" pitchFamily="34" charset="0"/>
-                <a:ea typeface="Calibri" pitchFamily="34" charset="-122"/>
-                <a:cs typeface="Calibri" pitchFamily="34" charset="-120"/>
-              </a:rPr>
-              <a:t>—</a:t>
-            </a:r>
-            <a:endParaRPr lang="en-US" sz="1000" dirty="0"/>
-          </a:p>
-        </p:txBody>
-      </p:sp>
-      <p:sp>
-        <p:nvSpPr>
-          <p:cNvPr id="11" name="Text 9"/>
-          <p:cNvSpPr/>
-          <p:nvPr/>
-        </p:nvSpPr>
-        <p:spPr>
-          <a:xfrm>
-            <a:off x="960120" y="3337560"/>
-            <a:ext cx="3474720" cy="256032"/>
-          </a:xfrm>
-          <a:prstGeom prst="rect">
-            <a:avLst/>
-          </a:prstGeom>
-          <a:noFill/>
-          <a:ln/>
-        </p:spPr>
-        <p:txBody>
-          <a:bodyPr wrap="square" lIns="0" tIns="0" rIns="0" bIns="0" rtlCol="0" anchor="ctr"/>
-          <a:lstStyle/>
-          <a:p>
-            <a:pPr indent="0" marL="0">
-              <a:buNone/>
-            </a:pPr>
-            <a:r>
-              <a:rPr lang="en-US" sz="950" dirty="0">
-                <a:solidFill>
-                  <a:srgbClr val="5C3A20"/>
-                </a:solidFill>
-                <a:latin typeface="Calibri" pitchFamily="34" charset="0"/>
-                <a:ea typeface="Calibri" pitchFamily="34" charset="-122"/>
-                <a:cs typeface="Calibri" pitchFamily="34" charset="-120"/>
-              </a:rPr>
-              <a:t>Venue booking &amp; management</a:t>
-            </a:r>
-            <a:endParaRPr lang="en-US" sz="950" dirty="0"/>
-          </a:p>
-        </p:txBody>
-      </p:sp>
-      <p:sp>
-        <p:nvSpPr>
-          <p:cNvPr id="12" name="Text 10"/>
-          <p:cNvSpPr/>
-          <p:nvPr/>
-        </p:nvSpPr>
-        <p:spPr>
-          <a:xfrm>
-            <a:off x="658368" y="3611880"/>
-            <a:ext cx="256032" cy="256032"/>
-          </a:xfrm>
-          <a:prstGeom prst="rect">
-            <a:avLst/>
-          </a:prstGeom>
-          <a:noFill/>
-          <a:ln/>
-        </p:spPr>
-        <p:txBody>
-          <a:bodyPr wrap="square" lIns="0" tIns="0" rIns="0" bIns="0" rtlCol="0" anchor="ctr"/>
-          <a:lstStyle/>
-          <a:p>
-            <a:pPr indent="0" marL="0">
-              <a:buNone/>
-            </a:pPr>
-            <a:r>
-              <a:rPr lang="en-US" sz="1000" dirty="0">
-                <a:solidFill>
-                  <a:srgbClr val="F26522"/>
-                </a:solidFill>
-                <a:latin typeface="Calibri" pitchFamily="34" charset="0"/>
-                <a:ea typeface="Calibri" pitchFamily="34" charset="-122"/>
-                <a:cs typeface="Calibri" pitchFamily="34" charset="-120"/>
-              </a:rPr>
-              <a:t>—</a:t>
-            </a:r>
-            <a:endParaRPr lang="en-US" sz="1000" dirty="0"/>
-          </a:p>
-        </p:txBody>
-      </p:sp>
-      <p:sp>
-        <p:nvSpPr>
-          <p:cNvPr id="13" name="Text 11"/>
-          <p:cNvSpPr/>
-          <p:nvPr/>
-        </p:nvSpPr>
-        <p:spPr>
-          <a:xfrm>
-            <a:off x="960120" y="3611880"/>
-            <a:ext cx="3474720" cy="256032"/>
-          </a:xfrm>
-          <a:prstGeom prst="rect">
-            <a:avLst/>
-          </a:prstGeom>
-          <a:noFill/>
-          <a:ln/>
-        </p:spPr>
-        <p:txBody>
-          <a:bodyPr wrap="square" lIns="0" tIns="0" rIns="0" bIns="0" rtlCol="0" anchor="ctr"/>
-          <a:lstStyle/>
-          <a:p>
-            <a:pPr indent="0" marL="0">
-              <a:buNone/>
-            </a:pPr>
-            <a:r>
-              <a:rPr lang="en-US" sz="950" dirty="0">
-                <a:solidFill>
-                  <a:srgbClr val="5C3A20"/>
-                </a:solidFill>
-                <a:latin typeface="Calibri" pitchFamily="34" charset="0"/>
-                <a:ea typeface="Calibri" pitchFamily="34" charset="-122"/>
-                <a:cs typeface="Calibri" pitchFamily="34" charset="-120"/>
-              </a:rPr>
-              <a:t>Mentor / speaker time</a:t>
-            </a:r>
-            <a:endParaRPr lang="en-US" sz="950" dirty="0"/>
-          </a:p>
-        </p:txBody>
-      </p:sp>
-      <p:sp>
-        <p:nvSpPr>
-          <p:cNvPr id="14" name="Text 12"/>
-          <p:cNvSpPr/>
-          <p:nvPr/>
-        </p:nvSpPr>
-        <p:spPr>
-          <a:xfrm>
-            <a:off x="658368" y="3886200"/>
-            <a:ext cx="256032" cy="256032"/>
-          </a:xfrm>
-          <a:prstGeom prst="rect">
-            <a:avLst/>
-          </a:prstGeom>
-          <a:noFill/>
-          <a:ln/>
-        </p:spPr>
-        <p:txBody>
-          <a:bodyPr wrap="square" lIns="0" tIns="0" rIns="0" bIns="0" rtlCol="0" anchor="ctr"/>
-          <a:lstStyle/>
-          <a:p>
-            <a:pPr indent="0" marL="0">
-              <a:buNone/>
-            </a:pPr>
-            <a:r>
-              <a:rPr lang="en-US" sz="1000" dirty="0">
-                <a:solidFill>
-                  <a:srgbClr val="F26522"/>
-                </a:solidFill>
-                <a:latin typeface="Calibri" pitchFamily="34" charset="0"/>
-                <a:ea typeface="Calibri" pitchFamily="34" charset="-122"/>
-                <a:cs typeface="Calibri" pitchFamily="34" charset="-120"/>
-              </a:rPr>
-              <a:t>—</a:t>
-            </a:r>
-            <a:endParaRPr lang="en-US" sz="1000" dirty="0"/>
-          </a:p>
-        </p:txBody>
-      </p:sp>
-      <p:sp>
-        <p:nvSpPr>
-          <p:cNvPr id="15" name="Text 13"/>
-          <p:cNvSpPr/>
-          <p:nvPr/>
-        </p:nvSpPr>
-        <p:spPr>
-          <a:xfrm>
-            <a:off x="960120" y="3886200"/>
-            <a:ext cx="3474720" cy="256032"/>
-          </a:xfrm>
-          <a:prstGeom prst="rect">
-            <a:avLst/>
-          </a:prstGeom>
-          <a:noFill/>
-          <a:ln/>
-        </p:spPr>
-        <p:txBody>
-          <a:bodyPr wrap="square" lIns="0" tIns="0" rIns="0" bIns="0" rtlCol="0" anchor="ctr"/>
-          <a:lstStyle/>
-          <a:p>
-            <a:pPr indent="0" marL="0">
-              <a:buNone/>
-            </a:pPr>
-            <a:r>
-              <a:rPr lang="en-US" sz="950" dirty="0">
-                <a:solidFill>
-                  <a:srgbClr val="5C3A20"/>
-                </a:solidFill>
-                <a:latin typeface="Calibri" pitchFamily="34" charset="0"/>
-                <a:ea typeface="Calibri" pitchFamily="34" charset="-122"/>
-                <a:cs typeface="Calibri" pitchFamily="34" charset="-120"/>
-              </a:rPr>
-              <a:t>Snacks, logistics, ops</a:t>
-            </a:r>
-            <a:endParaRPr lang="en-US" sz="950" dirty="0"/>
-          </a:p>
-        </p:txBody>
-      </p:sp>
-      <p:sp>
-        <p:nvSpPr>
-          <p:cNvPr id="16" name="Text 14"/>
-          <p:cNvSpPr/>
-          <p:nvPr/>
-        </p:nvSpPr>
-        <p:spPr>
-          <a:xfrm>
-            <a:off x="658368" y="4160520"/>
-            <a:ext cx="256032" cy="256032"/>
-          </a:xfrm>
-          <a:prstGeom prst="rect">
-            <a:avLst/>
-          </a:prstGeom>
-          <a:noFill/>
-          <a:ln/>
-        </p:spPr>
-        <p:txBody>
-          <a:bodyPr wrap="square" lIns="0" tIns="0" rIns="0" bIns="0" rtlCol="0" anchor="ctr"/>
-          <a:lstStyle/>
-          <a:p>
-            <a:pPr indent="0" marL="0">
-              <a:buNone/>
-            </a:pPr>
-            <a:r>
-              <a:rPr lang="en-US" sz="1000" dirty="0">
-                <a:solidFill>
-                  <a:srgbClr val="F26522"/>
-                </a:solidFill>
-                <a:latin typeface="Calibri" pitchFamily="34" charset="0"/>
-                <a:ea typeface="Calibri" pitchFamily="34" charset="-122"/>
-                <a:cs typeface="Calibri" pitchFamily="34" charset="-120"/>
-              </a:rPr>
-              <a:t>—</a:t>
-            </a:r>
-            <a:endParaRPr lang="en-US" sz="1000" dirty="0"/>
-          </a:p>
-        </p:txBody>
-      </p:sp>
-      <p:sp>
-        <p:nvSpPr>
-          <p:cNvPr id="17" name="Text 15"/>
-          <p:cNvSpPr/>
-          <p:nvPr/>
-        </p:nvSpPr>
-        <p:spPr>
-          <a:xfrm>
-            <a:off x="960120" y="4160520"/>
-            <a:ext cx="3474720" cy="256032"/>
-          </a:xfrm>
-          <a:prstGeom prst="rect">
-            <a:avLst/>
-          </a:prstGeom>
-          <a:noFill/>
-          <a:ln/>
-        </p:spPr>
-        <p:txBody>
-          <a:bodyPr wrap="square" lIns="0" tIns="0" rIns="0" bIns="0" rtlCol="0" anchor="ctr"/>
-          <a:lstStyle/>
-          <a:p>
-            <a:pPr indent="0" marL="0">
-              <a:buNone/>
-            </a:pPr>
-            <a:r>
-              <a:rPr lang="en-US" sz="950" dirty="0">
-                <a:solidFill>
-                  <a:srgbClr val="5C3A20"/>
-                </a:solidFill>
-                <a:latin typeface="Calibri" pitchFamily="34" charset="0"/>
-                <a:ea typeface="Calibri" pitchFamily="34" charset="-122"/>
-                <a:cs typeface="Calibri" pitchFamily="34" charset="-120"/>
-              </a:rPr>
-              <a:t>Post-event summary report</a:t>
-            </a:r>
-            <a:endParaRPr lang="en-US" sz="950" dirty="0"/>
-          </a:p>
-        </p:txBody>
-      </p:sp>
-      <p:sp>
-        <p:nvSpPr>
-          <p:cNvPr id="18" name="Shape 16"/>
-          <p:cNvSpPr/>
-          <p:nvPr/>
-        </p:nvSpPr>
-        <p:spPr>
-          <a:xfrm>
-            <a:off x="4800600" y="1371600"/>
-            <a:ext cx="4114800" cy="3429000"/>
-          </a:xfrm>
-          <a:prstGeom prst="rect">
-            <a:avLst/>
-          </a:prstGeom>
-          <a:solidFill>
-            <a:srgbClr val="FFFFFF"/>
-          </a:solidFill>
-          <a:ln w="9525">
-            <a:solidFill>
-              <a:srgbClr val="E5E7EB"/>
-            </a:solidFill>
-            <a:prstDash val="solid"/>
-          </a:ln>
-          <a:effectLst>
-            <a:outerShdw sx="100000" sy="100000" kx="0" ky="0" algn="bl" rotWithShape="0" blurRad="76200" dist="25400" dir="8100000">
-              <a:srgbClr val="000000">
-                <a:alpha val="8000"/>
-              </a:srgbClr>
-            </a:outerShdw>
-          </a:effectLst>
-        </p:spPr>
-      </p:sp>
-      <p:sp>
-        <p:nvSpPr>
-          <p:cNvPr id="19" name="Shape 17"/>
-          <p:cNvSpPr/>
-          <p:nvPr/>
-        </p:nvSpPr>
-        <p:spPr>
-          <a:xfrm>
-            <a:off x="5001768" y="1572768"/>
-            <a:ext cx="868680" cy="292608"/>
-          </a:xfrm>
-          <a:prstGeom prst="rect">
-            <a:avLst/>
-          </a:prstGeom>
-          <a:solidFill>
-            <a:srgbClr val="FAD9C8"/>
-          </a:solidFill>
-          <a:ln/>
-        </p:spPr>
-      </p:sp>
-      <p:sp>
-        <p:nvSpPr>
-          <p:cNvPr id="20" name="Text 18"/>
-          <p:cNvSpPr/>
-          <p:nvPr/>
-        </p:nvSpPr>
-        <p:spPr>
-          <a:xfrm>
-            <a:off x="5001768" y="1572768"/>
-            <a:ext cx="868680" cy="292608"/>
-          </a:xfrm>
-          <a:prstGeom prst="rect">
-            <a:avLst/>
-          </a:prstGeom>
-          <a:noFill/>
-          <a:ln/>
-        </p:spPr>
-        <p:txBody>
-          <a:bodyPr wrap="square" lIns="0" tIns="0" rIns="0" bIns="0" rtlCol="0" anchor="ctr"/>
-          <a:lstStyle/>
-          <a:p>
-            <a:pPr algn="ctr" indent="0" marL="0">
-              <a:buNone/>
-            </a:pPr>
-            <a:r>
-              <a:rPr lang="en-US" sz="750" b="1" spc="150" kern="0" dirty="0">
-                <a:solidFill>
-                  <a:srgbClr val="8A3010"/>
-                </a:solidFill>
-                <a:latin typeface="Calibri" pitchFamily="34" charset="0"/>
-                <a:ea typeface="Calibri" pitchFamily="34" charset="-122"/>
-                <a:cs typeface="Calibri" pitchFamily="34" charset="-120"/>
-              </a:rPr>
-              <a:t>VARIABLE</a:t>
-            </a:r>
-            <a:endParaRPr lang="en-US" sz="750" dirty="0"/>
-          </a:p>
-        </p:txBody>
-      </p:sp>
-      <p:sp>
-        <p:nvSpPr>
-          <p:cNvPr id="21" name="Text 19"/>
-          <p:cNvSpPr/>
-          <p:nvPr/>
-        </p:nvSpPr>
-        <p:spPr>
-          <a:xfrm>
-            <a:off x="5001768" y="1965960"/>
-            <a:ext cx="3749040" cy="365760"/>
-          </a:xfrm>
-          <a:prstGeom prst="rect">
-            <a:avLst/>
-          </a:prstGeom>
-          <a:noFill/>
-          <a:ln/>
-        </p:spPr>
-        <p:txBody>
-          <a:bodyPr wrap="square" lIns="0" tIns="0" rIns="0" bIns="0" rtlCol="0" anchor="ctr"/>
-          <a:lstStyle/>
-          <a:p>
-            <a:pPr indent="0" marL="0">
-              <a:buNone/>
-            </a:pPr>
-            <a:r>
-              <a:rPr lang="en-US" sz="1100" b="1" dirty="0">
-                <a:solidFill>
-                  <a:srgbClr val="1A1A1A"/>
-                </a:solidFill>
-                <a:latin typeface="Calibri" pitchFamily="34" charset="0"/>
-                <a:ea typeface="Calibri" pitchFamily="34" charset="-122"/>
-                <a:cs typeface="Calibri" pitchFamily="34" charset="-120"/>
-              </a:rPr>
-              <a:t>Performance / Revenue Share</a:t>
-            </a:r>
-            <a:endParaRPr lang="en-US" sz="1100" dirty="0"/>
-          </a:p>
-        </p:txBody>
-      </p:sp>
-      <p:sp>
-        <p:nvSpPr>
-          <p:cNvPr id="22" name="Text 20"/>
-          <p:cNvSpPr/>
-          <p:nvPr/>
-        </p:nvSpPr>
-        <p:spPr>
-          <a:xfrm>
-            <a:off x="5001768" y="2377440"/>
-            <a:ext cx="3749040" cy="566928"/>
-          </a:xfrm>
-          <a:prstGeom prst="rect">
-            <a:avLst/>
-          </a:prstGeom>
-          <a:noFill/>
-          <a:ln/>
-        </p:spPr>
-        <p:txBody>
-          <a:bodyPr wrap="square" lIns="0" tIns="0" rIns="0" bIns="0" rtlCol="0" anchor="ctr"/>
-          <a:lstStyle/>
-          <a:p>
-            <a:pPr indent="0" marL="0">
-              <a:buNone/>
-            </a:pPr>
-            <a:r>
-              <a:rPr lang="en-US" sz="2800" i="1" dirty="0">
-                <a:solidFill>
-                  <a:srgbClr val="F26522"/>
-                </a:solidFill>
-                <a:latin typeface="Georgia" pitchFamily="34" charset="0"/>
-                <a:ea typeface="Georgia" pitchFamily="34" charset="-122"/>
-                <a:cs typeface="Georgia" pitchFamily="34" charset="-120"/>
-              </a:rPr>
-              <a:t>0.5% – 2%</a:t>
-            </a:r>
-            <a:endParaRPr lang="en-US" sz="2800" dirty="0"/>
-          </a:p>
-        </p:txBody>
-      </p:sp>
-      <p:sp>
-        <p:nvSpPr>
-          <p:cNvPr id="23" name="Text 21"/>
-          <p:cNvSpPr/>
-          <p:nvPr/>
-        </p:nvSpPr>
-        <p:spPr>
-          <a:xfrm>
-            <a:off x="5001768" y="2953512"/>
-            <a:ext cx="3749040" cy="274320"/>
-          </a:xfrm>
-          <a:prstGeom prst="rect">
-            <a:avLst/>
-          </a:prstGeom>
-          <a:noFill/>
-          <a:ln/>
-        </p:spPr>
-        <p:txBody>
-          <a:bodyPr wrap="square" lIns="0" tIns="0" rIns="0" bIns="0" rtlCol="0" anchor="ctr"/>
-          <a:lstStyle/>
-          <a:p>
-            <a:pPr indent="0" marL="0">
-              <a:buNone/>
-            </a:pPr>
-            <a:r>
-              <a:rPr lang="en-US" sz="900" dirty="0">
-                <a:solidFill>
-                  <a:srgbClr val="8C5A3A"/>
-                </a:solidFill>
-                <a:latin typeface="Calibri" pitchFamily="34" charset="0"/>
-                <a:ea typeface="Calibri" pitchFamily="34" charset="-122"/>
-                <a:cs typeface="Calibri" pitchFamily="34" charset="-120"/>
-              </a:rPr>
-              <a:t>on attributed sales or activations</a:t>
-            </a:r>
-            <a:endParaRPr lang="en-US" sz="900" dirty="0"/>
-          </a:p>
-        </p:txBody>
-      </p:sp>
-      <p:sp>
-        <p:nvSpPr>
-          <p:cNvPr id="24" name="Text 22"/>
-          <p:cNvSpPr/>
-          <p:nvPr/>
-        </p:nvSpPr>
-        <p:spPr>
-          <a:xfrm>
-            <a:off x="5001768" y="3337560"/>
-            <a:ext cx="256032" cy="256032"/>
-          </a:xfrm>
-          <a:prstGeom prst="rect">
-            <a:avLst/>
-          </a:prstGeom>
-          <a:noFill/>
-          <a:ln/>
-        </p:spPr>
-        <p:txBody>
-          <a:bodyPr wrap="square" lIns="0" tIns="0" rIns="0" bIns="0" rtlCol="0" anchor="ctr"/>
-          <a:lstStyle/>
-          <a:p>
-            <a:pPr indent="0" marL="0">
-              <a:buNone/>
-            </a:pPr>
-            <a:r>
-              <a:rPr lang="en-US" sz="1000" dirty="0">
-                <a:solidFill>
-                  <a:srgbClr val="F26522"/>
-                </a:solidFill>
-                <a:latin typeface="Calibri" pitchFamily="34" charset="0"/>
-                <a:ea typeface="Calibri" pitchFamily="34" charset="-122"/>
-                <a:cs typeface="Calibri" pitchFamily="34" charset="-120"/>
-              </a:rPr>
-              <a:t>—</a:t>
-            </a:r>
-            <a:endParaRPr lang="en-US" sz="1000" dirty="0"/>
-          </a:p>
-        </p:txBody>
-      </p:sp>
-      <p:sp>
-        <p:nvSpPr>
-          <p:cNvPr id="25" name="Text 23"/>
-          <p:cNvSpPr/>
-          <p:nvPr/>
-        </p:nvSpPr>
-        <p:spPr>
-          <a:xfrm>
-            <a:off x="5303520" y="3337560"/>
-            <a:ext cx="3474720" cy="256032"/>
-          </a:xfrm>
-          <a:prstGeom prst="rect">
-            <a:avLst/>
-          </a:prstGeom>
-          <a:noFill/>
-          <a:ln/>
-        </p:spPr>
-        <p:txBody>
-          <a:bodyPr wrap="square" lIns="0" tIns="0" rIns="0" bIns="0" rtlCol="0" anchor="ctr"/>
-          <a:lstStyle/>
-          <a:p>
-            <a:pPr indent="0" marL="0">
-              <a:buNone/>
-            </a:pPr>
-            <a:r>
-              <a:rPr lang="en-US" sz="950" dirty="0">
-                <a:solidFill>
-                  <a:srgbClr val="5C3A20"/>
-                </a:solidFill>
-                <a:latin typeface="Calibri" pitchFamily="34" charset="0"/>
-                <a:ea typeface="Calibri" pitchFamily="34" charset="-122"/>
-                <a:cs typeface="Calibri" pitchFamily="34" charset="-120"/>
-              </a:rPr>
-              <a:t>KYC completions / deposits</a:t>
-            </a:r>
-            <a:endParaRPr lang="en-US" sz="950" dirty="0"/>
-          </a:p>
-        </p:txBody>
-      </p:sp>
-      <p:sp>
-        <p:nvSpPr>
-          <p:cNvPr id="26" name="Text 24"/>
-          <p:cNvSpPr/>
-          <p:nvPr/>
-        </p:nvSpPr>
-        <p:spPr>
-          <a:xfrm>
-            <a:off x="5001768" y="3611880"/>
-            <a:ext cx="256032" cy="256032"/>
-          </a:xfrm>
-          <a:prstGeom prst="rect">
-            <a:avLst/>
-          </a:prstGeom>
-          <a:noFill/>
-          <a:ln/>
-        </p:spPr>
-        <p:txBody>
-          <a:bodyPr wrap="square" lIns="0" tIns="0" rIns="0" bIns="0" rtlCol="0" anchor="ctr"/>
-          <a:lstStyle/>
-          <a:p>
-            <a:pPr indent="0" marL="0">
-              <a:buNone/>
-            </a:pPr>
-            <a:r>
-              <a:rPr lang="en-US" sz="1000" dirty="0">
-                <a:solidFill>
-                  <a:srgbClr val="F26522"/>
-                </a:solidFill>
-                <a:latin typeface="Calibri" pitchFamily="34" charset="0"/>
-                <a:ea typeface="Calibri" pitchFamily="34" charset="-122"/>
-                <a:cs typeface="Calibri" pitchFamily="34" charset="-120"/>
-              </a:rPr>
-              <a:t>—</a:t>
-            </a:r>
-            <a:endParaRPr lang="en-US" sz="1000" dirty="0"/>
-          </a:p>
-        </p:txBody>
-      </p:sp>
-      <p:sp>
-        <p:nvSpPr>
-          <p:cNvPr id="27" name="Text 25"/>
-          <p:cNvSpPr/>
-          <p:nvPr/>
-        </p:nvSpPr>
-        <p:spPr>
-          <a:xfrm>
-            <a:off x="5303520" y="3611880"/>
-            <a:ext cx="3474720" cy="256032"/>
-          </a:xfrm>
-          <a:prstGeom prst="rect">
-            <a:avLst/>
-          </a:prstGeom>
-          <a:noFill/>
-          <a:ln/>
-        </p:spPr>
-        <p:txBody>
-          <a:bodyPr wrap="square" lIns="0" tIns="0" rIns="0" bIns="0" rtlCol="0" anchor="ctr"/>
-          <a:lstStyle/>
-          <a:p>
-            <a:pPr indent="0" marL="0">
-              <a:buNone/>
-            </a:pPr>
-            <a:r>
-              <a:rPr lang="en-US" sz="950" dirty="0">
-                <a:solidFill>
-                  <a:srgbClr val="5C3A20"/>
-                </a:solidFill>
-                <a:latin typeface="Calibri" pitchFamily="34" charset="0"/>
-                <a:ea typeface="Calibri" pitchFamily="34" charset="-122"/>
-                <a:cs typeface="Calibri" pitchFamily="34" charset="-120"/>
-              </a:rPr>
-              <a:t>Hardware wallet sales</a:t>
-            </a:r>
-            <a:endParaRPr lang="en-US" sz="950" dirty="0"/>
-          </a:p>
-        </p:txBody>
-      </p:sp>
-      <p:sp>
-        <p:nvSpPr>
-          <p:cNvPr id="28" name="Text 26"/>
-          <p:cNvSpPr/>
-          <p:nvPr/>
-        </p:nvSpPr>
-        <p:spPr>
-          <a:xfrm>
-            <a:off x="5001768" y="3886200"/>
-            <a:ext cx="256032" cy="256032"/>
-          </a:xfrm>
-          <a:prstGeom prst="rect">
-            <a:avLst/>
-          </a:prstGeom>
-          <a:noFill/>
-          <a:ln/>
-        </p:spPr>
-        <p:txBody>
-          <a:bodyPr wrap="square" lIns="0" tIns="0" rIns="0" bIns="0" rtlCol="0" anchor="ctr"/>
-          <a:lstStyle/>
-          <a:p>
-            <a:pPr indent="0" marL="0">
-              <a:buNone/>
-            </a:pPr>
-            <a:r>
-              <a:rPr lang="en-US" sz="1000" dirty="0">
-                <a:solidFill>
-                  <a:srgbClr val="F26522"/>
-                </a:solidFill>
-                <a:latin typeface="Calibri" pitchFamily="34" charset="0"/>
-                <a:ea typeface="Calibri" pitchFamily="34" charset="-122"/>
-                <a:cs typeface="Calibri" pitchFamily="34" charset="-120"/>
-              </a:rPr>
-              <a:t>—</a:t>
-            </a:r>
-            <a:endParaRPr lang="en-US" sz="1000" dirty="0"/>
-          </a:p>
-        </p:txBody>
-      </p:sp>
-      <p:sp>
-        <p:nvSpPr>
-          <p:cNvPr id="29" name="Text 27"/>
-          <p:cNvSpPr/>
-          <p:nvPr/>
-        </p:nvSpPr>
-        <p:spPr>
-          <a:xfrm>
-            <a:off x="5303520" y="3886200"/>
-            <a:ext cx="3474720" cy="256032"/>
-          </a:xfrm>
-          <a:prstGeom prst="rect">
-            <a:avLst/>
-          </a:prstGeom>
-          <a:noFill/>
-          <a:ln/>
-        </p:spPr>
-        <p:txBody>
-          <a:bodyPr wrap="square" lIns="0" tIns="0" rIns="0" bIns="0" rtlCol="0" anchor="ctr"/>
-          <a:lstStyle/>
-          <a:p>
-            <a:pPr indent="0" marL="0">
-              <a:buNone/>
-            </a:pPr>
-            <a:r>
-              <a:rPr lang="en-US" sz="950" dirty="0">
-                <a:solidFill>
-                  <a:srgbClr val="5C3A20"/>
-                </a:solidFill>
-                <a:latin typeface="Calibri" pitchFamily="34" charset="0"/>
-                <a:ea typeface="Calibri" pitchFamily="34" charset="-122"/>
-                <a:cs typeface="Calibri" pitchFamily="34" charset="-120"/>
-              </a:rPr>
-              <a:t>Loan / custody product sign-ups</a:t>
-            </a:r>
-            <a:endParaRPr lang="en-US" sz="950" dirty="0"/>
-          </a:p>
-        </p:txBody>
-      </p:sp>
-      <p:sp>
-        <p:nvSpPr>
-          <p:cNvPr id="30" name="Text 28"/>
-          <p:cNvSpPr/>
-          <p:nvPr/>
-        </p:nvSpPr>
-        <p:spPr>
-          <a:xfrm>
-            <a:off x="5001768" y="4160520"/>
-            <a:ext cx="256032" cy="256032"/>
-          </a:xfrm>
-          <a:prstGeom prst="rect">
-            <a:avLst/>
-          </a:prstGeom>
-          <a:noFill/>
-          <a:ln/>
-        </p:spPr>
-        <p:txBody>
-          <a:bodyPr wrap="square" lIns="0" tIns="0" rIns="0" bIns="0" rtlCol="0" anchor="ctr"/>
-          <a:lstStyle/>
-          <a:p>
-            <a:pPr indent="0" marL="0">
-              <a:buNone/>
-            </a:pPr>
-            <a:r>
-              <a:rPr lang="en-US" sz="1000" dirty="0">
-                <a:solidFill>
-                  <a:srgbClr val="F26522"/>
-                </a:solidFill>
-                <a:latin typeface="Calibri" pitchFamily="34" charset="0"/>
-                <a:ea typeface="Calibri" pitchFamily="34" charset="-122"/>
-                <a:cs typeface="Calibri" pitchFamily="34" charset="-120"/>
-              </a:rPr>
-              <a:t>—</a:t>
-            </a:r>
-            <a:endParaRPr lang="en-US" sz="1000" dirty="0"/>
-          </a:p>
-        </p:txBody>
-      </p:sp>
-      <p:sp>
-        <p:nvSpPr>
-          <p:cNvPr id="31" name="Text 29"/>
-          <p:cNvSpPr/>
-          <p:nvPr/>
-        </p:nvSpPr>
-        <p:spPr>
-          <a:xfrm>
-            <a:off x="5303520" y="4160520"/>
-            <a:ext cx="3474720" cy="256032"/>
-          </a:xfrm>
-          <a:prstGeom prst="rect">
-            <a:avLst/>
-          </a:prstGeom>
-          <a:noFill/>
-          <a:ln/>
-        </p:spPr>
-        <p:txBody>
-          <a:bodyPr wrap="square" lIns="0" tIns="0" rIns="0" bIns="0" rtlCol="0" anchor="ctr"/>
-          <a:lstStyle/>
-          <a:p>
-            <a:pPr indent="0" marL="0">
-              <a:buNone/>
-            </a:pPr>
-            <a:r>
-              <a:rPr lang="en-US" sz="950" dirty="0">
-                <a:solidFill>
-                  <a:srgbClr val="5C3A20"/>
-                </a:solidFill>
-                <a:latin typeface="Calibri" pitchFamily="34" charset="0"/>
-                <a:ea typeface="Calibri" pitchFamily="34" charset="-122"/>
-                <a:cs typeface="Calibri" pitchFamily="34" charset="-120"/>
-              </a:rPr>
-              <a:t>Referrals through mentor network</a:t>
-            </a:r>
-            <a:endParaRPr lang="en-US" sz="950" dirty="0"/>
-          </a:p>
-        </p:txBody>
-      </p:sp>
-      <p:sp>
-        <p:nvSpPr>
-          <p:cNvPr id="32" name="Shape 30"/>
-          <p:cNvSpPr/>
-          <p:nvPr/>
-        </p:nvSpPr>
-        <p:spPr>
-          <a:xfrm>
-            <a:off x="0" y="4983480"/>
-            <a:ext cx="9144000" cy="164592"/>
-          </a:xfrm>
-          <a:prstGeom prst="rect">
-            <a:avLst/>
-          </a:prstGeom>
-          <a:solidFill>
-            <a:srgbClr val="FFF7F0"/>
-          </a:solidFill>
-          <a:ln/>
-        </p:spPr>
-      </p:sp>
-      <p:sp>
-        <p:nvSpPr>
-          <p:cNvPr id="33" name="Text 31"/>
-          <p:cNvSpPr/>
-          <p:nvPr/>
-        </p:nvSpPr>
-        <p:spPr>
-          <a:xfrm>
-            <a:off x="457200" y="4992624"/>
-            <a:ext cx="8229600" cy="146304"/>
-          </a:xfrm>
-          <a:prstGeom prst="rect">
-            <a:avLst/>
-          </a:prstGeom>
-          <a:noFill/>
-          <a:ln/>
-        </p:spPr>
-        <p:txBody>
-          <a:bodyPr wrap="square" lIns="0" tIns="0" rIns="0" bIns="0" rtlCol="0" anchor="ctr"/>
-          <a:lstStyle/>
-          <a:p>
-            <a:pPr algn="l" indent="0" marL="0">
-              <a:buNone/>
-            </a:pPr>
-            <a:r>
-              <a:rPr lang="en-US" sz="750" dirty="0">
-                <a:solidFill>
-                  <a:srgbClr val="8C5A3A"/>
-                </a:solidFill>
-                <a:latin typeface="Calibri" pitchFamily="34" charset="0"/>
-                <a:ea typeface="Calibri" pitchFamily="34" charset="-122"/>
-                <a:cs typeface="Calibri" pitchFamily="34" charset="-120"/>
-              </a:rPr>
-              <a:t>bitcoincierge.in</a:t>
-            </a:r>
-            <a:endParaRPr lang="en-US" sz="750" dirty="0"/>
           </a:p>
         </p:txBody>
       </p:sp>
@@ -6320,7 +5472,7 @@
                 <a:ea typeface="Georgia" pitchFamily="34" charset="-122"/>
                 <a:cs typeface="Georgia" pitchFamily="34" charset="-120"/>
               </a:rPr>
-              <a:t>Getbit</a:t>
+              <a:t>Zebpay</a:t>
             </a:r>
             <a:endParaRPr lang="en-US" sz="5600" dirty="0"/>
           </a:p>
@@ -6359,7 +5511,7 @@
                 <a:ea typeface="Calibri" pitchFamily="34" charset="-122"/>
                 <a:cs typeface="Calibri" pitchFamily="34" charset="-120"/>
               </a:rPr>
-              <a:t>Bitcoin-only exchange from India. 200+ attendees across meetups powered by Bitcoincierge.</a:t>
+              <a:t>India's leading crypto exchange. Hosted meetups across Mumbai and Delhi, reaching hundreds of attendees.</a:t>
             </a:r>
             <a:endParaRPr lang="en-US" sz="1800" dirty="0"/>
           </a:p>
@@ -6489,7 +5641,7 @@
                 <a:ea typeface="Georgia" pitchFamily="34" charset="-122"/>
                 <a:cs typeface="Georgia" pitchFamily="34" charset="-120"/>
               </a:rPr>
-              <a:t>Zebpay</a:t>
+              <a:t>Jetking</a:t>
             </a:r>
             <a:endParaRPr lang="en-US" sz="5600" dirty="0"/>
           </a:p>
@@ -6528,7 +5680,7 @@
                 <a:ea typeface="Calibri" pitchFamily="34" charset="-122"/>
                 <a:cs typeface="Calibri" pitchFamily="34" charset="-120"/>
               </a:rPr>
-              <a:t>India's leading crypto exchange. Hosted meetups across Mumbai and Delhi, reaching hundreds of attendees.</a:t>
+              <a:t>Reached thousands through in-person meetups and online streams, spreading their Bitcoin treasury story to potential investors.</a:t>
             </a:r>
             <a:endParaRPr lang="en-US" sz="1800" dirty="0"/>
           </a:p>
@@ -6658,7 +5810,7 @@
                 <a:ea typeface="Georgia" pitchFamily="34" charset="-122"/>
                 <a:cs typeface="Georgia" pitchFamily="34" charset="-120"/>
               </a:rPr>
-              <a:t>Jetking</a:t>
+              <a:t>Ourpool</a:t>
             </a:r>
             <a:endParaRPr lang="en-US" sz="5600" dirty="0"/>
           </a:p>
@@ -6697,7 +5849,7 @@
                 <a:ea typeface="Calibri" pitchFamily="34" charset="-122"/>
                 <a:cs typeface="Calibri" pitchFamily="34" charset="-120"/>
               </a:rPr>
-              <a:t>Reached thousands through in-person meetups and online streams, spreading their Bitcoin treasury story to potential investors.</a:t>
+              <a:t>3 meetups across Bangalore, Mumbai, and Delhi. Partners and ecosystem providers onboarded to their Bitcoin Mining Academy in Goa, culminating in a paid 30+ attendee cohort.</a:t>
             </a:r>
             <a:endParaRPr lang="en-US" sz="1800" dirty="0"/>
           </a:p>
@@ -6827,7 +5979,7 @@
                 <a:ea typeface="Georgia" pitchFamily="34" charset="-122"/>
                 <a:cs typeface="Georgia" pitchFamily="34" charset="-120"/>
               </a:rPr>
-              <a:t>Ourpool</a:t>
+              <a:t>Bitasha</a:t>
             </a:r>
             <a:endParaRPr lang="en-US" sz="5600" dirty="0"/>
           </a:p>
@@ -6866,7 +6018,7 @@
                 <a:ea typeface="Calibri" pitchFamily="34" charset="-122"/>
                 <a:cs typeface="Calibri" pitchFamily="34" charset="-120"/>
               </a:rPr>
-              <a:t>3 meetups across Bangalore, Mumbai, and Delhi. Partners and ecosystem providers onboarded to their Bitcoin Mining Academy in Goa, culminating in a paid 30+ attendee cohort.</a:t>
+              <a:t>Piloted first meetup, sold 5+ BitAxe through Delhi meetup and warmed attendees to visit them at Bitplebs.</a:t>
             </a:r>
             <a:endParaRPr lang="en-US" sz="1800" dirty="0"/>
           </a:p>
@@ -6996,7 +6148,7 @@
                 <a:ea typeface="Georgia" pitchFamily="34" charset="-122"/>
                 <a:cs typeface="Georgia" pitchFamily="34" charset="-120"/>
               </a:rPr>
-              <a:t>Bitasha</a:t>
+              <a:t>Cryobrick</a:t>
             </a:r>
             <a:endParaRPr lang="en-US" sz="5600" dirty="0"/>
           </a:p>
@@ -7035,7 +6187,7 @@
                 <a:ea typeface="Calibri" pitchFamily="34" charset="-122"/>
                 <a:cs typeface="Calibri" pitchFamily="34" charset="-120"/>
               </a:rPr>
-              <a:t>Piloted first meetup, sold 5+ BitAxe through Delhi meetup and warmed attendees to visit them at Bitplebs.</a:t>
+              <a:t>First user activation through meetups in Goa. Onboarded senior Bitcoiners as beta testers for v1 of the app.</a:t>
             </a:r>
             <a:endParaRPr lang="en-US" sz="1800" dirty="0"/>
           </a:p>
@@ -7121,13 +6273,13 @@
         <p:spPr>
           <a:xfrm>
             <a:off x="0" y="0"/>
-            <a:ext cx="9144000" cy="64008"/>
+            <a:ext cx="9144000" cy="5143500"/>
           </a:xfrm>
           <a:prstGeom prst="rect">
             <a:avLst/>
           </a:prstGeom>
           <a:solidFill>
-            <a:srgbClr val="F26522"/>
+            <a:srgbClr val="000000"/>
           </a:solidFill>
           <a:ln/>
         </p:spPr>
@@ -7135,84 +6287,6 @@
       <p:sp>
         <p:nvSpPr>
           <p:cNvPr id="3" name="Text 1"/>
-          <p:cNvSpPr/>
-          <p:nvPr/>
-        </p:nvSpPr>
-        <p:spPr>
-          <a:xfrm>
-            <a:off x="457200" y="1828800"/>
-            <a:ext cx="4572000" cy="914400"/>
-          </a:xfrm>
-          <a:prstGeom prst="rect">
-            <a:avLst/>
-          </a:prstGeom>
-          <a:noFill/>
-          <a:ln/>
-        </p:spPr>
-        <p:txBody>
-          <a:bodyPr wrap="square" lIns="0" tIns="0" rIns="0" bIns="0" rtlCol="0" anchor="ctr"/>
-          <a:lstStyle/>
-          <a:p>
-            <a:pPr algn="l" indent="0" marL="0">
-              <a:buNone/>
-            </a:pPr>
-            <a:r>
-              <a:rPr lang="en-US" sz="5600" i="1" dirty="0">
-                <a:solidFill>
-                  <a:srgbClr val="1A1A1A"/>
-                </a:solidFill>
-                <a:latin typeface="Georgia" pitchFamily="34" charset="0"/>
-                <a:ea typeface="Georgia" pitchFamily="34" charset="-122"/>
-                <a:cs typeface="Georgia" pitchFamily="34" charset="-120"/>
-              </a:rPr>
-              <a:t>Cryobrick</a:t>
-            </a:r>
-            <a:endParaRPr lang="en-US" sz="5600" dirty="0"/>
-          </a:p>
-        </p:txBody>
-      </p:sp>
-      <p:sp>
-        <p:nvSpPr>
-          <p:cNvPr id="4" name="Text 2"/>
-          <p:cNvSpPr/>
-          <p:nvPr/>
-        </p:nvSpPr>
-        <p:spPr>
-          <a:xfrm>
-            <a:off x="457200" y="2926080"/>
-            <a:ext cx="4389120" cy="1828800"/>
-          </a:xfrm>
-          <a:prstGeom prst="rect">
-            <a:avLst/>
-          </a:prstGeom>
-          <a:noFill/>
-          <a:ln/>
-        </p:spPr>
-        <p:txBody>
-          <a:bodyPr wrap="square" lIns="0" tIns="0" rIns="0" bIns="0" rtlCol="0" anchor="ctr"/>
-          <a:lstStyle/>
-          <a:p>
-            <a:pPr algn="l" indent="0" marL="0">
-              <a:buNone/>
-            </a:pPr>
-            <a:r>
-              <a:rPr lang="en-US" sz="1800" dirty="0">
-                <a:solidFill>
-                  <a:srgbClr val="8C5A3A"/>
-                </a:solidFill>
-                <a:latin typeface="Calibri" pitchFamily="34" charset="0"/>
-                <a:ea typeface="Calibri" pitchFamily="34" charset="-122"/>
-                <a:cs typeface="Calibri" pitchFamily="34" charset="-120"/>
-              </a:rPr>
-              <a:t>First user activation through meetups in Goa. Onboarded senior Bitcoiners as beta testers for v1 of the app.</a:t>
-            </a:r>
-            <a:endParaRPr lang="en-US" sz="1800" dirty="0"/>
-          </a:p>
-        </p:txBody>
-      </p:sp>
-      <p:sp>
-        <p:nvSpPr>
-          <p:cNvPr id="5" name="Text 3"/>
           <p:cNvSpPr/>
           <p:nvPr/>
         </p:nvSpPr>
@@ -7513,97 +6587,6 @@
               <a:t>500%</a:t>
             </a:r>
             <a:endParaRPr lang="en-US" sz="1200" dirty="0"/>
-          </a:p>
-        </p:txBody>
-      </p:sp>
-    </p:spTree>
-  </p:cSld>
-  <p:clrMapOvr>
-    <a:masterClrMapping/>
-  </p:clrMapOvr>
-</p:sld>
-</file>
-
-<file path=ppt/slides/slide20.xml><?xml version="1.0" encoding="utf-8"?>
-<p:sld xmlns:a="http://schemas.openxmlformats.org/drawingml/2006/main" xmlns:r="http://schemas.openxmlformats.org/officeDocument/2006/relationships" xmlns:p="http://schemas.openxmlformats.org/presentationml/2006/main">
-  <p:cSld name="Slide 20">
-    <p:bg>
-      <p:bgPr>
-        <a:solidFill>
-          <a:srgbClr val="FFFFFF"/>
-        </a:solidFill>
-      </p:bgPr>
-    </p:bg>
-    <p:spTree>
-      <p:nvGrpSpPr>
-        <p:cNvPr id="1" name=""/>
-        <p:cNvGrpSpPr/>
-        <p:nvPr/>
-      </p:nvGrpSpPr>
-      <p:grpSpPr>
-        <a:xfrm>
-          <a:off x="0" y="0"/>
-          <a:ext cx="0" cy="0"/>
-          <a:chOff x="0" y="0"/>
-          <a:chExt cx="0" cy="0"/>
-        </a:xfrm>
-      </p:grpSpPr>
-      <p:sp>
-        <p:nvSpPr>
-          <p:cNvPr id="2" name="Shape 0"/>
-          <p:cNvSpPr/>
-          <p:nvPr/>
-        </p:nvSpPr>
-        <p:spPr>
-          <a:xfrm>
-            <a:off x="0" y="0"/>
-            <a:ext cx="9144000" cy="5143500"/>
-          </a:xfrm>
-          <a:prstGeom prst="rect">
-            <a:avLst/>
-          </a:prstGeom>
-          <a:solidFill>
-            <a:srgbClr val="000000"/>
-          </a:solidFill>
-          <a:ln/>
-        </p:spPr>
-      </p:sp>
-      <p:sp>
-        <p:nvSpPr>
-          <p:cNvPr id="3" name="Text 1"/>
-          <p:cNvSpPr/>
-          <p:nvPr/>
-        </p:nvSpPr>
-        <p:spPr>
-          <a:xfrm>
-            <a:off x="457200" y="4892040"/>
-            <a:ext cx="8229600" cy="201168"/>
-          </a:xfrm>
-          <a:prstGeom prst="rect">
-            <a:avLst/>
-          </a:prstGeom>
-          <a:noFill/>
-          <a:ln/>
-        </p:spPr>
-        <p:txBody>
-          <a:bodyPr wrap="square" lIns="0" tIns="0" rIns="0" bIns="0" rtlCol="0" anchor="ctr"/>
-          <a:lstStyle/>
-          <a:p>
-            <a:pPr algn="l" indent="0" marL="0">
-              <a:buNone/>
-            </a:pPr>
-            <a:r>
-              <a:rPr lang="en-US" sz="900" i="1" dirty="0">
-                <a:solidFill>
-                  <a:srgbClr val="F26522"/>
-                </a:solidFill>
-                <a:latin typeface="Calibri" pitchFamily="34" charset="0"/>
-                <a:ea typeface="Calibri" pitchFamily="34" charset="-122"/>
-                <a:cs typeface="Calibri" pitchFamily="34" charset="-120"/>
-              </a:rPr>
-              <a:t>bitcoincierge.in</a:t>
-            </a:r>
-            <a:endParaRPr lang="en-US" sz="900" dirty="0"/>
           </a:p>
         </p:txBody>
       </p:sp>
@@ -8250,7 +7233,7 @@
     <p:bg>
       <p:bgPr>
         <a:solidFill>
-          <a:srgbClr val="FFF7F0"/>
+          <a:srgbClr val="FFFFFF"/>
         </a:solidFill>
       </p:bgPr>
     </p:bg>
@@ -8276,8 +7259,316 @@
         </p:nvSpPr>
         <p:spPr>
           <a:xfrm>
-            <a:off x="411480" y="475488"/>
-            <a:ext cx="50292" cy="1005840"/>
+            <a:off x="0" y="0"/>
+            <a:ext cx="4389120" cy="5143500"/>
+          </a:xfrm>
+          <a:prstGeom prst="rect">
+            <a:avLst/>
+          </a:prstGeom>
+          <a:solidFill>
+            <a:srgbClr val="FEF0E6"/>
+          </a:solidFill>
+          <a:ln/>
+        </p:spPr>
+      </p:sp>
+      <p:sp>
+        <p:nvSpPr>
+          <p:cNvPr id="3" name="Shape 1"/>
+          <p:cNvSpPr/>
+          <p:nvPr/>
+        </p:nvSpPr>
+        <p:spPr>
+          <a:xfrm>
+            <a:off x="0" y="0"/>
+            <a:ext cx="4389120" cy="64008"/>
+          </a:xfrm>
+          <a:prstGeom prst="rect">
+            <a:avLst/>
+          </a:prstGeom>
+          <a:solidFill>
+            <a:srgbClr val="1D4ED8"/>
+          </a:solidFill>
+          <a:ln/>
+        </p:spPr>
+      </p:sp>
+      <p:sp>
+        <p:nvSpPr>
+          <p:cNvPr id="4" name="Text 2"/>
+          <p:cNvSpPr/>
+          <p:nvPr/>
+        </p:nvSpPr>
+        <p:spPr>
+          <a:xfrm>
+            <a:off x="274320" y="274320"/>
+            <a:ext cx="3840480" cy="411480"/>
+          </a:xfrm>
+          <a:prstGeom prst="rect">
+            <a:avLst/>
+          </a:prstGeom>
+          <a:noFill/>
+          <a:ln/>
+        </p:spPr>
+        <p:txBody>
+          <a:bodyPr wrap="square" lIns="0" tIns="0" rIns="0" bIns="0" rtlCol="0" anchor="ctr"/>
+          <a:lstStyle/>
+          <a:p>
+            <a:pPr algn="l" indent="0" marL="0">
+              <a:buNone/>
+            </a:pPr>
+            <a:r>
+              <a:rPr lang="en-US" sz="1100" b="1" spc="400" kern="0" dirty="0">
+                <a:solidFill>
+                  <a:srgbClr val="1D4ED8"/>
+                </a:solidFill>
+                <a:latin typeface="Calibri" pitchFamily="34" charset="0"/>
+                <a:ea typeface="Calibri" pitchFamily="34" charset="-122"/>
+                <a:cs typeface="Calibri" pitchFamily="34" charset="-120"/>
+              </a:rPr>
+              <a:t>ONLINE</a:t>
+            </a:r>
+            <a:endParaRPr lang="en-US" sz="1100" dirty="0"/>
+          </a:p>
+        </p:txBody>
+      </p:sp>
+      <p:sp>
+        <p:nvSpPr>
+          <p:cNvPr id="5" name="Text 3"/>
+          <p:cNvSpPr/>
+          <p:nvPr/>
+        </p:nvSpPr>
+        <p:spPr>
+          <a:xfrm>
+            <a:off x="365760" y="777240"/>
+            <a:ext cx="3657600" cy="1828800"/>
+          </a:xfrm>
+          <a:prstGeom prst="rect">
+            <a:avLst/>
+          </a:prstGeom>
+          <a:noFill/>
+          <a:ln/>
+        </p:spPr>
+        <p:txBody>
+          <a:bodyPr wrap="square" lIns="0" tIns="0" rIns="0" bIns="0" rtlCol="0" anchor="ctr"/>
+          <a:lstStyle/>
+          <a:p>
+            <a:pPr algn="ctr" indent="0" marL="0">
+              <a:buNone/>
+            </a:pPr>
+            <a:r>
+              <a:rPr lang="en-US" sz="3000" dirty="0">
+                <a:solidFill>
+                  <a:srgbClr val="000000"/>
+                </a:solidFill>
+                <a:latin typeface="Calibri" pitchFamily="34" charset="0"/>
+                <a:ea typeface="Calibri" pitchFamily="34" charset="-122"/>
+                <a:cs typeface="Calibri" pitchFamily="34" charset="-120"/>
+              </a:rPr>
+              <a:t>📱 📱 📱</a:t>
+            </a:r>
+            <a:endParaRPr lang="en-US" sz="3000" dirty="0"/>
+          </a:p>
+          <a:p>
+            <a:pPr algn="ctr" indent="0" marL="0">
+              <a:buNone/>
+            </a:pPr>
+            <a:r>
+              <a:rPr lang="en-US" sz="3000" dirty="0">
+                <a:solidFill>
+                  <a:srgbClr val="000000"/>
+                </a:solidFill>
+                <a:latin typeface="Calibri" pitchFamily="34" charset="0"/>
+                <a:ea typeface="Calibri" pitchFamily="34" charset="-122"/>
+                <a:cs typeface="Calibri" pitchFamily="34" charset="-120"/>
+              </a:rPr>
+              <a:t>🤖 🤖 🤖</a:t>
+            </a:r>
+            <a:endParaRPr lang="en-US" sz="3000" dirty="0"/>
+          </a:p>
+          <a:p>
+            <a:pPr algn="ctr" indent="0" marL="0">
+              <a:buNone/>
+            </a:pPr>
+            <a:r>
+              <a:rPr lang="en-US" sz="3000" dirty="0">
+                <a:solidFill>
+                  <a:srgbClr val="000000"/>
+                </a:solidFill>
+                <a:latin typeface="Calibri" pitchFamily="34" charset="0"/>
+                <a:ea typeface="Calibri" pitchFamily="34" charset="-122"/>
+                <a:cs typeface="Calibri" pitchFamily="34" charset="-120"/>
+              </a:rPr>
+              <a:t>📲 📲 📲</a:t>
+            </a:r>
+            <a:endParaRPr lang="en-US" sz="3000" dirty="0"/>
+          </a:p>
+        </p:txBody>
+      </p:sp>
+      <p:sp>
+        <p:nvSpPr>
+          <p:cNvPr id="6" name="Text 4"/>
+          <p:cNvSpPr/>
+          <p:nvPr/>
+        </p:nvSpPr>
+        <p:spPr>
+          <a:xfrm>
+            <a:off x="365760" y="2834640"/>
+            <a:ext cx="3657600" cy="320040"/>
+          </a:xfrm>
+          <a:prstGeom prst="rect">
+            <a:avLst/>
+          </a:prstGeom>
+          <a:noFill/>
+          <a:ln/>
+        </p:spPr>
+        <p:txBody>
+          <a:bodyPr wrap="square" lIns="0" tIns="0" rIns="0" bIns="0" rtlCol="0" anchor="ctr"/>
+          <a:lstStyle/>
+          <a:p>
+            <a:pPr indent="0" marL="0">
+              <a:buNone/>
+            </a:pPr>
+            <a:r>
+              <a:rPr lang="en-US" sz="1000" i="1" dirty="0">
+                <a:solidFill>
+                  <a:srgbClr val="4B5563"/>
+                </a:solidFill>
+                <a:latin typeface="Calibri" pitchFamily="34" charset="0"/>
+                <a:ea typeface="Calibri" pitchFamily="34" charset="-122"/>
+                <a:cs typeface="Calibri" pitchFamily="34" charset="-120"/>
+              </a:rPr>
+              <a:t>— AI-generated content flood</a:t>
+            </a:r>
+            <a:endParaRPr lang="en-US" sz="1000" dirty="0"/>
+          </a:p>
+        </p:txBody>
+      </p:sp>
+      <p:sp>
+        <p:nvSpPr>
+          <p:cNvPr id="7" name="Text 5"/>
+          <p:cNvSpPr/>
+          <p:nvPr/>
+        </p:nvSpPr>
+        <p:spPr>
+          <a:xfrm>
+            <a:off x="365760" y="3218688"/>
+            <a:ext cx="3657600" cy="320040"/>
+          </a:xfrm>
+          <a:prstGeom prst="rect">
+            <a:avLst/>
+          </a:prstGeom>
+          <a:noFill/>
+          <a:ln/>
+        </p:spPr>
+        <p:txBody>
+          <a:bodyPr wrap="square" lIns="0" tIns="0" rIns="0" bIns="0" rtlCol="0" anchor="ctr"/>
+          <a:lstStyle/>
+          <a:p>
+            <a:pPr indent="0" marL="0">
+              <a:buNone/>
+            </a:pPr>
+            <a:r>
+              <a:rPr lang="en-US" sz="1000" i="1" dirty="0">
+                <a:solidFill>
+                  <a:srgbClr val="4B5563"/>
+                </a:solidFill>
+                <a:latin typeface="Calibri" pitchFamily="34" charset="0"/>
+                <a:ea typeface="Calibri" pitchFamily="34" charset="-122"/>
+                <a:cs typeface="Calibri" pitchFamily="34" charset="-120"/>
+              </a:rPr>
+              <a:t>— Crypto ad restrictions</a:t>
+            </a:r>
+            <a:endParaRPr lang="en-US" sz="1000" dirty="0"/>
+          </a:p>
+        </p:txBody>
+      </p:sp>
+      <p:sp>
+        <p:nvSpPr>
+          <p:cNvPr id="8" name="Text 6"/>
+          <p:cNvSpPr/>
+          <p:nvPr/>
+        </p:nvSpPr>
+        <p:spPr>
+          <a:xfrm>
+            <a:off x="365760" y="3602736"/>
+            <a:ext cx="3657600" cy="320040"/>
+          </a:xfrm>
+          <a:prstGeom prst="rect">
+            <a:avLst/>
+          </a:prstGeom>
+          <a:noFill/>
+          <a:ln/>
+        </p:spPr>
+        <p:txBody>
+          <a:bodyPr wrap="square" lIns="0" tIns="0" rIns="0" bIns="0" rtlCol="0" anchor="ctr"/>
+          <a:lstStyle/>
+          <a:p>
+            <a:pPr indent="0" marL="0">
+              <a:buNone/>
+            </a:pPr>
+            <a:r>
+              <a:rPr lang="en-US" sz="1000" i="1" dirty="0">
+                <a:solidFill>
+                  <a:srgbClr val="4B5563"/>
+                </a:solidFill>
+                <a:latin typeface="Calibri" pitchFamily="34" charset="0"/>
+                <a:ea typeface="Calibri" pitchFamily="34" charset="-122"/>
+                <a:cs typeface="Calibri" pitchFamily="34" charset="-120"/>
+              </a:rPr>
+              <a:t>— Doomscrolling &amp; fatigue</a:t>
+            </a:r>
+            <a:endParaRPr lang="en-US" sz="1000" dirty="0"/>
+          </a:p>
+        </p:txBody>
+      </p:sp>
+      <p:sp>
+        <p:nvSpPr>
+          <p:cNvPr id="9" name="Text 7"/>
+          <p:cNvSpPr/>
+          <p:nvPr/>
+        </p:nvSpPr>
+        <p:spPr>
+          <a:xfrm>
+            <a:off x="365760" y="3986784"/>
+            <a:ext cx="3657600" cy="320040"/>
+          </a:xfrm>
+          <a:prstGeom prst="rect">
+            <a:avLst/>
+          </a:prstGeom>
+          <a:noFill/>
+          <a:ln/>
+        </p:spPr>
+        <p:txBody>
+          <a:bodyPr wrap="square" lIns="0" tIns="0" rIns="0" bIns="0" rtlCol="0" anchor="ctr"/>
+          <a:lstStyle/>
+          <a:p>
+            <a:pPr indent="0" marL="0">
+              <a:buNone/>
+            </a:pPr>
+            <a:r>
+              <a:rPr lang="en-US" sz="1000" i="1" dirty="0">
+                <a:solidFill>
+                  <a:srgbClr val="4B5563"/>
+                </a:solidFill>
+                <a:latin typeface="Calibri" pitchFamily="34" charset="0"/>
+                <a:ea typeface="Calibri" pitchFamily="34" charset="-122"/>
+                <a:cs typeface="Calibri" pitchFamily="34" charset="-120"/>
+              </a:rPr>
+              <a:t>— Low ROAS, high burnout</a:t>
+            </a:r>
+            <a:endParaRPr lang="en-US" sz="1000" dirty="0"/>
+          </a:p>
+        </p:txBody>
+      </p:sp>
+      <p:sp>
+        <p:nvSpPr>
+          <p:cNvPr id="10" name="Shape 8"/>
+          <p:cNvSpPr/>
+          <p:nvPr/>
+        </p:nvSpPr>
+        <p:spPr>
+          <a:xfrm>
+            <a:off x="4315968" y="0"/>
+            <a:ext cx="64008" cy="5143500"/>
           </a:xfrm>
           <a:prstGeom prst="rect">
             <a:avLst/>
@@ -8290,38 +7581,38 @@
       </p:sp>
       <p:sp>
         <p:nvSpPr>
-          <p:cNvPr id="3" name="Text 1"/>
-          <p:cNvSpPr/>
-          <p:nvPr/>
-        </p:nvSpPr>
-        <p:spPr>
-          <a:xfrm>
-            <a:off x="594360" y="475488"/>
-            <a:ext cx="8046720" cy="1005840"/>
-          </a:xfrm>
-          <a:prstGeom prst="rect">
-            <a:avLst/>
-          </a:prstGeom>
-          <a:noFill/>
-          <a:ln/>
-        </p:spPr>
-        <p:txBody>
-          <a:bodyPr wrap="square" lIns="0" tIns="0" rIns="0" bIns="0" rtlCol="0" anchor="ctr"/>
-          <a:lstStyle/>
-          <a:p>
-            <a:pPr algn="l" indent="0" marL="0">
-              <a:buNone/>
-            </a:pPr>
-            <a:r>
-              <a:rPr lang="en-US" sz="3000" i="1" dirty="0">
-                <a:solidFill>
-                  <a:srgbClr val="1A1A1A"/>
+          <p:cNvPr id="11" name="Text 9"/>
+          <p:cNvSpPr/>
+          <p:nvPr/>
+        </p:nvSpPr>
+        <p:spPr>
+          <a:xfrm>
+            <a:off x="4023360" y="2331720"/>
+            <a:ext cx="1097280" cy="502920"/>
+          </a:xfrm>
+          <a:prstGeom prst="rect">
+            <a:avLst/>
+          </a:prstGeom>
+          <a:noFill/>
+          <a:ln/>
+        </p:spPr>
+        <p:txBody>
+          <a:bodyPr wrap="square" lIns="0" tIns="0" rIns="0" bIns="0" rtlCol="0" anchor="ctr"/>
+          <a:lstStyle/>
+          <a:p>
+            <a:pPr algn="ctr" indent="0" marL="0">
+              <a:buNone/>
+            </a:pPr>
+            <a:r>
+              <a:rPr lang="en-US" sz="3000" dirty="0">
+                <a:solidFill>
+                  <a:srgbClr val="F26522"/>
                 </a:solidFill>
                 <a:latin typeface="Georgia" pitchFamily="34" charset="0"/>
                 <a:ea typeface="Georgia" pitchFamily="34" charset="-122"/>
                 <a:cs typeface="Georgia" pitchFamily="34" charset="-120"/>
               </a:rPr>
-              <a:t>Smart founders are figuring</a:t>
+              <a:t>→</a:t>
             </a:r>
             <a:endParaRPr lang="en-US" sz="3000" dirty="0"/>
           </a:p>
@@ -8329,89 +7620,53 @@
       </p:sp>
       <p:sp>
         <p:nvSpPr>
-          <p:cNvPr id="4" name="Shape 2"/>
-          <p:cNvSpPr/>
-          <p:nvPr/>
-        </p:nvSpPr>
-        <p:spPr>
-          <a:xfrm>
-            <a:off x="365760" y="1645920"/>
-            <a:ext cx="2743200" cy="2560320"/>
-          </a:xfrm>
-          <a:prstGeom prst="rect">
-            <a:avLst/>
-          </a:prstGeom>
-          <a:solidFill>
-            <a:srgbClr val="FFFFFF"/>
-          </a:solidFill>
-          <a:ln w="9525">
-            <a:solidFill>
-              <a:srgbClr val="E5E7EB"/>
-            </a:solidFill>
-            <a:prstDash val="solid"/>
-          </a:ln>
-          <a:effectLst>
-            <a:outerShdw sx="100000" sy="100000" kx="0" ky="0" algn="bl" rotWithShape="0" blurRad="76200" dist="25400" dir="8100000">
-              <a:srgbClr val="000000">
-                <a:alpha val="8000"/>
-              </a:srgbClr>
-            </a:outerShdw>
-          </a:effectLst>
-        </p:spPr>
-      </p:sp>
-      <p:sp>
-        <p:nvSpPr>
-          <p:cNvPr id="5" name="Shape 3"/>
-          <p:cNvSpPr/>
-          <p:nvPr/>
-        </p:nvSpPr>
-        <p:spPr>
-          <a:xfrm>
-            <a:off x="365760" y="1645920"/>
-            <a:ext cx="2743200" cy="50292"/>
-          </a:xfrm>
-          <a:prstGeom prst="rect">
-            <a:avLst/>
-          </a:prstGeom>
-          <a:solidFill>
-            <a:srgbClr val="F26522"/>
-          </a:solidFill>
-          <a:ln/>
-        </p:spPr>
-      </p:sp>
-      <p:pic>
-        <p:nvPicPr>
-          <p:cNvPr id="6" name="Image 0" descr="preencoded.png">    </p:cNvPr>
-          <p:cNvPicPr>
-            <a:picLocks noChangeAspect="1"/>
-          </p:cNvPicPr>
-          <p:nvPr/>
-        </p:nvPicPr>
-        <p:blipFill>
-          <a:blip r:embed="rId1"/>
-          <a:srcRect l="0" r="0" t="0" b="0"/>
-          <a:stretch/>
-        </p:blipFill>
-        <p:spPr>
-          <a:xfrm>
-            <a:off x="1143000" y="1783080"/>
-            <a:ext cx="1188720" cy="1188720"/>
-          </a:xfrm>
-          <a:prstGeom prst="rect">
-            <a:avLst/>
-          </a:prstGeom>
-        </p:spPr>
-      </p:pic>
-      <p:sp>
-        <p:nvSpPr>
-          <p:cNvPr id="7" name="Text 4"/>
-          <p:cNvSpPr/>
-          <p:nvPr/>
-        </p:nvSpPr>
-        <p:spPr>
-          <a:xfrm>
-            <a:off x="502920" y="3017520"/>
-            <a:ext cx="2468880" cy="320040"/>
+          <p:cNvPr id="12" name="Text 10"/>
+          <p:cNvSpPr/>
+          <p:nvPr/>
+        </p:nvSpPr>
+        <p:spPr>
+          <a:xfrm>
+            <a:off x="4663440" y="274320"/>
+            <a:ext cx="4114800" cy="411480"/>
+          </a:xfrm>
+          <a:prstGeom prst="rect">
+            <a:avLst/>
+          </a:prstGeom>
+          <a:noFill/>
+          <a:ln/>
+        </p:spPr>
+        <p:txBody>
+          <a:bodyPr wrap="square" lIns="0" tIns="0" rIns="0" bIns="0" rtlCol="0" anchor="ctr"/>
+          <a:lstStyle/>
+          <a:p>
+            <a:pPr algn="l" indent="0" marL="0">
+              <a:buNone/>
+            </a:pPr>
+            <a:r>
+              <a:rPr lang="en-US" sz="1100" b="1" spc="400" kern="0" dirty="0">
+                <a:solidFill>
+                  <a:srgbClr val="F26522"/>
+                </a:solidFill>
+                <a:latin typeface="Calibri" pitchFamily="34" charset="0"/>
+                <a:ea typeface="Calibri" pitchFamily="34" charset="-122"/>
+                <a:cs typeface="Calibri" pitchFamily="34" charset="-120"/>
+              </a:rPr>
+              <a:t>OFFLINE</a:t>
+            </a:r>
+            <a:endParaRPr lang="en-US" sz="1100" dirty="0"/>
+          </a:p>
+        </p:txBody>
+      </p:sp>
+      <p:sp>
+        <p:nvSpPr>
+          <p:cNvPr id="13" name="Text 11"/>
+          <p:cNvSpPr/>
+          <p:nvPr/>
+        </p:nvSpPr>
+        <p:spPr>
+          <a:xfrm>
+            <a:off x="4663440" y="777240"/>
+            <a:ext cx="4114800" cy="1828800"/>
           </a:xfrm>
           <a:prstGeom prst="rect">
             <a:avLst/>
@@ -8427,528 +7682,136 @@
               <a:buNone/>
             </a:pPr>
             <a:r>
-              <a:rPr lang="en-US" sz="1050" b="1" dirty="0">
+              <a:rPr lang="en-US" sz="3000" dirty="0">
+                <a:solidFill>
+                  <a:srgbClr val="000000"/>
+                </a:solidFill>
+                <a:latin typeface="Calibri" pitchFamily="34" charset="0"/>
+                <a:ea typeface="Calibri" pitchFamily="34" charset="-122"/>
+                <a:cs typeface="Calibri" pitchFamily="34" charset="-120"/>
+              </a:rPr>
+              <a:t>🙌 🙌 🙌</a:t>
+            </a:r>
+            <a:endParaRPr lang="en-US" sz="3000" dirty="0"/>
+          </a:p>
+          <a:p>
+            <a:pPr algn="ctr" indent="0" marL="0">
+              <a:buNone/>
+            </a:pPr>
+            <a:r>
+              <a:rPr lang="en-US" sz="3000" dirty="0">
+                <a:solidFill>
+                  <a:srgbClr val="000000"/>
+                </a:solidFill>
+                <a:latin typeface="Calibri" pitchFamily="34" charset="0"/>
+                <a:ea typeface="Calibri" pitchFamily="34" charset="-122"/>
+                <a:cs typeface="Calibri" pitchFamily="34" charset="-120"/>
+              </a:rPr>
+              <a:t>🤝 🤝 🤝</a:t>
+            </a:r>
+            <a:endParaRPr lang="en-US" sz="3000" dirty="0"/>
+          </a:p>
+          <a:p>
+            <a:pPr algn="ctr" indent="0" marL="0">
+              <a:buNone/>
+            </a:pPr>
+            <a:r>
+              <a:rPr lang="en-US" sz="3000" dirty="0">
+                <a:solidFill>
+                  <a:srgbClr val="000000"/>
+                </a:solidFill>
+                <a:latin typeface="Calibri" pitchFamily="34" charset="0"/>
+                <a:ea typeface="Calibri" pitchFamily="34" charset="-122"/>
+                <a:cs typeface="Calibri" pitchFamily="34" charset="-120"/>
+              </a:rPr>
+              <a:t>⚡ ⚡ ⚡</a:t>
+            </a:r>
+            <a:endParaRPr lang="en-US" sz="3000" dirty="0"/>
+          </a:p>
+        </p:txBody>
+      </p:sp>
+      <p:sp>
+        <p:nvSpPr>
+          <p:cNvPr id="14" name="Text 12"/>
+          <p:cNvSpPr/>
+          <p:nvPr/>
+        </p:nvSpPr>
+        <p:spPr>
+          <a:xfrm>
+            <a:off x="4663440" y="2788920"/>
+            <a:ext cx="4114800" cy="777240"/>
+          </a:xfrm>
+          <a:prstGeom prst="rect">
+            <a:avLst/>
+          </a:prstGeom>
+          <a:noFill/>
+          <a:ln/>
+        </p:spPr>
+        <p:txBody>
+          <a:bodyPr wrap="square" lIns="0" tIns="0" rIns="0" bIns="0" rtlCol="0" anchor="ctr"/>
+          <a:lstStyle/>
+          <a:p>
+            <a:pPr indent="0" marL="0">
+              <a:buNone/>
+            </a:pPr>
+            <a:r>
+              <a:rPr lang="en-US" sz="1800" i="1" dirty="0">
                 <a:solidFill>
                   <a:srgbClr val="1A1A1A"/>
                 </a:solidFill>
-                <a:latin typeface="Calibri" pitchFamily="34" charset="0"/>
-                <a:ea typeface="Calibri" pitchFamily="34" charset="-122"/>
-                <a:cs typeface="Calibri" pitchFamily="34" charset="-120"/>
-              </a:rPr>
-              <a:t>B4I Community</a:t>
-            </a:r>
-            <a:endParaRPr lang="en-US" sz="1050" dirty="0"/>
-          </a:p>
-        </p:txBody>
-      </p:sp>
-      <p:sp>
-        <p:nvSpPr>
-          <p:cNvPr id="8" name="Text 5"/>
-          <p:cNvSpPr/>
-          <p:nvPr/>
-        </p:nvSpPr>
-        <p:spPr>
-          <a:xfrm>
-            <a:off x="502920" y="3383280"/>
-            <a:ext cx="2468880" cy="256032"/>
-          </a:xfrm>
-          <a:prstGeom prst="rect">
-            <a:avLst/>
-          </a:prstGeom>
-          <a:noFill/>
-          <a:ln/>
-        </p:spPr>
-        <p:txBody>
-          <a:bodyPr wrap="square" lIns="0" tIns="0" rIns="0" bIns="0" rtlCol="0" anchor="ctr"/>
-          <a:lstStyle/>
-          <a:p>
-            <a:pPr algn="ctr" indent="0" marL="0">
-              <a:buNone/>
-            </a:pPr>
-            <a:r>
-              <a:rPr lang="en-US" sz="900" dirty="0">
-                <a:solidFill>
-                  <a:srgbClr val="F26522"/>
-                </a:solidFill>
-                <a:latin typeface="Calibri" pitchFamily="34" charset="0"/>
-                <a:ea typeface="Calibri" pitchFamily="34" charset="-122"/>
-                <a:cs typeface="Calibri" pitchFamily="34" charset="-120"/>
-              </a:rPr>
-              <a:t>↓  powers  ↓</a:t>
-            </a:r>
-            <a:endParaRPr lang="en-US" sz="900" dirty="0"/>
-          </a:p>
-        </p:txBody>
-      </p:sp>
-      <p:sp>
-        <p:nvSpPr>
-          <p:cNvPr id="9" name="Text 6"/>
-          <p:cNvSpPr/>
-          <p:nvPr/>
-        </p:nvSpPr>
-        <p:spPr>
-          <a:xfrm>
-            <a:off x="502920" y="3703320"/>
-            <a:ext cx="2468880" cy="365760"/>
-          </a:xfrm>
-          <a:prstGeom prst="rect">
-            <a:avLst/>
-          </a:prstGeom>
-          <a:noFill/>
-          <a:ln/>
-        </p:spPr>
-        <p:txBody>
-          <a:bodyPr wrap="square" lIns="0" tIns="0" rIns="0" bIns="0" rtlCol="0" anchor="ctr"/>
-          <a:lstStyle/>
-          <a:p>
-            <a:pPr algn="ctr" indent="0" marL="0">
-              <a:buNone/>
-            </a:pPr>
-            <a:r>
-              <a:rPr lang="en-US" sz="1200" b="1" dirty="0">
-                <a:solidFill>
-                  <a:srgbClr val="F26522"/>
-                </a:solidFill>
-                <a:latin typeface="Calibri" pitchFamily="34" charset="0"/>
-                <a:ea typeface="Calibri" pitchFamily="34" charset="-122"/>
-                <a:cs typeface="Calibri" pitchFamily="34" charset="-120"/>
-              </a:rPr>
-              <a:t>Bitcoin Keeper</a:t>
-            </a:r>
-            <a:endParaRPr lang="en-US" sz="1200" dirty="0"/>
-          </a:p>
-        </p:txBody>
-      </p:sp>
-      <p:sp>
-        <p:nvSpPr>
-          <p:cNvPr id="10" name="Shape 7"/>
-          <p:cNvSpPr/>
-          <p:nvPr/>
-        </p:nvSpPr>
-        <p:spPr>
-          <a:xfrm>
-            <a:off x="3291840" y="1645920"/>
-            <a:ext cx="2743200" cy="2560320"/>
-          </a:xfrm>
-          <a:prstGeom prst="rect">
-            <a:avLst/>
-          </a:prstGeom>
-          <a:solidFill>
-            <a:srgbClr val="FFFFFF"/>
-          </a:solidFill>
-          <a:ln w="9525">
-            <a:solidFill>
-              <a:srgbClr val="E5E7EB"/>
-            </a:solidFill>
-            <a:prstDash val="solid"/>
-          </a:ln>
-          <a:effectLst>
-            <a:outerShdw sx="100000" sy="100000" kx="0" ky="0" algn="bl" rotWithShape="0" blurRad="76200" dist="25400" dir="8100000">
-              <a:srgbClr val="000000">
-                <a:alpha val="8000"/>
-              </a:srgbClr>
-            </a:outerShdw>
-          </a:effectLst>
-        </p:spPr>
-      </p:sp>
-      <p:sp>
-        <p:nvSpPr>
-          <p:cNvPr id="11" name="Shape 8"/>
-          <p:cNvSpPr/>
-          <p:nvPr/>
-        </p:nvSpPr>
-        <p:spPr>
-          <a:xfrm>
-            <a:off x="3291840" y="1645920"/>
-            <a:ext cx="2743200" cy="50292"/>
-          </a:xfrm>
-          <a:prstGeom prst="rect">
-            <a:avLst/>
-          </a:prstGeom>
-          <a:solidFill>
-            <a:srgbClr val="F26522"/>
-          </a:solidFill>
-          <a:ln/>
-        </p:spPr>
-      </p:sp>
-      <p:pic>
-        <p:nvPicPr>
-          <p:cNvPr id="12" name="Image 1" descr="preencoded.png">    </p:cNvPr>
-          <p:cNvPicPr>
-            <a:picLocks noChangeAspect="1"/>
-          </p:cNvPicPr>
-          <p:nvPr/>
-        </p:nvPicPr>
-        <p:blipFill>
-          <a:blip r:embed="rId2"/>
-          <a:srcRect l="0" r="0" t="0" b="0"/>
-          <a:stretch/>
-        </p:blipFill>
-        <p:spPr>
-          <a:xfrm>
-            <a:off x="4069080" y="1783080"/>
-            <a:ext cx="1188720" cy="1188720"/>
-          </a:xfrm>
-          <a:prstGeom prst="rect">
-            <a:avLst/>
-          </a:prstGeom>
-        </p:spPr>
-      </p:pic>
-      <p:sp>
-        <p:nvSpPr>
-          <p:cNvPr id="13" name="Text 9"/>
-          <p:cNvSpPr/>
-          <p:nvPr/>
-        </p:nvSpPr>
-        <p:spPr>
-          <a:xfrm>
-            <a:off x="3429000" y="3017520"/>
-            <a:ext cx="2468880" cy="320040"/>
-          </a:xfrm>
-          <a:prstGeom prst="rect">
-            <a:avLst/>
-          </a:prstGeom>
-          <a:noFill/>
-          <a:ln/>
-        </p:spPr>
-        <p:txBody>
-          <a:bodyPr wrap="square" lIns="0" tIns="0" rIns="0" bIns="0" rtlCol="0" anchor="ctr"/>
-          <a:lstStyle/>
-          <a:p>
-            <a:pPr algn="ctr" indent="0" marL="0">
-              <a:buNone/>
-            </a:pPr>
-            <a:r>
-              <a:rPr lang="en-US" sz="1050" b="1" dirty="0">
+                <a:latin typeface="Georgia" pitchFamily="34" charset="0"/>
+                <a:ea typeface="Georgia" pitchFamily="34" charset="-122"/>
+                <a:cs typeface="Georgia" pitchFamily="34" charset="-120"/>
+              </a:rPr>
+              <a:t>The pendulum is swinging</a:t>
+            </a:r>
+            <a:endParaRPr lang="en-US" sz="1800" dirty="0"/>
+          </a:p>
+          <a:p>
+            <a:pPr indent="0" marL="0">
+              <a:buNone/>
+            </a:pPr>
+            <a:r>
+              <a:rPr lang="en-US" sz="1800" i="1" dirty="0">
                 <a:solidFill>
                   <a:srgbClr val="1A1A1A"/>
                 </a:solidFill>
-                <a:latin typeface="Calibri" pitchFamily="34" charset="0"/>
-                <a:ea typeface="Calibri" pitchFamily="34" charset="-122"/>
-                <a:cs typeface="Calibri" pitchFamily="34" charset="-120"/>
-              </a:rPr>
-              <a:t>Bitcoin Bharat</a:t>
-            </a:r>
-            <a:endParaRPr lang="en-US" sz="1050" dirty="0"/>
-          </a:p>
-        </p:txBody>
-      </p:sp>
-      <p:sp>
-        <p:nvSpPr>
-          <p:cNvPr id="14" name="Text 10"/>
-          <p:cNvSpPr/>
-          <p:nvPr/>
-        </p:nvSpPr>
-        <p:spPr>
-          <a:xfrm>
-            <a:off x="3429000" y="3383280"/>
-            <a:ext cx="2468880" cy="256032"/>
-          </a:xfrm>
-          <a:prstGeom prst="rect">
-            <a:avLst/>
-          </a:prstGeom>
-          <a:noFill/>
-          <a:ln/>
-        </p:spPr>
-        <p:txBody>
-          <a:bodyPr wrap="square" lIns="0" tIns="0" rIns="0" bIns="0" rtlCol="0" anchor="ctr"/>
-          <a:lstStyle/>
-          <a:p>
-            <a:pPr algn="ctr" indent="0" marL="0">
-              <a:buNone/>
-            </a:pPr>
-            <a:r>
-              <a:rPr lang="en-US" sz="900" dirty="0">
-                <a:solidFill>
-                  <a:srgbClr val="F26522"/>
-                </a:solidFill>
-                <a:latin typeface="Calibri" pitchFamily="34" charset="0"/>
-                <a:ea typeface="Calibri" pitchFamily="34" charset="-122"/>
-                <a:cs typeface="Calibri" pitchFamily="34" charset="-120"/>
-              </a:rPr>
-              <a:t>↓  powers  ↓</a:t>
-            </a:r>
-            <a:endParaRPr lang="en-US" sz="900" dirty="0"/>
-          </a:p>
-        </p:txBody>
-      </p:sp>
-      <p:sp>
-        <p:nvSpPr>
-          <p:cNvPr id="15" name="Text 11"/>
-          <p:cNvSpPr/>
-          <p:nvPr/>
-        </p:nvSpPr>
-        <p:spPr>
-          <a:xfrm>
-            <a:off x="3429000" y="3703320"/>
-            <a:ext cx="2468880" cy="365760"/>
-          </a:xfrm>
-          <a:prstGeom prst="rect">
-            <a:avLst/>
-          </a:prstGeom>
-          <a:noFill/>
-          <a:ln/>
-        </p:spPr>
-        <p:txBody>
-          <a:bodyPr wrap="square" lIns="0" tIns="0" rIns="0" bIns="0" rtlCol="0" anchor="ctr"/>
-          <a:lstStyle/>
-          <a:p>
-            <a:pPr algn="ctr" indent="0" marL="0">
-              <a:buNone/>
-            </a:pPr>
-            <a:r>
-              <a:rPr lang="en-US" sz="1200" b="1" dirty="0">
-                <a:solidFill>
-                  <a:srgbClr val="F26522"/>
-                </a:solidFill>
-                <a:latin typeface="Calibri" pitchFamily="34" charset="0"/>
-                <a:ea typeface="Calibri" pitchFamily="34" charset="-122"/>
-                <a:cs typeface="Calibri" pitchFamily="34" charset="-120"/>
-              </a:rPr>
-              <a:t>SwapSo</a:t>
-            </a:r>
-            <a:endParaRPr lang="en-US" sz="1200" dirty="0"/>
-          </a:p>
-        </p:txBody>
-      </p:sp>
-      <p:sp>
-        <p:nvSpPr>
-          <p:cNvPr id="16" name="Shape 12"/>
-          <p:cNvSpPr/>
-          <p:nvPr/>
-        </p:nvSpPr>
-        <p:spPr>
-          <a:xfrm>
-            <a:off x="6217920" y="1645920"/>
-            <a:ext cx="2743200" cy="2560320"/>
-          </a:xfrm>
-          <a:prstGeom prst="rect">
-            <a:avLst/>
-          </a:prstGeom>
-          <a:solidFill>
-            <a:srgbClr val="FFFFFF"/>
-          </a:solidFill>
-          <a:ln w="9525">
-            <a:solidFill>
-              <a:srgbClr val="E5E7EB"/>
-            </a:solidFill>
-            <a:prstDash val="solid"/>
-          </a:ln>
-          <a:effectLst>
-            <a:outerShdw sx="100000" sy="100000" kx="0" ky="0" algn="bl" rotWithShape="0" blurRad="76200" dist="25400" dir="8100000">
-              <a:srgbClr val="000000">
-                <a:alpha val="8000"/>
-              </a:srgbClr>
-            </a:outerShdw>
-          </a:effectLst>
-        </p:spPr>
-      </p:sp>
-      <p:sp>
-        <p:nvSpPr>
-          <p:cNvPr id="17" name="Shape 13"/>
-          <p:cNvSpPr/>
-          <p:nvPr/>
-        </p:nvSpPr>
-        <p:spPr>
-          <a:xfrm>
-            <a:off x="6217920" y="1645920"/>
-            <a:ext cx="2743200" cy="50292"/>
-          </a:xfrm>
-          <a:prstGeom prst="rect">
-            <a:avLst/>
-          </a:prstGeom>
-          <a:solidFill>
-            <a:srgbClr val="F26522"/>
-          </a:solidFill>
-          <a:ln/>
-        </p:spPr>
-      </p:sp>
-      <p:pic>
-        <p:nvPicPr>
-          <p:cNvPr id="18" name="Image 2" descr="preencoded.png">    </p:cNvPr>
-          <p:cNvPicPr>
-            <a:picLocks noChangeAspect="1"/>
-          </p:cNvPicPr>
-          <p:nvPr/>
-        </p:nvPicPr>
-        <p:blipFill>
-          <a:blip r:embed="rId3"/>
-          <a:srcRect l="0" r="0" t="0" b="0"/>
-          <a:stretch/>
-        </p:blipFill>
-        <p:spPr>
-          <a:xfrm>
-            <a:off x="6995160" y="1783080"/>
-            <a:ext cx="1188720" cy="1188720"/>
-          </a:xfrm>
-          <a:prstGeom prst="rect">
-            <a:avLst/>
-          </a:prstGeom>
-        </p:spPr>
-      </p:pic>
-      <p:sp>
-        <p:nvSpPr>
-          <p:cNvPr id="19" name="Text 14"/>
-          <p:cNvSpPr/>
-          <p:nvPr/>
-        </p:nvSpPr>
-        <p:spPr>
-          <a:xfrm>
-            <a:off x="6355080" y="3017520"/>
-            <a:ext cx="2468880" cy="320040"/>
-          </a:xfrm>
-          <a:prstGeom prst="rect">
-            <a:avLst/>
-          </a:prstGeom>
-          <a:noFill/>
-          <a:ln/>
-        </p:spPr>
-        <p:txBody>
-          <a:bodyPr wrap="square" lIns="0" tIns="0" rIns="0" bIns="0" rtlCol="0" anchor="ctr"/>
-          <a:lstStyle/>
-          <a:p>
-            <a:pPr algn="ctr" indent="0" marL="0">
-              <a:buNone/>
-            </a:pPr>
-            <a:r>
-              <a:rPr lang="en-US" sz="1050" b="1" dirty="0">
-                <a:solidFill>
-                  <a:srgbClr val="1A1A1A"/>
-                </a:solidFill>
-                <a:latin typeface="Calibri" pitchFamily="34" charset="0"/>
-                <a:ea typeface="Calibri" pitchFamily="34" charset="-122"/>
-                <a:cs typeface="Calibri" pitchFamily="34" charset="-120"/>
-              </a:rPr>
-              <a:t>Bitcoinwaale</a:t>
-            </a:r>
-            <a:endParaRPr lang="en-US" sz="1050" dirty="0"/>
-          </a:p>
-        </p:txBody>
-      </p:sp>
-      <p:sp>
-        <p:nvSpPr>
-          <p:cNvPr id="20" name="Text 15"/>
-          <p:cNvSpPr/>
-          <p:nvPr/>
-        </p:nvSpPr>
-        <p:spPr>
-          <a:xfrm>
-            <a:off x="6355080" y="3383280"/>
-            <a:ext cx="2468880" cy="256032"/>
-          </a:xfrm>
-          <a:prstGeom prst="rect">
-            <a:avLst/>
-          </a:prstGeom>
-          <a:noFill/>
-          <a:ln/>
-        </p:spPr>
-        <p:txBody>
-          <a:bodyPr wrap="square" lIns="0" tIns="0" rIns="0" bIns="0" rtlCol="0" anchor="ctr"/>
-          <a:lstStyle/>
-          <a:p>
-            <a:pPr algn="ctr" indent="0" marL="0">
-              <a:buNone/>
-            </a:pPr>
-            <a:r>
-              <a:rPr lang="en-US" sz="900" dirty="0">
-                <a:solidFill>
-                  <a:srgbClr val="F26522"/>
-                </a:solidFill>
-                <a:latin typeface="Calibri" pitchFamily="34" charset="0"/>
-                <a:ea typeface="Calibri" pitchFamily="34" charset="-122"/>
-                <a:cs typeface="Calibri" pitchFamily="34" charset="-120"/>
-              </a:rPr>
-              <a:t>↓  powers  ↓</a:t>
-            </a:r>
-            <a:endParaRPr lang="en-US" sz="900" dirty="0"/>
-          </a:p>
-        </p:txBody>
-      </p:sp>
-      <p:sp>
-        <p:nvSpPr>
-          <p:cNvPr id="21" name="Text 16"/>
-          <p:cNvSpPr/>
-          <p:nvPr/>
-        </p:nvSpPr>
-        <p:spPr>
-          <a:xfrm>
-            <a:off x="6355080" y="3703320"/>
-            <a:ext cx="2468880" cy="365760"/>
-          </a:xfrm>
-          <a:prstGeom prst="rect">
-            <a:avLst/>
-          </a:prstGeom>
-          <a:noFill/>
-          <a:ln/>
-        </p:spPr>
-        <p:txBody>
-          <a:bodyPr wrap="square" lIns="0" tIns="0" rIns="0" bIns="0" rtlCol="0" anchor="ctr"/>
-          <a:lstStyle/>
-          <a:p>
-            <a:pPr algn="ctr" indent="0" marL="0">
-              <a:buNone/>
-            </a:pPr>
-            <a:r>
-              <a:rPr lang="en-US" sz="1200" b="1" dirty="0">
-                <a:solidFill>
-                  <a:srgbClr val="F26522"/>
-                </a:solidFill>
-                <a:latin typeface="Calibri" pitchFamily="34" charset="0"/>
-                <a:ea typeface="Calibri" pitchFamily="34" charset="-122"/>
-                <a:cs typeface="Calibri" pitchFamily="34" charset="-120"/>
-              </a:rPr>
-              <a:t>GetBit</a:t>
-            </a:r>
-            <a:endParaRPr lang="en-US" sz="1200" dirty="0"/>
-          </a:p>
-        </p:txBody>
-      </p:sp>
-      <p:sp>
-        <p:nvSpPr>
-          <p:cNvPr id="22" name="Shape 17"/>
-          <p:cNvSpPr/>
-          <p:nvPr/>
-        </p:nvSpPr>
-        <p:spPr>
-          <a:xfrm>
-            <a:off x="0" y="4983480"/>
-            <a:ext cx="9144000" cy="164592"/>
-          </a:xfrm>
-          <a:prstGeom prst="rect">
-            <a:avLst/>
-          </a:prstGeom>
-          <a:solidFill>
-            <a:srgbClr val="FFF7F0"/>
-          </a:solidFill>
-          <a:ln/>
-        </p:spPr>
-      </p:sp>
-      <p:sp>
-        <p:nvSpPr>
-          <p:cNvPr id="23" name="Text 18"/>
-          <p:cNvSpPr/>
-          <p:nvPr/>
-        </p:nvSpPr>
-        <p:spPr>
-          <a:xfrm>
-            <a:off x="457200" y="4992624"/>
-            <a:ext cx="8229600" cy="146304"/>
-          </a:xfrm>
-          <a:prstGeom prst="rect">
-            <a:avLst/>
-          </a:prstGeom>
-          <a:noFill/>
-          <a:ln/>
-        </p:spPr>
-        <p:txBody>
-          <a:bodyPr wrap="square" lIns="0" tIns="0" rIns="0" bIns="0" rtlCol="0" anchor="ctr"/>
-          <a:lstStyle/>
-          <a:p>
-            <a:pPr algn="l" indent="0" marL="0">
-              <a:buNone/>
-            </a:pPr>
-            <a:r>
-              <a:rPr lang="en-US" sz="750" dirty="0">
+                <a:latin typeface="Georgia" pitchFamily="34" charset="0"/>
+                <a:ea typeface="Georgia" pitchFamily="34" charset="-122"/>
+                <a:cs typeface="Georgia" pitchFamily="34" charset="-120"/>
+              </a:rPr>
+              <a:t>back offline.</a:t>
+            </a:r>
+            <a:endParaRPr lang="en-US" sz="1800" dirty="0"/>
+          </a:p>
+        </p:txBody>
+      </p:sp>
+      <p:sp>
+        <p:nvSpPr>
+          <p:cNvPr id="15" name="Text 13"/>
+          <p:cNvSpPr/>
+          <p:nvPr/>
+        </p:nvSpPr>
+        <p:spPr>
+          <a:xfrm>
+            <a:off x="4663440" y="3657600"/>
+            <a:ext cx="4114800" cy="987552"/>
+          </a:xfrm>
+          <a:prstGeom prst="rect">
+            <a:avLst/>
+          </a:prstGeom>
+          <a:noFill/>
+          <a:ln/>
+        </p:spPr>
+        <p:txBody>
+          <a:bodyPr wrap="square" lIns="0" tIns="0" rIns="0" bIns="0" rtlCol="0" anchor="ctr"/>
+          <a:lstStyle/>
+          <a:p>
+            <a:pPr indent="0" marL="0">
+              <a:buNone/>
+            </a:pPr>
+            <a:r>
+              <a:rPr lang="en-US" sz="950" dirty="0">
                 <a:solidFill>
                   <a:srgbClr val="8C5A3A"/>
                 </a:solidFill>
@@ -8956,9 +7819,9 @@
                 <a:ea typeface="Calibri" pitchFamily="34" charset="-122"/>
                 <a:cs typeface="Calibri" pitchFamily="34" charset="-120"/>
               </a:rPr>
-              <a:t>bitcoincierge.in</a:t>
-            </a:r>
-            <a:endParaRPr lang="en-US" sz="750" dirty="0"/>
+              <a:t>People want to meet in person. They want to hold the hardware. They want to feel the experience — not scroll past another post about it.</a:t>
+            </a:r>
+            <a:endParaRPr lang="en-US" sz="950" dirty="0"/>
           </a:p>
         </p:txBody>
       </p:sp>
@@ -9047,7 +7910,7 @@
                 <a:ea typeface="Georgia" pitchFamily="34" charset="-122"/>
                 <a:cs typeface="Georgia" pitchFamily="34" charset="-120"/>
               </a:rPr>
-              <a:t>Before you jump this route!</a:t>
+              <a:t>Smart founders are figuring</a:t>
             </a:r>
             <a:endParaRPr lang="en-US" sz="3000" dirty="0"/>
           </a:p>
@@ -9061,8 +7924,8 @@
         </p:nvSpPr>
         <p:spPr>
           <a:xfrm>
-            <a:off x="457200" y="1691640"/>
-            <a:ext cx="4160520" cy="713232"/>
+            <a:off x="365760" y="1645920"/>
+            <a:ext cx="2743200" cy="2560320"/>
           </a:xfrm>
           <a:prstGeom prst="rect">
             <a:avLst/>
@@ -9093,8 +7956,8 @@
         </p:nvSpPr>
         <p:spPr>
           <a:xfrm>
-            <a:off x="457200" y="1691640"/>
-            <a:ext cx="50292" cy="713232"/>
+            <a:off x="365760" y="1645920"/>
+            <a:ext cx="2743200" cy="50292"/>
           </a:xfrm>
           <a:prstGeom prst="rect">
             <a:avLst/>
@@ -9105,71 +7968,55 @@
           <a:ln/>
         </p:spPr>
       </p:sp>
-      <p:sp>
-        <p:nvSpPr>
-          <p:cNvPr id="6" name="Text 4"/>
-          <p:cNvSpPr/>
-          <p:nvPr/>
-        </p:nvSpPr>
-        <p:spPr>
-          <a:xfrm>
-            <a:off x="621792" y="1801368"/>
-            <a:ext cx="457200" cy="457200"/>
-          </a:xfrm>
-          <a:prstGeom prst="rect">
-            <a:avLst/>
-          </a:prstGeom>
-          <a:noFill/>
-          <a:ln/>
-        </p:spPr>
-        <p:txBody>
-          <a:bodyPr wrap="square" lIns="0" tIns="0" rIns="0" bIns="0" rtlCol="0" anchor="ctr"/>
-          <a:lstStyle/>
-          <a:p>
-            <a:pPr indent="0" marL="0">
-              <a:buNone/>
-            </a:pPr>
-            <a:r>
-              <a:rPr lang="en-US" sz="2200" dirty="0">
-                <a:solidFill>
-                  <a:srgbClr val="000000"/>
-                </a:solidFill>
-                <a:latin typeface="Calibri" pitchFamily="34" charset="0"/>
-                <a:ea typeface="Calibri" pitchFamily="34" charset="-122"/>
-                <a:cs typeface="Calibri" pitchFamily="34" charset="-120"/>
-              </a:rPr>
-              <a:t>🧠</a:t>
-            </a:r>
-            <a:endParaRPr lang="en-US" sz="2200" dirty="0"/>
-          </a:p>
-        </p:txBody>
-      </p:sp>
-      <p:sp>
-        <p:nvSpPr>
-          <p:cNvPr id="7" name="Text 5"/>
-          <p:cNvSpPr/>
-          <p:nvPr/>
-        </p:nvSpPr>
-        <p:spPr>
-          <a:xfrm>
-            <a:off x="1170432" y="1856232"/>
-            <a:ext cx="3246120" cy="384048"/>
-          </a:xfrm>
-          <a:prstGeom prst="rect">
-            <a:avLst/>
-          </a:prstGeom>
-          <a:noFill/>
-          <a:ln/>
-        </p:spPr>
-        <p:txBody>
-          <a:bodyPr wrap="square" lIns="0" tIns="0" rIns="0" bIns="0" rtlCol="0" anchor="ctr"/>
-          <a:lstStyle/>
-          <a:p>
-            <a:pPr indent="0" marL="0">
-              <a:buNone/>
-            </a:pPr>
-            <a:r>
-              <a:rPr lang="en-US" sz="1150" b="1" dirty="0">
+      <p:pic>
+        <p:nvPicPr>
+          <p:cNvPr id="6" name="Image 0" descr="preencoded.png">    </p:cNvPr>
+          <p:cNvPicPr>
+            <a:picLocks noChangeAspect="1"/>
+          </p:cNvPicPr>
+          <p:nvPr/>
+        </p:nvPicPr>
+        <p:blipFill>
+          <a:blip r:embed="rId1"/>
+          <a:srcRect l="0" r="0" t="0" b="0"/>
+          <a:stretch/>
+        </p:blipFill>
+        <p:spPr>
+          <a:xfrm>
+            <a:off x="1143000" y="1783080"/>
+            <a:ext cx="1188720" cy="1188720"/>
+          </a:xfrm>
+          <a:prstGeom prst="rect">
+            <a:avLst/>
+          </a:prstGeom>
+        </p:spPr>
+      </p:pic>
+      <p:sp>
+        <p:nvSpPr>
+          <p:cNvPr id="7" name="Text 4"/>
+          <p:cNvSpPr/>
+          <p:nvPr/>
+        </p:nvSpPr>
+        <p:spPr>
+          <a:xfrm>
+            <a:off x="502920" y="3017520"/>
+            <a:ext cx="2468880" cy="320040"/>
+          </a:xfrm>
+          <a:prstGeom prst="rect">
+            <a:avLst/>
+          </a:prstGeom>
+          <a:noFill/>
+          <a:ln/>
+        </p:spPr>
+        <p:txBody>
+          <a:bodyPr wrap="square" lIns="0" tIns="0" rIns="0" bIns="0" rtlCol="0" anchor="ctr"/>
+          <a:lstStyle/>
+          <a:p>
+            <a:pPr algn="ctr" indent="0" marL="0">
+              <a:buNone/>
+            </a:pPr>
+            <a:r>
+              <a:rPr lang="en-US" sz="1050" b="1" dirty="0">
                 <a:solidFill>
                   <a:srgbClr val="1A1A1A"/>
                 </a:solidFill>
@@ -9177,22 +8024,100 @@
                 <a:ea typeface="Calibri" pitchFamily="34" charset="-122"/>
                 <a:cs typeface="Calibri" pitchFamily="34" charset="-120"/>
               </a:rPr>
-              <a:t>Org time &amp; energy</a:t>
-            </a:r>
-            <a:endParaRPr lang="en-US" sz="1150" dirty="0"/>
-          </a:p>
-        </p:txBody>
-      </p:sp>
-      <p:sp>
-        <p:nvSpPr>
-          <p:cNvPr id="8" name="Shape 6"/>
-          <p:cNvSpPr/>
-          <p:nvPr/>
-        </p:nvSpPr>
-        <p:spPr>
-          <a:xfrm>
-            <a:off x="4828032" y="1691640"/>
-            <a:ext cx="4160520" cy="713232"/>
+              <a:t>B4I Community</a:t>
+            </a:r>
+            <a:endParaRPr lang="en-US" sz="1050" dirty="0"/>
+          </a:p>
+        </p:txBody>
+      </p:sp>
+      <p:sp>
+        <p:nvSpPr>
+          <p:cNvPr id="8" name="Text 5"/>
+          <p:cNvSpPr/>
+          <p:nvPr/>
+        </p:nvSpPr>
+        <p:spPr>
+          <a:xfrm>
+            <a:off x="502920" y="3383280"/>
+            <a:ext cx="2468880" cy="256032"/>
+          </a:xfrm>
+          <a:prstGeom prst="rect">
+            <a:avLst/>
+          </a:prstGeom>
+          <a:noFill/>
+          <a:ln/>
+        </p:spPr>
+        <p:txBody>
+          <a:bodyPr wrap="square" lIns="0" tIns="0" rIns="0" bIns="0" rtlCol="0" anchor="ctr"/>
+          <a:lstStyle/>
+          <a:p>
+            <a:pPr algn="ctr" indent="0" marL="0">
+              <a:buNone/>
+            </a:pPr>
+            <a:r>
+              <a:rPr lang="en-US" sz="900" dirty="0">
+                <a:solidFill>
+                  <a:srgbClr val="F26522"/>
+                </a:solidFill>
+                <a:latin typeface="Calibri" pitchFamily="34" charset="0"/>
+                <a:ea typeface="Calibri" pitchFamily="34" charset="-122"/>
+                <a:cs typeface="Calibri" pitchFamily="34" charset="-120"/>
+              </a:rPr>
+              <a:t>↓  powers  ↓</a:t>
+            </a:r>
+            <a:endParaRPr lang="en-US" sz="900" dirty="0"/>
+          </a:p>
+        </p:txBody>
+      </p:sp>
+      <p:sp>
+        <p:nvSpPr>
+          <p:cNvPr id="9" name="Text 6"/>
+          <p:cNvSpPr/>
+          <p:nvPr/>
+        </p:nvSpPr>
+        <p:spPr>
+          <a:xfrm>
+            <a:off x="502920" y="3703320"/>
+            <a:ext cx="2468880" cy="365760"/>
+          </a:xfrm>
+          <a:prstGeom prst="rect">
+            <a:avLst/>
+          </a:prstGeom>
+          <a:noFill/>
+          <a:ln/>
+        </p:spPr>
+        <p:txBody>
+          <a:bodyPr wrap="square" lIns="0" tIns="0" rIns="0" bIns="0" rtlCol="0" anchor="ctr"/>
+          <a:lstStyle/>
+          <a:p>
+            <a:pPr algn="ctr" indent="0" marL="0">
+              <a:buNone/>
+            </a:pPr>
+            <a:r>
+              <a:rPr lang="en-US" sz="1200" b="1" dirty="0">
+                <a:solidFill>
+                  <a:srgbClr val="F26522"/>
+                </a:solidFill>
+                <a:latin typeface="Calibri" pitchFamily="34" charset="0"/>
+                <a:ea typeface="Calibri" pitchFamily="34" charset="-122"/>
+                <a:cs typeface="Calibri" pitchFamily="34" charset="-120"/>
+              </a:rPr>
+              <a:t>Bitcoin Keeper</a:t>
+            </a:r>
+            <a:endParaRPr lang="en-US" sz="1200" dirty="0"/>
+          </a:p>
+        </p:txBody>
+      </p:sp>
+      <p:sp>
+        <p:nvSpPr>
+          <p:cNvPr id="10" name="Shape 7"/>
+          <p:cNvSpPr/>
+          <p:nvPr/>
+        </p:nvSpPr>
+        <p:spPr>
+          <a:xfrm>
+            <a:off x="3291840" y="1645920"/>
+            <a:ext cx="2743200" cy="2560320"/>
           </a:xfrm>
           <a:prstGeom prst="rect">
             <a:avLst/>
@@ -9217,14 +8142,14 @@
       </p:sp>
       <p:sp>
         <p:nvSpPr>
-          <p:cNvPr id="9" name="Shape 7"/>
-          <p:cNvSpPr/>
-          <p:nvPr/>
-        </p:nvSpPr>
-        <p:spPr>
-          <a:xfrm>
-            <a:off x="4828032" y="1691640"/>
-            <a:ext cx="50292" cy="713232"/>
+          <p:cNvPr id="11" name="Shape 8"/>
+          <p:cNvSpPr/>
+          <p:nvPr/>
+        </p:nvSpPr>
+        <p:spPr>
+          <a:xfrm>
+            <a:off x="3291840" y="1645920"/>
+            <a:ext cx="2743200" cy="50292"/>
           </a:xfrm>
           <a:prstGeom prst="rect">
             <a:avLst/>
@@ -9235,71 +8160,55 @@
           <a:ln/>
         </p:spPr>
       </p:sp>
-      <p:sp>
-        <p:nvSpPr>
-          <p:cNvPr id="10" name="Text 8"/>
-          <p:cNvSpPr/>
-          <p:nvPr/>
-        </p:nvSpPr>
-        <p:spPr>
-          <a:xfrm>
-            <a:off x="4992624" y="1801368"/>
-            <a:ext cx="457200" cy="457200"/>
-          </a:xfrm>
-          <a:prstGeom prst="rect">
-            <a:avLst/>
-          </a:prstGeom>
-          <a:noFill/>
-          <a:ln/>
-        </p:spPr>
-        <p:txBody>
-          <a:bodyPr wrap="square" lIns="0" tIns="0" rIns="0" bIns="0" rtlCol="0" anchor="ctr"/>
-          <a:lstStyle/>
-          <a:p>
-            <a:pPr indent="0" marL="0">
-              <a:buNone/>
-            </a:pPr>
-            <a:r>
-              <a:rPr lang="en-US" sz="2200" dirty="0">
-                <a:solidFill>
-                  <a:srgbClr val="000000"/>
-                </a:solidFill>
-                <a:latin typeface="Calibri" pitchFamily="34" charset="0"/>
-                <a:ea typeface="Calibri" pitchFamily="34" charset="-122"/>
-                <a:cs typeface="Calibri" pitchFamily="34" charset="-120"/>
-              </a:rPr>
-              <a:t>🗺️</a:t>
-            </a:r>
-            <a:endParaRPr lang="en-US" sz="2200" dirty="0"/>
-          </a:p>
-        </p:txBody>
-      </p:sp>
-      <p:sp>
-        <p:nvSpPr>
-          <p:cNvPr id="11" name="Text 9"/>
-          <p:cNvSpPr/>
-          <p:nvPr/>
-        </p:nvSpPr>
-        <p:spPr>
-          <a:xfrm>
-            <a:off x="5541264" y="1856232"/>
-            <a:ext cx="3246120" cy="384048"/>
-          </a:xfrm>
-          <a:prstGeom prst="rect">
-            <a:avLst/>
-          </a:prstGeom>
-          <a:noFill/>
-          <a:ln/>
-        </p:spPr>
-        <p:txBody>
-          <a:bodyPr wrap="square" lIns="0" tIns="0" rIns="0" bIns="0" rtlCol="0" anchor="ctr"/>
-          <a:lstStyle/>
-          <a:p>
-            <a:pPr indent="0" marL="0">
-              <a:buNone/>
-            </a:pPr>
-            <a:r>
-              <a:rPr lang="en-US" sz="1150" b="1" dirty="0">
+      <p:pic>
+        <p:nvPicPr>
+          <p:cNvPr id="12" name="Image 1" descr="preencoded.png">    </p:cNvPr>
+          <p:cNvPicPr>
+            <a:picLocks noChangeAspect="1"/>
+          </p:cNvPicPr>
+          <p:nvPr/>
+        </p:nvPicPr>
+        <p:blipFill>
+          <a:blip r:embed="rId2"/>
+          <a:srcRect l="0" r="0" t="0" b="0"/>
+          <a:stretch/>
+        </p:blipFill>
+        <p:spPr>
+          <a:xfrm>
+            <a:off x="4069080" y="1783080"/>
+            <a:ext cx="1188720" cy="1188720"/>
+          </a:xfrm>
+          <a:prstGeom prst="rect">
+            <a:avLst/>
+          </a:prstGeom>
+        </p:spPr>
+      </p:pic>
+      <p:sp>
+        <p:nvSpPr>
+          <p:cNvPr id="13" name="Text 9"/>
+          <p:cNvSpPr/>
+          <p:nvPr/>
+        </p:nvSpPr>
+        <p:spPr>
+          <a:xfrm>
+            <a:off x="3429000" y="3017520"/>
+            <a:ext cx="2468880" cy="320040"/>
+          </a:xfrm>
+          <a:prstGeom prst="rect">
+            <a:avLst/>
+          </a:prstGeom>
+          <a:noFill/>
+          <a:ln/>
+        </p:spPr>
+        <p:txBody>
+          <a:bodyPr wrap="square" lIns="0" tIns="0" rIns="0" bIns="0" rtlCol="0" anchor="ctr"/>
+          <a:lstStyle/>
+          <a:p>
+            <a:pPr algn="ctr" indent="0" marL="0">
+              <a:buNone/>
+            </a:pPr>
+            <a:r>
+              <a:rPr lang="en-US" sz="1050" b="1" dirty="0">
                 <a:solidFill>
                   <a:srgbClr val="1A1A1A"/>
                 </a:solidFill>
@@ -9307,22 +8216,100 @@
                 <a:ea typeface="Calibri" pitchFamily="34" charset="-122"/>
                 <a:cs typeface="Calibri" pitchFamily="34" charset="-120"/>
               </a:rPr>
-              <a:t>Physical presence across cities</a:t>
-            </a:r>
-            <a:endParaRPr lang="en-US" sz="1150" dirty="0"/>
-          </a:p>
-        </p:txBody>
-      </p:sp>
-      <p:sp>
-        <p:nvSpPr>
-          <p:cNvPr id="12" name="Shape 10"/>
-          <p:cNvSpPr/>
-          <p:nvPr/>
-        </p:nvSpPr>
-        <p:spPr>
-          <a:xfrm>
-            <a:off x="457200" y="2651760"/>
-            <a:ext cx="4160520" cy="713232"/>
+              <a:t>Bitcoin Bharat</a:t>
+            </a:r>
+            <a:endParaRPr lang="en-US" sz="1050" dirty="0"/>
+          </a:p>
+        </p:txBody>
+      </p:sp>
+      <p:sp>
+        <p:nvSpPr>
+          <p:cNvPr id="14" name="Text 10"/>
+          <p:cNvSpPr/>
+          <p:nvPr/>
+        </p:nvSpPr>
+        <p:spPr>
+          <a:xfrm>
+            <a:off x="3429000" y="3383280"/>
+            <a:ext cx="2468880" cy="256032"/>
+          </a:xfrm>
+          <a:prstGeom prst="rect">
+            <a:avLst/>
+          </a:prstGeom>
+          <a:noFill/>
+          <a:ln/>
+        </p:spPr>
+        <p:txBody>
+          <a:bodyPr wrap="square" lIns="0" tIns="0" rIns="0" bIns="0" rtlCol="0" anchor="ctr"/>
+          <a:lstStyle/>
+          <a:p>
+            <a:pPr algn="ctr" indent="0" marL="0">
+              <a:buNone/>
+            </a:pPr>
+            <a:r>
+              <a:rPr lang="en-US" sz="900" dirty="0">
+                <a:solidFill>
+                  <a:srgbClr val="F26522"/>
+                </a:solidFill>
+                <a:latin typeface="Calibri" pitchFamily="34" charset="0"/>
+                <a:ea typeface="Calibri" pitchFamily="34" charset="-122"/>
+                <a:cs typeface="Calibri" pitchFamily="34" charset="-120"/>
+              </a:rPr>
+              <a:t>↓  powers  ↓</a:t>
+            </a:r>
+            <a:endParaRPr lang="en-US" sz="900" dirty="0"/>
+          </a:p>
+        </p:txBody>
+      </p:sp>
+      <p:sp>
+        <p:nvSpPr>
+          <p:cNvPr id="15" name="Text 11"/>
+          <p:cNvSpPr/>
+          <p:nvPr/>
+        </p:nvSpPr>
+        <p:spPr>
+          <a:xfrm>
+            <a:off x="3429000" y="3703320"/>
+            <a:ext cx="2468880" cy="365760"/>
+          </a:xfrm>
+          <a:prstGeom prst="rect">
+            <a:avLst/>
+          </a:prstGeom>
+          <a:noFill/>
+          <a:ln/>
+        </p:spPr>
+        <p:txBody>
+          <a:bodyPr wrap="square" lIns="0" tIns="0" rIns="0" bIns="0" rtlCol="0" anchor="ctr"/>
+          <a:lstStyle/>
+          <a:p>
+            <a:pPr algn="ctr" indent="0" marL="0">
+              <a:buNone/>
+            </a:pPr>
+            <a:r>
+              <a:rPr lang="en-US" sz="1200" b="1" dirty="0">
+                <a:solidFill>
+                  <a:srgbClr val="F26522"/>
+                </a:solidFill>
+                <a:latin typeface="Calibri" pitchFamily="34" charset="0"/>
+                <a:ea typeface="Calibri" pitchFamily="34" charset="-122"/>
+                <a:cs typeface="Calibri" pitchFamily="34" charset="-120"/>
+              </a:rPr>
+              <a:t>SwapSo</a:t>
+            </a:r>
+            <a:endParaRPr lang="en-US" sz="1200" dirty="0"/>
+          </a:p>
+        </p:txBody>
+      </p:sp>
+      <p:sp>
+        <p:nvSpPr>
+          <p:cNvPr id="16" name="Shape 12"/>
+          <p:cNvSpPr/>
+          <p:nvPr/>
+        </p:nvSpPr>
+        <p:spPr>
+          <a:xfrm>
+            <a:off x="6217920" y="1645920"/>
+            <a:ext cx="2743200" cy="2560320"/>
           </a:xfrm>
           <a:prstGeom prst="rect">
             <a:avLst/>
@@ -9347,14 +8334,14 @@
       </p:sp>
       <p:sp>
         <p:nvSpPr>
-          <p:cNvPr id="13" name="Shape 11"/>
-          <p:cNvSpPr/>
-          <p:nvPr/>
-        </p:nvSpPr>
-        <p:spPr>
-          <a:xfrm>
-            <a:off x="457200" y="2651760"/>
-            <a:ext cx="50292" cy="713232"/>
+          <p:cNvPr id="17" name="Shape 13"/>
+          <p:cNvSpPr/>
+          <p:nvPr/>
+        </p:nvSpPr>
+        <p:spPr>
+          <a:xfrm>
+            <a:off x="6217920" y="1645920"/>
+            <a:ext cx="2743200" cy="50292"/>
           </a:xfrm>
           <a:prstGeom prst="rect">
             <a:avLst/>
@@ -9365,71 +8352,55 @@
           <a:ln/>
         </p:spPr>
       </p:sp>
-      <p:sp>
-        <p:nvSpPr>
-          <p:cNvPr id="14" name="Text 12"/>
-          <p:cNvSpPr/>
-          <p:nvPr/>
-        </p:nvSpPr>
-        <p:spPr>
-          <a:xfrm>
-            <a:off x="621792" y="2761488"/>
-            <a:ext cx="457200" cy="457200"/>
-          </a:xfrm>
-          <a:prstGeom prst="rect">
-            <a:avLst/>
-          </a:prstGeom>
-          <a:noFill/>
-          <a:ln/>
-        </p:spPr>
-        <p:txBody>
-          <a:bodyPr wrap="square" lIns="0" tIns="0" rIns="0" bIns="0" rtlCol="0" anchor="ctr"/>
-          <a:lstStyle/>
-          <a:p>
-            <a:pPr indent="0" marL="0">
-              <a:buNone/>
-            </a:pPr>
-            <a:r>
-              <a:rPr lang="en-US" sz="2200" dirty="0">
-                <a:solidFill>
-                  <a:srgbClr val="000000"/>
-                </a:solidFill>
-                <a:latin typeface="Calibri" pitchFamily="34" charset="0"/>
-                <a:ea typeface="Calibri" pitchFamily="34" charset="-122"/>
-                <a:cs typeface="Calibri" pitchFamily="34" charset="-120"/>
-              </a:rPr>
-              <a:t>⚙️</a:t>
-            </a:r>
-            <a:endParaRPr lang="en-US" sz="2200" dirty="0"/>
-          </a:p>
-        </p:txBody>
-      </p:sp>
-      <p:sp>
-        <p:nvSpPr>
-          <p:cNvPr id="15" name="Text 13"/>
-          <p:cNvSpPr/>
-          <p:nvPr/>
-        </p:nvSpPr>
-        <p:spPr>
-          <a:xfrm>
-            <a:off x="1170432" y="2816352"/>
-            <a:ext cx="3246120" cy="384048"/>
-          </a:xfrm>
-          <a:prstGeom prst="rect">
-            <a:avLst/>
-          </a:prstGeom>
-          <a:noFill/>
-          <a:ln/>
-        </p:spPr>
-        <p:txBody>
-          <a:bodyPr wrap="square" lIns="0" tIns="0" rIns="0" bIns="0" rtlCol="0" anchor="ctr"/>
-          <a:lstStyle/>
-          <a:p>
-            <a:pPr indent="0" marL="0">
-              <a:buNone/>
-            </a:pPr>
-            <a:r>
-              <a:rPr lang="en-US" sz="1150" b="1" dirty="0">
+      <p:pic>
+        <p:nvPicPr>
+          <p:cNvPr id="18" name="Image 2" descr="preencoded.png">    </p:cNvPr>
+          <p:cNvPicPr>
+            <a:picLocks noChangeAspect="1"/>
+          </p:cNvPicPr>
+          <p:nvPr/>
+        </p:nvPicPr>
+        <p:blipFill>
+          <a:blip r:embed="rId3"/>
+          <a:srcRect l="0" r="0" t="0" b="0"/>
+          <a:stretch/>
+        </p:blipFill>
+        <p:spPr>
+          <a:xfrm>
+            <a:off x="6995160" y="1783080"/>
+            <a:ext cx="1188720" cy="1188720"/>
+          </a:xfrm>
+          <a:prstGeom prst="rect">
+            <a:avLst/>
+          </a:prstGeom>
+        </p:spPr>
+      </p:pic>
+      <p:sp>
+        <p:nvSpPr>
+          <p:cNvPr id="19" name="Text 14"/>
+          <p:cNvSpPr/>
+          <p:nvPr/>
+        </p:nvSpPr>
+        <p:spPr>
+          <a:xfrm>
+            <a:off x="6355080" y="3017520"/>
+            <a:ext cx="2468880" cy="320040"/>
+          </a:xfrm>
+          <a:prstGeom prst="rect">
+            <a:avLst/>
+          </a:prstGeom>
+          <a:noFill/>
+          <a:ln/>
+        </p:spPr>
+        <p:txBody>
+          <a:bodyPr wrap="square" lIns="0" tIns="0" rIns="0" bIns="0" rtlCol="0" anchor="ctr"/>
+          <a:lstStyle/>
+          <a:p>
+            <a:pPr algn="ctr" indent="0" marL="0">
+              <a:buNone/>
+            </a:pPr>
+            <a:r>
+              <a:rPr lang="en-US" sz="1050" b="1" dirty="0">
                 <a:solidFill>
                   <a:srgbClr val="1A1A1A"/>
                 </a:solidFill>
@@ -9437,275 +8408,93 @@
                 <a:ea typeface="Calibri" pitchFamily="34" charset="-122"/>
                 <a:cs typeface="Calibri" pitchFamily="34" charset="-120"/>
               </a:rPr>
-              <a:t>Operations &amp; hiring</a:t>
-            </a:r>
-            <a:endParaRPr lang="en-US" sz="1150" dirty="0"/>
-          </a:p>
-        </p:txBody>
-      </p:sp>
-      <p:sp>
-        <p:nvSpPr>
-          <p:cNvPr id="16" name="Shape 14"/>
-          <p:cNvSpPr/>
-          <p:nvPr/>
-        </p:nvSpPr>
-        <p:spPr>
-          <a:xfrm>
-            <a:off x="4828032" y="2651760"/>
-            <a:ext cx="4160520" cy="713232"/>
-          </a:xfrm>
-          <a:prstGeom prst="rect">
-            <a:avLst/>
-          </a:prstGeom>
-          <a:solidFill>
-            <a:srgbClr val="FFFFFF"/>
-          </a:solidFill>
-          <a:ln w="9525">
-            <a:solidFill>
-              <a:srgbClr val="E5E7EB"/>
-            </a:solidFill>
-            <a:prstDash val="solid"/>
-          </a:ln>
-          <a:effectLst>
-            <a:outerShdw sx="100000" sy="100000" kx="0" ky="0" algn="bl" rotWithShape="0" blurRad="76200" dist="25400" dir="8100000">
-              <a:srgbClr val="000000">
-                <a:alpha val="8000"/>
-              </a:srgbClr>
-            </a:outerShdw>
-          </a:effectLst>
-        </p:spPr>
-      </p:sp>
-      <p:sp>
-        <p:nvSpPr>
-          <p:cNvPr id="17" name="Shape 15"/>
-          <p:cNvSpPr/>
-          <p:nvPr/>
-        </p:nvSpPr>
-        <p:spPr>
-          <a:xfrm>
-            <a:off x="4828032" y="2651760"/>
-            <a:ext cx="50292" cy="713232"/>
-          </a:xfrm>
-          <a:prstGeom prst="rect">
-            <a:avLst/>
-          </a:prstGeom>
-          <a:solidFill>
-            <a:srgbClr val="F26522"/>
-          </a:solidFill>
-          <a:ln/>
-        </p:spPr>
-      </p:sp>
-      <p:sp>
-        <p:nvSpPr>
-          <p:cNvPr id="18" name="Text 16"/>
-          <p:cNvSpPr/>
-          <p:nvPr/>
-        </p:nvSpPr>
-        <p:spPr>
-          <a:xfrm>
-            <a:off x="4992624" y="2761488"/>
-            <a:ext cx="457200" cy="457200"/>
-          </a:xfrm>
-          <a:prstGeom prst="rect">
-            <a:avLst/>
-          </a:prstGeom>
-          <a:noFill/>
-          <a:ln/>
-        </p:spPr>
-        <p:txBody>
-          <a:bodyPr wrap="square" lIns="0" tIns="0" rIns="0" bIns="0" rtlCol="0" anchor="ctr"/>
-          <a:lstStyle/>
-          <a:p>
-            <a:pPr indent="0" marL="0">
-              <a:buNone/>
-            </a:pPr>
-            <a:r>
-              <a:rPr lang="en-US" sz="2200" dirty="0">
-                <a:solidFill>
-                  <a:srgbClr val="000000"/>
-                </a:solidFill>
-                <a:latin typeface="Calibri" pitchFamily="34" charset="0"/>
-                <a:ea typeface="Calibri" pitchFamily="34" charset="-122"/>
-                <a:cs typeface="Calibri" pitchFamily="34" charset="-120"/>
-              </a:rPr>
-              <a:t>✈️</a:t>
-            </a:r>
-            <a:endParaRPr lang="en-US" sz="2200" dirty="0"/>
-          </a:p>
-        </p:txBody>
-      </p:sp>
-      <p:sp>
-        <p:nvSpPr>
-          <p:cNvPr id="19" name="Text 17"/>
-          <p:cNvSpPr/>
-          <p:nvPr/>
-        </p:nvSpPr>
-        <p:spPr>
-          <a:xfrm>
-            <a:off x="5541264" y="2816352"/>
-            <a:ext cx="3246120" cy="384048"/>
-          </a:xfrm>
-          <a:prstGeom prst="rect">
-            <a:avLst/>
-          </a:prstGeom>
-          <a:noFill/>
-          <a:ln/>
-        </p:spPr>
-        <p:txBody>
-          <a:bodyPr wrap="square" lIns="0" tIns="0" rIns="0" bIns="0" rtlCol="0" anchor="ctr"/>
-          <a:lstStyle/>
-          <a:p>
-            <a:pPr indent="0" marL="0">
-              <a:buNone/>
-            </a:pPr>
-            <a:r>
-              <a:rPr lang="en-US" sz="1150" b="1" dirty="0">
-                <a:solidFill>
-                  <a:srgbClr val="1A1A1A"/>
-                </a:solidFill>
-                <a:latin typeface="Calibri" pitchFamily="34" charset="0"/>
-                <a:ea typeface="Calibri" pitchFamily="34" charset="-122"/>
-                <a:cs typeface="Calibri" pitchFamily="34" charset="-120"/>
-              </a:rPr>
-              <a:t>Travel &amp; accommodation budget</a:t>
-            </a:r>
-            <a:endParaRPr lang="en-US" sz="1150" dirty="0"/>
-          </a:p>
-        </p:txBody>
-      </p:sp>
-      <p:sp>
-        <p:nvSpPr>
-          <p:cNvPr id="20" name="Shape 18"/>
-          <p:cNvSpPr/>
-          <p:nvPr/>
-        </p:nvSpPr>
-        <p:spPr>
-          <a:xfrm>
-            <a:off x="457200" y="3611880"/>
-            <a:ext cx="8229600" cy="713232"/>
-          </a:xfrm>
-          <a:prstGeom prst="rect">
-            <a:avLst/>
-          </a:prstGeom>
-          <a:solidFill>
-            <a:srgbClr val="FFFFFF"/>
-          </a:solidFill>
-          <a:ln w="9525">
-            <a:solidFill>
-              <a:srgbClr val="E5E7EB"/>
-            </a:solidFill>
-            <a:prstDash val="solid"/>
-          </a:ln>
-          <a:effectLst>
-            <a:outerShdw sx="100000" sy="100000" kx="0" ky="0" algn="bl" rotWithShape="0" blurRad="76200" dist="25400" dir="8100000">
-              <a:srgbClr val="000000">
-                <a:alpha val="8000"/>
-              </a:srgbClr>
-            </a:outerShdw>
-          </a:effectLst>
-        </p:spPr>
-      </p:sp>
-      <p:sp>
-        <p:nvSpPr>
-          <p:cNvPr id="21" name="Shape 19"/>
-          <p:cNvSpPr/>
-          <p:nvPr/>
-        </p:nvSpPr>
-        <p:spPr>
-          <a:xfrm>
-            <a:off x="457200" y="3611880"/>
-            <a:ext cx="50292" cy="713232"/>
-          </a:xfrm>
-          <a:prstGeom prst="rect">
-            <a:avLst/>
-          </a:prstGeom>
-          <a:solidFill>
-            <a:srgbClr val="F26522"/>
-          </a:solidFill>
-          <a:ln/>
-        </p:spPr>
-      </p:sp>
-      <p:sp>
-        <p:nvSpPr>
-          <p:cNvPr id="22" name="Text 20"/>
-          <p:cNvSpPr/>
-          <p:nvPr/>
-        </p:nvSpPr>
-        <p:spPr>
-          <a:xfrm>
-            <a:off x="621792" y="3721608"/>
-            <a:ext cx="457200" cy="457200"/>
-          </a:xfrm>
-          <a:prstGeom prst="rect">
-            <a:avLst/>
-          </a:prstGeom>
-          <a:noFill/>
-          <a:ln/>
-        </p:spPr>
-        <p:txBody>
-          <a:bodyPr wrap="square" lIns="0" tIns="0" rIns="0" bIns="0" rtlCol="0" anchor="ctr"/>
-          <a:lstStyle/>
-          <a:p>
-            <a:pPr indent="0" marL="0">
-              <a:buNone/>
-            </a:pPr>
-            <a:r>
-              <a:rPr lang="en-US" sz="2200" dirty="0">
-                <a:solidFill>
-                  <a:srgbClr val="000000"/>
-                </a:solidFill>
-                <a:latin typeface="Calibri" pitchFamily="34" charset="0"/>
-                <a:ea typeface="Calibri" pitchFamily="34" charset="-122"/>
-                <a:cs typeface="Calibri" pitchFamily="34" charset="-120"/>
-              </a:rPr>
-              <a:t>📊</a:t>
-            </a:r>
-            <a:endParaRPr lang="en-US" sz="2200" dirty="0"/>
-          </a:p>
-        </p:txBody>
-      </p:sp>
-      <p:sp>
-        <p:nvSpPr>
-          <p:cNvPr id="23" name="Text 21"/>
-          <p:cNvSpPr/>
-          <p:nvPr/>
-        </p:nvSpPr>
-        <p:spPr>
-          <a:xfrm>
-            <a:off x="1170432" y="3776472"/>
-            <a:ext cx="7315200" cy="384048"/>
-          </a:xfrm>
-          <a:prstGeom prst="rect">
-            <a:avLst/>
-          </a:prstGeom>
-          <a:noFill/>
-          <a:ln/>
-        </p:spPr>
-        <p:txBody>
-          <a:bodyPr wrap="square" lIns="0" tIns="0" rIns="0" bIns="0" rtlCol="0" anchor="ctr"/>
-          <a:lstStyle/>
-          <a:p>
-            <a:pPr indent="0" marL="0">
-              <a:buNone/>
-            </a:pPr>
-            <a:r>
-              <a:rPr lang="en-US" sz="1150" b="1" dirty="0">
-                <a:solidFill>
-                  <a:srgbClr val="1A1A1A"/>
-                </a:solidFill>
-                <a:latin typeface="Calibri" pitchFamily="34" charset="0"/>
-                <a:ea typeface="Calibri" pitchFamily="34" charset="-122"/>
-                <a:cs typeface="Calibri" pitchFamily="34" charset="-120"/>
-              </a:rPr>
-              <a:t>End-to-end attribution</a:t>
-            </a:r>
-            <a:endParaRPr lang="en-US" sz="1150" dirty="0"/>
-          </a:p>
-        </p:txBody>
-      </p:sp>
-      <p:sp>
-        <p:nvSpPr>
-          <p:cNvPr id="24" name="Shape 22"/>
+              <a:t>Bitcoinwaale</a:t>
+            </a:r>
+            <a:endParaRPr lang="en-US" sz="1050" dirty="0"/>
+          </a:p>
+        </p:txBody>
+      </p:sp>
+      <p:sp>
+        <p:nvSpPr>
+          <p:cNvPr id="20" name="Text 15"/>
+          <p:cNvSpPr/>
+          <p:nvPr/>
+        </p:nvSpPr>
+        <p:spPr>
+          <a:xfrm>
+            <a:off x="6355080" y="3383280"/>
+            <a:ext cx="2468880" cy="256032"/>
+          </a:xfrm>
+          <a:prstGeom prst="rect">
+            <a:avLst/>
+          </a:prstGeom>
+          <a:noFill/>
+          <a:ln/>
+        </p:spPr>
+        <p:txBody>
+          <a:bodyPr wrap="square" lIns="0" tIns="0" rIns="0" bIns="0" rtlCol="0" anchor="ctr"/>
+          <a:lstStyle/>
+          <a:p>
+            <a:pPr algn="ctr" indent="0" marL="0">
+              <a:buNone/>
+            </a:pPr>
+            <a:r>
+              <a:rPr lang="en-US" sz="900" dirty="0">
+                <a:solidFill>
+                  <a:srgbClr val="F26522"/>
+                </a:solidFill>
+                <a:latin typeface="Calibri" pitchFamily="34" charset="0"/>
+                <a:ea typeface="Calibri" pitchFamily="34" charset="-122"/>
+                <a:cs typeface="Calibri" pitchFamily="34" charset="-120"/>
+              </a:rPr>
+              <a:t>↓  powers  ↓</a:t>
+            </a:r>
+            <a:endParaRPr lang="en-US" sz="900" dirty="0"/>
+          </a:p>
+        </p:txBody>
+      </p:sp>
+      <p:sp>
+        <p:nvSpPr>
+          <p:cNvPr id="21" name="Text 16"/>
+          <p:cNvSpPr/>
+          <p:nvPr/>
+        </p:nvSpPr>
+        <p:spPr>
+          <a:xfrm>
+            <a:off x="6355080" y="3703320"/>
+            <a:ext cx="2468880" cy="365760"/>
+          </a:xfrm>
+          <a:prstGeom prst="rect">
+            <a:avLst/>
+          </a:prstGeom>
+          <a:noFill/>
+          <a:ln/>
+        </p:spPr>
+        <p:txBody>
+          <a:bodyPr wrap="square" lIns="0" tIns="0" rIns="0" bIns="0" rtlCol="0" anchor="ctr"/>
+          <a:lstStyle/>
+          <a:p>
+            <a:pPr algn="ctr" indent="0" marL="0">
+              <a:buNone/>
+            </a:pPr>
+            <a:r>
+              <a:rPr lang="en-US" sz="1200" b="1" dirty="0">
+                <a:solidFill>
+                  <a:srgbClr val="F26522"/>
+                </a:solidFill>
+                <a:latin typeface="Calibri" pitchFamily="34" charset="0"/>
+                <a:ea typeface="Calibri" pitchFamily="34" charset="-122"/>
+                <a:cs typeface="Calibri" pitchFamily="34" charset="-120"/>
+              </a:rPr>
+              <a:t>GetBit</a:t>
+            </a:r>
+            <a:endParaRPr lang="en-US" sz="1200" dirty="0"/>
+          </a:p>
+        </p:txBody>
+      </p:sp>
+      <p:sp>
+        <p:nvSpPr>
+          <p:cNvPr id="22" name="Shape 17"/>
           <p:cNvSpPr/>
           <p:nvPr/>
         </p:nvSpPr>
@@ -9725,7 +8514,7 @@
       </p:sp>
       <p:sp>
         <p:nvSpPr>
-          <p:cNvPr id="25" name="Text 23"/>
+          <p:cNvPr id="23" name="Text 18"/>
           <p:cNvSpPr/>
           <p:nvPr/>
         </p:nvSpPr>
@@ -9802,8 +8591,8 @@
         </p:nvSpPr>
         <p:spPr>
           <a:xfrm>
-            <a:off x="0" y="0"/>
-            <a:ext cx="9144000" cy="64008"/>
+            <a:off x="411480" y="475488"/>
+            <a:ext cx="50292" cy="1005840"/>
           </a:xfrm>
           <a:prstGeom prst="rect">
             <a:avLst/>
@@ -9822,8 +8611,8 @@
         </p:nvSpPr>
         <p:spPr>
           <a:xfrm>
-            <a:off x="457200" y="640080"/>
-            <a:ext cx="8229600" cy="1097280"/>
+            <a:off x="594360" y="475488"/>
+            <a:ext cx="8046720" cy="1005840"/>
           </a:xfrm>
           <a:prstGeom prst="rect">
             <a:avLst/>
@@ -9839,7 +8628,7 @@
               <a:buNone/>
             </a:pPr>
             <a:r>
-              <a:rPr lang="en-US" sz="6800" i="1" dirty="0">
+              <a:rPr lang="en-US" sz="3000" i="1" dirty="0">
                 <a:solidFill>
                   <a:srgbClr val="1A1A1A"/>
                 </a:solidFill>
@@ -9847,9 +8636,9 @@
                 <a:ea typeface="Georgia" pitchFamily="34" charset="-122"/>
                 <a:cs typeface="Georgia" pitchFamily="34" charset="-120"/>
               </a:rPr>
-              <a:t>Bitcoincierge</a:t>
-            </a:r>
-            <a:endParaRPr lang="en-US" sz="6800" dirty="0"/>
+              <a:t>Before you jump this route!</a:t>
+            </a:r>
+            <a:endParaRPr lang="en-US" sz="3000" dirty="0"/>
           </a:p>
         </p:txBody>
       </p:sp>
@@ -9862,7 +8651,39 @@
         <p:spPr>
           <a:xfrm>
             <a:off x="457200" y="1691640"/>
-            <a:ext cx="2286000" cy="50292"/>
+            <a:ext cx="4160520" cy="713232"/>
+          </a:xfrm>
+          <a:prstGeom prst="rect">
+            <a:avLst/>
+          </a:prstGeom>
+          <a:solidFill>
+            <a:srgbClr val="FFFFFF"/>
+          </a:solidFill>
+          <a:ln w="9525">
+            <a:solidFill>
+              <a:srgbClr val="E5E7EB"/>
+            </a:solidFill>
+            <a:prstDash val="solid"/>
+          </a:ln>
+          <a:effectLst>
+            <a:outerShdw sx="100000" sy="100000" kx="0" ky="0" algn="bl" rotWithShape="0" blurRad="76200" dist="25400" dir="8100000">
+              <a:srgbClr val="000000">
+                <a:alpha val="8000"/>
+              </a:srgbClr>
+            </a:outerShdw>
+          </a:effectLst>
+        </p:spPr>
+      </p:sp>
+      <p:sp>
+        <p:nvSpPr>
+          <p:cNvPr id="5" name="Shape 3"/>
+          <p:cNvSpPr/>
+          <p:nvPr/>
+        </p:nvSpPr>
+        <p:spPr>
+          <a:xfrm>
+            <a:off x="457200" y="1691640"/>
+            <a:ext cx="50292" cy="713232"/>
           </a:xfrm>
           <a:prstGeom prst="rect">
             <a:avLst/>
@@ -9875,30 +8696,69 @@
       </p:sp>
       <p:sp>
         <p:nvSpPr>
-          <p:cNvPr id="5" name="Text 3"/>
-          <p:cNvSpPr/>
-          <p:nvPr/>
-        </p:nvSpPr>
-        <p:spPr>
-          <a:xfrm>
-            <a:off x="457200" y="1874520"/>
-            <a:ext cx="8046720" cy="822960"/>
-          </a:xfrm>
-          <a:prstGeom prst="rect">
-            <a:avLst/>
-          </a:prstGeom>
-          <a:noFill/>
-          <a:ln/>
-        </p:spPr>
-        <p:txBody>
-          <a:bodyPr wrap="square" lIns="0" tIns="0" rIns="0" bIns="0" rtlCol="0" anchor="ctr"/>
-          <a:lstStyle/>
-          <a:p>
-            <a:pPr algn="l" indent="0" marL="0">
-              <a:buNone/>
-            </a:pPr>
-            <a:r>
-              <a:rPr lang="en-US" sz="1800" dirty="0">
+          <p:cNvPr id="6" name="Text 4"/>
+          <p:cNvSpPr/>
+          <p:nvPr/>
+        </p:nvSpPr>
+        <p:spPr>
+          <a:xfrm>
+            <a:off x="621792" y="1801368"/>
+            <a:ext cx="457200" cy="457200"/>
+          </a:xfrm>
+          <a:prstGeom prst="rect">
+            <a:avLst/>
+          </a:prstGeom>
+          <a:noFill/>
+          <a:ln/>
+        </p:spPr>
+        <p:txBody>
+          <a:bodyPr wrap="square" lIns="0" tIns="0" rIns="0" bIns="0" rtlCol="0" anchor="ctr"/>
+          <a:lstStyle/>
+          <a:p>
+            <a:pPr indent="0" marL="0">
+              <a:buNone/>
+            </a:pPr>
+            <a:r>
+              <a:rPr lang="en-US" sz="2200" dirty="0">
+                <a:solidFill>
+                  <a:srgbClr val="000000"/>
+                </a:solidFill>
+                <a:latin typeface="Calibri" pitchFamily="34" charset="0"/>
+                <a:ea typeface="Calibri" pitchFamily="34" charset="-122"/>
+                <a:cs typeface="Calibri" pitchFamily="34" charset="-120"/>
+              </a:rPr>
+              <a:t>🧠</a:t>
+            </a:r>
+            <a:endParaRPr lang="en-US" sz="2200" dirty="0"/>
+          </a:p>
+        </p:txBody>
+      </p:sp>
+      <p:sp>
+        <p:nvSpPr>
+          <p:cNvPr id="7" name="Text 5"/>
+          <p:cNvSpPr/>
+          <p:nvPr/>
+        </p:nvSpPr>
+        <p:spPr>
+          <a:xfrm>
+            <a:off x="1170432" y="1856232"/>
+            <a:ext cx="3246120" cy="384048"/>
+          </a:xfrm>
+          <a:prstGeom prst="rect">
+            <a:avLst/>
+          </a:prstGeom>
+          <a:noFill/>
+          <a:ln/>
+        </p:spPr>
+        <p:txBody>
+          <a:bodyPr wrap="square" lIns="0" tIns="0" rIns="0" bIns="0" rtlCol="0" anchor="ctr"/>
+          <a:lstStyle/>
+          <a:p>
+            <a:pPr indent="0" marL="0">
+              <a:buNone/>
+            </a:pPr>
+            <a:r>
+              <a:rPr lang="en-US" sz="1150" b="1" dirty="0">
                 <a:solidFill>
                   <a:srgbClr val="1A1A1A"/>
                 </a:solidFill>
@@ -9906,16 +8766,129 @@
                 <a:ea typeface="Calibri" pitchFamily="34" charset="-122"/>
                 <a:cs typeface="Calibri" pitchFamily="34" charset="-120"/>
               </a:rPr>
-              <a:t>IRL Event and Community Management.</a:t>
-            </a:r>
-            <a:endParaRPr lang="en-US" sz="1800" dirty="0"/>
-          </a:p>
-          <a:p>
-            <a:pPr algn="l" indent="0" marL="0">
-              <a:buNone/>
-            </a:pPr>
-            <a:r>
-              <a:rPr lang="en-US" sz="1800" dirty="0">
+              <a:t>Org time &amp; energy</a:t>
+            </a:r>
+            <a:endParaRPr lang="en-US" sz="1150" dirty="0"/>
+          </a:p>
+        </p:txBody>
+      </p:sp>
+      <p:sp>
+        <p:nvSpPr>
+          <p:cNvPr id="8" name="Shape 6"/>
+          <p:cNvSpPr/>
+          <p:nvPr/>
+        </p:nvSpPr>
+        <p:spPr>
+          <a:xfrm>
+            <a:off x="4828032" y="1691640"/>
+            <a:ext cx="4160520" cy="713232"/>
+          </a:xfrm>
+          <a:prstGeom prst="rect">
+            <a:avLst/>
+          </a:prstGeom>
+          <a:solidFill>
+            <a:srgbClr val="FFFFFF"/>
+          </a:solidFill>
+          <a:ln w="9525">
+            <a:solidFill>
+              <a:srgbClr val="E5E7EB"/>
+            </a:solidFill>
+            <a:prstDash val="solid"/>
+          </a:ln>
+          <a:effectLst>
+            <a:outerShdw sx="100000" sy="100000" kx="0" ky="0" algn="bl" rotWithShape="0" blurRad="76200" dist="25400" dir="8100000">
+              <a:srgbClr val="000000">
+                <a:alpha val="8000"/>
+              </a:srgbClr>
+            </a:outerShdw>
+          </a:effectLst>
+        </p:spPr>
+      </p:sp>
+      <p:sp>
+        <p:nvSpPr>
+          <p:cNvPr id="9" name="Shape 7"/>
+          <p:cNvSpPr/>
+          <p:nvPr/>
+        </p:nvSpPr>
+        <p:spPr>
+          <a:xfrm>
+            <a:off x="4828032" y="1691640"/>
+            <a:ext cx="50292" cy="713232"/>
+          </a:xfrm>
+          <a:prstGeom prst="rect">
+            <a:avLst/>
+          </a:prstGeom>
+          <a:solidFill>
+            <a:srgbClr val="F26522"/>
+          </a:solidFill>
+          <a:ln/>
+        </p:spPr>
+      </p:sp>
+      <p:sp>
+        <p:nvSpPr>
+          <p:cNvPr id="10" name="Text 8"/>
+          <p:cNvSpPr/>
+          <p:nvPr/>
+        </p:nvSpPr>
+        <p:spPr>
+          <a:xfrm>
+            <a:off x="4992624" y="1801368"/>
+            <a:ext cx="457200" cy="457200"/>
+          </a:xfrm>
+          <a:prstGeom prst="rect">
+            <a:avLst/>
+          </a:prstGeom>
+          <a:noFill/>
+          <a:ln/>
+        </p:spPr>
+        <p:txBody>
+          <a:bodyPr wrap="square" lIns="0" tIns="0" rIns="0" bIns="0" rtlCol="0" anchor="ctr"/>
+          <a:lstStyle/>
+          <a:p>
+            <a:pPr indent="0" marL="0">
+              <a:buNone/>
+            </a:pPr>
+            <a:r>
+              <a:rPr lang="en-US" sz="2200" dirty="0">
+                <a:solidFill>
+                  <a:srgbClr val="000000"/>
+                </a:solidFill>
+                <a:latin typeface="Calibri" pitchFamily="34" charset="0"/>
+                <a:ea typeface="Calibri" pitchFamily="34" charset="-122"/>
+                <a:cs typeface="Calibri" pitchFamily="34" charset="-120"/>
+              </a:rPr>
+              <a:t>🗺️</a:t>
+            </a:r>
+            <a:endParaRPr lang="en-US" sz="2200" dirty="0"/>
+          </a:p>
+        </p:txBody>
+      </p:sp>
+      <p:sp>
+        <p:nvSpPr>
+          <p:cNvPr id="11" name="Text 9"/>
+          <p:cNvSpPr/>
+          <p:nvPr/>
+        </p:nvSpPr>
+        <p:spPr>
+          <a:xfrm>
+            <a:off x="5541264" y="1856232"/>
+            <a:ext cx="3246120" cy="384048"/>
+          </a:xfrm>
+          <a:prstGeom prst="rect">
+            <a:avLst/>
+          </a:prstGeom>
+          <a:noFill/>
+          <a:ln/>
+        </p:spPr>
+        <p:txBody>
+          <a:bodyPr wrap="square" lIns="0" tIns="0" rIns="0" bIns="0" rtlCol="0" anchor="ctr"/>
+          <a:lstStyle/>
+          <a:p>
+            <a:pPr indent="0" marL="0">
+              <a:buNone/>
+            </a:pPr>
+            <a:r>
+              <a:rPr lang="en-US" sz="1150" b="1" dirty="0">
                 <a:solidFill>
                   <a:srgbClr val="1A1A1A"/>
                 </a:solidFill>
@@ -9923,46 +8896,137 @@
                 <a:ea typeface="Calibri" pitchFamily="34" charset="-122"/>
                 <a:cs typeface="Calibri" pitchFamily="34" charset="-120"/>
               </a:rPr>
-              <a:t>For Bitcoin brands. In India.</a:t>
-            </a:r>
-            <a:endParaRPr lang="en-US" sz="1800" dirty="0"/>
-          </a:p>
-        </p:txBody>
-      </p:sp>
-      <p:sp>
-        <p:nvSpPr>
-          <p:cNvPr id="6" name="Text 4"/>
-          <p:cNvSpPr/>
-          <p:nvPr/>
-        </p:nvSpPr>
-        <p:spPr>
-          <a:xfrm>
-            <a:off x="457200" y="2880360"/>
-            <a:ext cx="8046720" cy="365760"/>
-          </a:xfrm>
-          <a:prstGeom prst="rect">
-            <a:avLst/>
-          </a:prstGeom>
-          <a:noFill/>
-          <a:ln/>
-        </p:spPr>
-        <p:txBody>
-          <a:bodyPr wrap="square" lIns="0" tIns="0" rIns="0" bIns="0" rtlCol="0" anchor="ctr"/>
-          <a:lstStyle/>
-          <a:p>
-            <a:pPr algn="l" indent="0" marL="0">
+              <a:t>Physical presence across cities</a:t>
+            </a:r>
+            <a:endParaRPr lang="en-US" sz="1150" dirty="0"/>
+          </a:p>
+        </p:txBody>
+      </p:sp>
+      <p:sp>
+        <p:nvSpPr>
+          <p:cNvPr id="12" name="Shape 10"/>
+          <p:cNvSpPr/>
+          <p:nvPr/>
+        </p:nvSpPr>
+        <p:spPr>
+          <a:xfrm>
+            <a:off x="457200" y="2651760"/>
+            <a:ext cx="4160520" cy="713232"/>
+          </a:xfrm>
+          <a:prstGeom prst="rect">
+            <a:avLst/>
+          </a:prstGeom>
+          <a:solidFill>
+            <a:srgbClr val="FFFFFF"/>
+          </a:solidFill>
+          <a:ln w="9525">
+            <a:solidFill>
+              <a:srgbClr val="E5E7EB"/>
+            </a:solidFill>
+            <a:prstDash val="solid"/>
+          </a:ln>
+          <a:effectLst>
+            <a:outerShdw sx="100000" sy="100000" kx="0" ky="0" algn="bl" rotWithShape="0" blurRad="76200" dist="25400" dir="8100000">
+              <a:srgbClr val="000000">
+                <a:alpha val="8000"/>
+              </a:srgbClr>
+            </a:outerShdw>
+          </a:effectLst>
+        </p:spPr>
+      </p:sp>
+      <p:sp>
+        <p:nvSpPr>
+          <p:cNvPr id="13" name="Shape 11"/>
+          <p:cNvSpPr/>
+          <p:nvPr/>
+        </p:nvSpPr>
+        <p:spPr>
+          <a:xfrm>
+            <a:off x="457200" y="2651760"/>
+            <a:ext cx="50292" cy="713232"/>
+          </a:xfrm>
+          <a:prstGeom prst="rect">
+            <a:avLst/>
+          </a:prstGeom>
+          <a:solidFill>
+            <a:srgbClr val="F26522"/>
+          </a:solidFill>
+          <a:ln/>
+        </p:spPr>
+      </p:sp>
+      <p:sp>
+        <p:nvSpPr>
+          <p:cNvPr id="14" name="Text 12"/>
+          <p:cNvSpPr/>
+          <p:nvPr/>
+        </p:nvSpPr>
+        <p:spPr>
+          <a:xfrm>
+            <a:off x="621792" y="2761488"/>
+            <a:ext cx="457200" cy="457200"/>
+          </a:xfrm>
+          <a:prstGeom prst="rect">
+            <a:avLst/>
+          </a:prstGeom>
+          <a:noFill/>
+          <a:ln/>
+        </p:spPr>
+        <p:txBody>
+          <a:bodyPr wrap="square" lIns="0" tIns="0" rIns="0" bIns="0" rtlCol="0" anchor="ctr"/>
+          <a:lstStyle/>
+          <a:p>
+            <a:pPr indent="0" marL="0">
+              <a:buNone/>
+            </a:pPr>
+            <a:r>
+              <a:rPr lang="en-US" sz="2200" dirty="0">
+                <a:solidFill>
+                  <a:srgbClr val="000000"/>
+                </a:solidFill>
+                <a:latin typeface="Calibri" pitchFamily="34" charset="0"/>
+                <a:ea typeface="Calibri" pitchFamily="34" charset="-122"/>
+                <a:cs typeface="Calibri" pitchFamily="34" charset="-120"/>
+              </a:rPr>
+              <a:t>⚙️</a:t>
+            </a:r>
+            <a:endParaRPr lang="en-US" sz="2200" dirty="0"/>
+          </a:p>
+        </p:txBody>
+      </p:sp>
+      <p:sp>
+        <p:nvSpPr>
+          <p:cNvPr id="15" name="Text 13"/>
+          <p:cNvSpPr/>
+          <p:nvPr/>
+        </p:nvSpPr>
+        <p:spPr>
+          <a:xfrm>
+            <a:off x="1170432" y="2816352"/>
+            <a:ext cx="3246120" cy="384048"/>
+          </a:xfrm>
+          <a:prstGeom prst="rect">
+            <a:avLst/>
+          </a:prstGeom>
+          <a:noFill/>
+          <a:ln/>
+        </p:spPr>
+        <p:txBody>
+          <a:bodyPr wrap="square" lIns="0" tIns="0" rIns="0" bIns="0" rtlCol="0" anchor="ctr"/>
+          <a:lstStyle/>
+          <a:p>
+            <a:pPr indent="0" marL="0">
               <a:buNone/>
             </a:pPr>
             <a:r>
               <a:rPr lang="en-US" sz="1150" b="1" dirty="0">
                 <a:solidFill>
-                  <a:srgbClr val="F26522"/>
-                </a:solidFill>
-                <a:latin typeface="Calibri" pitchFamily="34" charset="0"/>
-                <a:ea typeface="Calibri" pitchFamily="34" charset="-122"/>
-                <a:cs typeface="Calibri" pitchFamily="34" charset="-120"/>
-              </a:rPr>
-              <a:t>D e m o s .   W o r k s h o p s .   M e e t u p s .</a:t>
+                  <a:srgbClr val="1A1A1A"/>
+                </a:solidFill>
+                <a:latin typeface="Calibri" pitchFamily="34" charset="0"/>
+                <a:ea typeface="Calibri" pitchFamily="34" charset="-122"/>
+                <a:cs typeface="Calibri" pitchFamily="34" charset="-120"/>
+              </a:rPr>
+              <a:t>Operations &amp; hiring</a:t>
             </a:r>
             <a:endParaRPr lang="en-US" sz="1150" dirty="0"/>
           </a:p>
@@ -9970,14 +9034,274 @@
       </p:sp>
       <p:sp>
         <p:nvSpPr>
-          <p:cNvPr id="7" name="Shape 5"/>
-          <p:cNvSpPr/>
-          <p:nvPr/>
-        </p:nvSpPr>
-        <p:spPr>
-          <a:xfrm>
-            <a:off x="0" y="4754880"/>
-            <a:ext cx="9144000" cy="393192"/>
+          <p:cNvPr id="16" name="Shape 14"/>
+          <p:cNvSpPr/>
+          <p:nvPr/>
+        </p:nvSpPr>
+        <p:spPr>
+          <a:xfrm>
+            <a:off x="4828032" y="2651760"/>
+            <a:ext cx="4160520" cy="713232"/>
+          </a:xfrm>
+          <a:prstGeom prst="rect">
+            <a:avLst/>
+          </a:prstGeom>
+          <a:solidFill>
+            <a:srgbClr val="FFFFFF"/>
+          </a:solidFill>
+          <a:ln w="9525">
+            <a:solidFill>
+              <a:srgbClr val="E5E7EB"/>
+            </a:solidFill>
+            <a:prstDash val="solid"/>
+          </a:ln>
+          <a:effectLst>
+            <a:outerShdw sx="100000" sy="100000" kx="0" ky="0" algn="bl" rotWithShape="0" blurRad="76200" dist="25400" dir="8100000">
+              <a:srgbClr val="000000">
+                <a:alpha val="8000"/>
+              </a:srgbClr>
+            </a:outerShdw>
+          </a:effectLst>
+        </p:spPr>
+      </p:sp>
+      <p:sp>
+        <p:nvSpPr>
+          <p:cNvPr id="17" name="Shape 15"/>
+          <p:cNvSpPr/>
+          <p:nvPr/>
+        </p:nvSpPr>
+        <p:spPr>
+          <a:xfrm>
+            <a:off x="4828032" y="2651760"/>
+            <a:ext cx="50292" cy="713232"/>
+          </a:xfrm>
+          <a:prstGeom prst="rect">
+            <a:avLst/>
+          </a:prstGeom>
+          <a:solidFill>
+            <a:srgbClr val="F26522"/>
+          </a:solidFill>
+          <a:ln/>
+        </p:spPr>
+      </p:sp>
+      <p:sp>
+        <p:nvSpPr>
+          <p:cNvPr id="18" name="Text 16"/>
+          <p:cNvSpPr/>
+          <p:nvPr/>
+        </p:nvSpPr>
+        <p:spPr>
+          <a:xfrm>
+            <a:off x="4992624" y="2761488"/>
+            <a:ext cx="457200" cy="457200"/>
+          </a:xfrm>
+          <a:prstGeom prst="rect">
+            <a:avLst/>
+          </a:prstGeom>
+          <a:noFill/>
+          <a:ln/>
+        </p:spPr>
+        <p:txBody>
+          <a:bodyPr wrap="square" lIns="0" tIns="0" rIns="0" bIns="0" rtlCol="0" anchor="ctr"/>
+          <a:lstStyle/>
+          <a:p>
+            <a:pPr indent="0" marL="0">
+              <a:buNone/>
+            </a:pPr>
+            <a:r>
+              <a:rPr lang="en-US" sz="2200" dirty="0">
+                <a:solidFill>
+                  <a:srgbClr val="000000"/>
+                </a:solidFill>
+                <a:latin typeface="Calibri" pitchFamily="34" charset="0"/>
+                <a:ea typeface="Calibri" pitchFamily="34" charset="-122"/>
+                <a:cs typeface="Calibri" pitchFamily="34" charset="-120"/>
+              </a:rPr>
+              <a:t>✈️</a:t>
+            </a:r>
+            <a:endParaRPr lang="en-US" sz="2200" dirty="0"/>
+          </a:p>
+        </p:txBody>
+      </p:sp>
+      <p:sp>
+        <p:nvSpPr>
+          <p:cNvPr id="19" name="Text 17"/>
+          <p:cNvSpPr/>
+          <p:nvPr/>
+        </p:nvSpPr>
+        <p:spPr>
+          <a:xfrm>
+            <a:off x="5541264" y="2816352"/>
+            <a:ext cx="3246120" cy="384048"/>
+          </a:xfrm>
+          <a:prstGeom prst="rect">
+            <a:avLst/>
+          </a:prstGeom>
+          <a:noFill/>
+          <a:ln/>
+        </p:spPr>
+        <p:txBody>
+          <a:bodyPr wrap="square" lIns="0" tIns="0" rIns="0" bIns="0" rtlCol="0" anchor="ctr"/>
+          <a:lstStyle/>
+          <a:p>
+            <a:pPr indent="0" marL="0">
+              <a:buNone/>
+            </a:pPr>
+            <a:r>
+              <a:rPr lang="en-US" sz="1150" b="1" dirty="0">
+                <a:solidFill>
+                  <a:srgbClr val="1A1A1A"/>
+                </a:solidFill>
+                <a:latin typeface="Calibri" pitchFamily="34" charset="0"/>
+                <a:ea typeface="Calibri" pitchFamily="34" charset="-122"/>
+                <a:cs typeface="Calibri" pitchFamily="34" charset="-120"/>
+              </a:rPr>
+              <a:t>Travel &amp; accommodation budget</a:t>
+            </a:r>
+            <a:endParaRPr lang="en-US" sz="1150" dirty="0"/>
+          </a:p>
+        </p:txBody>
+      </p:sp>
+      <p:sp>
+        <p:nvSpPr>
+          <p:cNvPr id="20" name="Shape 18"/>
+          <p:cNvSpPr/>
+          <p:nvPr/>
+        </p:nvSpPr>
+        <p:spPr>
+          <a:xfrm>
+            <a:off x="457200" y="3611880"/>
+            <a:ext cx="8229600" cy="713232"/>
+          </a:xfrm>
+          <a:prstGeom prst="rect">
+            <a:avLst/>
+          </a:prstGeom>
+          <a:solidFill>
+            <a:srgbClr val="FFFFFF"/>
+          </a:solidFill>
+          <a:ln w="9525">
+            <a:solidFill>
+              <a:srgbClr val="E5E7EB"/>
+            </a:solidFill>
+            <a:prstDash val="solid"/>
+          </a:ln>
+          <a:effectLst>
+            <a:outerShdw sx="100000" sy="100000" kx="0" ky="0" algn="bl" rotWithShape="0" blurRad="76200" dist="25400" dir="8100000">
+              <a:srgbClr val="000000">
+                <a:alpha val="8000"/>
+              </a:srgbClr>
+            </a:outerShdw>
+          </a:effectLst>
+        </p:spPr>
+      </p:sp>
+      <p:sp>
+        <p:nvSpPr>
+          <p:cNvPr id="21" name="Shape 19"/>
+          <p:cNvSpPr/>
+          <p:nvPr/>
+        </p:nvSpPr>
+        <p:spPr>
+          <a:xfrm>
+            <a:off x="457200" y="3611880"/>
+            <a:ext cx="50292" cy="713232"/>
+          </a:xfrm>
+          <a:prstGeom prst="rect">
+            <a:avLst/>
+          </a:prstGeom>
+          <a:solidFill>
+            <a:srgbClr val="F26522"/>
+          </a:solidFill>
+          <a:ln/>
+        </p:spPr>
+      </p:sp>
+      <p:sp>
+        <p:nvSpPr>
+          <p:cNvPr id="22" name="Text 20"/>
+          <p:cNvSpPr/>
+          <p:nvPr/>
+        </p:nvSpPr>
+        <p:spPr>
+          <a:xfrm>
+            <a:off x="621792" y="3721608"/>
+            <a:ext cx="457200" cy="457200"/>
+          </a:xfrm>
+          <a:prstGeom prst="rect">
+            <a:avLst/>
+          </a:prstGeom>
+          <a:noFill/>
+          <a:ln/>
+        </p:spPr>
+        <p:txBody>
+          <a:bodyPr wrap="square" lIns="0" tIns="0" rIns="0" bIns="0" rtlCol="0" anchor="ctr"/>
+          <a:lstStyle/>
+          <a:p>
+            <a:pPr indent="0" marL="0">
+              <a:buNone/>
+            </a:pPr>
+            <a:r>
+              <a:rPr lang="en-US" sz="2200" dirty="0">
+                <a:solidFill>
+                  <a:srgbClr val="000000"/>
+                </a:solidFill>
+                <a:latin typeface="Calibri" pitchFamily="34" charset="0"/>
+                <a:ea typeface="Calibri" pitchFamily="34" charset="-122"/>
+                <a:cs typeface="Calibri" pitchFamily="34" charset="-120"/>
+              </a:rPr>
+              <a:t>📊</a:t>
+            </a:r>
+            <a:endParaRPr lang="en-US" sz="2200" dirty="0"/>
+          </a:p>
+        </p:txBody>
+      </p:sp>
+      <p:sp>
+        <p:nvSpPr>
+          <p:cNvPr id="23" name="Text 21"/>
+          <p:cNvSpPr/>
+          <p:nvPr/>
+        </p:nvSpPr>
+        <p:spPr>
+          <a:xfrm>
+            <a:off x="1170432" y="3776472"/>
+            <a:ext cx="7315200" cy="384048"/>
+          </a:xfrm>
+          <a:prstGeom prst="rect">
+            <a:avLst/>
+          </a:prstGeom>
+          <a:noFill/>
+          <a:ln/>
+        </p:spPr>
+        <p:txBody>
+          <a:bodyPr wrap="square" lIns="0" tIns="0" rIns="0" bIns="0" rtlCol="0" anchor="ctr"/>
+          <a:lstStyle/>
+          <a:p>
+            <a:pPr indent="0" marL="0">
+              <a:buNone/>
+            </a:pPr>
+            <a:r>
+              <a:rPr lang="en-US" sz="1150" b="1" dirty="0">
+                <a:solidFill>
+                  <a:srgbClr val="1A1A1A"/>
+                </a:solidFill>
+                <a:latin typeface="Calibri" pitchFamily="34" charset="0"/>
+                <a:ea typeface="Calibri" pitchFamily="34" charset="-122"/>
+                <a:cs typeface="Calibri" pitchFamily="34" charset="-120"/>
+              </a:rPr>
+              <a:t>End-to-end attribution</a:t>
+            </a:r>
+            <a:endParaRPr lang="en-US" sz="1150" dirty="0"/>
+          </a:p>
+        </p:txBody>
+      </p:sp>
+      <p:sp>
+        <p:nvSpPr>
+          <p:cNvPr id="24" name="Shape 22"/>
+          <p:cNvSpPr/>
+          <p:nvPr/>
+        </p:nvSpPr>
+        <p:spPr>
+          <a:xfrm>
+            <a:off x="0" y="4983480"/>
+            <a:ext cx="9144000" cy="164592"/>
           </a:xfrm>
           <a:prstGeom prst="rect">
             <a:avLst/>
@@ -9990,14 +9314,14 @@
       </p:sp>
       <p:sp>
         <p:nvSpPr>
-          <p:cNvPr id="8" name="Text 6"/>
-          <p:cNvSpPr/>
-          <p:nvPr/>
-        </p:nvSpPr>
-        <p:spPr>
-          <a:xfrm>
-            <a:off x="457200" y="4773168"/>
-            <a:ext cx="5486400" cy="274320"/>
+          <p:cNvPr id="25" name="Text 23"/>
+          <p:cNvSpPr/>
+          <p:nvPr/>
+        </p:nvSpPr>
+        <p:spPr>
+          <a:xfrm>
+            <a:off x="457200" y="4992624"/>
+            <a:ext cx="8229600" cy="146304"/>
           </a:xfrm>
           <a:prstGeom prst="rect">
             <a:avLst/>
@@ -10013,7 +9337,7 @@
               <a:buNone/>
             </a:pPr>
             <a:r>
-              <a:rPr lang="en-US" sz="900" dirty="0">
+              <a:rPr lang="en-US" sz="750" dirty="0">
                 <a:solidFill>
                   <a:srgbClr val="8C5A3A"/>
                 </a:solidFill>
@@ -10021,48 +9345,9 @@
                 <a:ea typeface="Calibri" pitchFamily="34" charset="-122"/>
                 <a:cs typeface="Calibri" pitchFamily="34" charset="-120"/>
               </a:rPr>
-              <a:t>SofB Accelerator Pitch</a:t>
-            </a:r>
-            <a:endParaRPr lang="en-US" sz="900" dirty="0"/>
-          </a:p>
-        </p:txBody>
-      </p:sp>
-      <p:sp>
-        <p:nvSpPr>
-          <p:cNvPr id="9" name="Text 7"/>
-          <p:cNvSpPr/>
-          <p:nvPr/>
-        </p:nvSpPr>
-        <p:spPr>
-          <a:xfrm>
-            <a:off x="457200" y="4773168"/>
-            <a:ext cx="8229600" cy="274320"/>
-          </a:xfrm>
-          <a:prstGeom prst="rect">
-            <a:avLst/>
-          </a:prstGeom>
-          <a:noFill/>
-          <a:ln/>
-        </p:spPr>
-        <p:txBody>
-          <a:bodyPr wrap="square" lIns="0" tIns="0" rIns="0" bIns="0" rtlCol="0" anchor="ctr"/>
-          <a:lstStyle/>
-          <a:p>
-            <a:pPr algn="r" indent="0" marL="0">
-              <a:buNone/>
-            </a:pPr>
-            <a:r>
-              <a:rPr lang="en-US" sz="900" dirty="0">
-                <a:solidFill>
-                  <a:srgbClr val="8C5A3A"/>
-                </a:solidFill>
-                <a:latin typeface="Calibri" pitchFamily="34" charset="0"/>
-                <a:ea typeface="Calibri" pitchFamily="34" charset="-122"/>
-                <a:cs typeface="Calibri" pitchFamily="34" charset="-120"/>
-              </a:rPr>
-              <a:t>2026</a:t>
-            </a:r>
-            <a:endParaRPr lang="en-US" sz="900" dirty="0"/>
+              <a:t>bitcoincierge.in</a:t>
+            </a:r>
+            <a:endParaRPr lang="en-US" sz="750" dirty="0"/>
           </a:p>
         </p:txBody>
       </p:sp>
@@ -10080,7 +9365,7 @@
     <p:bg>
       <p:bgPr>
         <a:solidFill>
-          <a:srgbClr val="FAF9F6"/>
+          <a:srgbClr val="FFF7F0"/>
         </a:solidFill>
       </p:bgPr>
     </p:bg>
@@ -10106,8 +9391,8 @@
         </p:nvSpPr>
         <p:spPr>
           <a:xfrm>
-            <a:off x="411480" y="502920"/>
-            <a:ext cx="50292" cy="1078992"/>
+            <a:off x="0" y="0"/>
+            <a:ext cx="9144000" cy="64008"/>
           </a:xfrm>
           <a:prstGeom prst="rect">
             <a:avLst/>
@@ -10126,8 +9411,8 @@
         </p:nvSpPr>
         <p:spPr>
           <a:xfrm>
-            <a:off x="594360" y="502920"/>
-            <a:ext cx="8046720" cy="1078992"/>
+            <a:off x="457200" y="640080"/>
+            <a:ext cx="8229600" cy="1097280"/>
           </a:xfrm>
           <a:prstGeom prst="rect">
             <a:avLst/>
@@ -10143,7 +9428,7 @@
               <a:buNone/>
             </a:pPr>
             <a:r>
-              <a:rPr lang="en-US" sz="3000" i="1" dirty="0">
+              <a:rPr lang="en-US" sz="6800" i="1" dirty="0">
                 <a:solidFill>
                   <a:srgbClr val="1A1A1A"/>
                 </a:solidFill>
@@ -10151,97 +9436,85 @@
                 <a:ea typeface="Georgia" pitchFamily="34" charset="-122"/>
                 <a:cs typeface="Georgia" pitchFamily="34" charset="-120"/>
               </a:rPr>
-              <a:t>IRL event &amp; community management</a:t>
-            </a:r>
-            <a:endParaRPr lang="en-US" sz="3000" dirty="0"/>
-          </a:p>
+              <a:t>Bitcoincierge</a:t>
+            </a:r>
+            <a:endParaRPr lang="en-US" sz="6800" dirty="0"/>
+          </a:p>
+        </p:txBody>
+      </p:sp>
+      <p:sp>
+        <p:nvSpPr>
+          <p:cNvPr id="4" name="Shape 2"/>
+          <p:cNvSpPr/>
+          <p:nvPr/>
+        </p:nvSpPr>
+        <p:spPr>
+          <a:xfrm>
+            <a:off x="457200" y="1691640"/>
+            <a:ext cx="2286000" cy="50292"/>
+          </a:xfrm>
+          <a:prstGeom prst="rect">
+            <a:avLst/>
+          </a:prstGeom>
+          <a:solidFill>
+            <a:srgbClr val="F26522"/>
+          </a:solidFill>
+          <a:ln/>
+        </p:spPr>
+      </p:sp>
+      <p:sp>
+        <p:nvSpPr>
+          <p:cNvPr id="5" name="Text 3"/>
+          <p:cNvSpPr/>
+          <p:nvPr/>
+        </p:nvSpPr>
+        <p:spPr>
+          <a:xfrm>
+            <a:off x="457200" y="1874520"/>
+            <a:ext cx="8046720" cy="822960"/>
+          </a:xfrm>
+          <a:prstGeom prst="rect">
+            <a:avLst/>
+          </a:prstGeom>
+          <a:noFill/>
+          <a:ln/>
+        </p:spPr>
+        <p:txBody>
+          <a:bodyPr wrap="square" lIns="0" tIns="0" rIns="0" bIns="0" rtlCol="0" anchor="ctr"/>
+          <a:lstStyle/>
           <a:p>
             <a:pPr algn="l" indent="0" marL="0">
               <a:buNone/>
             </a:pPr>
             <a:r>
-              <a:rPr lang="en-US" sz="3000" i="1" dirty="0">
+              <a:rPr lang="en-US" sz="1800" dirty="0">
                 <a:solidFill>
                   <a:srgbClr val="1A1A1A"/>
                 </a:solidFill>
-                <a:latin typeface="Georgia" pitchFamily="34" charset="0"/>
-                <a:ea typeface="Georgia" pitchFamily="34" charset="-122"/>
-                <a:cs typeface="Georgia" pitchFamily="34" charset="-120"/>
-              </a:rPr>
-              <a:t>as a service — for Bitcoin brands.</a:t>
-            </a:r>
-            <a:endParaRPr lang="en-US" sz="3000" dirty="0"/>
-          </a:p>
-        </p:txBody>
-      </p:sp>
-      <p:sp>
-        <p:nvSpPr>
-          <p:cNvPr id="4" name="Shape 2"/>
-          <p:cNvSpPr/>
-          <p:nvPr/>
-        </p:nvSpPr>
-        <p:spPr>
-          <a:xfrm>
-            <a:off x="457200" y="1691640"/>
-            <a:ext cx="1965960" cy="2743200"/>
-          </a:xfrm>
-          <a:prstGeom prst="rect">
-            <a:avLst/>
-          </a:prstGeom>
-          <a:solidFill>
-            <a:srgbClr val="FFFFFF"/>
-          </a:solidFill>
-          <a:ln w="9525">
-            <a:solidFill>
-              <a:srgbClr val="E5E7EB"/>
-            </a:solidFill>
-            <a:prstDash val="solid"/>
-          </a:ln>
-          <a:effectLst>
-            <a:outerShdw sx="100000" sy="100000" kx="0" ky="0" algn="bl" rotWithShape="0" blurRad="76200" dist="25400" dir="8100000">
-              <a:srgbClr val="000000">
-                <a:alpha val="8000"/>
-              </a:srgbClr>
-            </a:outerShdw>
-          </a:effectLst>
-        </p:spPr>
-      </p:sp>
-      <p:sp>
-        <p:nvSpPr>
-          <p:cNvPr id="5" name="Text 3"/>
-          <p:cNvSpPr/>
-          <p:nvPr/>
-        </p:nvSpPr>
-        <p:spPr>
-          <a:xfrm>
-            <a:off x="548640" y="1920240"/>
-            <a:ext cx="1783080" cy="1097280"/>
-          </a:xfrm>
-          <a:prstGeom prst="rect">
-            <a:avLst/>
-          </a:prstGeom>
-          <a:noFill/>
-          <a:ln/>
-        </p:spPr>
-        <p:txBody>
-          <a:bodyPr wrap="square" lIns="0" tIns="0" rIns="0" bIns="0" rtlCol="0" anchor="ctr"/>
-          <a:lstStyle/>
-          <a:p>
-            <a:pPr algn="ctr" indent="0" marL="0">
-              <a:buNone/>
-            </a:pPr>
-            <a:r>
-              <a:rPr lang="en-US" sz="5200" dirty="0">
-                <a:solidFill>
-                  <a:srgbClr val="000000"/>
-                </a:solidFill>
-                <a:latin typeface="Calibri" pitchFamily="34" charset="0"/>
-                <a:ea typeface="Calibri" pitchFamily="34" charset="-122"/>
-                <a:cs typeface="Calibri" pitchFamily="34" charset="-120"/>
-              </a:rPr>
-              <a:t>📍</a:t>
-            </a:r>
-            <a:endParaRPr lang="en-US" sz="5200" dirty="0"/>
+                <a:latin typeface="Calibri" pitchFamily="34" charset="0"/>
+                <a:ea typeface="Calibri" pitchFamily="34" charset="-122"/>
+                <a:cs typeface="Calibri" pitchFamily="34" charset="-120"/>
+              </a:rPr>
+              <a:t>IRL Event and Community Management.</a:t>
+            </a:r>
+            <a:endParaRPr lang="en-US" sz="1800" dirty="0"/>
+          </a:p>
+          <a:p>
+            <a:pPr algn="l" indent="0" marL="0">
+              <a:buNone/>
+            </a:pPr>
+            <a:r>
+              <a:rPr lang="en-US" sz="1800" dirty="0">
+                <a:solidFill>
+                  <a:srgbClr val="1A1A1A"/>
+                </a:solidFill>
+                <a:latin typeface="Calibri" pitchFamily="34" charset="0"/>
+                <a:ea typeface="Calibri" pitchFamily="34" charset="-122"/>
+                <a:cs typeface="Calibri" pitchFamily="34" charset="-120"/>
+              </a:rPr>
+              <a:t>For Bitcoin brands. In India.</a:t>
+            </a:r>
+            <a:endParaRPr lang="en-US" sz="1800" dirty="0"/>
           </a:p>
         </p:txBody>
       </p:sp>
@@ -10253,34 +9526,34 @@
         </p:nvSpPr>
         <p:spPr>
           <a:xfrm>
-            <a:off x="548640" y="3154680"/>
-            <a:ext cx="1783080" cy="731520"/>
-          </a:xfrm>
-          <a:prstGeom prst="rect">
-            <a:avLst/>
-          </a:prstGeom>
-          <a:noFill/>
-          <a:ln/>
-        </p:spPr>
-        <p:txBody>
-          <a:bodyPr wrap="square" lIns="0" tIns="0" rIns="0" bIns="0" rtlCol="0" anchor="ctr"/>
-          <a:lstStyle/>
-          <a:p>
-            <a:pPr algn="ctr" indent="0" marL="0">
-              <a:buNone/>
-            </a:pPr>
-            <a:r>
-              <a:rPr lang="en-US" sz="1200" b="1" dirty="0">
-                <a:solidFill>
-                  <a:srgbClr val="1A1A1A"/>
-                </a:solidFill>
-                <a:latin typeface="Calibri" pitchFamily="34" charset="0"/>
-                <a:ea typeface="Calibri" pitchFamily="34" charset="-122"/>
-                <a:cs typeface="Calibri" pitchFamily="34" charset="-120"/>
-              </a:rPr>
-              <a:t>Venue &amp; Logistics</a:t>
-            </a:r>
-            <a:endParaRPr lang="en-US" sz="1200" dirty="0"/>
+            <a:off x="457200" y="2880360"/>
+            <a:ext cx="8046720" cy="365760"/>
+          </a:xfrm>
+          <a:prstGeom prst="rect">
+            <a:avLst/>
+          </a:prstGeom>
+          <a:noFill/>
+          <a:ln/>
+        </p:spPr>
+        <p:txBody>
+          <a:bodyPr wrap="square" lIns="0" tIns="0" rIns="0" bIns="0" rtlCol="0" anchor="ctr"/>
+          <a:lstStyle/>
+          <a:p>
+            <a:pPr algn="l" indent="0" marL="0">
+              <a:buNone/>
+            </a:pPr>
+            <a:r>
+              <a:rPr lang="en-US" sz="1150" b="1" dirty="0">
+                <a:solidFill>
+                  <a:srgbClr val="F26522"/>
+                </a:solidFill>
+                <a:latin typeface="Calibri" pitchFamily="34" charset="0"/>
+                <a:ea typeface="Calibri" pitchFamily="34" charset="-122"/>
+                <a:cs typeface="Calibri" pitchFamily="34" charset="-120"/>
+              </a:rPr>
+              <a:t>D e m o s .   W o r k s h o p s .   M e e t u p s .</a:t>
+            </a:r>
+            <a:endParaRPr lang="en-US" sz="1150" dirty="0"/>
           </a:p>
         </p:txBody>
       </p:sp>
@@ -10292,338 +9565,8 @@
         </p:nvSpPr>
         <p:spPr>
           <a:xfrm>
-            <a:off x="2542032" y="1691640"/>
-            <a:ext cx="1965960" cy="2743200"/>
-          </a:xfrm>
-          <a:prstGeom prst="rect">
-            <a:avLst/>
-          </a:prstGeom>
-          <a:solidFill>
-            <a:srgbClr val="FFFFFF"/>
-          </a:solidFill>
-          <a:ln w="9525">
-            <a:solidFill>
-              <a:srgbClr val="E5E7EB"/>
-            </a:solidFill>
-            <a:prstDash val="solid"/>
-          </a:ln>
-          <a:effectLst>
-            <a:outerShdw sx="100000" sy="100000" kx="0" ky="0" algn="bl" rotWithShape="0" blurRad="76200" dist="25400" dir="8100000">
-              <a:srgbClr val="000000">
-                <a:alpha val="8000"/>
-              </a:srgbClr>
-            </a:outerShdw>
-          </a:effectLst>
-        </p:spPr>
-      </p:sp>
-      <p:sp>
-        <p:nvSpPr>
-          <p:cNvPr id="8" name="Text 6"/>
-          <p:cNvSpPr/>
-          <p:nvPr/>
-        </p:nvSpPr>
-        <p:spPr>
-          <a:xfrm>
-            <a:off x="2633472" y="1920240"/>
-            <a:ext cx="1783080" cy="1097280"/>
-          </a:xfrm>
-          <a:prstGeom prst="rect">
-            <a:avLst/>
-          </a:prstGeom>
-          <a:noFill/>
-          <a:ln/>
-        </p:spPr>
-        <p:txBody>
-          <a:bodyPr wrap="square" lIns="0" tIns="0" rIns="0" bIns="0" rtlCol="0" anchor="ctr"/>
-          <a:lstStyle/>
-          <a:p>
-            <a:pPr algn="ctr" indent="0" marL="0">
-              <a:buNone/>
-            </a:pPr>
-            <a:r>
-              <a:rPr lang="en-US" sz="5200" dirty="0">
-                <a:solidFill>
-                  <a:srgbClr val="000000"/>
-                </a:solidFill>
-                <a:latin typeface="Calibri" pitchFamily="34" charset="0"/>
-                <a:ea typeface="Calibri" pitchFamily="34" charset="-122"/>
-                <a:cs typeface="Calibri" pitchFamily="34" charset="-120"/>
-              </a:rPr>
-              <a:t>👥</a:t>
-            </a:r>
-            <a:endParaRPr lang="en-US" sz="5200" dirty="0"/>
-          </a:p>
-        </p:txBody>
-      </p:sp>
-      <p:sp>
-        <p:nvSpPr>
-          <p:cNvPr id="9" name="Text 7"/>
-          <p:cNvSpPr/>
-          <p:nvPr/>
-        </p:nvSpPr>
-        <p:spPr>
-          <a:xfrm>
-            <a:off x="2633472" y="3154680"/>
-            <a:ext cx="1783080" cy="731520"/>
-          </a:xfrm>
-          <a:prstGeom prst="rect">
-            <a:avLst/>
-          </a:prstGeom>
-          <a:noFill/>
-          <a:ln/>
-        </p:spPr>
-        <p:txBody>
-          <a:bodyPr wrap="square" lIns="0" tIns="0" rIns="0" bIns="0" rtlCol="0" anchor="ctr"/>
-          <a:lstStyle/>
-          <a:p>
-            <a:pPr algn="ctr" indent="0" marL="0">
-              <a:buNone/>
-            </a:pPr>
-            <a:r>
-              <a:rPr lang="en-US" sz="1200" b="1" dirty="0">
-                <a:solidFill>
-                  <a:srgbClr val="1A1A1A"/>
-                </a:solidFill>
-                <a:latin typeface="Calibri" pitchFamily="34" charset="0"/>
-                <a:ea typeface="Calibri" pitchFamily="34" charset="-122"/>
-                <a:cs typeface="Calibri" pitchFamily="34" charset="-120"/>
-              </a:rPr>
-              <a:t>Curated Audience</a:t>
-            </a:r>
-            <a:endParaRPr lang="en-US" sz="1200" dirty="0"/>
-          </a:p>
-        </p:txBody>
-      </p:sp>
-      <p:sp>
-        <p:nvSpPr>
-          <p:cNvPr id="10" name="Shape 8"/>
-          <p:cNvSpPr/>
-          <p:nvPr/>
-        </p:nvSpPr>
-        <p:spPr>
-          <a:xfrm>
-            <a:off x="4626864" y="1691640"/>
-            <a:ext cx="1965960" cy="2743200"/>
-          </a:xfrm>
-          <a:prstGeom prst="rect">
-            <a:avLst/>
-          </a:prstGeom>
-          <a:solidFill>
-            <a:srgbClr val="FFFFFF"/>
-          </a:solidFill>
-          <a:ln w="9525">
-            <a:solidFill>
-              <a:srgbClr val="E5E7EB"/>
-            </a:solidFill>
-            <a:prstDash val="solid"/>
-          </a:ln>
-          <a:effectLst>
-            <a:outerShdw sx="100000" sy="100000" kx="0" ky="0" algn="bl" rotWithShape="0" blurRad="76200" dist="25400" dir="8100000">
-              <a:srgbClr val="000000">
-                <a:alpha val="8000"/>
-              </a:srgbClr>
-            </a:outerShdw>
-          </a:effectLst>
-        </p:spPr>
-      </p:sp>
-      <p:sp>
-        <p:nvSpPr>
-          <p:cNvPr id="11" name="Text 9"/>
-          <p:cNvSpPr/>
-          <p:nvPr/>
-        </p:nvSpPr>
-        <p:spPr>
-          <a:xfrm>
-            <a:off x="4718304" y="1920240"/>
-            <a:ext cx="1783080" cy="1097280"/>
-          </a:xfrm>
-          <a:prstGeom prst="rect">
-            <a:avLst/>
-          </a:prstGeom>
-          <a:noFill/>
-          <a:ln/>
-        </p:spPr>
-        <p:txBody>
-          <a:bodyPr wrap="square" lIns="0" tIns="0" rIns="0" bIns="0" rtlCol="0" anchor="ctr"/>
-          <a:lstStyle/>
-          <a:p>
-            <a:pPr algn="ctr" indent="0" marL="0">
-              <a:buNone/>
-            </a:pPr>
-            <a:r>
-              <a:rPr lang="en-US" sz="5200" dirty="0">
-                <a:solidFill>
-                  <a:srgbClr val="000000"/>
-                </a:solidFill>
-                <a:latin typeface="Calibri" pitchFamily="34" charset="0"/>
-                <a:ea typeface="Calibri" pitchFamily="34" charset="-122"/>
-                <a:cs typeface="Calibri" pitchFamily="34" charset="-120"/>
-              </a:rPr>
-              <a:t>🎤</a:t>
-            </a:r>
-            <a:endParaRPr lang="en-US" sz="5200" dirty="0"/>
-          </a:p>
-        </p:txBody>
-      </p:sp>
-      <p:sp>
-        <p:nvSpPr>
-          <p:cNvPr id="12" name="Text 10"/>
-          <p:cNvSpPr/>
-          <p:nvPr/>
-        </p:nvSpPr>
-        <p:spPr>
-          <a:xfrm>
-            <a:off x="4718304" y="3154680"/>
-            <a:ext cx="1783080" cy="731520"/>
-          </a:xfrm>
-          <a:prstGeom prst="rect">
-            <a:avLst/>
-          </a:prstGeom>
-          <a:noFill/>
-          <a:ln/>
-        </p:spPr>
-        <p:txBody>
-          <a:bodyPr wrap="square" lIns="0" tIns="0" rIns="0" bIns="0" rtlCol="0" anchor="ctr"/>
-          <a:lstStyle/>
-          <a:p>
-            <a:pPr algn="ctr" indent="0" marL="0">
-              <a:buNone/>
-            </a:pPr>
-            <a:r>
-              <a:rPr lang="en-US" sz="1200" b="1" dirty="0">
-                <a:solidFill>
-                  <a:srgbClr val="1A1A1A"/>
-                </a:solidFill>
-                <a:latin typeface="Calibri" pitchFamily="34" charset="0"/>
-                <a:ea typeface="Calibri" pitchFamily="34" charset="-122"/>
-                <a:cs typeface="Calibri" pitchFamily="34" charset="-120"/>
-              </a:rPr>
-              <a:t>Expert Mentors</a:t>
-            </a:r>
-            <a:endParaRPr lang="en-US" sz="1200" dirty="0"/>
-          </a:p>
-        </p:txBody>
-      </p:sp>
-      <p:sp>
-        <p:nvSpPr>
-          <p:cNvPr id="13" name="Shape 11"/>
-          <p:cNvSpPr/>
-          <p:nvPr/>
-        </p:nvSpPr>
-        <p:spPr>
-          <a:xfrm>
-            <a:off x="6711696" y="1691640"/>
-            <a:ext cx="1965960" cy="2743200"/>
-          </a:xfrm>
-          <a:prstGeom prst="rect">
-            <a:avLst/>
-          </a:prstGeom>
-          <a:solidFill>
-            <a:srgbClr val="FFFFFF"/>
-          </a:solidFill>
-          <a:ln w="9525">
-            <a:solidFill>
-              <a:srgbClr val="E5E7EB"/>
-            </a:solidFill>
-            <a:prstDash val="solid"/>
-          </a:ln>
-          <a:effectLst>
-            <a:outerShdw sx="100000" sy="100000" kx="0" ky="0" algn="bl" rotWithShape="0" blurRad="76200" dist="25400" dir="8100000">
-              <a:srgbClr val="000000">
-                <a:alpha val="8000"/>
-              </a:srgbClr>
-            </a:outerShdw>
-          </a:effectLst>
-        </p:spPr>
-      </p:sp>
-      <p:sp>
-        <p:nvSpPr>
-          <p:cNvPr id="14" name="Text 12"/>
-          <p:cNvSpPr/>
-          <p:nvPr/>
-        </p:nvSpPr>
-        <p:spPr>
-          <a:xfrm>
-            <a:off x="6803136" y="1920240"/>
-            <a:ext cx="1783080" cy="1097280"/>
-          </a:xfrm>
-          <a:prstGeom prst="rect">
-            <a:avLst/>
-          </a:prstGeom>
-          <a:noFill/>
-          <a:ln/>
-        </p:spPr>
-        <p:txBody>
-          <a:bodyPr wrap="square" lIns="0" tIns="0" rIns="0" bIns="0" rtlCol="0" anchor="ctr"/>
-          <a:lstStyle/>
-          <a:p>
-            <a:pPr algn="ctr" indent="0" marL="0">
-              <a:buNone/>
-            </a:pPr>
-            <a:r>
-              <a:rPr lang="en-US" sz="5200" dirty="0">
-                <a:solidFill>
-                  <a:srgbClr val="000000"/>
-                </a:solidFill>
-                <a:latin typeface="Calibri" pitchFamily="34" charset="0"/>
-                <a:ea typeface="Calibri" pitchFamily="34" charset="-122"/>
-                <a:cs typeface="Calibri" pitchFamily="34" charset="-120"/>
-              </a:rPr>
-              <a:t>📊</a:t>
-            </a:r>
-            <a:endParaRPr lang="en-US" sz="5200" dirty="0"/>
-          </a:p>
-        </p:txBody>
-      </p:sp>
-      <p:sp>
-        <p:nvSpPr>
-          <p:cNvPr id="15" name="Text 13"/>
-          <p:cNvSpPr/>
-          <p:nvPr/>
-        </p:nvSpPr>
-        <p:spPr>
-          <a:xfrm>
-            <a:off x="6803136" y="3154680"/>
-            <a:ext cx="1783080" cy="731520"/>
-          </a:xfrm>
-          <a:prstGeom prst="rect">
-            <a:avLst/>
-          </a:prstGeom>
-          <a:noFill/>
-          <a:ln/>
-        </p:spPr>
-        <p:txBody>
-          <a:bodyPr wrap="square" lIns="0" tIns="0" rIns="0" bIns="0" rtlCol="0" anchor="ctr"/>
-          <a:lstStyle/>
-          <a:p>
-            <a:pPr algn="ctr" indent="0" marL="0">
-              <a:buNone/>
-            </a:pPr>
-            <a:r>
-              <a:rPr lang="en-US" sz="1200" b="1" dirty="0">
-                <a:solidFill>
-                  <a:srgbClr val="1A1A1A"/>
-                </a:solidFill>
-                <a:latin typeface="Calibri" pitchFamily="34" charset="0"/>
-                <a:ea typeface="Calibri" pitchFamily="34" charset="-122"/>
-                <a:cs typeface="Calibri" pitchFamily="34" charset="-120"/>
-              </a:rPr>
-              <a:t>Attribution Reports</a:t>
-            </a:r>
-            <a:endParaRPr lang="en-US" sz="1200" dirty="0"/>
-          </a:p>
-        </p:txBody>
-      </p:sp>
-      <p:sp>
-        <p:nvSpPr>
-          <p:cNvPr id="16" name="Shape 14"/>
-          <p:cNvSpPr/>
-          <p:nvPr/>
-        </p:nvSpPr>
-        <p:spPr>
-          <a:xfrm>
-            <a:off x="0" y="4983480"/>
-            <a:ext cx="9144000" cy="164592"/>
+            <a:off x="0" y="4754880"/>
+            <a:ext cx="9144000" cy="393192"/>
           </a:xfrm>
           <a:prstGeom prst="rect">
             <a:avLst/>
@@ -10636,14 +9579,14 @@
       </p:sp>
       <p:sp>
         <p:nvSpPr>
-          <p:cNvPr id="17" name="Text 15"/>
-          <p:cNvSpPr/>
-          <p:nvPr/>
-        </p:nvSpPr>
-        <p:spPr>
-          <a:xfrm>
-            <a:off x="457200" y="4992624"/>
-            <a:ext cx="8229600" cy="146304"/>
+          <p:cNvPr id="8" name="Text 6"/>
+          <p:cNvSpPr/>
+          <p:nvPr/>
+        </p:nvSpPr>
+        <p:spPr>
+          <a:xfrm>
+            <a:off x="457200" y="4773168"/>
+            <a:ext cx="5486400" cy="274320"/>
           </a:xfrm>
           <a:prstGeom prst="rect">
             <a:avLst/>
@@ -10659,7 +9602,7 @@
               <a:buNone/>
             </a:pPr>
             <a:r>
-              <a:rPr lang="en-US" sz="750" dirty="0">
+              <a:rPr lang="en-US" sz="900" dirty="0">
                 <a:solidFill>
                   <a:srgbClr val="8C5A3A"/>
                 </a:solidFill>
@@ -10667,9 +9610,48 @@
                 <a:ea typeface="Calibri" pitchFamily="34" charset="-122"/>
                 <a:cs typeface="Calibri" pitchFamily="34" charset="-120"/>
               </a:rPr>
-              <a:t>bitcoincierge.in</a:t>
-            </a:r>
-            <a:endParaRPr lang="en-US" sz="750" dirty="0"/>
+              <a:t>SofB Accelerator Pitch</a:t>
+            </a:r>
+            <a:endParaRPr lang="en-US" sz="900" dirty="0"/>
+          </a:p>
+        </p:txBody>
+      </p:sp>
+      <p:sp>
+        <p:nvSpPr>
+          <p:cNvPr id="9" name="Text 7"/>
+          <p:cNvSpPr/>
+          <p:nvPr/>
+        </p:nvSpPr>
+        <p:spPr>
+          <a:xfrm>
+            <a:off x="457200" y="4773168"/>
+            <a:ext cx="8229600" cy="274320"/>
+          </a:xfrm>
+          <a:prstGeom prst="rect">
+            <a:avLst/>
+          </a:prstGeom>
+          <a:noFill/>
+          <a:ln/>
+        </p:spPr>
+        <p:txBody>
+          <a:bodyPr wrap="square" lIns="0" tIns="0" rIns="0" bIns="0" rtlCol="0" anchor="ctr"/>
+          <a:lstStyle/>
+          <a:p>
+            <a:pPr algn="r" indent="0" marL="0">
+              <a:buNone/>
+            </a:pPr>
+            <a:r>
+              <a:rPr lang="en-US" sz="900" dirty="0">
+                <a:solidFill>
+                  <a:srgbClr val="8C5A3A"/>
+                </a:solidFill>
+                <a:latin typeface="Calibri" pitchFamily="34" charset="0"/>
+                <a:ea typeface="Calibri" pitchFamily="34" charset="-122"/>
+                <a:cs typeface="Calibri" pitchFamily="34" charset="-120"/>
+              </a:rPr>
+              <a:t>2026</a:t>
+            </a:r>
+            <a:endParaRPr lang="en-US" sz="900" dirty="0"/>
           </a:p>
         </p:txBody>
       </p:sp>
